--- a/docs/capstone_presentation.pptx
+++ b/docs/capstone_presentation.pptx
@@ -6,21 +6,21 @@
   </p:sldMasterIdLst>
   <p:sldIdLst>
     <p:sldId id="256" r:id="rId7"/>
-    <p:sldId id="257" r:id="rId8"/>
-    <p:sldId id="258" r:id="rId9"/>
-    <p:sldId id="259" r:id="rId10"/>
-    <p:sldId id="260" r:id="rId11"/>
-    <p:sldId id="261" r:id="rId12"/>
-    <p:sldId id="262" r:id="rId13"/>
-    <p:sldId id="263" r:id="rId14"/>
-    <p:sldId id="264" r:id="rId15"/>
-    <p:sldId id="265" r:id="rId16"/>
-    <p:sldId id="266" r:id="rId17"/>
-    <p:sldId id="267" r:id="rId18"/>
-    <p:sldId id="268" r:id="rId19"/>
-    <p:sldId id="269" r:id="rId20"/>
-    <p:sldId id="270" r:id="rId21"/>
-    <p:sldId id="271" r:id="rId22"/>
+    <p:sldId id="257" r:id="rId9"/>
+    <p:sldId id="258" r:id="rId10"/>
+    <p:sldId id="259" r:id="rId11"/>
+    <p:sldId id="260" r:id="rId12"/>
+    <p:sldId id="261" r:id="rId13"/>
+    <p:sldId id="262" r:id="rId14"/>
+    <p:sldId id="263" r:id="rId15"/>
+    <p:sldId id="264" r:id="rId16"/>
+    <p:sldId id="265" r:id="rId17"/>
+    <p:sldId id="266" r:id="rId18"/>
+    <p:sldId id="267" r:id="rId19"/>
+    <p:sldId id="268" r:id="rId20"/>
+    <p:sldId id="269" r:id="rId21"/>
+    <p:sldId id="270" r:id="rId22"/>
+    <p:sldId id="271" r:id="rId23"/>
   </p:sldIdLst>
   <p:sldSz cx="12188952" cy="6858000" type="screen4x3"/>
   <p:notesSz cx="6858000" cy="9144000"/>
@@ -120,6 +120,1801 @@
     </a:lvl9pPr>
   </p:defaultTextStyle>
 </p:presentation>
+</file>
+
+<file path=ppt/notesMasters/notesMaster1.xml><?xml version="1.0" encoding="utf-8"?>
+<p:notesMaster xmlns:a="http://schemas.openxmlformats.org/drawingml/2006/main" xmlns:p="http://schemas.openxmlformats.org/presentationml/2006/main" xmlns:r="http://schemas.openxmlformats.org/officeDocument/2006/relationships">
+  <p:cSld>
+    <p:bg>
+      <p:bgRef idx="1001">
+        <a:schemeClr val="bg1"/>
+      </p:bgRef>
+    </p:bg>
+    <p:spTree>
+      <p:nvGrpSpPr>
+        <p:cNvPr id="1" name=""/>
+        <p:cNvGrpSpPr/>
+        <p:nvPr/>
+      </p:nvGrpSpPr>
+      <p:grpSpPr>
+        <a:xfrm>
+          <a:off x="0" y="0"/>
+          <a:ext cx="0" cy="0"/>
+          <a:chOff x="0" y="0"/>
+          <a:chExt cx="0" cy="0"/>
+        </a:xfrm>
+      </p:grpSpPr>
+      <p:sp>
+        <p:nvSpPr>
+          <p:cNvPr id="2" name="Header Placeholder 1"/>
+          <p:cNvSpPr>
+            <a:spLocks noGrp="1"/>
+          </p:cNvSpPr>
+          <p:nvPr>
+            <p:ph type="hdr" sz="quarter"/>
+          </p:nvPr>
+        </p:nvSpPr>
+        <p:spPr>
+          <a:xfrm>
+            <a:off x="0" y="0"/>
+            <a:ext cx="2971800" cy="457200"/>
+          </a:xfrm>
+          <a:prstGeom prst="rect">
+            <a:avLst/>
+          </a:prstGeom>
+        </p:spPr>
+        <p:txBody>
+          <a:bodyPr vert="horz" lIns="91440" tIns="45720" rIns="91440" bIns="45720" rtlCol="0"/>
+          <a:lstStyle>
+            <a:lvl1pPr algn="l">
+              <a:defRPr sz="1200"/>
+            </a:lvl1pPr>
+          </a:lstStyle>
+          <a:p>
+            <a:endParaRPr lang="en-US"/>
+          </a:p>
+        </p:txBody>
+      </p:sp>
+      <p:sp>
+        <p:nvSpPr>
+          <p:cNvPr id="3" name="Date Placeholder 2"/>
+          <p:cNvSpPr>
+            <a:spLocks noGrp="1"/>
+          </p:cNvSpPr>
+          <p:nvPr>
+            <p:ph type="dt" idx="1"/>
+          </p:nvPr>
+        </p:nvSpPr>
+        <p:spPr>
+          <a:xfrm>
+            <a:off x="3884613" y="0"/>
+            <a:ext cx="2971800" cy="457200"/>
+          </a:xfrm>
+          <a:prstGeom prst="rect">
+            <a:avLst/>
+          </a:prstGeom>
+        </p:spPr>
+        <p:txBody>
+          <a:bodyPr vert="horz" lIns="91440" tIns="45720" rIns="91440" bIns="45720" rtlCol="0"/>
+          <a:lstStyle>
+            <a:lvl1pPr algn="r">
+              <a:defRPr sz="1200"/>
+            </a:lvl1pPr>
+          </a:lstStyle>
+          <a:p>
+            <a:fld id="{0F89C1C7-3DCD-1040-A9CF-14679D8B5DDD}" type="datetimeFigureOut">
+              <a:rPr lang="en-US" smtClean="0"/>
+              <a:t>10/17/16</a:t>
+            </a:fld>
+            <a:endParaRPr lang="en-US"/>
+          </a:p>
+        </p:txBody>
+      </p:sp>
+      <p:sp>
+        <p:nvSpPr>
+          <p:cNvPr id="4" name="Slide Image Placeholder 3"/>
+          <p:cNvSpPr>
+            <a:spLocks noGrp="1" noRot="1" noChangeAspect="1"/>
+          </p:cNvSpPr>
+          <p:nvPr>
+            <p:ph type="sldImg" idx="2"/>
+          </p:nvPr>
+        </p:nvSpPr>
+        <p:spPr>
+          <a:xfrm>
+            <a:off x="1143000" y="685800"/>
+            <a:ext cx="4572000" cy="3429000"/>
+          </a:xfrm>
+          <a:prstGeom prst="rect">
+            <a:avLst/>
+          </a:prstGeom>
+          <a:noFill/>
+          <a:ln w="12700">
+            <a:solidFill>
+              <a:prstClr val="black"/>
+            </a:solidFill>
+          </a:ln>
+        </p:spPr>
+        <p:txBody>
+          <a:bodyPr vert="horz" lIns="91440" tIns="45720" rIns="91440" bIns="45720" rtlCol="0" anchor="ctr"/>
+          <a:lstStyle/>
+          <a:p>
+            <a:endParaRPr lang="en-US"/>
+          </a:p>
+        </p:txBody>
+      </p:sp>
+      <p:sp>
+        <p:nvSpPr>
+          <p:cNvPr id="5" name="Notes Placeholder 4"/>
+          <p:cNvSpPr>
+            <a:spLocks noGrp="1"/>
+          </p:cNvSpPr>
+          <p:nvPr>
+            <p:ph type="body" sz="quarter" idx="3"/>
+          </p:nvPr>
+        </p:nvSpPr>
+        <p:spPr>
+          <a:xfrm>
+            <a:off x="685800" y="4343400"/>
+            <a:ext cx="5486400" cy="4114800"/>
+          </a:xfrm>
+          <a:prstGeom prst="rect">
+            <a:avLst/>
+          </a:prstGeom>
+        </p:spPr>
+        <p:txBody>
+          <a:bodyPr vert="horz" lIns="91440" tIns="45720" rIns="91440" bIns="45720" rtlCol="0"/>
+          <a:lstStyle/>
+          <a:p>
+            <a:pPr lvl="0"/>
+            <a:r>
+              <a:rPr lang="en-US" smtClean="0"/>
+              <a:t>Click to edit Master text styles</a:t>
+            </a:r>
+          </a:p>
+          <a:p>
+            <a:pPr lvl="1"/>
+            <a:r>
+              <a:rPr lang="en-US" smtClean="0"/>
+              <a:t>Second level</a:t>
+            </a:r>
+          </a:p>
+          <a:p>
+            <a:pPr lvl="2"/>
+            <a:r>
+              <a:rPr lang="en-US" smtClean="0"/>
+              <a:t>Third level</a:t>
+            </a:r>
+          </a:p>
+          <a:p>
+            <a:pPr lvl="3"/>
+            <a:r>
+              <a:rPr lang="en-US" smtClean="0"/>
+              <a:t>Fourth level</a:t>
+            </a:r>
+          </a:p>
+          <a:p>
+            <a:pPr lvl="4"/>
+            <a:r>
+              <a:rPr lang="en-US" smtClean="0"/>
+              <a:t>Fifth level</a:t>
+            </a:r>
+            <a:endParaRPr lang="en-US"/>
+          </a:p>
+        </p:txBody>
+      </p:sp>
+      <p:sp>
+        <p:nvSpPr>
+          <p:cNvPr id="6" name="Footer Placeholder 5"/>
+          <p:cNvSpPr>
+            <a:spLocks noGrp="1"/>
+          </p:cNvSpPr>
+          <p:nvPr>
+            <p:ph type="ftr" sz="quarter" idx="4"/>
+          </p:nvPr>
+        </p:nvSpPr>
+        <p:spPr>
+          <a:xfrm>
+            <a:off x="0" y="8685213"/>
+            <a:ext cx="2971800" cy="457200"/>
+          </a:xfrm>
+          <a:prstGeom prst="rect">
+            <a:avLst/>
+          </a:prstGeom>
+        </p:spPr>
+        <p:txBody>
+          <a:bodyPr vert="horz" lIns="91440" tIns="45720" rIns="91440" bIns="45720" rtlCol="0" anchor="b"/>
+          <a:lstStyle>
+            <a:lvl1pPr algn="l">
+              <a:defRPr sz="1200"/>
+            </a:lvl1pPr>
+          </a:lstStyle>
+          <a:p>
+            <a:endParaRPr lang="en-US"/>
+          </a:p>
+        </p:txBody>
+      </p:sp>
+      <p:sp>
+        <p:nvSpPr>
+          <p:cNvPr id="7" name="Slide Number Placeholder 6"/>
+          <p:cNvSpPr>
+            <a:spLocks noGrp="1"/>
+          </p:cNvSpPr>
+          <p:nvPr>
+            <p:ph type="sldNum" sz="quarter" idx="5"/>
+          </p:nvPr>
+        </p:nvSpPr>
+        <p:spPr>
+          <a:xfrm>
+            <a:off x="3884613" y="8685213"/>
+            <a:ext cx="2971800" cy="457200"/>
+          </a:xfrm>
+          <a:prstGeom prst="rect">
+            <a:avLst/>
+          </a:prstGeom>
+        </p:spPr>
+        <p:txBody>
+          <a:bodyPr vert="horz" lIns="91440" tIns="45720" rIns="91440" bIns="45720" rtlCol="0" anchor="b"/>
+          <a:lstStyle>
+            <a:lvl1pPr algn="r">
+              <a:defRPr sz="1200"/>
+            </a:lvl1pPr>
+          </a:lstStyle>
+          <a:p>
+            <a:fld id="{BB5E49A5-4136-284D-997B-48E1D791AD67}" type="slidenum">
+              <a:rPr lang="en-US" smtClean="0"/>
+              <a:t>‹#›</a:t>
+            </a:fld>
+            <a:endParaRPr lang="en-US"/>
+          </a:p>
+        </p:txBody>
+      </p:sp>
+    </p:spTree>
+    <p:extLst>
+      <p:ext uri="{BB962C8B-B14F-4D97-AF65-F5344CB8AC3E}">
+        <p14:creationId xmlns:p14="http://schemas.microsoft.com/office/powerpoint/2010/main" val="2623252185"/>
+      </p:ext>
+    </p:extLst>
+  </p:cSld>
+  <p:clrMap bg1="lt1" tx1="dk1" bg2="lt2" tx2="dk2" accent1="accent1" accent2="accent2" accent3="accent3" accent4="accent4" accent5="accent5" accent6="accent6" hlink="hlink" folHlink="folHlink"/>
+  <p:notesStyle>
+    <a:lvl1pPr marL="0" algn="l" defTabSz="457200" rtl="0" eaLnBrk="1" latinLnBrk="0" hangingPunct="1">
+      <a:defRPr sz="1200" kern="1200">
+        <a:solidFill>
+          <a:schemeClr val="tx1"/>
+        </a:solidFill>
+        <a:latin typeface="+mn-lt"/>
+        <a:ea typeface="+mn-ea"/>
+        <a:cs typeface="+mn-cs"/>
+      </a:defRPr>
+    </a:lvl1pPr>
+    <a:lvl2pPr marL="457200" algn="l" defTabSz="457200" rtl="0" eaLnBrk="1" latinLnBrk="0" hangingPunct="1">
+      <a:defRPr sz="1200" kern="1200">
+        <a:solidFill>
+          <a:schemeClr val="tx1"/>
+        </a:solidFill>
+        <a:latin typeface="+mn-lt"/>
+        <a:ea typeface="+mn-ea"/>
+        <a:cs typeface="+mn-cs"/>
+      </a:defRPr>
+    </a:lvl2pPr>
+    <a:lvl3pPr marL="914400" algn="l" defTabSz="457200" rtl="0" eaLnBrk="1" latinLnBrk="0" hangingPunct="1">
+      <a:defRPr sz="1200" kern="1200">
+        <a:solidFill>
+          <a:schemeClr val="tx1"/>
+        </a:solidFill>
+        <a:latin typeface="+mn-lt"/>
+        <a:ea typeface="+mn-ea"/>
+        <a:cs typeface="+mn-cs"/>
+      </a:defRPr>
+    </a:lvl3pPr>
+    <a:lvl4pPr marL="1371600" algn="l" defTabSz="457200" rtl="0" eaLnBrk="1" latinLnBrk="0" hangingPunct="1">
+      <a:defRPr sz="1200" kern="1200">
+        <a:solidFill>
+          <a:schemeClr val="tx1"/>
+        </a:solidFill>
+        <a:latin typeface="+mn-lt"/>
+        <a:ea typeface="+mn-ea"/>
+        <a:cs typeface="+mn-cs"/>
+      </a:defRPr>
+    </a:lvl4pPr>
+    <a:lvl5pPr marL="1828800" algn="l" defTabSz="457200" rtl="0" eaLnBrk="1" latinLnBrk="0" hangingPunct="1">
+      <a:defRPr sz="1200" kern="1200">
+        <a:solidFill>
+          <a:schemeClr val="tx1"/>
+        </a:solidFill>
+        <a:latin typeface="+mn-lt"/>
+        <a:ea typeface="+mn-ea"/>
+        <a:cs typeface="+mn-cs"/>
+      </a:defRPr>
+    </a:lvl5pPr>
+    <a:lvl6pPr marL="2286000" algn="l" defTabSz="457200" rtl="0" eaLnBrk="1" latinLnBrk="0" hangingPunct="1">
+      <a:defRPr sz="1200" kern="1200">
+        <a:solidFill>
+          <a:schemeClr val="tx1"/>
+        </a:solidFill>
+        <a:latin typeface="+mn-lt"/>
+        <a:ea typeface="+mn-ea"/>
+        <a:cs typeface="+mn-cs"/>
+      </a:defRPr>
+    </a:lvl6pPr>
+    <a:lvl7pPr marL="2743200" algn="l" defTabSz="457200" rtl="0" eaLnBrk="1" latinLnBrk="0" hangingPunct="1">
+      <a:defRPr sz="1200" kern="1200">
+        <a:solidFill>
+          <a:schemeClr val="tx1"/>
+        </a:solidFill>
+        <a:latin typeface="+mn-lt"/>
+        <a:ea typeface="+mn-ea"/>
+        <a:cs typeface="+mn-cs"/>
+      </a:defRPr>
+    </a:lvl7pPr>
+    <a:lvl8pPr marL="3200400" algn="l" defTabSz="457200" rtl="0" eaLnBrk="1" latinLnBrk="0" hangingPunct="1">
+      <a:defRPr sz="1200" kern="1200">
+        <a:solidFill>
+          <a:schemeClr val="tx1"/>
+        </a:solidFill>
+        <a:latin typeface="+mn-lt"/>
+        <a:ea typeface="+mn-ea"/>
+        <a:cs typeface="+mn-cs"/>
+      </a:defRPr>
+    </a:lvl8pPr>
+    <a:lvl9pPr marL="3657600" algn="l" defTabSz="457200" rtl="0" eaLnBrk="1" latinLnBrk="0" hangingPunct="1">
+      <a:defRPr sz="1200" kern="1200">
+        <a:solidFill>
+          <a:schemeClr val="tx1"/>
+        </a:solidFill>
+        <a:latin typeface="+mn-lt"/>
+        <a:ea typeface="+mn-ea"/>
+        <a:cs typeface="+mn-cs"/>
+      </a:defRPr>
+    </a:lvl9pPr>
+  </p:notesStyle>
+</p:notesMaster>
+</file>
+
+<file path=ppt/notesSlides/notesSlide1.xml><?xml version="1.0" encoding="utf-8"?>
+<p:notes xmlns:a="http://schemas.openxmlformats.org/drawingml/2006/main" xmlns:p="http://schemas.openxmlformats.org/presentationml/2006/main" xmlns:r="http://schemas.openxmlformats.org/officeDocument/2006/relationships">
+  <p:cSld>
+    <p:spTree>
+      <p:nvGrpSpPr>
+        <p:cNvPr id="1" name=""/>
+        <p:cNvGrpSpPr/>
+        <p:nvPr/>
+      </p:nvGrpSpPr>
+      <p:grpSpPr>
+        <a:xfrm>
+          <a:off x="0" y="0"/>
+          <a:ext cx="0" cy="0"/>
+          <a:chOff x="0" y="0"/>
+          <a:chExt cx="0" cy="0"/>
+        </a:xfrm>
+      </p:grpSpPr>
+      <p:sp>
+        <p:nvSpPr>
+          <p:cNvPr id="2" name="Slide Image Placeholder 1"/>
+          <p:cNvSpPr>
+            <a:spLocks noGrp="1"/>
+          </p:cNvSpPr>
+          <p:nvPr>
+            <p:ph type="sldImg" idx="2"/>
+          </p:nvPr>
+        </p:nvSpPr>
+        <p:spPr/>
+      </p:sp>
+      <p:sp>
+        <p:nvSpPr>
+          <p:cNvPr id="3" name="Notes Placeholder 2"/>
+          <p:cNvSpPr>
+            <a:spLocks noGrp="1"/>
+          </p:cNvSpPr>
+          <p:nvPr>
+            <p:ph type="body" idx="3" sz="quarter"/>
+          </p:nvPr>
+        </p:nvSpPr>
+        <p:spPr/>
+        <p:txBody>
+          <a:bodyPr/>
+          <a:lstStyle/>
+          <a:p>
+            <a:r>
+              <a:t>Good [morning/afternoon] — this is my IIT Madras AI Capstone submission, Scenario 2 Banking, Track A LangChain.</a:t>
+            </a:r>
+          </a:p>
+          <a:p>
+            <a:r>
+              <a:t>The project is an AI Copilot that guides retail bank customers through early-stage loan origination.</a:t>
+            </a:r>
+          </a:p>
+          <a:p>
+            <a:r>
+              <a:t>It covers 4 loan products — Home, Personal, MSME, New Car — using 5 AI tools and a full RAG pipeline.</a:t>
+            </a:r>
+          </a:p>
+          <a:p>
+            <a:r>
+              <a:t>Built in 10 days across 8 phases; 233 tests passing. Let me walk you through the architecture and key decisions.</a:t>
+            </a:r>
+          </a:p>
+        </p:txBody>
+      </p:sp>
+      <p:sp>
+        <p:nvSpPr>
+          <p:cNvPr id="4" name="Slide Number Placeholder 3"/>
+          <p:cNvSpPr>
+            <a:spLocks noGrp="1"/>
+          </p:cNvSpPr>
+          <p:nvPr>
+            <p:ph type="sldNum" idx="5" sz="quarter"/>
+          </p:nvPr>
+        </p:nvSpPr>
+        <p:spPr/>
+      </p:sp>
+    </p:spTree>
+  </p:cSld>
+  <p:clrMapOvr>
+    <a:masterClrMapping/>
+  </p:clrMapOvr>
+</p:notes>
+</file>
+
+<file path=ppt/notesSlides/notesSlide10.xml><?xml version="1.0" encoding="utf-8"?>
+<p:notes xmlns:a="http://schemas.openxmlformats.org/drawingml/2006/main" xmlns:p="http://schemas.openxmlformats.org/presentationml/2006/main" xmlns:r="http://schemas.openxmlformats.org/officeDocument/2006/relationships">
+  <p:cSld>
+    <p:spTree>
+      <p:nvGrpSpPr>
+        <p:cNvPr id="1" name=""/>
+        <p:cNvGrpSpPr/>
+        <p:nvPr/>
+      </p:nvGrpSpPr>
+      <p:grpSpPr>
+        <a:xfrm>
+          <a:off x="0" y="0"/>
+          <a:ext cx="0" cy="0"/>
+          <a:chOff x="0" y="0"/>
+          <a:chExt cx="0" cy="0"/>
+        </a:xfrm>
+      </p:grpSpPr>
+      <p:sp>
+        <p:nvSpPr>
+          <p:cNvPr id="2" name="Slide Image Placeholder 1"/>
+          <p:cNvSpPr>
+            <a:spLocks noGrp="1"/>
+          </p:cNvSpPr>
+          <p:nvPr>
+            <p:ph type="sldImg" idx="2"/>
+          </p:nvPr>
+        </p:nvSpPr>
+        <p:spPr/>
+      </p:sp>
+      <p:sp>
+        <p:nvSpPr>
+          <p:cNvPr id="3" name="Notes Placeholder 2"/>
+          <p:cNvSpPr>
+            <a:spLocks noGrp="1"/>
+          </p:cNvSpPr>
+          <p:nvPr>
+            <p:ph type="body" idx="3" sz="quarter"/>
+          </p:nvPr>
+        </p:nvSpPr>
+        <p:spPr/>
+        <p:txBody>
+          <a:bodyPr/>
+          <a:lstStyle/>
+          <a:p>
+            <a:r>
+              <a:t>Memory has two complementary components: LangChain's sliding window (k=10) for prompt context, and CustomerProfile dataclass for structured state.</a:t>
+            </a:r>
+          </a:p>
+          <a:p>
+            <a:r>
+              <a:t>The Planner (next_question()) drives sequential profile collection — it never re-asks a field already in SessionState.</a:t>
+            </a:r>
+          </a:p>
+          <a:p>
+            <a:r>
+              <a:t>SessionState persists eligibility_result and emi_result so the agent can reference prior tool outputs without re-calling tools.</a:t>
+            </a:r>
+          </a:p>
+          <a:p>
+            <a:r>
+              <a:t>The 9-turn demo (right panel) shows a realistic MSME ceiling-breach scenario: Rajesh Mehta requests ₹5Cr → breach detected → mobile validation loop → escalation packet.</a:t>
+            </a:r>
+          </a:p>
+          <a:p>
+            <a:r>
+              <a:t>Reset flow: 'start over' clears both LangChain memory AND SessionState — same agent object, no re-init overhead.</a:t>
+            </a:r>
+          </a:p>
+        </p:txBody>
+      </p:sp>
+      <p:sp>
+        <p:nvSpPr>
+          <p:cNvPr id="4" name="Slide Number Placeholder 3"/>
+          <p:cNvSpPr>
+            <a:spLocks noGrp="1"/>
+          </p:cNvSpPr>
+          <p:nvPr>
+            <p:ph type="sldNum" idx="5" sz="quarter"/>
+          </p:nvPr>
+        </p:nvSpPr>
+        <p:spPr/>
+      </p:sp>
+    </p:spTree>
+  </p:cSld>
+  <p:clrMapOvr>
+    <a:masterClrMapping/>
+  </p:clrMapOvr>
+</p:notes>
+</file>
+
+<file path=ppt/notesSlides/notesSlide11.xml><?xml version="1.0" encoding="utf-8"?>
+<p:notes xmlns:a="http://schemas.openxmlformats.org/drawingml/2006/main" xmlns:p="http://schemas.openxmlformats.org/presentationml/2006/main" xmlns:r="http://schemas.openxmlformats.org/officeDocument/2006/relationships">
+  <p:cSld>
+    <p:spTree>
+      <p:nvGrpSpPr>
+        <p:cNvPr id="1" name=""/>
+        <p:cNvGrpSpPr/>
+        <p:nvPr/>
+      </p:nvGrpSpPr>
+      <p:grpSpPr>
+        <a:xfrm>
+          <a:off x="0" y="0"/>
+          <a:ext cx="0" cy="0"/>
+          <a:chOff x="0" y="0"/>
+          <a:chExt cx="0" cy="0"/>
+        </a:xfrm>
+      </p:grpSpPr>
+      <p:sp>
+        <p:nvSpPr>
+          <p:cNvPr id="2" name="Slide Image Placeholder 1"/>
+          <p:cNvSpPr>
+            <a:spLocks noGrp="1"/>
+          </p:cNvSpPr>
+          <p:nvPr>
+            <p:ph type="sldImg" idx="2"/>
+          </p:nvPr>
+        </p:nvSpPr>
+        <p:spPr/>
+      </p:sp>
+      <p:sp>
+        <p:nvSpPr>
+          <p:cNvPr id="3" name="Notes Placeholder 2"/>
+          <p:cNvSpPr>
+            <a:spLocks noGrp="1"/>
+          </p:cNvSpPr>
+          <p:nvPr>
+            <p:ph type="body" idx="3" sz="quarter"/>
+          </p:nvPr>
+        </p:nvSpPr>
+        <p:spPr/>
+        <p:txBody>
+          <a:bodyPr/>
+          <a:lstStyle/>
+          <a:p>
+            <a:r>
+              <a:t>The RLHF loop: customer star rating → feedback_collector → analyse_feedback() → EMPATHY_PREFIX injected into next session.</a:t>
+            </a:r>
+          </a:p>
+          <a:p>
+            <a:r>
+              <a:t>When average rating over the last 20 sessions drops below 0.60, the EMPATHY_PREFIX is prepended to the system prompt — no fine-tuning needed.</a:t>
+            </a:r>
+          </a:p>
+          <a:p>
+            <a:r>
+              <a:t>policy_checker runs on every single response: checks no-approval-guarantee, no-single-rate-promise, no-PII-in-response.</a:t>
+            </a:r>
+          </a:p>
+          <a:p>
+            <a:r>
+              <a:t>RM Dashboard (right) provides the RM with a pending queue, resolved case management, KPI strip, and PII-masked interaction log.</a:t>
+            </a:r>
+          </a:p>
+          <a:p>
+            <a:r>
+              <a:t>This demonstrates a lightweight, auditable RLHF loop — fast to iterate, visible to reviewers, no model weights changed.</a:t>
+            </a:r>
+          </a:p>
+        </p:txBody>
+      </p:sp>
+      <p:sp>
+        <p:nvSpPr>
+          <p:cNvPr id="4" name="Slide Number Placeholder 3"/>
+          <p:cNvSpPr>
+            <a:spLocks noGrp="1"/>
+          </p:cNvSpPr>
+          <p:nvPr>
+            <p:ph type="sldNum" idx="5" sz="quarter"/>
+          </p:nvPr>
+        </p:nvSpPr>
+        <p:spPr/>
+      </p:sp>
+    </p:spTree>
+  </p:cSld>
+  <p:clrMapOvr>
+    <a:masterClrMapping/>
+  </p:clrMapOvr>
+</p:notes>
+</file>
+
+<file path=ppt/notesSlides/notesSlide12.xml><?xml version="1.0" encoding="utf-8"?>
+<p:notes xmlns:a="http://schemas.openxmlformats.org/drawingml/2006/main" xmlns:p="http://schemas.openxmlformats.org/presentationml/2006/main" xmlns:r="http://schemas.openxmlformats.org/officeDocument/2006/relationships">
+  <p:cSld>
+    <p:spTree>
+      <p:nvGrpSpPr>
+        <p:cNvPr id="1" name=""/>
+        <p:cNvGrpSpPr/>
+        <p:nvPr/>
+      </p:nvGrpSpPr>
+      <p:grpSpPr>
+        <a:xfrm>
+          <a:off x="0" y="0"/>
+          <a:ext cx="0" cy="0"/>
+          <a:chOff x="0" y="0"/>
+          <a:chExt cx="0" cy="0"/>
+        </a:xfrm>
+      </p:grpSpPr>
+      <p:sp>
+        <p:nvSpPr>
+          <p:cNvPr id="2" name="Slide Image Placeholder 1"/>
+          <p:cNvSpPr>
+            <a:spLocks noGrp="1"/>
+          </p:cNvSpPr>
+          <p:nvPr>
+            <p:ph type="sldImg" idx="2"/>
+          </p:nvPr>
+        </p:nvSpPr>
+        <p:spPr/>
+      </p:sp>
+      <p:sp>
+        <p:nvSpPr>
+          <p:cNvPr id="3" name="Notes Placeholder 2"/>
+          <p:cNvSpPr>
+            <a:spLocks noGrp="1"/>
+          </p:cNvSpPr>
+          <p:nvPr>
+            <p:ph type="body" idx="3" sz="quarter"/>
+          </p:nvPr>
+        </p:nvSpPr>
+        <p:spPr/>
+        <p:txBody>
+          <a:bodyPr/>
+          <a:lstStyle/>
+          <a:p>
+            <a:r>
+              <a:t>Langfuse self-hosted (Docker Compose, localhost:3000) — zero cloud upload; satisfies Indian data-protection requirements.</a:t>
+            </a:r>
+          </a:p>
+          <a:p>
+            <a:r>
+              <a:t>One Langfuse trace per agent turn captures everything: session_id, tool names + args + outputs, token count, wall-clock latency.</a:t>
+            </a:r>
+          </a:p>
+          <a:p>
+            <a:r>
+              <a:t>Two evaluation datasets: prompt_comparison_5q (15 traces: V1×5, V2×5, V3×5) and rag_eval_20q (20 Q/A pairs for RAG quality).</a:t>
+            </a:r>
+          </a:p>
+          <a:p>
+            <a:r>
+              <a:t>LLM-as-judge scores all evaluation runs 0–1; V3 selected as SYSTEM_PROMPT default based on Q3 (safety boundary) + Q1/Q4 accuracy.</a:t>
+            </a:r>
+          </a:p>
+          <a:p>
+            <a:r>
+              <a:t>Star ratings (user_feedback score) and policy_checker violations (policy_compliance score) both flow to Langfuse for trend analysis.</a:t>
+            </a:r>
+          </a:p>
+        </p:txBody>
+      </p:sp>
+      <p:sp>
+        <p:nvSpPr>
+          <p:cNvPr id="4" name="Slide Number Placeholder 3"/>
+          <p:cNvSpPr>
+            <a:spLocks noGrp="1"/>
+          </p:cNvSpPr>
+          <p:nvPr>
+            <p:ph type="sldNum" idx="5" sz="quarter"/>
+          </p:nvPr>
+        </p:nvSpPr>
+        <p:spPr/>
+      </p:sp>
+    </p:spTree>
+  </p:cSld>
+  <p:clrMapOvr>
+    <a:masterClrMapping/>
+  </p:clrMapOvr>
+</p:notes>
+</file>
+
+<file path=ppt/notesSlides/notesSlide13.xml><?xml version="1.0" encoding="utf-8"?>
+<p:notes xmlns:a="http://schemas.openxmlformats.org/drawingml/2006/main" xmlns:p="http://schemas.openxmlformats.org/presentationml/2006/main" xmlns:r="http://schemas.openxmlformats.org/officeDocument/2006/relationships">
+  <p:cSld>
+    <p:spTree>
+      <p:nvGrpSpPr>
+        <p:cNvPr id="1" name=""/>
+        <p:cNvGrpSpPr/>
+        <p:nvPr/>
+      </p:nvGrpSpPr>
+      <p:grpSpPr>
+        <a:xfrm>
+          <a:off x="0" y="0"/>
+          <a:ext cx="0" cy="0"/>
+          <a:chOff x="0" y="0"/>
+          <a:chExt cx="0" cy="0"/>
+        </a:xfrm>
+      </p:grpSpPr>
+      <p:sp>
+        <p:nvSpPr>
+          <p:cNvPr id="2" name="Slide Image Placeholder 1"/>
+          <p:cNvSpPr>
+            <a:spLocks noGrp="1"/>
+          </p:cNvSpPr>
+          <p:nvPr>
+            <p:ph type="sldImg" idx="2"/>
+          </p:nvPr>
+        </p:nvSpPr>
+        <p:spPr/>
+      </p:sp>
+      <p:sp>
+        <p:nvSpPr>
+          <p:cNvPr id="3" name="Notes Placeholder 2"/>
+          <p:cNvSpPr>
+            <a:spLocks noGrp="1"/>
+          </p:cNvSpPr>
+          <p:nvPr>
+            <p:ph type="body" idx="3" sz="quarter"/>
+          </p:nvPr>
+        </p:nvSpPr>
+        <p:spPr/>
+        <p:txBody>
+          <a:bodyPr/>
+          <a:lstStyle/>
+          <a:p>
+            <a:r>
+              <a:t>3 prompt variants evaluated on 5 standard questions via Langfuse LLM-as-judge — 15 total traces.</a:t>
+            </a:r>
+          </a:p>
+          <a:p>
+            <a:r>
+              <a:t>V1 (~60 tokens): no safety rules, approval language risk — useful only as a baseline.</a:t>
+            </a:r>
+          </a:p>
+          <a:p>
+            <a:r>
+              <a:t>V2 (~200 tokens): adds ROLE + BOUNDARIES but still lacks an explicit SAFETY block — V3 catches cases V2 misses.</a:t>
+            </a:r>
+          </a:p>
+          <a:p>
+            <a:r>
+              <a:t>V3 (~900 tokens, 6 sections): adds SAFETY RULES, rate-range enforcement, product inference from purpose, AMBIGUOUS handling.</a:t>
+            </a:r>
+          </a:p>
+          <a:p>
+            <a:r>
+              <a:t>Q3 (approval guarantee) was the most discriminating test — V1 partially complies, V2 is borderline, V3 gives a clean refusal with no equivocation.</a:t>
+            </a:r>
+          </a:p>
+        </p:txBody>
+      </p:sp>
+      <p:sp>
+        <p:nvSpPr>
+          <p:cNvPr id="4" name="Slide Number Placeholder 3"/>
+          <p:cNvSpPr>
+            <a:spLocks noGrp="1"/>
+          </p:cNvSpPr>
+          <p:nvPr>
+            <p:ph type="sldNum" idx="5" sz="quarter"/>
+          </p:nvPr>
+        </p:nvSpPr>
+        <p:spPr/>
+      </p:sp>
+    </p:spTree>
+  </p:cSld>
+  <p:clrMapOvr>
+    <a:masterClrMapping/>
+  </p:clrMapOvr>
+</p:notes>
+</file>
+
+<file path=ppt/notesSlides/notesSlide14.xml><?xml version="1.0" encoding="utf-8"?>
+<p:notes xmlns:a="http://schemas.openxmlformats.org/drawingml/2006/main" xmlns:p="http://schemas.openxmlformats.org/presentationml/2006/main" xmlns:r="http://schemas.openxmlformats.org/officeDocument/2006/relationships">
+  <p:cSld>
+    <p:spTree>
+      <p:nvGrpSpPr>
+        <p:cNvPr id="1" name=""/>
+        <p:cNvGrpSpPr/>
+        <p:nvPr/>
+      </p:nvGrpSpPr>
+      <p:grpSpPr>
+        <a:xfrm>
+          <a:off x="0" y="0"/>
+          <a:ext cx="0" cy="0"/>
+          <a:chOff x="0" y="0"/>
+          <a:chExt cx="0" cy="0"/>
+        </a:xfrm>
+      </p:grpSpPr>
+      <p:sp>
+        <p:nvSpPr>
+          <p:cNvPr id="2" name="Slide Image Placeholder 1"/>
+          <p:cNvSpPr>
+            <a:spLocks noGrp="1"/>
+          </p:cNvSpPr>
+          <p:nvPr>
+            <p:ph type="sldImg" idx="2"/>
+          </p:nvPr>
+        </p:nvSpPr>
+        <p:spPr/>
+      </p:sp>
+      <p:sp>
+        <p:nvSpPr>
+          <p:cNvPr id="3" name="Notes Placeholder 2"/>
+          <p:cNvSpPr>
+            <a:spLocks noGrp="1"/>
+          </p:cNvSpPr>
+          <p:nvPr>
+            <p:ph type="body" idx="3" sz="quarter"/>
+          </p:nvPr>
+        </p:nvSpPr>
+        <p:spPr/>
+        <p:txBody>
+          <a:bodyPr/>
+          <a:lstStyle/>
+          <a:p>
+            <a:r>
+              <a:t>3 evaluation suites: RAG Quality (20 Q/A pairs, LLM-as-judge), Tool Selection (30 scenarios, boolean match), Safety (5 adversarial probes, must be 100%).</a:t>
+            </a:r>
+          </a:p>
+          <a:p>
+            <a:r>
+              <a:t>RAG target ≥70% pass rate; Tool Selection target ≥80%; Safety must hit 100% — any missed block triggers a full suite re-run.</a:t>
+            </a:r>
+          </a:p>
+          <a:p>
+            <a:r>
+              <a:t>Root-cause investigation: a chunk without the product-label prefix scored 0.4 (retrieved wrong product); adding the prefix → score 1.0.</a:t>
+            </a:r>
+          </a:p>
+          <a:p>
+            <a:r>
+              <a:t>Latency profile shows safety gate handles blocked turns in &lt;200ms; full 4-tool advisory turn takes 3.5–5.0s P50.</a:t>
+            </a:r>
+          </a:p>
+          <a:p>
+            <a:r>
+              <a:t>233 automated tests provide regression coverage; scripts/run_evaluation.py --suite all runs all 3 evaluation suites.</a:t>
+            </a:r>
+          </a:p>
+        </p:txBody>
+      </p:sp>
+      <p:sp>
+        <p:nvSpPr>
+          <p:cNvPr id="4" name="Slide Number Placeholder 3"/>
+          <p:cNvSpPr>
+            <a:spLocks noGrp="1"/>
+          </p:cNvSpPr>
+          <p:nvPr>
+            <p:ph type="sldNum" idx="5" sz="quarter"/>
+          </p:nvPr>
+        </p:nvSpPr>
+        <p:spPr/>
+      </p:sp>
+    </p:spTree>
+  </p:cSld>
+  <p:clrMapOvr>
+    <a:masterClrMapping/>
+  </p:clrMapOvr>
+</p:notes>
+</file>
+
+<file path=ppt/notesSlides/notesSlide15.xml><?xml version="1.0" encoding="utf-8"?>
+<p:notes xmlns:a="http://schemas.openxmlformats.org/drawingml/2006/main" xmlns:p="http://schemas.openxmlformats.org/presentationml/2006/main" xmlns:r="http://schemas.openxmlformats.org/officeDocument/2006/relationships">
+  <p:cSld>
+    <p:spTree>
+      <p:nvGrpSpPr>
+        <p:cNvPr id="1" name=""/>
+        <p:cNvGrpSpPr/>
+        <p:nvPr/>
+      </p:nvGrpSpPr>
+      <p:grpSpPr>
+        <a:xfrm>
+          <a:off x="0" y="0"/>
+          <a:ext cx="0" cy="0"/>
+          <a:chOff x="0" y="0"/>
+          <a:chExt cx="0" cy="0"/>
+        </a:xfrm>
+      </p:grpSpPr>
+      <p:sp>
+        <p:nvSpPr>
+          <p:cNvPr id="2" name="Slide Image Placeholder 1"/>
+          <p:cNvSpPr>
+            <a:spLocks noGrp="1"/>
+          </p:cNvSpPr>
+          <p:nvPr>
+            <p:ph type="sldImg" idx="2"/>
+          </p:nvPr>
+        </p:nvSpPr>
+        <p:spPr/>
+      </p:sp>
+      <p:sp>
+        <p:nvSpPr>
+          <p:cNvPr id="3" name="Notes Placeholder 2"/>
+          <p:cNvSpPr>
+            <a:spLocks noGrp="1"/>
+          </p:cNvSpPr>
+          <p:nvPr>
+            <p:ph type="body" idx="3" sz="quarter"/>
+          </p:nvPr>
+        </p:nvSpPr>
+        <p:spPr/>
+        <p:txBody>
+          <a:bodyPr/>
+          <a:lstStyle/>
+          <a:p>
+            <a:r>
+              <a:t>Baseline: 2,500 RM-hours/month on pre-screening × ₹600/hr loaded cost = ₹15 Lakh/month.</a:t>
+            </a:r>
+          </a:p>
+          <a:p>
+            <a:r>
+              <a:t>The copilot automates 65% of queries → RM residual drops to 875 hrs/month → ₹5.25L/month. Monthly savings: ₹9.75L.</a:t>
+            </a:r>
+          </a:p>
+          <a:p>
+            <a:r>
+              <a:t>Annual savings: ₹1.17 Crore. Estimated 3-month production dev cost ~₹25–30L → payback in under 6 months.</a:t>
+            </a:r>
+          </a:p>
+          <a:p>
+            <a:r>
+              <a:t>Beyond cost: zero lead loss (structured escalation packets), 24×7 availability, infinite scale, consistent policy compliance.</a:t>
+            </a:r>
+          </a:p>
+          <a:p>
+            <a:r>
+              <a:t>These are conservative assumptions — actual ROI will be higher with scale and as the copilot handles increasingly complex queries over time.</a:t>
+            </a:r>
+          </a:p>
+        </p:txBody>
+      </p:sp>
+      <p:sp>
+        <p:nvSpPr>
+          <p:cNvPr id="4" name="Slide Number Placeholder 3"/>
+          <p:cNvSpPr>
+            <a:spLocks noGrp="1"/>
+          </p:cNvSpPr>
+          <p:nvPr>
+            <p:ph type="sldNum" idx="5" sz="quarter"/>
+          </p:nvPr>
+        </p:nvSpPr>
+        <p:spPr/>
+      </p:sp>
+    </p:spTree>
+  </p:cSld>
+  <p:clrMapOvr>
+    <a:masterClrMapping/>
+  </p:clrMapOvr>
+</p:notes>
+</file>
+
+<file path=ppt/notesSlides/notesSlide16.xml><?xml version="1.0" encoding="utf-8"?>
+<p:notes xmlns:a="http://schemas.openxmlformats.org/drawingml/2006/main" xmlns:p="http://schemas.openxmlformats.org/presentationml/2006/main" xmlns:r="http://schemas.openxmlformats.org/officeDocument/2006/relationships">
+  <p:cSld>
+    <p:spTree>
+      <p:nvGrpSpPr>
+        <p:cNvPr id="1" name=""/>
+        <p:cNvGrpSpPr/>
+        <p:nvPr/>
+      </p:nvGrpSpPr>
+      <p:grpSpPr>
+        <a:xfrm>
+          <a:off x="0" y="0"/>
+          <a:ext cx="0" cy="0"/>
+          <a:chOff x="0" y="0"/>
+          <a:chExt cx="0" cy="0"/>
+        </a:xfrm>
+      </p:grpSpPr>
+      <p:sp>
+        <p:nvSpPr>
+          <p:cNvPr id="2" name="Slide Image Placeholder 1"/>
+          <p:cNvSpPr>
+            <a:spLocks noGrp="1"/>
+          </p:cNvSpPr>
+          <p:nvPr>
+            <p:ph type="sldImg" idx="2"/>
+          </p:nvPr>
+        </p:nvSpPr>
+        <p:spPr/>
+      </p:sp>
+      <p:sp>
+        <p:nvSpPr>
+          <p:cNvPr id="3" name="Notes Placeholder 2"/>
+          <p:cNvSpPr>
+            <a:spLocks noGrp="1"/>
+          </p:cNvSpPr>
+          <p:nvPr>
+            <p:ph type="body" idx="3" sz="quarter"/>
+          </p:nvPr>
+        </p:nvSpPr>
+        <p:spPr/>
+        <p:txBody>
+          <a:bodyPr/>
+          <a:lstStyle/>
+          <a:p>
+            <a:r>
+              <a:t>5 key learnings from this capstone project.</a:t>
+            </a:r>
+          </a:p>
+          <a:p>
+            <a:r>
+              <a:t>1. ReAct + typed tools: structured JSON schemas gave reliable orchestration with minimal prompt engineering for flow logic.</a:t>
+            </a:r>
+          </a:p>
+          <a:p>
+            <a:r>
+              <a:t>2. Product-label prefix: the highest-impact single fix — data quality beat model tuning; precision went from 45% to ≥70%.</a:t>
+            </a:r>
+          </a:p>
+          <a:p>
+            <a:r>
+              <a:t>3. Safety first-class: two-stage gate + PII masking before every log write are architectural constraints, not optional features.</a:t>
+            </a:r>
+          </a:p>
+          <a:p>
+            <a:r>
+              <a:t>4. Langfuse self-hosted: one decision solved both the tracing need and the data-privacy requirement simultaneously.</a:t>
+            </a:r>
+          </a:p>
+          <a:p>
+            <a:r>
+              <a:t>5. Prompt-level RLHF: EMPATHY_PREFIX injection demonstrates a lightweight feedback loop — fast to iterate, fully auditable, no fine-tuning needed.</a:t>
+            </a:r>
+          </a:p>
+          <a:p>
+            <a:r>
+              <a:t>Happy to take questions — I have demo notebooks for any phase you'd like to explore further.</a:t>
+            </a:r>
+          </a:p>
+        </p:txBody>
+      </p:sp>
+      <p:sp>
+        <p:nvSpPr>
+          <p:cNvPr id="4" name="Slide Number Placeholder 3"/>
+          <p:cNvSpPr>
+            <a:spLocks noGrp="1"/>
+          </p:cNvSpPr>
+          <p:nvPr>
+            <p:ph type="sldNum" idx="5" sz="quarter"/>
+          </p:nvPr>
+        </p:nvSpPr>
+        <p:spPr/>
+      </p:sp>
+    </p:spTree>
+  </p:cSld>
+  <p:clrMapOvr>
+    <a:masterClrMapping/>
+  </p:clrMapOvr>
+</p:notes>
+</file>
+
+<file path=ppt/notesSlides/notesSlide2.xml><?xml version="1.0" encoding="utf-8"?>
+<p:notes xmlns:a="http://schemas.openxmlformats.org/drawingml/2006/main" xmlns:p="http://schemas.openxmlformats.org/presentationml/2006/main" xmlns:r="http://schemas.openxmlformats.org/officeDocument/2006/relationships">
+  <p:cSld>
+    <p:spTree>
+      <p:nvGrpSpPr>
+        <p:cNvPr id="1" name=""/>
+        <p:cNvGrpSpPr/>
+        <p:nvPr/>
+      </p:nvGrpSpPr>
+      <p:grpSpPr>
+        <a:xfrm>
+          <a:off x="0" y="0"/>
+          <a:ext cx="0" cy="0"/>
+          <a:chOff x="0" y="0"/>
+          <a:chExt cx="0" cy="0"/>
+        </a:xfrm>
+      </p:grpSpPr>
+      <p:sp>
+        <p:nvSpPr>
+          <p:cNvPr id="2" name="Slide Image Placeholder 1"/>
+          <p:cNvSpPr>
+            <a:spLocks noGrp="1"/>
+          </p:cNvSpPr>
+          <p:nvPr>
+            <p:ph type="sldImg" idx="2"/>
+          </p:nvPr>
+        </p:nvSpPr>
+        <p:spPr/>
+      </p:sp>
+      <p:sp>
+        <p:nvSpPr>
+          <p:cNvPr id="3" name="Notes Placeholder 2"/>
+          <p:cNvSpPr>
+            <a:spLocks noGrp="1"/>
+          </p:cNvSpPr>
+          <p:nvPr>
+            <p:ph type="body" idx="3" sz="quarter"/>
+          </p:nvPr>
+        </p:nvSpPr>
+        <p:spPr/>
+        <p:txBody>
+          <a:bodyPr/>
+          <a:lstStyle/>
+          <a:p>
+            <a:r>
+              <a:t>Indian retail banks lose ~2,500 RM-hours every month to repeatable pre-screening queries.</a:t>
+            </a:r>
+          </a:p>
+          <a:p>
+            <a:r>
+              <a:t>60% of loan enquiries are rejected at eligibility stage — yet RMs still spend 25–40 min per customer on cases that go nowhere.</a:t>
+            </a:r>
+          </a:p>
+          <a:p>
+            <a:r>
+              <a:t>4 products × 4 rulesets creates inconsistency risk — different RMs give different answers, a compliance problem.</a:t>
+            </a:r>
+          </a:p>
+          <a:p>
+            <a:r>
+              <a:t>Customers can only reach an RM 9am–6pm Mon–Sat; loan enquiries arrive 24×7.</a:t>
+            </a:r>
+          </a:p>
+          <a:p>
+            <a:r>
+              <a:t>The AI opportunity: 65% of these queries are automatable — eligibility, EMI, docs, FAQ — freeing RMs for complex cases.</a:t>
+            </a:r>
+          </a:p>
+        </p:txBody>
+      </p:sp>
+      <p:sp>
+        <p:nvSpPr>
+          <p:cNvPr id="4" name="Slide Number Placeholder 3"/>
+          <p:cNvSpPr>
+            <a:spLocks noGrp="1"/>
+          </p:cNvSpPr>
+          <p:nvPr>
+            <p:ph type="sldNum" idx="5" sz="quarter"/>
+          </p:nvPr>
+        </p:nvSpPr>
+        <p:spPr/>
+      </p:sp>
+    </p:spTree>
+  </p:cSld>
+  <p:clrMapOvr>
+    <a:masterClrMapping/>
+  </p:clrMapOvr>
+</p:notes>
+</file>
+
+<file path=ppt/notesSlides/notesSlide3.xml><?xml version="1.0" encoding="utf-8"?>
+<p:notes xmlns:a="http://schemas.openxmlformats.org/drawingml/2006/main" xmlns:p="http://schemas.openxmlformats.org/presentationml/2006/main" xmlns:r="http://schemas.openxmlformats.org/officeDocument/2006/relationships">
+  <p:cSld>
+    <p:spTree>
+      <p:nvGrpSpPr>
+        <p:cNvPr id="1" name=""/>
+        <p:cNvGrpSpPr/>
+        <p:nvPr/>
+      </p:nvGrpSpPr>
+      <p:grpSpPr>
+        <a:xfrm>
+          <a:off x="0" y="0"/>
+          <a:ext cx="0" cy="0"/>
+          <a:chOff x="0" y="0"/>
+          <a:chExt cx="0" cy="0"/>
+        </a:xfrm>
+      </p:grpSpPr>
+      <p:sp>
+        <p:nvSpPr>
+          <p:cNvPr id="2" name="Slide Image Placeholder 1"/>
+          <p:cNvSpPr>
+            <a:spLocks noGrp="1"/>
+          </p:cNvSpPr>
+          <p:nvPr>
+            <p:ph type="sldImg" idx="2"/>
+          </p:nvPr>
+        </p:nvSpPr>
+        <p:spPr/>
+      </p:sp>
+      <p:sp>
+        <p:nvSpPr>
+          <p:cNvPr id="3" name="Notes Placeholder 2"/>
+          <p:cNvSpPr>
+            <a:spLocks noGrp="1"/>
+          </p:cNvSpPr>
+          <p:nvPr>
+            <p:ph type="body" idx="3" sz="quarter"/>
+          </p:nvPr>
+        </p:nvSpPr>
+        <p:spPr/>
+        <p:txBody>
+          <a:bodyPr/>
+          <a:lstStyle/>
+          <a:p>
+            <a:r>
+              <a:t>The copilot delivers 5 tightly integrated capabilities covering the full pre-application journey.</a:t>
+            </a:r>
+          </a:p>
+          <a:p>
+            <a:r>
+              <a:t>Eligibility check uses FOIR (fixed obligations to income ratio) + credit score + age + amount limits — returns PASS / REFER / REJECT with a specific reason.</a:t>
+            </a:r>
+          </a:p>
+          <a:p>
+            <a:r>
+              <a:t>EMI is calculated using reducing-balance formula; always presented as a range (min rate to max rate) with an indicative disclaimer.</a:t>
+            </a:r>
+          </a:p>
+          <a:p>
+            <a:r>
+              <a:t>Document checklist is a product × employment-type lookup — tailored to each customer's situation.</a:t>
+            </a:r>
+          </a:p>
+          <a:p>
+            <a:r>
+              <a:t>The sample conversation shows how all 4 capabilities fire in sequence in just 3 turns for a salaried Home Loan customer.</a:t>
+            </a:r>
+          </a:p>
+        </p:txBody>
+      </p:sp>
+      <p:sp>
+        <p:nvSpPr>
+          <p:cNvPr id="4" name="Slide Number Placeholder 3"/>
+          <p:cNvSpPr>
+            <a:spLocks noGrp="1"/>
+          </p:cNvSpPr>
+          <p:nvPr>
+            <p:ph type="sldNum" idx="5" sz="quarter"/>
+          </p:nvPr>
+        </p:nvSpPr>
+        <p:spPr/>
+      </p:sp>
+    </p:spTree>
+  </p:cSld>
+  <p:clrMapOvr>
+    <a:masterClrMapping/>
+  </p:clrMapOvr>
+</p:notes>
+</file>
+
+<file path=ppt/notesSlides/notesSlide4.xml><?xml version="1.0" encoding="utf-8"?>
+<p:notes xmlns:a="http://schemas.openxmlformats.org/drawingml/2006/main" xmlns:p="http://schemas.openxmlformats.org/presentationml/2006/main" xmlns:r="http://schemas.openxmlformats.org/officeDocument/2006/relationships">
+  <p:cSld>
+    <p:spTree>
+      <p:nvGrpSpPr>
+        <p:cNvPr id="1" name=""/>
+        <p:cNvGrpSpPr/>
+        <p:nvPr/>
+      </p:nvGrpSpPr>
+      <p:grpSpPr>
+        <a:xfrm>
+          <a:off x="0" y="0"/>
+          <a:ext cx="0" cy="0"/>
+          <a:chOff x="0" y="0"/>
+          <a:chExt cx="0" cy="0"/>
+        </a:xfrm>
+      </p:grpSpPr>
+      <p:sp>
+        <p:nvSpPr>
+          <p:cNvPr id="2" name="Slide Image Placeholder 1"/>
+          <p:cNvSpPr>
+            <a:spLocks noGrp="1"/>
+          </p:cNvSpPr>
+          <p:nvPr>
+            <p:ph type="sldImg" idx="2"/>
+          </p:nvPr>
+        </p:nvSpPr>
+        <p:spPr/>
+      </p:sp>
+      <p:sp>
+        <p:nvSpPr>
+          <p:cNvPr id="3" name="Notes Placeholder 2"/>
+          <p:cNvSpPr>
+            <a:spLocks noGrp="1"/>
+          </p:cNvSpPr>
+          <p:nvPr>
+            <p:ph type="body" idx="3" sz="quarter"/>
+          </p:nvPr>
+        </p:nvSpPr>
+        <p:spPr/>
+        <p:txBody>
+          <a:bodyPr/>
+          <a:lstStyle/>
+          <a:p>
+            <a:r>
+              <a:t>5 layers — Presentation → Safety Gate → Agent/Orchestration → Tools → Retrieval — all traced through Langfuse.</a:t>
+            </a:r>
+          </a:p>
+          <a:p>
+            <a:r>
+              <a:t>Users interact via Streamlit customer chat, RM dashboard, or CLI; every message passes through the 2-stage safety gate first.</a:t>
+            </a:r>
+          </a:p>
+          <a:p>
+            <a:r>
+              <a:t>The ReAct agent (GPT-4o) sits at the centre — it reasons about what the user needs and selects the right tool with JSON args.</a:t>
+            </a:r>
+          </a:p>
+          <a:p>
+            <a:r>
+              <a:t>Layer ④ shows the 5 @tool functions; Layer ⑤ shows the full RAG ingestion pipeline ending in ChromaDB.</a:t>
+            </a:r>
+          </a:p>
+          <a:p>
+            <a:r>
+              <a:t>Langfuse (right panel) is self-hosted — all traces stay on-premise, satisfying Indian data-protection requirements.</a:t>
+            </a:r>
+          </a:p>
+        </p:txBody>
+      </p:sp>
+      <p:sp>
+        <p:nvSpPr>
+          <p:cNvPr id="4" name="Slide Number Placeholder 3"/>
+          <p:cNvSpPr>
+            <a:spLocks noGrp="1"/>
+          </p:cNvSpPr>
+          <p:nvPr>
+            <p:ph type="sldNum" idx="5" sz="quarter"/>
+          </p:nvPr>
+        </p:nvSpPr>
+        <p:spPr/>
+      </p:sp>
+    </p:spTree>
+  </p:cSld>
+  <p:clrMapOvr>
+    <a:masterClrMapping/>
+  </p:clrMapOvr>
+</p:notes>
+</file>
+
+<file path=ppt/notesSlides/notesSlide5.xml><?xml version="1.0" encoding="utf-8"?>
+<p:notes xmlns:a="http://schemas.openxmlformats.org/drawingml/2006/main" xmlns:p="http://schemas.openxmlformats.org/presentationml/2006/main" xmlns:r="http://schemas.openxmlformats.org/officeDocument/2006/relationships">
+  <p:cSld>
+    <p:spTree>
+      <p:nvGrpSpPr>
+        <p:cNvPr id="1" name=""/>
+        <p:cNvGrpSpPr/>
+        <p:nvPr/>
+      </p:nvGrpSpPr>
+      <p:grpSpPr>
+        <a:xfrm>
+          <a:off x="0" y="0"/>
+          <a:ext cx="0" cy="0"/>
+          <a:chOff x="0" y="0"/>
+          <a:chExt cx="0" cy="0"/>
+        </a:xfrm>
+      </p:grpSpPr>
+      <p:sp>
+        <p:nvSpPr>
+          <p:cNvPr id="2" name="Slide Image Placeholder 1"/>
+          <p:cNvSpPr>
+            <a:spLocks noGrp="1"/>
+          </p:cNvSpPr>
+          <p:nvPr>
+            <p:ph type="sldImg" idx="2"/>
+          </p:nvPr>
+        </p:nvSpPr>
+        <p:spPr/>
+      </p:sp>
+      <p:sp>
+        <p:nvSpPr>
+          <p:cNvPr id="3" name="Notes Placeholder 2"/>
+          <p:cNvSpPr>
+            <a:spLocks noGrp="1"/>
+          </p:cNvSpPr>
+          <p:nvPr>
+            <p:ph type="body" idx="3" sz="quarter"/>
+          </p:nvPr>
+        </p:nvSpPr>
+        <p:spPr/>
+        <p:txBody>
+          <a:bodyPr/>
+          <a:lstStyle/>
+          <a:p>
+            <a:r>
+              <a:t>Every tech choice has a documented justification in docs/engineering_justification.md — this slide is the summary.</a:t>
+            </a:r>
+          </a:p>
+          <a:p>
+            <a:r>
+              <a:t>GPT-4o chosen for tool-calling fidelity; GPT-4o-mini for safety gate (&lt;50 tokens, &lt;150ms, minimal cost overhead).</a:t>
+            </a:r>
+          </a:p>
+          <a:p>
+            <a:r>
+              <a:t>ReAct over Plan-and-Execute: loan advisory is a sequential, deterministic flow — a separate planner adds 300ms with no accuracy benefit.</a:t>
+            </a:r>
+          </a:p>
+          <a:p>
+            <a:r>
+              <a:t>Langfuse self-hosted: LangSmith is cloud-only — banking income and employment data cannot leave the network perimeter (India data-protection).</a:t>
+            </a:r>
+          </a:p>
+          <a:p>
+            <a:r>
+              <a:t>ChromaDB persistent with metadata filtering: FAISS migration path documented; text-embedding-3-small chosen for cost/quality ratio.</a:t>
+            </a:r>
+          </a:p>
+        </p:txBody>
+      </p:sp>
+      <p:sp>
+        <p:nvSpPr>
+          <p:cNvPr id="4" name="Slide Number Placeholder 3"/>
+          <p:cNvSpPr>
+            <a:spLocks noGrp="1"/>
+          </p:cNvSpPr>
+          <p:nvPr>
+            <p:ph type="sldNum" idx="5" sz="quarter"/>
+          </p:nvPr>
+        </p:nvSpPr>
+        <p:spPr/>
+      </p:sp>
+    </p:spTree>
+  </p:cSld>
+  <p:clrMapOvr>
+    <a:masterClrMapping/>
+  </p:clrMapOvr>
+</p:notes>
+</file>
+
+<file path=ppt/notesSlides/notesSlide6.xml><?xml version="1.0" encoding="utf-8"?>
+<p:notes xmlns:a="http://schemas.openxmlformats.org/drawingml/2006/main" xmlns:p="http://schemas.openxmlformats.org/presentationml/2006/main" xmlns:r="http://schemas.openxmlformats.org/officeDocument/2006/relationships">
+  <p:cSld>
+    <p:spTree>
+      <p:nvGrpSpPr>
+        <p:cNvPr id="1" name=""/>
+        <p:cNvGrpSpPr/>
+        <p:nvPr/>
+      </p:nvGrpSpPr>
+      <p:grpSpPr>
+        <a:xfrm>
+          <a:off x="0" y="0"/>
+          <a:ext cx="0" cy="0"/>
+          <a:chOff x="0" y="0"/>
+          <a:chExt cx="0" cy="0"/>
+        </a:xfrm>
+      </p:grpSpPr>
+      <p:sp>
+        <p:nvSpPr>
+          <p:cNvPr id="2" name="Slide Image Placeholder 1"/>
+          <p:cNvSpPr>
+            <a:spLocks noGrp="1"/>
+          </p:cNvSpPr>
+          <p:nvPr>
+            <p:ph type="sldImg" idx="2"/>
+          </p:nvPr>
+        </p:nvSpPr>
+        <p:spPr/>
+      </p:sp>
+      <p:sp>
+        <p:nvSpPr>
+          <p:cNvPr id="3" name="Notes Placeholder 2"/>
+          <p:cNvSpPr>
+            <a:spLocks noGrp="1"/>
+          </p:cNvSpPr>
+          <p:nvPr>
+            <p:ph type="body" idx="3" sz="quarter"/>
+          </p:nvPr>
+        </p:nvSpPr>
+        <p:spPr/>
+        <p:txBody>
+          <a:bodyPr/>
+          <a:lstStyle/>
+          <a:p>
+            <a:r>
+              <a:t>8 phases built in 10 days — Phase 2 (rules-based, no LLM) through Phase 9 (evaluation).</a:t>
+            </a:r>
+          </a:p>
+          <a:p>
+            <a:r>
+              <a:t>Phases progress: rules → GPT-4o → RAG → tool integration → memory → RLHF → deployment → evaluation.</a:t>
+            </a:r>
+          </a:p>
+          <a:p>
+            <a:r>
+              <a:t>The rubric alignment table (bottom) maps each phase to a graded dimension with evidence and key artifacts.</a:t>
+            </a:r>
+          </a:p>
+          <a:p>
+            <a:r>
+              <a:t>All 8 phases are complete — verified by 233 passing tests and 8 Jupyter demo notebooks.</a:t>
+            </a:r>
+          </a:p>
+          <a:p>
+            <a:r>
+              <a:t>Key milestone: Phase 4 RAG + Phase 5 tools are where the system becomes truly conversational and grounded.</a:t>
+            </a:r>
+          </a:p>
+        </p:txBody>
+      </p:sp>
+      <p:sp>
+        <p:nvSpPr>
+          <p:cNvPr id="4" name="Slide Number Placeholder 3"/>
+          <p:cNvSpPr>
+            <a:spLocks noGrp="1"/>
+          </p:cNvSpPr>
+          <p:nvPr>
+            <p:ph type="sldNum" idx="5" sz="quarter"/>
+          </p:nvPr>
+        </p:nvSpPr>
+        <p:spPr/>
+      </p:sp>
+    </p:spTree>
+  </p:cSld>
+  <p:clrMapOvr>
+    <a:masterClrMapping/>
+  </p:clrMapOvr>
+</p:notes>
+</file>
+
+<file path=ppt/notesSlides/notesSlide7.xml><?xml version="1.0" encoding="utf-8"?>
+<p:notes xmlns:a="http://schemas.openxmlformats.org/drawingml/2006/main" xmlns:p="http://schemas.openxmlformats.org/presentationml/2006/main" xmlns:r="http://schemas.openxmlformats.org/officeDocument/2006/relationships">
+  <p:cSld>
+    <p:spTree>
+      <p:nvGrpSpPr>
+        <p:cNvPr id="1" name=""/>
+        <p:cNvGrpSpPr/>
+        <p:nvPr/>
+      </p:nvGrpSpPr>
+      <p:grpSpPr>
+        <a:xfrm>
+          <a:off x="0" y="0"/>
+          <a:ext cx="0" cy="0"/>
+          <a:chOff x="0" y="0"/>
+          <a:chExt cx="0" cy="0"/>
+        </a:xfrm>
+      </p:grpSpPr>
+      <p:sp>
+        <p:nvSpPr>
+          <p:cNvPr id="2" name="Slide Image Placeholder 1"/>
+          <p:cNvSpPr>
+            <a:spLocks noGrp="1"/>
+          </p:cNvSpPr>
+          <p:nvPr>
+            <p:ph type="sldImg" idx="2"/>
+          </p:nvPr>
+        </p:nvSpPr>
+        <p:spPr/>
+      </p:sp>
+      <p:sp>
+        <p:nvSpPr>
+          <p:cNvPr id="3" name="Notes Placeholder 2"/>
+          <p:cNvSpPr>
+            <a:spLocks noGrp="1"/>
+          </p:cNvSpPr>
+          <p:nvPr>
+            <p:ph type="body" idx="3" sz="quarter"/>
+          </p:nvPr>
+        </p:nvSpPr>
+        <p:spPr/>
+        <p:txBody>
+          <a:bodyPr/>
+          <a:lstStyle/>
+          <a:p>
+            <a:r>
+              <a:t>The left panel shows the ReAct loop: Think → Act (select tool + JSON args) → Observe result → Loop → Respond.</a:t>
+            </a:r>
+          </a:p>
+          <a:p>
+            <a:r>
+              <a:t>5 @tool functions are registered in tool_registry.py; GPT-4o dynamically selects the right tool based on conversation state.</a:t>
+            </a:r>
+          </a:p>
+          <a:p>
+            <a:r>
+              <a:t>check_eligibility is the most complex: 8 input parameters, product-specific FOIR and credit limits, returns PASS/REFER/REJECT with reason.</a:t>
+            </a:r>
+          </a:p>
+          <a:p>
+            <a:r>
+              <a:t>generate_escalation_summary is triggered automatically when loan_amount exceeds the product ceiling — validates mobile (10-digit) and email.</a:t>
+            </a:r>
+          </a:p>
+          <a:p>
+            <a:r>
+              <a:t>All tool calls are traced in Langfuse with full args + output — crucial for debugging and evaluation.</a:t>
+            </a:r>
+          </a:p>
+        </p:txBody>
+      </p:sp>
+      <p:sp>
+        <p:nvSpPr>
+          <p:cNvPr id="4" name="Slide Number Placeholder 3"/>
+          <p:cNvSpPr>
+            <a:spLocks noGrp="1"/>
+          </p:cNvSpPr>
+          <p:nvPr>
+            <p:ph type="sldNum" idx="5" sz="quarter"/>
+          </p:nvPr>
+        </p:nvSpPr>
+        <p:spPr/>
+      </p:sp>
+    </p:spTree>
+  </p:cSld>
+  <p:clrMapOvr>
+    <a:masterClrMapping/>
+  </p:clrMapOvr>
+</p:notes>
+</file>
+
+<file path=ppt/notesSlides/notesSlide8.xml><?xml version="1.0" encoding="utf-8"?>
+<p:notes xmlns:a="http://schemas.openxmlformats.org/drawingml/2006/main" xmlns:p="http://schemas.openxmlformats.org/presentationml/2006/main" xmlns:r="http://schemas.openxmlformats.org/officeDocument/2006/relationships">
+  <p:cSld>
+    <p:spTree>
+      <p:nvGrpSpPr>
+        <p:cNvPr id="1" name=""/>
+        <p:cNvGrpSpPr/>
+        <p:nvPr/>
+      </p:nvGrpSpPr>
+      <p:grpSpPr>
+        <a:xfrm>
+          <a:off x="0" y="0"/>
+          <a:ext cx="0" cy="0"/>
+          <a:chOff x="0" y="0"/>
+          <a:chExt cx="0" cy="0"/>
+        </a:xfrm>
+      </p:grpSpPr>
+      <p:sp>
+        <p:nvSpPr>
+          <p:cNvPr id="2" name="Slide Image Placeholder 1"/>
+          <p:cNvSpPr>
+            <a:spLocks noGrp="1"/>
+          </p:cNvSpPr>
+          <p:nvPr>
+            <p:ph type="sldImg" idx="2"/>
+          </p:nvPr>
+        </p:nvSpPr>
+        <p:spPr/>
+      </p:sp>
+      <p:sp>
+        <p:nvSpPr>
+          <p:cNvPr id="3" name="Notes Placeholder 2"/>
+          <p:cNvSpPr>
+            <a:spLocks noGrp="1"/>
+          </p:cNvSpPr>
+          <p:nvPr>
+            <p:ph type="body" idx="3" sz="quarter"/>
+          </p:nvPr>
+        </p:nvSpPr>
+        <p:spPr/>
+        <p:txBody>
+          <a:bodyPr/>
+          <a:lstStyle/>
+          <a:p>
+            <a:r>
+              <a:t>5-step RAG pipeline: document_loader → chunker → embedder → ChromaDB store → retriever.</a:t>
+            </a:r>
+          </a:p>
+          <a:p>
+            <a:r>
+              <a:t>Key engineering insight: without the product-label prefix, the MSME docs query retrieved Home Loan chunks — semantic similarity alone is insufficient across similar-domain documents.</a:t>
+            </a:r>
+          </a:p>
+          <a:p>
+            <a:r>
+              <a:t>The fix: prepend '[MSME LOAN] ...' to every chunk from that product file. Retrieval precision jumped from ~45% to ≥70% with zero model changes.</a:t>
+            </a:r>
+          </a:p>
+          <a:p>
+            <a:r>
+              <a:t>500-char chunks with 100-char overlap; text-embedding-3-small (1536-dim); RAG_TOP_K=5 with MMR re-ranking for diversity.</a:t>
+            </a:r>
+          </a:p>
+          <a:p>
+            <a:r>
+              <a:t>Run 'python scripts/ingest_documents.py' after any policy doc update — takes ~30 seconds for all 5 files.</a:t>
+            </a:r>
+          </a:p>
+        </p:txBody>
+      </p:sp>
+      <p:sp>
+        <p:nvSpPr>
+          <p:cNvPr id="4" name="Slide Number Placeholder 3"/>
+          <p:cNvSpPr>
+            <a:spLocks noGrp="1"/>
+          </p:cNvSpPr>
+          <p:nvPr>
+            <p:ph type="sldNum" idx="5" sz="quarter"/>
+          </p:nvPr>
+        </p:nvSpPr>
+        <p:spPr/>
+      </p:sp>
+    </p:spTree>
+  </p:cSld>
+  <p:clrMapOvr>
+    <a:masterClrMapping/>
+  </p:clrMapOvr>
+</p:notes>
+</file>
+
+<file path=ppt/notesSlides/notesSlide9.xml><?xml version="1.0" encoding="utf-8"?>
+<p:notes xmlns:a="http://schemas.openxmlformats.org/drawingml/2006/main" xmlns:p="http://schemas.openxmlformats.org/presentationml/2006/main" xmlns:r="http://schemas.openxmlformats.org/officeDocument/2006/relationships">
+  <p:cSld>
+    <p:spTree>
+      <p:nvGrpSpPr>
+        <p:cNvPr id="1" name=""/>
+        <p:cNvGrpSpPr/>
+        <p:nvPr/>
+      </p:nvGrpSpPr>
+      <p:grpSpPr>
+        <a:xfrm>
+          <a:off x="0" y="0"/>
+          <a:ext cx="0" cy="0"/>
+          <a:chOff x="0" y="0"/>
+          <a:chExt cx="0" cy="0"/>
+        </a:xfrm>
+      </p:grpSpPr>
+      <p:sp>
+        <p:nvSpPr>
+          <p:cNvPr id="2" name="Slide Image Placeholder 1"/>
+          <p:cNvSpPr>
+            <a:spLocks noGrp="1"/>
+          </p:cNvSpPr>
+          <p:nvPr>
+            <p:ph type="sldImg" idx="2"/>
+          </p:nvPr>
+        </p:nvSpPr>
+        <p:spPr/>
+      </p:sp>
+      <p:sp>
+        <p:nvSpPr>
+          <p:cNvPr id="3" name="Notes Placeholder 2"/>
+          <p:cNvSpPr>
+            <a:spLocks noGrp="1"/>
+          </p:cNvSpPr>
+          <p:nvPr>
+            <p:ph type="body" idx="3" sz="quarter"/>
+          </p:nvPr>
+        </p:nvSpPr>
+        <p:spPr/>
+        <p:txBody>
+          <a:bodyPr/>
+          <a:lstStyle/>
+          <a:p>
+            <a:r>
+              <a:t>Two-stage gate sits in front of every agent call — no message reaches GPT-4o until it passes both stages.</a:t>
+            </a:r>
+          </a:p>
+          <a:p>
+            <a:r>
+              <a:t>Stage A (keyword blocklist): catches 80%+ of adversarial probes in under 1ms at zero token cost.</a:t>
+            </a:r>
+          </a:p>
+          <a:p>
+            <a:r>
+              <a:t>Stage B (GPT-4o-mini classifier): handles semantic edge cases; fail-OPEN on API error so legitimate customers are never blocked.</a:t>
+            </a:r>
+          </a:p>
+          <a:p>
+            <a:r>
+              <a:t>PII filter (right panel) is applied before EVERY log write — 5 types, ordered Mobile → Aadhaar → PAN → Email → Account.</a:t>
+            </a:r>
+          </a:p>
+          <a:p>
+            <a:r>
+              <a:t>100% adversarial block rate achieved in evaluation — all 5 probe types blocked correctly.</a:t>
+            </a:r>
+          </a:p>
+        </p:txBody>
+      </p:sp>
+      <p:sp>
+        <p:nvSpPr>
+          <p:cNvPr id="4" name="Slide Number Placeholder 3"/>
+          <p:cNvSpPr>
+            <a:spLocks noGrp="1"/>
+          </p:cNvSpPr>
+          <p:nvPr>
+            <p:ph type="sldNum" idx="5" sz="quarter"/>
+          </p:nvPr>
+        </p:nvSpPr>
+        <p:spPr/>
+      </p:sp>
+    </p:spTree>
+  </p:cSld>
+  <p:clrMapOvr>
+    <a:masterClrMapping/>
+  </p:clrMapOvr>
+</p:notes>
 </file>
 
 <file path=ppt/slideLayouts/slideLayout1.xml><?xml version="1.0" encoding="utf-8"?>
@@ -7436,7 +9231,7 @@
         <p:spPr>
           <a:xfrm>
             <a:off x="7680960" y="4544568"/>
-            <a:ext cx="4297680" cy="3337560"/>
+            <a:ext cx="4297680" cy="2011680"/>
           </a:xfrm>
           <a:prstGeom prst="rect">
             <a:avLst/>
@@ -7558,7 +9353,7 @@
         <p:spPr>
           <a:xfrm>
             <a:off x="7772400" y="4910328"/>
-            <a:ext cx="4114800" cy="658368"/>
+            <a:ext cx="4114800" cy="384048"/>
           </a:xfrm>
           <a:prstGeom prst="rect">
             <a:avLst/>
@@ -7601,22 +9396,22 @@
         <p:spPr>
           <a:xfrm>
             <a:off x="7863840" y="4937760"/>
-            <a:ext cx="1828800" cy="274320"/>
-          </a:xfrm>
-          <a:prstGeom prst="rect">
-            <a:avLst/>
-          </a:prstGeom>
-          <a:noFill/>
-        </p:spPr>
-        <p:txBody>
-          <a:bodyPr wrap="square">
-            <a:spAutoFit/>
-          </a:bodyPr>
-          <a:lstStyle/>
-          <a:p>
-            <a:pPr algn="l"/>
-            <a:r>
-              <a:rPr sz="950" b="1" i="0">
+            <a:ext cx="1828800" cy="146304"/>
+          </a:xfrm>
+          <a:prstGeom prst="rect">
+            <a:avLst/>
+          </a:prstGeom>
+          <a:noFill/>
+        </p:spPr>
+        <p:txBody>
+          <a:bodyPr wrap="square">
+            <a:spAutoFit/>
+          </a:bodyPr>
+          <a:lstStyle/>
+          <a:p>
+            <a:pPr algn="l"/>
+            <a:r>
+              <a:rPr sz="900" b="1" i="0">
                 <a:solidFill>
                   <a:srgbClr val="0D2D5E"/>
                 </a:solidFill>
@@ -7634,29 +9429,28 @@
         </p:nvSpPr>
         <p:spPr>
           <a:xfrm>
-            <a:off x="7863840" y="5212079"/>
-            <a:ext cx="3840480" cy="329184"/>
-          </a:xfrm>
-          <a:prstGeom prst="rect">
-            <a:avLst/>
-          </a:prstGeom>
-          <a:noFill/>
-        </p:spPr>
-        <p:txBody>
-          <a:bodyPr wrap="square">
-            <a:spAutoFit/>
-          </a:bodyPr>
-          <a:lstStyle/>
-          <a:p>
-            <a:pPr algn="l"/>
-            <a:r>
-              <a:rPr sz="900" b="0" i="0">
+            <a:off x="7863840" y="5102352"/>
+            <a:ext cx="3840480" cy="201168"/>
+          </a:xfrm>
+          <a:prstGeom prst="rect">
+            <a:avLst/>
+          </a:prstGeom>
+          <a:noFill/>
+        </p:spPr>
+        <p:txBody>
+          <a:bodyPr wrap="square">
+            <a:spAutoFit/>
+          </a:bodyPr>
+          <a:lstStyle/>
+          <a:p>
+            <a:pPr algn="l"/>
+            <a:r>
+              <a:rPr sz="800" b="0" i="0">
                 <a:solidFill>
                   <a:srgbClr val="2D3A4B"/>
                 </a:solidFill>
               </a:rPr>
-              <a:t>Live cases with full conversation
-history; loan type + date filters</a:t>
+              <a:t>Live cases with full conversation history; loan type + date filters</a:t>
             </a:r>
           </a:p>
         </p:txBody>
@@ -7669,8 +9463,8 @@
         </p:nvSpPr>
         <p:spPr>
           <a:xfrm>
-            <a:off x="7772400" y="5641848"/>
-            <a:ext cx="4114800" cy="658368"/>
+            <a:off x="7772400" y="5330952"/>
+            <a:ext cx="4114800" cy="384048"/>
           </a:xfrm>
           <a:prstGeom prst="rect">
             <a:avLst/>
@@ -7712,23 +9506,23 @@
         </p:nvSpPr>
         <p:spPr>
           <a:xfrm>
-            <a:off x="7863840" y="5669280"/>
-            <a:ext cx="1828800" cy="274320"/>
-          </a:xfrm>
-          <a:prstGeom prst="rect">
-            <a:avLst/>
-          </a:prstGeom>
-          <a:noFill/>
-        </p:spPr>
-        <p:txBody>
-          <a:bodyPr wrap="square">
-            <a:spAutoFit/>
-          </a:bodyPr>
-          <a:lstStyle/>
-          <a:p>
-            <a:pPr algn="l"/>
-            <a:r>
-              <a:rPr sz="950" b="1" i="0">
+            <a:off x="7863840" y="5358384"/>
+            <a:ext cx="1828800" cy="146304"/>
+          </a:xfrm>
+          <a:prstGeom prst="rect">
+            <a:avLst/>
+          </a:prstGeom>
+          <a:noFill/>
+        </p:spPr>
+        <p:txBody>
+          <a:bodyPr wrap="square">
+            <a:spAutoFit/>
+          </a:bodyPr>
+          <a:lstStyle/>
+          <a:p>
+            <a:pPr algn="l"/>
+            <a:r>
+              <a:rPr sz="900" b="1" i="0">
                 <a:solidFill>
                   <a:srgbClr val="0D2D5E"/>
                 </a:solidFill>
@@ -7746,29 +9540,28 @@
         </p:nvSpPr>
         <p:spPr>
           <a:xfrm>
-            <a:off x="7863840" y="5943599"/>
-            <a:ext cx="3840480" cy="329184"/>
-          </a:xfrm>
-          <a:prstGeom prst="rect">
-            <a:avLst/>
-          </a:prstGeom>
-          <a:noFill/>
-        </p:spPr>
-        <p:txBody>
-          <a:bodyPr wrap="square">
-            <a:spAutoFit/>
-          </a:bodyPr>
-          <a:lstStyle/>
-          <a:p>
-            <a:pPr algn="l"/>
-            <a:r>
-              <a:rPr sz="900" b="0" i="0">
+            <a:off x="7863840" y="5522976"/>
+            <a:ext cx="3840480" cy="201168"/>
+          </a:xfrm>
+          <a:prstGeom prst="rect">
+            <a:avLst/>
+          </a:prstGeom>
+          <a:noFill/>
+        </p:spPr>
+        <p:txBody>
+          <a:bodyPr wrap="square">
+            <a:spAutoFit/>
+          </a:bodyPr>
+          <a:lstStyle/>
+          <a:p>
+            <a:pPr algn="l"/>
+            <a:r>
+              <a:rPr sz="800" b="0" i="0">
                 <a:solidFill>
                   <a:srgbClr val="2D3A4B"/>
                 </a:solidFill>
               </a:rPr>
-              <a:t>Mark resolved + add comment;
-timestamp logged to JSON store</a:t>
+              <a:t>Mark resolved + add comment; timestamp logged to JSON store</a:t>
             </a:r>
           </a:p>
         </p:txBody>
@@ -7781,8 +9574,8 @@
         </p:nvSpPr>
         <p:spPr>
           <a:xfrm>
-            <a:off x="7772400" y="6373368"/>
-            <a:ext cx="4114800" cy="658368"/>
+            <a:off x="7772400" y="5751576"/>
+            <a:ext cx="4114800" cy="384048"/>
           </a:xfrm>
           <a:prstGeom prst="rect">
             <a:avLst/>
@@ -7824,23 +9617,23 @@
         </p:nvSpPr>
         <p:spPr>
           <a:xfrm>
-            <a:off x="7863840" y="6400800"/>
-            <a:ext cx="1828800" cy="274320"/>
-          </a:xfrm>
-          <a:prstGeom prst="rect">
-            <a:avLst/>
-          </a:prstGeom>
-          <a:noFill/>
-        </p:spPr>
-        <p:txBody>
-          <a:bodyPr wrap="square">
-            <a:spAutoFit/>
-          </a:bodyPr>
-          <a:lstStyle/>
-          <a:p>
-            <a:pPr algn="l"/>
-            <a:r>
-              <a:rPr sz="950" b="1" i="0">
+            <a:off x="7863840" y="5779008"/>
+            <a:ext cx="1828800" cy="146304"/>
+          </a:xfrm>
+          <a:prstGeom prst="rect">
+            <a:avLst/>
+          </a:prstGeom>
+          <a:noFill/>
+        </p:spPr>
+        <p:txBody>
+          <a:bodyPr wrap="square">
+            <a:spAutoFit/>
+          </a:bodyPr>
+          <a:lstStyle/>
+          <a:p>
+            <a:pPr algn="l"/>
+            <a:r>
+              <a:rPr sz="900" b="1" i="0">
                 <a:solidFill>
                   <a:srgbClr val="0D2D5E"/>
                 </a:solidFill>
@@ -7858,29 +9651,28 @@
         </p:nvSpPr>
         <p:spPr>
           <a:xfrm>
-            <a:off x="7863840" y="6675119"/>
-            <a:ext cx="3840480" cy="329184"/>
-          </a:xfrm>
-          <a:prstGeom prst="rect">
-            <a:avLst/>
-          </a:prstGeom>
-          <a:noFill/>
-        </p:spPr>
-        <p:txBody>
-          <a:bodyPr wrap="square">
-            <a:spAutoFit/>
-          </a:bodyPr>
-          <a:lstStyle/>
-          <a:p>
-            <a:pPr algn="l"/>
-            <a:r>
-              <a:rPr sz="900" b="0" i="0">
+            <a:off x="7863840" y="5943600"/>
+            <a:ext cx="3840480" cy="201168"/>
+          </a:xfrm>
+          <a:prstGeom prst="rect">
+            <a:avLst/>
+          </a:prstGeom>
+          <a:noFill/>
+        </p:spPr>
+        <p:txBody>
+          <a:bodyPr wrap="square">
+            <a:spAutoFit/>
+          </a:bodyPr>
+          <a:lstStyle/>
+          <a:p>
+            <a:pPr algn="l"/>
+            <a:r>
+              <a:rPr sz="800" b="0" i="0">
                 <a:solidFill>
                   <a:srgbClr val="2D3A4B"/>
                 </a:solidFill>
               </a:rPr>
-              <a:t>Sessions · Pending · Resolved ·
-P95 latency (from interactions.log)</a:t>
+              <a:t>Sessions · Pending · Resolved · P95 latency (from interactions.log)</a:t>
             </a:r>
           </a:p>
         </p:txBody>
@@ -7893,8 +9685,8 @@
         </p:nvSpPr>
         <p:spPr>
           <a:xfrm>
-            <a:off x="7772400" y="7104888"/>
-            <a:ext cx="4114800" cy="658368"/>
+            <a:off x="7772400" y="6172200"/>
+            <a:ext cx="4114800" cy="384048"/>
           </a:xfrm>
           <a:prstGeom prst="rect">
             <a:avLst/>
@@ -7936,23 +9728,23 @@
         </p:nvSpPr>
         <p:spPr>
           <a:xfrm>
-            <a:off x="7863840" y="7132320"/>
-            <a:ext cx="1828800" cy="274320"/>
-          </a:xfrm>
-          <a:prstGeom prst="rect">
-            <a:avLst/>
-          </a:prstGeom>
-          <a:noFill/>
-        </p:spPr>
-        <p:txBody>
-          <a:bodyPr wrap="square">
-            <a:spAutoFit/>
-          </a:bodyPr>
-          <a:lstStyle/>
-          <a:p>
-            <a:pPr algn="l"/>
-            <a:r>
-              <a:rPr sz="950" b="1" i="0">
+            <a:off x="7863840" y="6199632"/>
+            <a:ext cx="1828800" cy="146304"/>
+          </a:xfrm>
+          <a:prstGeom prst="rect">
+            <a:avLst/>
+          </a:prstGeom>
+          <a:noFill/>
+        </p:spPr>
+        <p:txBody>
+          <a:bodyPr wrap="square">
+            <a:spAutoFit/>
+          </a:bodyPr>
+          <a:lstStyle/>
+          <a:p>
+            <a:pPr algn="l"/>
+            <a:r>
+              <a:rPr sz="900" b="1" i="0">
                 <a:solidFill>
                   <a:srgbClr val="0D2D5E"/>
                 </a:solidFill>
@@ -7970,29 +9762,28 @@
         </p:nvSpPr>
         <p:spPr>
           <a:xfrm>
-            <a:off x="7863840" y="7406640"/>
-            <a:ext cx="3840480" cy="329184"/>
-          </a:xfrm>
-          <a:prstGeom prst="rect">
-            <a:avLst/>
-          </a:prstGeom>
-          <a:noFill/>
-        </p:spPr>
-        <p:txBody>
-          <a:bodyPr wrap="square">
-            <a:spAutoFit/>
-          </a:bodyPr>
-          <a:lstStyle/>
-          <a:p>
-            <a:pPr algn="l"/>
-            <a:r>
-              <a:rPr sz="900" b="0" i="0">
+            <a:off x="7863840" y="6364224"/>
+            <a:ext cx="3840480" cy="201168"/>
+          </a:xfrm>
+          <a:prstGeom prst="rect">
+            <a:avLst/>
+          </a:prstGeom>
+          <a:noFill/>
+        </p:spPr>
+        <p:txBody>
+          <a:bodyPr wrap="square">
+            <a:spAutoFit/>
+          </a:bodyPr>
+          <a:lstStyle/>
+          <a:p>
+            <a:pPr algn="l"/>
+            <a:r>
+              <a:rPr sz="800" b="0" i="0">
                 <a:solidFill>
                   <a:srgbClr val="2D3A4B"/>
                 </a:solidFill>
               </a:rPr>
-              <a:t>Last 50 turns; PII-masked;
-latency per turn; block flag</a:t>
+              <a:t>Last 50 turns; PII-masked; latency per turn; block flag</a:t>
             </a:r>
           </a:p>
         </p:txBody>
@@ -9849,7 +11640,7 @@
         <p:spPr>
           <a:xfrm>
             <a:off x="320040" y="1389888"/>
-            <a:ext cx="3822191" cy="4206240"/>
+            <a:ext cx="3822191" cy="3584448"/>
           </a:xfrm>
           <a:prstGeom prst="rect">
             <a:avLst/>
@@ -10108,7 +11899,7 @@
         <p:spPr>
           <a:xfrm>
             <a:off x="411479" y="3730752"/>
-            <a:ext cx="3639312" cy="1536192"/>
+            <a:ext cx="3639312" cy="877824"/>
           </a:xfrm>
           <a:prstGeom prst="rect">
             <a:avLst/>
@@ -10145,7 +11936,7 @@
         </p:nvSpPr>
         <p:spPr>
           <a:xfrm>
-            <a:off x="411479" y="5266944"/>
+            <a:off x="411479" y="4681728"/>
             <a:ext cx="3639312" cy="256032"/>
           </a:xfrm>
           <a:prstGeom prst="rect">
@@ -10188,7 +11979,7 @@
         </p:nvSpPr>
         <p:spPr>
           <a:xfrm>
-            <a:off x="411479" y="5266944"/>
+            <a:off x="411479" y="4681728"/>
             <a:ext cx="3639312" cy="256032"/>
           </a:xfrm>
           <a:prstGeom prst="rect">
@@ -10223,7 +12014,7 @@
         <p:spPr>
           <a:xfrm>
             <a:off x="4270248" y="1389888"/>
-            <a:ext cx="3822191" cy="4206240"/>
+            <a:ext cx="3822191" cy="3584448"/>
           </a:xfrm>
           <a:prstGeom prst="rect">
             <a:avLst/>
@@ -10482,7 +12273,7 @@
         <p:spPr>
           <a:xfrm>
             <a:off x="4361688" y="3730752"/>
-            <a:ext cx="3639312" cy="1536192"/>
+            <a:ext cx="3639312" cy="877824"/>
           </a:xfrm>
           <a:prstGeom prst="rect">
             <a:avLst/>
@@ -10519,7 +12310,7 @@
         </p:nvSpPr>
         <p:spPr>
           <a:xfrm>
-            <a:off x="4361688" y="5266944"/>
+            <a:off x="4361688" y="4681728"/>
             <a:ext cx="3639312" cy="256032"/>
           </a:xfrm>
           <a:prstGeom prst="rect">
@@ -10562,7 +12353,7 @@
         </p:nvSpPr>
         <p:spPr>
           <a:xfrm>
-            <a:off x="4361688" y="5266944"/>
+            <a:off x="4361688" y="4681728"/>
             <a:ext cx="3639312" cy="256032"/>
           </a:xfrm>
           <a:prstGeom prst="rect">
@@ -10597,7 +12388,7 @@
         <p:spPr>
           <a:xfrm>
             <a:off x="8220456" y="1389888"/>
-            <a:ext cx="3822191" cy="4206240"/>
+            <a:ext cx="3822191" cy="3584448"/>
           </a:xfrm>
           <a:prstGeom prst="rect">
             <a:avLst/>
@@ -10856,7 +12647,7 @@
         <p:spPr>
           <a:xfrm>
             <a:off x="8311896" y="3730752"/>
-            <a:ext cx="3639312" cy="1536192"/>
+            <a:ext cx="3639312" cy="877824"/>
           </a:xfrm>
           <a:prstGeom prst="rect">
             <a:avLst/>
@@ -10893,7 +12684,7 @@
         </p:nvSpPr>
         <p:spPr>
           <a:xfrm>
-            <a:off x="8311896" y="5266944"/>
+            <a:off x="8311896" y="4681728"/>
             <a:ext cx="3639312" cy="256032"/>
           </a:xfrm>
           <a:prstGeom prst="rect">
@@ -10936,7 +12727,7 @@
         </p:nvSpPr>
         <p:spPr>
           <a:xfrm>
-            <a:off x="8311896" y="5266944"/>
+            <a:off x="8311896" y="4681728"/>
             <a:ext cx="3639312" cy="256032"/>
           </a:xfrm>
           <a:prstGeom prst="rect">
@@ -10970,7 +12761,7 @@
         </p:nvSpPr>
         <p:spPr>
           <a:xfrm>
-            <a:off x="320040" y="5961888"/>
+            <a:off x="320040" y="5065775"/>
             <a:ext cx="11548872" cy="256032"/>
           </a:xfrm>
           <a:prstGeom prst="rect">
@@ -11013,7 +12804,7 @@
         </p:nvSpPr>
         <p:spPr>
           <a:xfrm>
-            <a:off x="457200" y="5980175"/>
+            <a:off x="457200" y="5084064"/>
             <a:ext cx="10972800" cy="219456"/>
           </a:xfrm>
           <a:prstGeom prst="rect">
@@ -11047,8 +12838,8 @@
         </p:nvSpPr>
         <p:spPr>
           <a:xfrm>
-            <a:off x="320040" y="6254496"/>
-            <a:ext cx="3749039" cy="1298448"/>
+            <a:off x="320040" y="5358383"/>
+            <a:ext cx="3749039" cy="822960"/>
           </a:xfrm>
           <a:prstGeom prst="rect">
             <a:avLst/>
@@ -11092,8 +12883,8 @@
         </p:nvSpPr>
         <p:spPr>
           <a:xfrm>
-            <a:off x="411479" y="6309360"/>
-            <a:ext cx="3566160" cy="1170432"/>
+            <a:off x="411479" y="5413248"/>
+            <a:ext cx="3566160" cy="713232"/>
           </a:xfrm>
           <a:prstGeom prst="rect">
             <a:avLst/>
@@ -11126,8 +12917,8 @@
         </p:nvSpPr>
         <p:spPr>
           <a:xfrm>
-            <a:off x="4142232" y="6254496"/>
-            <a:ext cx="3749039" cy="1298448"/>
+            <a:off x="4142232" y="5358383"/>
+            <a:ext cx="3749039" cy="822960"/>
           </a:xfrm>
           <a:prstGeom prst="rect">
             <a:avLst/>
@@ -11171,8 +12962,8 @@
         </p:nvSpPr>
         <p:spPr>
           <a:xfrm>
-            <a:off x="4233672" y="6309360"/>
-            <a:ext cx="3566160" cy="1170432"/>
+            <a:off x="4233672" y="5413248"/>
+            <a:ext cx="3566160" cy="713232"/>
           </a:xfrm>
           <a:prstGeom prst="rect">
             <a:avLst/>
@@ -11205,8 +12996,8 @@
         </p:nvSpPr>
         <p:spPr>
           <a:xfrm>
-            <a:off x="7964424" y="6254496"/>
-            <a:ext cx="3749039" cy="1298448"/>
+            <a:off x="7964424" y="5358383"/>
+            <a:ext cx="3749039" cy="822960"/>
           </a:xfrm>
           <a:prstGeom prst="rect">
             <a:avLst/>
@@ -11250,8 +13041,8 @@
         </p:nvSpPr>
         <p:spPr>
           <a:xfrm>
-            <a:off x="8055864" y="6309360"/>
-            <a:ext cx="3566160" cy="1170432"/>
+            <a:off x="8055864" y="5413248"/>
+            <a:ext cx="3566160" cy="713232"/>
           </a:xfrm>
           <a:prstGeom prst="rect">
             <a:avLst/>
@@ -12350,7 +14141,7 @@
         <p:spPr>
           <a:xfrm>
             <a:off x="320040" y="2779776"/>
-            <a:ext cx="11548872" cy="676656"/>
+            <a:ext cx="11548872" cy="530352"/>
           </a:xfrm>
           <a:prstGeom prst="rect">
             <a:avLst/>
@@ -12393,7 +14184,7 @@
         <p:spPr>
           <a:xfrm>
             <a:off x="457200" y="2807208"/>
-            <a:ext cx="1737360" cy="603504"/>
+            <a:ext cx="1737360" cy="493776"/>
           </a:xfrm>
           <a:prstGeom prst="rect">
             <a:avLst/>
@@ -12427,7 +14218,7 @@
         <p:spPr>
           <a:xfrm>
             <a:off x="2286000" y="2807208"/>
-            <a:ext cx="822960" cy="603504"/>
+            <a:ext cx="822960" cy="493776"/>
           </a:xfrm>
           <a:prstGeom prst="rect">
             <a:avLst/>
@@ -12461,7 +14252,7 @@
         <p:spPr>
           <a:xfrm>
             <a:off x="3200400" y="2807208"/>
-            <a:ext cx="1097280" cy="603504"/>
+            <a:ext cx="1097280" cy="493776"/>
           </a:xfrm>
           <a:prstGeom prst="rect">
             <a:avLst/>
@@ -12495,7 +14286,7 @@
         <p:spPr>
           <a:xfrm>
             <a:off x="4389120" y="2807208"/>
-            <a:ext cx="3291840" cy="603504"/>
+            <a:ext cx="3291840" cy="493776"/>
           </a:xfrm>
           <a:prstGeom prst="rect">
             <a:avLst/>
@@ -12529,7 +14320,7 @@
         <p:spPr>
           <a:xfrm>
             <a:off x="7772400" y="2807208"/>
-            <a:ext cx="4023360" cy="603504"/>
+            <a:ext cx="4023360" cy="493776"/>
           </a:xfrm>
           <a:prstGeom prst="rect">
             <a:avLst/>
@@ -12562,8 +14353,8 @@
         </p:nvSpPr>
         <p:spPr>
           <a:xfrm>
-            <a:off x="320040" y="3493008"/>
-            <a:ext cx="11548872" cy="676656"/>
+            <a:off x="320040" y="3346704"/>
+            <a:ext cx="11548872" cy="530352"/>
           </a:xfrm>
           <a:prstGeom prst="rect">
             <a:avLst/>
@@ -12605,8 +14396,8 @@
         </p:nvSpPr>
         <p:spPr>
           <a:xfrm>
-            <a:off x="457200" y="3520440"/>
-            <a:ext cx="1737360" cy="603504"/>
+            <a:off x="457200" y="3374136"/>
+            <a:ext cx="1737360" cy="493776"/>
           </a:xfrm>
           <a:prstGeom prst="rect">
             <a:avLst/>
@@ -12639,8 +14430,8 @@
         </p:nvSpPr>
         <p:spPr>
           <a:xfrm>
-            <a:off x="2286000" y="3520440"/>
-            <a:ext cx="822960" cy="603504"/>
+            <a:off x="2286000" y="3374136"/>
+            <a:ext cx="822960" cy="493776"/>
           </a:xfrm>
           <a:prstGeom prst="rect">
             <a:avLst/>
@@ -12673,8 +14464,8 @@
         </p:nvSpPr>
         <p:spPr>
           <a:xfrm>
-            <a:off x="3200400" y="3520440"/>
-            <a:ext cx="1097280" cy="603504"/>
+            <a:off x="3200400" y="3374136"/>
+            <a:ext cx="1097280" cy="493776"/>
           </a:xfrm>
           <a:prstGeom prst="rect">
             <a:avLst/>
@@ -12707,8 +14498,8 @@
         </p:nvSpPr>
         <p:spPr>
           <a:xfrm>
-            <a:off x="4389120" y="3520440"/>
-            <a:ext cx="3291840" cy="603504"/>
+            <a:off x="4389120" y="3374136"/>
+            <a:ext cx="3291840" cy="493776"/>
           </a:xfrm>
           <a:prstGeom prst="rect">
             <a:avLst/>
@@ -12741,8 +14532,8 @@
         </p:nvSpPr>
         <p:spPr>
           <a:xfrm>
-            <a:off x="7772400" y="3520440"/>
-            <a:ext cx="4023360" cy="603504"/>
+            <a:off x="7772400" y="3374136"/>
+            <a:ext cx="4023360" cy="493776"/>
           </a:xfrm>
           <a:prstGeom prst="rect">
             <a:avLst/>
@@ -12775,8 +14566,8 @@
         </p:nvSpPr>
         <p:spPr>
           <a:xfrm>
-            <a:off x="320040" y="4206240"/>
-            <a:ext cx="11548872" cy="676656"/>
+            <a:off x="320040" y="3913632"/>
+            <a:ext cx="11548872" cy="530352"/>
           </a:xfrm>
           <a:prstGeom prst="rect">
             <a:avLst/>
@@ -12818,8 +14609,8 @@
         </p:nvSpPr>
         <p:spPr>
           <a:xfrm>
-            <a:off x="457200" y="4233672"/>
-            <a:ext cx="1737360" cy="603504"/>
+            <a:off x="457200" y="3941064"/>
+            <a:ext cx="1737360" cy="493776"/>
           </a:xfrm>
           <a:prstGeom prst="rect">
             <a:avLst/>
@@ -12852,8 +14643,8 @@
         </p:nvSpPr>
         <p:spPr>
           <a:xfrm>
-            <a:off x="2286000" y="4233672"/>
-            <a:ext cx="822960" cy="603504"/>
+            <a:off x="2286000" y="3941064"/>
+            <a:ext cx="822960" cy="493776"/>
           </a:xfrm>
           <a:prstGeom prst="rect">
             <a:avLst/>
@@ -12886,8 +14677,8 @@
         </p:nvSpPr>
         <p:spPr>
           <a:xfrm>
-            <a:off x="3200400" y="4233672"/>
-            <a:ext cx="1097280" cy="603504"/>
+            <a:off x="3200400" y="3941064"/>
+            <a:ext cx="1097280" cy="493776"/>
           </a:xfrm>
           <a:prstGeom prst="rect">
             <a:avLst/>
@@ -12920,8 +14711,8 @@
         </p:nvSpPr>
         <p:spPr>
           <a:xfrm>
-            <a:off x="4389120" y="4233672"/>
-            <a:ext cx="3291840" cy="603504"/>
+            <a:off x="4389120" y="3941064"/>
+            <a:ext cx="3291840" cy="493776"/>
           </a:xfrm>
           <a:prstGeom prst="rect">
             <a:avLst/>
@@ -12954,8 +14745,8 @@
         </p:nvSpPr>
         <p:spPr>
           <a:xfrm>
-            <a:off x="7772400" y="4233672"/>
-            <a:ext cx="4023360" cy="603504"/>
+            <a:off x="7772400" y="3941064"/>
+            <a:ext cx="4023360" cy="493776"/>
           </a:xfrm>
           <a:prstGeom prst="rect">
             <a:avLst/>
@@ -12988,7 +14779,7 @@
         </p:nvSpPr>
         <p:spPr>
           <a:xfrm>
-            <a:off x="320040" y="4919472"/>
+            <a:off x="320040" y="4590288"/>
             <a:ext cx="11548872" cy="256032"/>
           </a:xfrm>
           <a:prstGeom prst="rect">
@@ -13031,7 +14822,7 @@
         </p:nvSpPr>
         <p:spPr>
           <a:xfrm>
-            <a:off x="457200" y="4937760"/>
+            <a:off x="457200" y="4608576"/>
             <a:ext cx="10972800" cy="219456"/>
           </a:xfrm>
           <a:prstGeom prst="rect">
@@ -13065,7 +14856,7 @@
         </p:nvSpPr>
         <p:spPr>
           <a:xfrm>
-            <a:off x="320040" y="5175504"/>
+            <a:off x="320040" y="4846320"/>
             <a:ext cx="11548872" cy="256032"/>
           </a:xfrm>
           <a:prstGeom prst="rect">
@@ -13108,7 +14899,7 @@
         </p:nvSpPr>
         <p:spPr>
           <a:xfrm>
-            <a:off x="457200" y="5193792"/>
+            <a:off x="457200" y="4864608"/>
             <a:ext cx="1828800" cy="219456"/>
           </a:xfrm>
           <a:prstGeom prst="rect">
@@ -13142,7 +14933,7 @@
         </p:nvSpPr>
         <p:spPr>
           <a:xfrm>
-            <a:off x="4572000" y="5193792"/>
+            <a:off x="4572000" y="4864608"/>
             <a:ext cx="1828800" cy="219456"/>
           </a:xfrm>
           <a:prstGeom prst="rect">
@@ -13176,7 +14967,7 @@
         </p:nvSpPr>
         <p:spPr>
           <a:xfrm>
-            <a:off x="6217920" y="5193792"/>
+            <a:off x="6217920" y="4864608"/>
             <a:ext cx="1828800" cy="219456"/>
           </a:xfrm>
           <a:prstGeom prst="rect">
@@ -13210,7 +15001,7 @@
         </p:nvSpPr>
         <p:spPr>
           <a:xfrm>
-            <a:off x="7863840" y="5193792"/>
+            <a:off x="7863840" y="4864608"/>
             <a:ext cx="1828800" cy="219456"/>
           </a:xfrm>
           <a:prstGeom prst="rect">
@@ -13244,8 +15035,8 @@
         </p:nvSpPr>
         <p:spPr>
           <a:xfrm>
-            <a:off x="320040" y="5431536"/>
-            <a:ext cx="11548872" cy="493776"/>
+            <a:off x="320040" y="5102352"/>
+            <a:ext cx="11548872" cy="329184"/>
           </a:xfrm>
           <a:prstGeom prst="rect">
             <a:avLst/>
@@ -13287,8 +15078,8 @@
         </p:nvSpPr>
         <p:spPr>
           <a:xfrm>
-            <a:off x="457200" y="5458968"/>
-            <a:ext cx="4023360" cy="420624"/>
+            <a:off x="457200" y="5129783"/>
+            <a:ext cx="4023360" cy="274320"/>
           </a:xfrm>
           <a:prstGeom prst="rect">
             <a:avLst/>
@@ -13321,8 +15112,8 @@
         </p:nvSpPr>
         <p:spPr>
           <a:xfrm>
-            <a:off x="4572000" y="5458968"/>
-            <a:ext cx="1554480" cy="420624"/>
+            <a:off x="4572000" y="5129783"/>
+            <a:ext cx="1554480" cy="274320"/>
           </a:xfrm>
           <a:prstGeom prst="rect">
             <a:avLst/>
@@ -13355,8 +15146,8 @@
         </p:nvSpPr>
         <p:spPr>
           <a:xfrm>
-            <a:off x="6217920" y="5458968"/>
-            <a:ext cx="1554480" cy="420624"/>
+            <a:off x="6217920" y="5129783"/>
+            <a:ext cx="1554480" cy="274320"/>
           </a:xfrm>
           <a:prstGeom prst="rect">
             <a:avLst/>
@@ -13389,8 +15180,8 @@
         </p:nvSpPr>
         <p:spPr>
           <a:xfrm>
-            <a:off x="7863840" y="5458968"/>
-            <a:ext cx="3749039" cy="420624"/>
+            <a:off x="7863840" y="5129783"/>
+            <a:ext cx="3749039" cy="274320"/>
           </a:xfrm>
           <a:prstGeom prst="rect">
             <a:avLst/>
@@ -13423,8 +15214,8 @@
         </p:nvSpPr>
         <p:spPr>
           <a:xfrm>
-            <a:off x="320040" y="5961888"/>
-            <a:ext cx="11548872" cy="493776"/>
+            <a:off x="320040" y="5468112"/>
+            <a:ext cx="11548872" cy="329184"/>
           </a:xfrm>
           <a:prstGeom prst="rect">
             <a:avLst/>
@@ -13466,8 +15257,8 @@
         </p:nvSpPr>
         <p:spPr>
           <a:xfrm>
-            <a:off x="457200" y="5989320"/>
-            <a:ext cx="4023360" cy="420624"/>
+            <a:off x="457200" y="5495544"/>
+            <a:ext cx="4023360" cy="274320"/>
           </a:xfrm>
           <a:prstGeom prst="rect">
             <a:avLst/>
@@ -13500,8 +15291,8 @@
         </p:nvSpPr>
         <p:spPr>
           <a:xfrm>
-            <a:off x="4572000" y="5989320"/>
-            <a:ext cx="1554480" cy="420624"/>
+            <a:off x="4572000" y="5495544"/>
+            <a:ext cx="1554480" cy="274320"/>
           </a:xfrm>
           <a:prstGeom prst="rect">
             <a:avLst/>
@@ -13534,8 +15325,8 @@
         </p:nvSpPr>
         <p:spPr>
           <a:xfrm>
-            <a:off x="6217920" y="5989320"/>
-            <a:ext cx="1554480" cy="420624"/>
+            <a:off x="6217920" y="5495544"/>
+            <a:ext cx="1554480" cy="274320"/>
           </a:xfrm>
           <a:prstGeom prst="rect">
             <a:avLst/>
@@ -13568,8 +15359,8 @@
         </p:nvSpPr>
         <p:spPr>
           <a:xfrm>
-            <a:off x="7863840" y="5989320"/>
-            <a:ext cx="3749039" cy="420624"/>
+            <a:off x="7863840" y="5495544"/>
+            <a:ext cx="3749039" cy="274320"/>
           </a:xfrm>
           <a:prstGeom prst="rect">
             <a:avLst/>
@@ -13602,8 +15393,8 @@
         </p:nvSpPr>
         <p:spPr>
           <a:xfrm>
-            <a:off x="320040" y="6492240"/>
-            <a:ext cx="11548872" cy="493776"/>
+            <a:off x="320040" y="5833872"/>
+            <a:ext cx="11548872" cy="329184"/>
           </a:xfrm>
           <a:prstGeom prst="rect">
             <a:avLst/>
@@ -13645,8 +15436,8 @@
         </p:nvSpPr>
         <p:spPr>
           <a:xfrm>
-            <a:off x="457200" y="6519672"/>
-            <a:ext cx="4023360" cy="420624"/>
+            <a:off x="457200" y="5861303"/>
+            <a:ext cx="4023360" cy="274320"/>
           </a:xfrm>
           <a:prstGeom prst="rect">
             <a:avLst/>
@@ -13679,8 +15470,8 @@
         </p:nvSpPr>
         <p:spPr>
           <a:xfrm>
-            <a:off x="4572000" y="6519672"/>
-            <a:ext cx="1554480" cy="420624"/>
+            <a:off x="4572000" y="5861303"/>
+            <a:ext cx="1554480" cy="274320"/>
           </a:xfrm>
           <a:prstGeom prst="rect">
             <a:avLst/>
@@ -13713,8 +15504,8 @@
         </p:nvSpPr>
         <p:spPr>
           <a:xfrm>
-            <a:off x="6217920" y="6519672"/>
-            <a:ext cx="1554480" cy="420624"/>
+            <a:off x="6217920" y="5861303"/>
+            <a:ext cx="1554480" cy="274320"/>
           </a:xfrm>
           <a:prstGeom prst="rect">
             <a:avLst/>
@@ -13747,8 +15538,8 @@
         </p:nvSpPr>
         <p:spPr>
           <a:xfrm>
-            <a:off x="7863840" y="6519672"/>
-            <a:ext cx="3749039" cy="420624"/>
+            <a:off x="7863840" y="5861303"/>
+            <a:ext cx="3749039" cy="274320"/>
           </a:xfrm>
           <a:prstGeom prst="rect">
             <a:avLst/>
@@ -13781,8 +15572,8 @@
         </p:nvSpPr>
         <p:spPr>
           <a:xfrm>
-            <a:off x="320040" y="7022592"/>
-            <a:ext cx="11548872" cy="493776"/>
+            <a:off x="320040" y="6199632"/>
+            <a:ext cx="11548872" cy="329184"/>
           </a:xfrm>
           <a:prstGeom prst="rect">
             <a:avLst/>
@@ -13824,8 +15615,8 @@
         </p:nvSpPr>
         <p:spPr>
           <a:xfrm>
-            <a:off x="457200" y="7050024"/>
-            <a:ext cx="4023360" cy="420624"/>
+            <a:off x="457200" y="6227064"/>
+            <a:ext cx="4023360" cy="274320"/>
           </a:xfrm>
           <a:prstGeom prst="rect">
             <a:avLst/>
@@ -13858,8 +15649,8 @@
         </p:nvSpPr>
         <p:spPr>
           <a:xfrm>
-            <a:off x="4572000" y="7050024"/>
-            <a:ext cx="1554480" cy="420624"/>
+            <a:off x="4572000" y="6227064"/>
+            <a:ext cx="1554480" cy="274320"/>
           </a:xfrm>
           <a:prstGeom prst="rect">
             <a:avLst/>
@@ -13892,8 +15683,8 @@
         </p:nvSpPr>
         <p:spPr>
           <a:xfrm>
-            <a:off x="6217920" y="7050024"/>
-            <a:ext cx="1554480" cy="420624"/>
+            <a:off x="6217920" y="6227064"/>
+            <a:ext cx="1554480" cy="274320"/>
           </a:xfrm>
           <a:prstGeom prst="rect">
             <a:avLst/>
@@ -13926,8 +15717,8 @@
         </p:nvSpPr>
         <p:spPr>
           <a:xfrm>
-            <a:off x="7863840" y="7050024"/>
-            <a:ext cx="3749039" cy="420624"/>
+            <a:off x="7863840" y="6227064"/>
+            <a:ext cx="3749039" cy="274320"/>
           </a:xfrm>
           <a:prstGeom prst="rect">
             <a:avLst/>
@@ -13954,77 +15745,34 @@
       </p:sp>
       <p:sp>
         <p:nvSpPr>
-          <p:cNvPr id="75" name="Rectangle 74"/>
-          <p:cNvSpPr/>
-          <p:nvPr/>
-        </p:nvSpPr>
-        <p:spPr>
-          <a:xfrm>
-            <a:off x="320040" y="7552944"/>
-            <a:ext cx="11548872" cy="256032"/>
-          </a:xfrm>
-          <a:prstGeom prst="rect">
-            <a:avLst/>
-          </a:prstGeom>
-          <a:solidFill>
-            <a:srgbClr val="D97B06"/>
-          </a:solidFill>
-          <a:ln>
-            <a:noFill/>
-          </a:ln>
-        </p:spPr>
-        <p:style>
-          <a:lnRef idx="1">
-            <a:schemeClr val="accent1"/>
-          </a:lnRef>
-          <a:fillRef idx="3">
-            <a:schemeClr val="accent1"/>
-          </a:fillRef>
-          <a:effectRef idx="2">
-            <a:schemeClr val="accent1"/>
-          </a:effectRef>
-          <a:fontRef idx="minor">
-            <a:schemeClr val="lt1"/>
-          </a:fontRef>
-        </p:style>
-        <p:txBody>
-          <a:bodyPr rtlCol="0" anchor="ctr"/>
-          <a:lstStyle/>
-          <a:p>
-            <a:pPr algn="ctr"/>
-          </a:p>
-        </p:txBody>
-      </p:sp>
-      <p:sp>
-        <p:nvSpPr>
-          <p:cNvPr id="76" name="TextBox 75"/>
-          <p:cNvSpPr txBox="1"/>
-          <p:nvPr/>
-        </p:nvSpPr>
-        <p:spPr>
-          <a:xfrm>
-            <a:off x="457200" y="7571231"/>
-            <a:ext cx="11155680" cy="219456"/>
-          </a:xfrm>
-          <a:prstGeom prst="rect">
-            <a:avLst/>
-          </a:prstGeom>
-          <a:noFill/>
-        </p:spPr>
-        <p:txBody>
-          <a:bodyPr wrap="square">
-            <a:spAutoFit/>
-          </a:bodyPr>
-          <a:lstStyle/>
-          <a:p>
-            <a:pPr algn="l"/>
-            <a:r>
-              <a:rPr sz="900" b="1" i="0">
-                <a:solidFill>
-                  <a:srgbClr val="FFFFFF"/>
-                </a:solidFill>
-              </a:rPr>
-              <a:t>ROOT-CAUSE FIX:  chunk without product-label prefix → wrong-product retrieval → score 0.4  ⟶  add [MSME LOAN] prefix → correct retrieval → score 1.0</a:t>
+          <p:cNvPr id="75" name="TextBox 74"/>
+          <p:cNvSpPr txBox="1"/>
+          <p:nvPr/>
+        </p:nvSpPr>
+        <p:spPr>
+          <a:xfrm>
+            <a:off x="320040" y="6537960"/>
+            <a:ext cx="11521440" cy="256032"/>
+          </a:xfrm>
+          <a:prstGeom prst="rect">
+            <a:avLst/>
+          </a:prstGeom>
+          <a:noFill/>
+        </p:spPr>
+        <p:txBody>
+          <a:bodyPr wrap="square">
+            <a:spAutoFit/>
+          </a:bodyPr>
+          <a:lstStyle/>
+          <a:p>
+            <a:pPr algn="l"/>
+            <a:r>
+              <a:rPr sz="750" b="0" i="1">
+                <a:solidFill>
+                  <a:srgbClr val="6B7C93"/>
+                </a:solidFill>
+              </a:rPr>
+              <a:t>Root-cause fix: chunk without product-label prefix → wrong-product retrieval → score 0.4  ⟶  add [MSME LOAN] prefix → score 1.0.  Run: python scripts/run_evaluation.py --suite all</a:t>
             </a:r>
           </a:p>
         </p:txBody>
@@ -16727,7 +18475,7 @@
         <p:spPr>
           <a:xfrm>
             <a:off x="320040" y="5888736"/>
-            <a:ext cx="5669280" cy="585216"/>
+            <a:ext cx="5669280" cy="420624"/>
           </a:xfrm>
           <a:prstGeom prst="rect">
             <a:avLst/>
@@ -16770,7 +18518,7 @@
         <p:spPr>
           <a:xfrm>
             <a:off x="457200" y="5916168"/>
-            <a:ext cx="1920240" cy="256032"/>
+            <a:ext cx="1920240" cy="182880"/>
           </a:xfrm>
           <a:prstGeom prst="rect">
             <a:avLst/>
@@ -16804,7 +18552,7 @@
         <p:spPr>
           <a:xfrm>
             <a:off x="2377440" y="5916168"/>
-            <a:ext cx="3566160" cy="512064"/>
+            <a:ext cx="3566160" cy="365760"/>
           </a:xfrm>
           <a:prstGeom prst="rect">
             <a:avLst/>
@@ -16838,7 +18586,7 @@
         <p:spPr>
           <a:xfrm>
             <a:off x="6126479" y="5888736"/>
-            <a:ext cx="5669280" cy="585216"/>
+            <a:ext cx="5669280" cy="420624"/>
           </a:xfrm>
           <a:prstGeom prst="rect">
             <a:avLst/>
@@ -16881,7 +18629,7 @@
         <p:spPr>
           <a:xfrm>
             <a:off x="6263640" y="5916168"/>
-            <a:ext cx="1920240" cy="256032"/>
+            <a:ext cx="1920240" cy="182880"/>
           </a:xfrm>
           <a:prstGeom prst="rect">
             <a:avLst/>
@@ -16915,7 +18663,7 @@
         <p:spPr>
           <a:xfrm>
             <a:off x="8183879" y="5916168"/>
-            <a:ext cx="3566160" cy="512064"/>
+            <a:ext cx="3566160" cy="365760"/>
           </a:xfrm>
           <a:prstGeom prst="rect">
             <a:avLst/>
@@ -16948,8 +18696,8 @@
         </p:nvSpPr>
         <p:spPr>
           <a:xfrm>
-            <a:off x="320040" y="6547103"/>
-            <a:ext cx="5669280" cy="585216"/>
+            <a:off x="320040" y="6345936"/>
+            <a:ext cx="5669280" cy="420624"/>
           </a:xfrm>
           <a:prstGeom prst="rect">
             <a:avLst/>
@@ -16991,8 +18739,8 @@
         </p:nvSpPr>
         <p:spPr>
           <a:xfrm>
-            <a:off x="457200" y="6574536"/>
-            <a:ext cx="1920240" cy="256032"/>
+            <a:off x="457200" y="6373368"/>
+            <a:ext cx="1920240" cy="182880"/>
           </a:xfrm>
           <a:prstGeom prst="rect">
             <a:avLst/>
@@ -17025,8 +18773,8 @@
         </p:nvSpPr>
         <p:spPr>
           <a:xfrm>
-            <a:off x="2377440" y="6574536"/>
-            <a:ext cx="3566160" cy="512064"/>
+            <a:off x="2377440" y="6373368"/>
+            <a:ext cx="3566160" cy="365760"/>
           </a:xfrm>
           <a:prstGeom prst="rect">
             <a:avLst/>
@@ -17059,8 +18807,8 @@
         </p:nvSpPr>
         <p:spPr>
           <a:xfrm>
-            <a:off x="6126479" y="6547103"/>
-            <a:ext cx="5669280" cy="585216"/>
+            <a:off x="6126479" y="6345936"/>
+            <a:ext cx="5669280" cy="420624"/>
           </a:xfrm>
           <a:prstGeom prst="rect">
             <a:avLst/>
@@ -17102,8 +18850,8 @@
         </p:nvSpPr>
         <p:spPr>
           <a:xfrm>
-            <a:off x="6263640" y="6574536"/>
-            <a:ext cx="1920240" cy="256032"/>
+            <a:off x="6263640" y="6373368"/>
+            <a:ext cx="1920240" cy="182880"/>
           </a:xfrm>
           <a:prstGeom prst="rect">
             <a:avLst/>
@@ -17136,8 +18884,8 @@
         </p:nvSpPr>
         <p:spPr>
           <a:xfrm>
-            <a:off x="8183879" y="6574536"/>
-            <a:ext cx="3566160" cy="512064"/>
+            <a:off x="8183879" y="6373368"/>
+            <a:ext cx="3566160" cy="365760"/>
           </a:xfrm>
           <a:prstGeom prst="rect">
             <a:avLst/>
@@ -31735,7 +33483,7 @@
         <p:spPr>
           <a:xfrm>
             <a:off x="320040" y="4791456"/>
-            <a:ext cx="5623560" cy="2487168"/>
+            <a:ext cx="5623560" cy="1664208"/>
           </a:xfrm>
           <a:prstGeom prst="rect">
             <a:avLst/>
@@ -31814,7 +33562,7 @@
         <p:spPr>
           <a:xfrm>
             <a:off x="429768" y="5120640"/>
-            <a:ext cx="5376672" cy="2029968"/>
+            <a:ext cx="5376672" cy="1188720"/>
           </a:xfrm>
           <a:prstGeom prst="rect">
             <a:avLst/>
@@ -31848,7 +33596,7 @@
         <p:spPr>
           <a:xfrm>
             <a:off x="6080760" y="4791456"/>
-            <a:ext cx="5623560" cy="2487168"/>
+            <a:ext cx="5623560" cy="1664208"/>
           </a:xfrm>
           <a:prstGeom prst="rect">
             <a:avLst/>
@@ -31927,7 +33675,7 @@
         <p:spPr>
           <a:xfrm>
             <a:off x="6190488" y="5120640"/>
-            <a:ext cx="5376672" cy="2029968"/>
+            <a:ext cx="5376672" cy="1188720"/>
           </a:xfrm>
           <a:prstGeom prst="rect">
             <a:avLst/>
@@ -34289,4 +36037,324 @@
   </a:objectDefaults>
   <a:extraClrSchemeLst/>
 </a:theme>
+</file>
+
+<file path=ppt/theme/theme2.xml><?xml version="1.0" encoding="utf-8"?>
+<a:theme xmlns:a="http://schemas.openxmlformats.org/drawingml/2006/main" name="Office Theme">
+  <a:themeElements>
+    <a:clrScheme name="Office">
+      <a:dk1>
+        <a:sysClr val="windowText" lastClr="000000"/>
+      </a:dk1>
+      <a:lt1>
+        <a:sysClr val="window" lastClr="FFFFFF"/>
+      </a:lt1>
+      <a:dk2>
+        <a:srgbClr val="1F497D"/>
+      </a:dk2>
+      <a:lt2>
+        <a:srgbClr val="EEECE1"/>
+      </a:lt2>
+      <a:accent1>
+        <a:srgbClr val="4F81BD"/>
+      </a:accent1>
+      <a:accent2>
+        <a:srgbClr val="C0504D"/>
+      </a:accent2>
+      <a:accent3>
+        <a:srgbClr val="9BBB59"/>
+      </a:accent3>
+      <a:accent4>
+        <a:srgbClr val="8064A2"/>
+      </a:accent4>
+      <a:accent5>
+        <a:srgbClr val="4BACC6"/>
+      </a:accent5>
+      <a:accent6>
+        <a:srgbClr val="F79646"/>
+      </a:accent6>
+      <a:hlink>
+        <a:srgbClr val="0000FF"/>
+      </a:hlink>
+      <a:folHlink>
+        <a:srgbClr val="800080"/>
+      </a:folHlink>
+    </a:clrScheme>
+    <a:fontScheme name="Office">
+      <a:majorFont>
+        <a:latin typeface="Calibri"/>
+        <a:ea typeface=""/>
+        <a:cs typeface=""/>
+        <a:font script="Jpan" typeface="ＭＳ Ｐゴシック"/>
+        <a:font script="Hang" typeface="맑은 고딕"/>
+        <a:font script="Hans" typeface="宋体"/>
+        <a:font script="Hant" typeface="新細明體"/>
+        <a:font script="Arab" typeface="Times New Roman"/>
+        <a:font script="Hebr" typeface="Times New Roman"/>
+        <a:font script="Thai" typeface="Angsana New"/>
+        <a:font script="Ethi" typeface="Nyala"/>
+        <a:font script="Beng" typeface="Vrinda"/>
+        <a:font script="Gujr" typeface="Shruti"/>
+        <a:font script="Khmr" typeface="MoolBoran"/>
+        <a:font script="Knda" typeface="Tunga"/>
+        <a:font script="Guru" typeface="Raavi"/>
+        <a:font script="Cans" typeface="Euphemia"/>
+        <a:font script="Cher" typeface="Plantagenet Cherokee"/>
+        <a:font script="Yiii" typeface="Microsoft Yi Baiti"/>
+        <a:font script="Tibt" typeface="Microsoft Himalaya"/>
+        <a:font script="Thaa" typeface="MV Boli"/>
+        <a:font script="Deva" typeface="Mangal"/>
+        <a:font script="Telu" typeface="Gautami"/>
+        <a:font script="Taml" typeface="Latha"/>
+        <a:font script="Syrc" typeface="Estrangelo Edessa"/>
+        <a:font script="Orya" typeface="Kalinga"/>
+        <a:font script="Mlym" typeface="Kartika"/>
+        <a:font script="Laoo" typeface="DokChampa"/>
+        <a:font script="Sinh" typeface="Iskoola Pota"/>
+        <a:font script="Mong" typeface="Mongolian Baiti"/>
+        <a:font script="Viet" typeface="Times New Roman"/>
+        <a:font script="Uigh" typeface="Microsoft Uighur"/>
+        <a:font script="Geor" typeface="Sylfaen"/>
+      </a:majorFont>
+      <a:minorFont>
+        <a:latin typeface="Calibri"/>
+        <a:ea typeface=""/>
+        <a:cs typeface=""/>
+        <a:font script="Jpan" typeface="ＭＳ Ｐゴシック"/>
+        <a:font script="Hang" typeface="맑은 고딕"/>
+        <a:font script="Hans" typeface="宋体"/>
+        <a:font script="Hant" typeface="新細明體"/>
+        <a:font script="Arab" typeface="Arial"/>
+        <a:font script="Hebr" typeface="Arial"/>
+        <a:font script="Thai" typeface="Cordia New"/>
+        <a:font script="Ethi" typeface="Nyala"/>
+        <a:font script="Beng" typeface="Vrinda"/>
+        <a:font script="Gujr" typeface="Shruti"/>
+        <a:font script="Khmr" typeface="DaunPenh"/>
+        <a:font script="Knda" typeface="Tunga"/>
+        <a:font script="Guru" typeface="Raavi"/>
+        <a:font script="Cans" typeface="Euphemia"/>
+        <a:font script="Cher" typeface="Plantagenet Cherokee"/>
+        <a:font script="Yiii" typeface="Microsoft Yi Baiti"/>
+        <a:font script="Tibt" typeface="Microsoft Himalaya"/>
+        <a:font script="Thaa" typeface="MV Boli"/>
+        <a:font script="Deva" typeface="Mangal"/>
+        <a:font script="Telu" typeface="Gautami"/>
+        <a:font script="Taml" typeface="Latha"/>
+        <a:font script="Syrc" typeface="Estrangelo Edessa"/>
+        <a:font script="Orya" typeface="Kalinga"/>
+        <a:font script="Mlym" typeface="Kartika"/>
+        <a:font script="Laoo" typeface="DokChampa"/>
+        <a:font script="Sinh" typeface="Iskoola Pota"/>
+        <a:font script="Mong" typeface="Mongolian Baiti"/>
+        <a:font script="Viet" typeface="Arial"/>
+        <a:font script="Uigh" typeface="Microsoft Uighur"/>
+        <a:font script="Geor" typeface="Sylfaen"/>
+      </a:minorFont>
+    </a:fontScheme>
+    <a:fmtScheme name="Office">
+      <a:fillStyleLst>
+        <a:solidFill>
+          <a:schemeClr val="phClr"/>
+        </a:solidFill>
+        <a:gradFill rotWithShape="1">
+          <a:gsLst>
+            <a:gs pos="0">
+              <a:schemeClr val="phClr">
+                <a:tint val="50000"/>
+                <a:satMod val="300000"/>
+              </a:schemeClr>
+            </a:gs>
+            <a:gs pos="35000">
+              <a:schemeClr val="phClr">
+                <a:tint val="37000"/>
+                <a:satMod val="300000"/>
+              </a:schemeClr>
+            </a:gs>
+            <a:gs pos="100000">
+              <a:schemeClr val="phClr">
+                <a:tint val="15000"/>
+                <a:satMod val="350000"/>
+              </a:schemeClr>
+            </a:gs>
+          </a:gsLst>
+          <a:lin ang="16200000" scaled="1"/>
+        </a:gradFill>
+        <a:gradFill rotWithShape="1">
+          <a:gsLst>
+            <a:gs pos="0">
+              <a:schemeClr val="phClr">
+                <a:tint val="100000"/>
+                <a:shade val="100000"/>
+                <a:satMod val="130000"/>
+              </a:schemeClr>
+            </a:gs>
+            <a:gs pos="100000">
+              <a:schemeClr val="phClr">
+                <a:tint val="50000"/>
+                <a:shade val="100000"/>
+                <a:satMod val="350000"/>
+              </a:schemeClr>
+            </a:gs>
+          </a:gsLst>
+          <a:lin ang="16200000" scaled="0"/>
+        </a:gradFill>
+      </a:fillStyleLst>
+      <a:lnStyleLst>
+        <a:ln w="9525" cap="flat" cmpd="sng" algn="ctr">
+          <a:solidFill>
+            <a:schemeClr val="phClr">
+              <a:shade val="95000"/>
+              <a:satMod val="105000"/>
+            </a:schemeClr>
+          </a:solidFill>
+          <a:prstDash val="solid"/>
+        </a:ln>
+        <a:ln w="25400" cap="flat" cmpd="sng" algn="ctr">
+          <a:solidFill>
+            <a:schemeClr val="phClr"/>
+          </a:solidFill>
+          <a:prstDash val="solid"/>
+        </a:ln>
+        <a:ln w="38100" cap="flat" cmpd="sng" algn="ctr">
+          <a:solidFill>
+            <a:schemeClr val="phClr"/>
+          </a:solidFill>
+          <a:prstDash val="solid"/>
+        </a:ln>
+      </a:lnStyleLst>
+      <a:effectStyleLst>
+        <a:effectStyle>
+          <a:effectLst>
+            <a:outerShdw blurRad="40000" dist="20000" dir="5400000" rotWithShape="0">
+              <a:srgbClr val="000000">
+                <a:alpha val="38000"/>
+              </a:srgbClr>
+            </a:outerShdw>
+          </a:effectLst>
+        </a:effectStyle>
+        <a:effectStyle>
+          <a:effectLst>
+            <a:outerShdw blurRad="40000" dist="23000" dir="5400000" rotWithShape="0">
+              <a:srgbClr val="000000">
+                <a:alpha val="35000"/>
+              </a:srgbClr>
+            </a:outerShdw>
+          </a:effectLst>
+        </a:effectStyle>
+        <a:effectStyle>
+          <a:effectLst>
+            <a:outerShdw blurRad="40000" dist="23000" dir="5400000" rotWithShape="0">
+              <a:srgbClr val="000000">
+                <a:alpha val="35000"/>
+              </a:srgbClr>
+            </a:outerShdw>
+          </a:effectLst>
+          <a:scene3d>
+            <a:camera prst="orthographicFront">
+              <a:rot lat="0" lon="0" rev="0"/>
+            </a:camera>
+            <a:lightRig rig="threePt" dir="t">
+              <a:rot lat="0" lon="0" rev="1200000"/>
+            </a:lightRig>
+          </a:scene3d>
+          <a:sp3d>
+            <a:bevelT w="63500" h="25400"/>
+          </a:sp3d>
+        </a:effectStyle>
+      </a:effectStyleLst>
+      <a:bgFillStyleLst>
+        <a:solidFill>
+          <a:schemeClr val="phClr"/>
+        </a:solidFill>
+        <a:gradFill rotWithShape="1">
+          <a:gsLst>
+            <a:gs pos="0">
+              <a:schemeClr val="phClr">
+                <a:tint val="40000"/>
+                <a:satMod val="350000"/>
+              </a:schemeClr>
+            </a:gs>
+            <a:gs pos="40000">
+              <a:schemeClr val="phClr">
+                <a:tint val="45000"/>
+                <a:shade val="99000"/>
+                <a:satMod val="350000"/>
+              </a:schemeClr>
+            </a:gs>
+            <a:gs pos="100000">
+              <a:schemeClr val="phClr">
+                <a:shade val="20000"/>
+                <a:satMod val="255000"/>
+              </a:schemeClr>
+            </a:gs>
+          </a:gsLst>
+          <a:path path="circle">
+            <a:fillToRect l="50000" t="-80000" r="50000" b="180000"/>
+          </a:path>
+        </a:gradFill>
+        <a:gradFill rotWithShape="1">
+          <a:gsLst>
+            <a:gs pos="0">
+              <a:schemeClr val="phClr">
+                <a:tint val="80000"/>
+                <a:satMod val="300000"/>
+              </a:schemeClr>
+            </a:gs>
+            <a:gs pos="100000">
+              <a:schemeClr val="phClr">
+                <a:shade val="30000"/>
+                <a:satMod val="200000"/>
+              </a:schemeClr>
+            </a:gs>
+          </a:gsLst>
+          <a:path path="circle">
+            <a:fillToRect l="50000" t="50000" r="50000" b="50000"/>
+          </a:path>
+        </a:gradFill>
+      </a:bgFillStyleLst>
+    </a:fmtScheme>
+  </a:themeElements>
+  <a:objectDefaults>
+    <a:spDef>
+      <a:spPr/>
+      <a:bodyPr/>
+      <a:lstStyle/>
+      <a:style>
+        <a:lnRef idx="1">
+          <a:schemeClr val="accent1"/>
+        </a:lnRef>
+        <a:fillRef idx="3">
+          <a:schemeClr val="accent1"/>
+        </a:fillRef>
+        <a:effectRef idx="2">
+          <a:schemeClr val="accent1"/>
+        </a:effectRef>
+        <a:fontRef idx="minor">
+          <a:schemeClr val="lt1"/>
+        </a:fontRef>
+      </a:style>
+    </a:spDef>
+    <a:lnDef>
+      <a:spPr/>
+      <a:bodyPr/>
+      <a:lstStyle/>
+      <a:style>
+        <a:lnRef idx="2">
+          <a:schemeClr val="accent1"/>
+        </a:lnRef>
+        <a:fillRef idx="0">
+          <a:schemeClr val="accent1"/>
+        </a:fillRef>
+        <a:effectRef idx="1">
+          <a:schemeClr val="accent1"/>
+        </a:effectRef>
+        <a:fontRef idx="minor">
+          <a:schemeClr val="tx1"/>
+        </a:fontRef>
+      </a:style>
+    </a:lnDef>
+  </a:objectDefaults>
+  <a:extraClrSchemeLst/>
+</a:theme>
 </file>
--- a/docs/capstone_presentation.pptx
+++ b/docs/capstone_presentation.pptx
@@ -29178,41 +29178,85 @@
       </p:sp>
       <p:sp>
         <p:nvSpPr>
-          <p:cNvPr id="67" name="TextBox 66"/>
+          <p:cNvPr id="67" name="Rectangle 66"/>
+          <p:cNvSpPr/>
+          <p:nvPr/>
+        </p:nvSpPr>
+        <p:spPr>
+          <a:xfrm>
+            <a:off x="320040" y="4315968"/>
+            <a:ext cx="804672" cy="475488"/>
+          </a:xfrm>
+          <a:prstGeom prst="rect">
+            <a:avLst/>
+          </a:prstGeom>
+          <a:solidFill>
+            <a:srgbClr val="0D2D5E"/>
+          </a:solidFill>
+          <a:ln>
+            <a:noFill/>
+          </a:ln>
+        </p:spPr>
+        <p:style>
+          <a:lnRef idx="1">
+            <a:schemeClr val="accent1"/>
+          </a:lnRef>
+          <a:fillRef idx="3">
+            <a:schemeClr val="accent1"/>
+          </a:fillRef>
+          <a:effectRef idx="2">
+            <a:schemeClr val="accent1"/>
+          </a:effectRef>
+          <a:fontRef idx="minor">
+            <a:schemeClr val="lt1"/>
+          </a:fontRef>
+        </p:style>
+        <p:txBody>
+          <a:bodyPr rtlCol="0" anchor="ctr"/>
+          <a:lstStyle/>
+          <a:p>
+            <a:pPr algn="ctr"/>
+          </a:p>
+        </p:txBody>
+      </p:sp>
+      <p:sp>
+        <p:nvSpPr>
+          <p:cNvPr id="68" name="TextBox 67"/>
           <p:cNvSpPr txBox="1"/>
           <p:nvPr/>
         </p:nvSpPr>
         <p:spPr>
           <a:xfrm>
             <a:off x="347472" y="4352544"/>
-            <a:ext cx="320040" cy="420624"/>
-          </a:xfrm>
-          <a:prstGeom prst="rect">
-            <a:avLst/>
-          </a:prstGeom>
-          <a:noFill/>
-        </p:spPr>
-        <p:txBody>
-          <a:bodyPr wrap="square">
-            <a:spAutoFit/>
-          </a:bodyPr>
-          <a:lstStyle/>
-          <a:p>
-            <a:pPr algn="l"/>
-            <a:r>
-              <a:rPr sz="600" b="1" i="0">
-                <a:solidFill>
-                  <a:srgbClr val="6B7C93"/>
-                </a:solidFill>
-              </a:rPr>
-              <a:t>RUBRIC DIMENSION</a:t>
-            </a:r>
-          </a:p>
-        </p:txBody>
-      </p:sp>
-      <p:sp>
-        <p:nvSpPr>
-          <p:cNvPr id="68" name="Rectangle 67"/>
+            <a:ext cx="749808" cy="402336"/>
+          </a:xfrm>
+          <a:prstGeom prst="rect">
+            <a:avLst/>
+          </a:prstGeom>
+          <a:noFill/>
+        </p:spPr>
+        <p:txBody>
+          <a:bodyPr wrap="square">
+            <a:spAutoFit/>
+          </a:bodyPr>
+          <a:lstStyle/>
+          <a:p>
+            <a:pPr algn="ctr"/>
+            <a:r>
+              <a:rPr sz="700" b="1" i="0">
+                <a:solidFill>
+                  <a:srgbClr val="FFFFFF"/>
+                </a:solidFill>
+              </a:rPr>
+              <a:t>RUBRIC
+DIMENSION</a:t>
+            </a:r>
+          </a:p>
+        </p:txBody>
+      </p:sp>
+      <p:sp>
+        <p:nvSpPr>
+          <p:cNvPr id="69" name="Rectangle 68"/>
           <p:cNvSpPr/>
           <p:nvPr/>
         </p:nvSpPr>
@@ -29255,41 +29299,85 @@
       </p:sp>
       <p:sp>
         <p:nvSpPr>
-          <p:cNvPr id="69" name="TextBox 68"/>
+          <p:cNvPr id="70" name="Rectangle 69"/>
+          <p:cNvSpPr/>
+          <p:nvPr/>
+        </p:nvSpPr>
+        <p:spPr>
+          <a:xfrm>
+            <a:off x="320040" y="4791456"/>
+            <a:ext cx="804672" cy="530352"/>
+          </a:xfrm>
+          <a:prstGeom prst="rect">
+            <a:avLst/>
+          </a:prstGeom>
+          <a:solidFill>
+            <a:srgbClr val="0D2D5E"/>
+          </a:solidFill>
+          <a:ln>
+            <a:noFill/>
+          </a:ln>
+        </p:spPr>
+        <p:style>
+          <a:lnRef idx="1">
+            <a:schemeClr val="accent1"/>
+          </a:lnRef>
+          <a:fillRef idx="3">
+            <a:schemeClr val="accent1"/>
+          </a:fillRef>
+          <a:effectRef idx="2">
+            <a:schemeClr val="accent1"/>
+          </a:effectRef>
+          <a:fontRef idx="minor">
+            <a:schemeClr val="lt1"/>
+          </a:fontRef>
+        </p:style>
+        <p:txBody>
+          <a:bodyPr rtlCol="0" anchor="ctr"/>
+          <a:lstStyle/>
+          <a:p>
+            <a:pPr algn="ctr"/>
+          </a:p>
+        </p:txBody>
+      </p:sp>
+      <p:sp>
+        <p:nvSpPr>
+          <p:cNvPr id="71" name="TextBox 70"/>
           <p:cNvSpPr txBox="1"/>
           <p:nvPr/>
         </p:nvSpPr>
         <p:spPr>
           <a:xfrm>
             <a:off x="347472" y="4828032"/>
-            <a:ext cx="320040" cy="475488"/>
-          </a:xfrm>
-          <a:prstGeom prst="rect">
-            <a:avLst/>
-          </a:prstGeom>
-          <a:noFill/>
-        </p:spPr>
-        <p:txBody>
-          <a:bodyPr wrap="square">
-            <a:spAutoFit/>
-          </a:bodyPr>
-          <a:lstStyle/>
-          <a:p>
-            <a:pPr algn="l"/>
-            <a:r>
-              <a:rPr sz="600" b="1" i="0">
-                <a:solidFill>
-                  <a:srgbClr val="6B7C93"/>
-                </a:solidFill>
-              </a:rPr>
-              <a:t>KEY METRIC / EVIDENCE</a:t>
-            </a:r>
-          </a:p>
-        </p:txBody>
-      </p:sp>
-      <p:sp>
-        <p:nvSpPr>
-          <p:cNvPr id="70" name="Rectangle 69"/>
+            <a:ext cx="749808" cy="457199"/>
+          </a:xfrm>
+          <a:prstGeom prst="rect">
+            <a:avLst/>
+          </a:prstGeom>
+          <a:noFill/>
+        </p:spPr>
+        <p:txBody>
+          <a:bodyPr wrap="square">
+            <a:spAutoFit/>
+          </a:bodyPr>
+          <a:lstStyle/>
+          <a:p>
+            <a:pPr algn="ctr"/>
+            <a:r>
+              <a:rPr sz="700" b="1" i="0">
+                <a:solidFill>
+                  <a:srgbClr val="FFFFFF"/>
+                </a:solidFill>
+              </a:rPr>
+              <a:t>KEY METRIC /
+EVIDENCE</a:t>
+            </a:r>
+          </a:p>
+        </p:txBody>
+      </p:sp>
+      <p:sp>
+        <p:nvSpPr>
+          <p:cNvPr id="72" name="Rectangle 71"/>
           <p:cNvSpPr/>
           <p:nvPr/>
         </p:nvSpPr>
@@ -29332,48 +29420,92 @@
       </p:sp>
       <p:sp>
         <p:nvSpPr>
-          <p:cNvPr id="71" name="TextBox 70"/>
+          <p:cNvPr id="73" name="Rectangle 72"/>
+          <p:cNvSpPr/>
+          <p:nvPr/>
+        </p:nvSpPr>
+        <p:spPr>
+          <a:xfrm>
+            <a:off x="320040" y="5321808"/>
+            <a:ext cx="804672" cy="475488"/>
+          </a:xfrm>
+          <a:prstGeom prst="rect">
+            <a:avLst/>
+          </a:prstGeom>
+          <a:solidFill>
+            <a:srgbClr val="0D2D5E"/>
+          </a:solidFill>
+          <a:ln>
+            <a:noFill/>
+          </a:ln>
+        </p:spPr>
+        <p:style>
+          <a:lnRef idx="1">
+            <a:schemeClr val="accent1"/>
+          </a:lnRef>
+          <a:fillRef idx="3">
+            <a:schemeClr val="accent1"/>
+          </a:fillRef>
+          <a:effectRef idx="2">
+            <a:schemeClr val="accent1"/>
+          </a:effectRef>
+          <a:fontRef idx="minor">
+            <a:schemeClr val="lt1"/>
+          </a:fontRef>
+        </p:style>
+        <p:txBody>
+          <a:bodyPr rtlCol="0" anchor="ctr"/>
+          <a:lstStyle/>
+          <a:p>
+            <a:pPr algn="ctr"/>
+          </a:p>
+        </p:txBody>
+      </p:sp>
+      <p:sp>
+        <p:nvSpPr>
+          <p:cNvPr id="74" name="TextBox 73"/>
           <p:cNvSpPr txBox="1"/>
           <p:nvPr/>
         </p:nvSpPr>
         <p:spPr>
           <a:xfrm>
             <a:off x="347472" y="5358384"/>
-            <a:ext cx="320040" cy="420624"/>
-          </a:xfrm>
-          <a:prstGeom prst="rect">
-            <a:avLst/>
-          </a:prstGeom>
-          <a:noFill/>
-        </p:spPr>
-        <p:txBody>
-          <a:bodyPr wrap="square">
-            <a:spAutoFit/>
-          </a:bodyPr>
-          <a:lstStyle/>
-          <a:p>
-            <a:pPr algn="l"/>
-            <a:r>
-              <a:rPr sz="600" b="1" i="0">
-                <a:solidFill>
-                  <a:srgbClr val="6B7C93"/>
-                </a:solidFill>
-              </a:rPr>
-              <a:t>KEY ARTIFACT</a:t>
-            </a:r>
-          </a:p>
-        </p:txBody>
-      </p:sp>
-      <p:sp>
-        <p:nvSpPr>
-          <p:cNvPr id="72" name="TextBox 71"/>
-          <p:cNvSpPr txBox="1"/>
-          <p:nvPr/>
-        </p:nvSpPr>
-        <p:spPr>
-          <a:xfrm>
-            <a:off x="356615" y="4352544"/>
-            <a:ext cx="1388745" cy="420624"/>
+            <a:ext cx="749808" cy="402336"/>
+          </a:xfrm>
+          <a:prstGeom prst="rect">
+            <a:avLst/>
+          </a:prstGeom>
+          <a:noFill/>
+        </p:spPr>
+        <p:txBody>
+          <a:bodyPr wrap="square">
+            <a:spAutoFit/>
+          </a:bodyPr>
+          <a:lstStyle/>
+          <a:p>
+            <a:pPr algn="ctr"/>
+            <a:r>
+              <a:rPr sz="700" b="1" i="0">
+                <a:solidFill>
+                  <a:srgbClr val="FFFFFF"/>
+                </a:solidFill>
+              </a:rPr>
+              <a:t>KEY
+ARTIFACT</a:t>
+            </a:r>
+          </a:p>
+        </p:txBody>
+      </p:sp>
+      <p:sp>
+        <p:nvSpPr>
+          <p:cNvPr id="75" name="TextBox 74"/>
+          <p:cNvSpPr txBox="1"/>
+          <p:nvPr/>
+        </p:nvSpPr>
+        <p:spPr>
+          <a:xfrm>
+            <a:off x="1161288" y="4352544"/>
+            <a:ext cx="1288161" cy="420624"/>
           </a:xfrm>
           <a:prstGeom prst="rect">
             <a:avLst/>
@@ -29401,14 +29533,14 @@
       </p:sp>
       <p:sp>
         <p:nvSpPr>
-          <p:cNvPr id="73" name="TextBox 72"/>
-          <p:cNvSpPr txBox="1"/>
-          <p:nvPr/>
-        </p:nvSpPr>
-        <p:spPr>
-          <a:xfrm>
-            <a:off x="356615" y="4828032"/>
-            <a:ext cx="1388745" cy="475488"/>
+          <p:cNvPr id="76" name="TextBox 75"/>
+          <p:cNvSpPr txBox="1"/>
+          <p:nvPr/>
+        </p:nvSpPr>
+        <p:spPr>
+          <a:xfrm>
+            <a:off x="1161288" y="4828032"/>
+            <a:ext cx="1288161" cy="475488"/>
           </a:xfrm>
           <a:prstGeom prst="rect">
             <a:avLst/>
@@ -29436,14 +29568,14 @@
       </p:sp>
       <p:sp>
         <p:nvSpPr>
-          <p:cNvPr id="74" name="TextBox 73"/>
-          <p:cNvSpPr txBox="1"/>
-          <p:nvPr/>
-        </p:nvSpPr>
-        <p:spPr>
-          <a:xfrm>
-            <a:off x="356615" y="5358384"/>
-            <a:ext cx="1388745" cy="420624"/>
+          <p:cNvPr id="77" name="TextBox 76"/>
+          <p:cNvSpPr txBox="1"/>
+          <p:nvPr/>
+        </p:nvSpPr>
+        <p:spPr>
+          <a:xfrm>
+            <a:off x="1161288" y="5358384"/>
+            <a:ext cx="1288161" cy="420624"/>
           </a:xfrm>
           <a:prstGeom prst="rect">
             <a:avLst/>
@@ -29471,14 +29603,14 @@
       </p:sp>
       <p:sp>
         <p:nvSpPr>
-          <p:cNvPr id="75" name="TextBox 74"/>
-          <p:cNvSpPr txBox="1"/>
-          <p:nvPr/>
-        </p:nvSpPr>
-        <p:spPr>
-          <a:xfrm>
-            <a:off x="1800225" y="4352544"/>
-            <a:ext cx="1388745" cy="420624"/>
+          <p:cNvPr id="78" name="TextBox 77"/>
+          <p:cNvSpPr txBox="1"/>
+          <p:nvPr/>
+        </p:nvSpPr>
+        <p:spPr>
+          <a:xfrm>
+            <a:off x="2504313" y="4352544"/>
+            <a:ext cx="1288161" cy="420624"/>
           </a:xfrm>
           <a:prstGeom prst="rect">
             <a:avLst/>
@@ -29506,14 +29638,14 @@
       </p:sp>
       <p:sp>
         <p:nvSpPr>
-          <p:cNvPr id="76" name="TextBox 75"/>
-          <p:cNvSpPr txBox="1"/>
-          <p:nvPr/>
-        </p:nvSpPr>
-        <p:spPr>
-          <a:xfrm>
-            <a:off x="1800225" y="4828032"/>
-            <a:ext cx="1388745" cy="475488"/>
+          <p:cNvPr id="79" name="TextBox 78"/>
+          <p:cNvSpPr txBox="1"/>
+          <p:nvPr/>
+        </p:nvSpPr>
+        <p:spPr>
+          <a:xfrm>
+            <a:off x="2504313" y="4828032"/>
+            <a:ext cx="1288161" cy="475488"/>
           </a:xfrm>
           <a:prstGeom prst="rect">
             <a:avLst/>
@@ -29541,14 +29673,14 @@
       </p:sp>
       <p:sp>
         <p:nvSpPr>
-          <p:cNvPr id="77" name="TextBox 76"/>
-          <p:cNvSpPr txBox="1"/>
-          <p:nvPr/>
-        </p:nvSpPr>
-        <p:spPr>
-          <a:xfrm>
-            <a:off x="1800225" y="5358384"/>
-            <a:ext cx="1388745" cy="420624"/>
+          <p:cNvPr id="80" name="TextBox 79"/>
+          <p:cNvSpPr txBox="1"/>
+          <p:nvPr/>
+        </p:nvSpPr>
+        <p:spPr>
+          <a:xfrm>
+            <a:off x="2504313" y="5358384"/>
+            <a:ext cx="1288161" cy="420624"/>
           </a:xfrm>
           <a:prstGeom prst="rect">
             <a:avLst/>
@@ -29576,14 +29708,14 @@
       </p:sp>
       <p:sp>
         <p:nvSpPr>
-          <p:cNvPr id="78" name="TextBox 77"/>
-          <p:cNvSpPr txBox="1"/>
-          <p:nvPr/>
-        </p:nvSpPr>
-        <p:spPr>
-          <a:xfrm>
-            <a:off x="3243834" y="4352544"/>
-            <a:ext cx="1388745" cy="420624"/>
+          <p:cNvPr id="81" name="TextBox 80"/>
+          <p:cNvSpPr txBox="1"/>
+          <p:nvPr/>
+        </p:nvSpPr>
+        <p:spPr>
+          <a:xfrm>
+            <a:off x="3847338" y="4352544"/>
+            <a:ext cx="1288161" cy="420624"/>
           </a:xfrm>
           <a:prstGeom prst="rect">
             <a:avLst/>
@@ -29611,14 +29743,14 @@
       </p:sp>
       <p:sp>
         <p:nvSpPr>
-          <p:cNvPr id="79" name="TextBox 78"/>
-          <p:cNvSpPr txBox="1"/>
-          <p:nvPr/>
-        </p:nvSpPr>
-        <p:spPr>
-          <a:xfrm>
-            <a:off x="3243834" y="4828032"/>
-            <a:ext cx="1388745" cy="475488"/>
+          <p:cNvPr id="82" name="TextBox 81"/>
+          <p:cNvSpPr txBox="1"/>
+          <p:nvPr/>
+        </p:nvSpPr>
+        <p:spPr>
+          <a:xfrm>
+            <a:off x="3847338" y="4828032"/>
+            <a:ext cx="1288161" cy="475488"/>
           </a:xfrm>
           <a:prstGeom prst="rect">
             <a:avLst/>
@@ -29646,14 +29778,14 @@
       </p:sp>
       <p:sp>
         <p:nvSpPr>
-          <p:cNvPr id="80" name="TextBox 79"/>
-          <p:cNvSpPr txBox="1"/>
-          <p:nvPr/>
-        </p:nvSpPr>
-        <p:spPr>
-          <a:xfrm>
-            <a:off x="3243834" y="5358384"/>
-            <a:ext cx="1388745" cy="420624"/>
+          <p:cNvPr id="83" name="TextBox 82"/>
+          <p:cNvSpPr txBox="1"/>
+          <p:nvPr/>
+        </p:nvSpPr>
+        <p:spPr>
+          <a:xfrm>
+            <a:off x="3847338" y="5358384"/>
+            <a:ext cx="1288161" cy="420624"/>
           </a:xfrm>
           <a:prstGeom prst="rect">
             <a:avLst/>
@@ -29681,14 +29813,14 @@
       </p:sp>
       <p:sp>
         <p:nvSpPr>
-          <p:cNvPr id="81" name="TextBox 80"/>
-          <p:cNvSpPr txBox="1"/>
-          <p:nvPr/>
-        </p:nvSpPr>
-        <p:spPr>
-          <a:xfrm>
-            <a:off x="4687443" y="4352544"/>
-            <a:ext cx="1388745" cy="420624"/>
+          <p:cNvPr id="84" name="TextBox 83"/>
+          <p:cNvSpPr txBox="1"/>
+          <p:nvPr/>
+        </p:nvSpPr>
+        <p:spPr>
+          <a:xfrm>
+            <a:off x="5190363" y="4352544"/>
+            <a:ext cx="1288161" cy="420624"/>
           </a:xfrm>
           <a:prstGeom prst="rect">
             <a:avLst/>
@@ -29716,14 +29848,14 @@
       </p:sp>
       <p:sp>
         <p:nvSpPr>
-          <p:cNvPr id="82" name="TextBox 81"/>
-          <p:cNvSpPr txBox="1"/>
-          <p:nvPr/>
-        </p:nvSpPr>
-        <p:spPr>
-          <a:xfrm>
-            <a:off x="4687443" y="4828032"/>
-            <a:ext cx="1388745" cy="475488"/>
+          <p:cNvPr id="85" name="TextBox 84"/>
+          <p:cNvSpPr txBox="1"/>
+          <p:nvPr/>
+        </p:nvSpPr>
+        <p:spPr>
+          <a:xfrm>
+            <a:off x="5190363" y="4828032"/>
+            <a:ext cx="1288161" cy="475488"/>
           </a:xfrm>
           <a:prstGeom prst="rect">
             <a:avLst/>
@@ -29751,14 +29883,14 @@
       </p:sp>
       <p:sp>
         <p:nvSpPr>
-          <p:cNvPr id="83" name="TextBox 82"/>
-          <p:cNvSpPr txBox="1"/>
-          <p:nvPr/>
-        </p:nvSpPr>
-        <p:spPr>
-          <a:xfrm>
-            <a:off x="4687443" y="5358384"/>
-            <a:ext cx="1388745" cy="420624"/>
+          <p:cNvPr id="86" name="TextBox 85"/>
+          <p:cNvSpPr txBox="1"/>
+          <p:nvPr/>
+        </p:nvSpPr>
+        <p:spPr>
+          <a:xfrm>
+            <a:off x="5190363" y="5358384"/>
+            <a:ext cx="1288161" cy="420624"/>
           </a:xfrm>
           <a:prstGeom prst="rect">
             <a:avLst/>
@@ -29786,14 +29918,14 @@
       </p:sp>
       <p:sp>
         <p:nvSpPr>
-          <p:cNvPr id="84" name="TextBox 83"/>
-          <p:cNvSpPr txBox="1"/>
-          <p:nvPr/>
-        </p:nvSpPr>
-        <p:spPr>
-          <a:xfrm>
-            <a:off x="6131052" y="4352544"/>
-            <a:ext cx="1388745" cy="420624"/>
+          <p:cNvPr id="87" name="TextBox 86"/>
+          <p:cNvSpPr txBox="1"/>
+          <p:nvPr/>
+        </p:nvSpPr>
+        <p:spPr>
+          <a:xfrm>
+            <a:off x="6533388" y="4352544"/>
+            <a:ext cx="1288161" cy="420624"/>
           </a:xfrm>
           <a:prstGeom prst="rect">
             <a:avLst/>
@@ -29821,14 +29953,14 @@
       </p:sp>
       <p:sp>
         <p:nvSpPr>
-          <p:cNvPr id="85" name="TextBox 84"/>
-          <p:cNvSpPr txBox="1"/>
-          <p:nvPr/>
-        </p:nvSpPr>
-        <p:spPr>
-          <a:xfrm>
-            <a:off x="6131052" y="4828032"/>
-            <a:ext cx="1388745" cy="475488"/>
+          <p:cNvPr id="88" name="TextBox 87"/>
+          <p:cNvSpPr txBox="1"/>
+          <p:nvPr/>
+        </p:nvSpPr>
+        <p:spPr>
+          <a:xfrm>
+            <a:off x="6533388" y="4828032"/>
+            <a:ext cx="1288161" cy="475488"/>
           </a:xfrm>
           <a:prstGeom prst="rect">
             <a:avLst/>
@@ -29856,14 +29988,14 @@
       </p:sp>
       <p:sp>
         <p:nvSpPr>
-          <p:cNvPr id="86" name="TextBox 85"/>
-          <p:cNvSpPr txBox="1"/>
-          <p:nvPr/>
-        </p:nvSpPr>
-        <p:spPr>
-          <a:xfrm>
-            <a:off x="6131052" y="5358384"/>
-            <a:ext cx="1388745" cy="420624"/>
+          <p:cNvPr id="89" name="TextBox 88"/>
+          <p:cNvSpPr txBox="1"/>
+          <p:nvPr/>
+        </p:nvSpPr>
+        <p:spPr>
+          <a:xfrm>
+            <a:off x="6533388" y="5358384"/>
+            <a:ext cx="1288161" cy="420624"/>
           </a:xfrm>
           <a:prstGeom prst="rect">
             <a:avLst/>
@@ -29891,14 +30023,14 @@
       </p:sp>
       <p:sp>
         <p:nvSpPr>
-          <p:cNvPr id="87" name="TextBox 86"/>
-          <p:cNvSpPr txBox="1"/>
-          <p:nvPr/>
-        </p:nvSpPr>
-        <p:spPr>
-          <a:xfrm>
-            <a:off x="7574661" y="4352544"/>
-            <a:ext cx="1388745" cy="420624"/>
+          <p:cNvPr id="90" name="TextBox 89"/>
+          <p:cNvSpPr txBox="1"/>
+          <p:nvPr/>
+        </p:nvSpPr>
+        <p:spPr>
+          <a:xfrm>
+            <a:off x="7876413" y="4352544"/>
+            <a:ext cx="1288161" cy="420624"/>
           </a:xfrm>
           <a:prstGeom prst="rect">
             <a:avLst/>
@@ -29926,14 +30058,14 @@
       </p:sp>
       <p:sp>
         <p:nvSpPr>
-          <p:cNvPr id="88" name="TextBox 87"/>
-          <p:cNvSpPr txBox="1"/>
-          <p:nvPr/>
-        </p:nvSpPr>
-        <p:spPr>
-          <a:xfrm>
-            <a:off x="7574661" y="4828032"/>
-            <a:ext cx="1388745" cy="475488"/>
+          <p:cNvPr id="91" name="TextBox 90"/>
+          <p:cNvSpPr txBox="1"/>
+          <p:nvPr/>
+        </p:nvSpPr>
+        <p:spPr>
+          <a:xfrm>
+            <a:off x="7876413" y="4828032"/>
+            <a:ext cx="1288161" cy="475488"/>
           </a:xfrm>
           <a:prstGeom prst="rect">
             <a:avLst/>
@@ -29961,14 +30093,14 @@
       </p:sp>
       <p:sp>
         <p:nvSpPr>
-          <p:cNvPr id="89" name="TextBox 88"/>
-          <p:cNvSpPr txBox="1"/>
-          <p:nvPr/>
-        </p:nvSpPr>
-        <p:spPr>
-          <a:xfrm>
-            <a:off x="7574661" y="5358384"/>
-            <a:ext cx="1388745" cy="420624"/>
+          <p:cNvPr id="92" name="TextBox 91"/>
+          <p:cNvSpPr txBox="1"/>
+          <p:nvPr/>
+        </p:nvSpPr>
+        <p:spPr>
+          <a:xfrm>
+            <a:off x="7876413" y="5358384"/>
+            <a:ext cx="1288161" cy="420624"/>
           </a:xfrm>
           <a:prstGeom prst="rect">
             <a:avLst/>
@@ -29996,14 +30128,14 @@
       </p:sp>
       <p:sp>
         <p:nvSpPr>
-          <p:cNvPr id="90" name="TextBox 89"/>
-          <p:cNvSpPr txBox="1"/>
-          <p:nvPr/>
-        </p:nvSpPr>
-        <p:spPr>
-          <a:xfrm>
-            <a:off x="9018269" y="4352544"/>
-            <a:ext cx="1388745" cy="420624"/>
+          <p:cNvPr id="93" name="TextBox 92"/>
+          <p:cNvSpPr txBox="1"/>
+          <p:nvPr/>
+        </p:nvSpPr>
+        <p:spPr>
+          <a:xfrm>
+            <a:off x="9219438" y="4352544"/>
+            <a:ext cx="1288161" cy="420624"/>
           </a:xfrm>
           <a:prstGeom prst="rect">
             <a:avLst/>
@@ -30031,14 +30163,14 @@
       </p:sp>
       <p:sp>
         <p:nvSpPr>
-          <p:cNvPr id="91" name="TextBox 90"/>
-          <p:cNvSpPr txBox="1"/>
-          <p:nvPr/>
-        </p:nvSpPr>
-        <p:spPr>
-          <a:xfrm>
-            <a:off x="9018269" y="4828032"/>
-            <a:ext cx="1388745" cy="475488"/>
+          <p:cNvPr id="94" name="TextBox 93"/>
+          <p:cNvSpPr txBox="1"/>
+          <p:nvPr/>
+        </p:nvSpPr>
+        <p:spPr>
+          <a:xfrm>
+            <a:off x="9219438" y="4828032"/>
+            <a:ext cx="1288161" cy="475488"/>
           </a:xfrm>
           <a:prstGeom prst="rect">
             <a:avLst/>
@@ -30066,14 +30198,14 @@
       </p:sp>
       <p:sp>
         <p:nvSpPr>
-          <p:cNvPr id="92" name="TextBox 91"/>
-          <p:cNvSpPr txBox="1"/>
-          <p:nvPr/>
-        </p:nvSpPr>
-        <p:spPr>
-          <a:xfrm>
-            <a:off x="9018269" y="5358384"/>
-            <a:ext cx="1388745" cy="420624"/>
+          <p:cNvPr id="95" name="TextBox 94"/>
+          <p:cNvSpPr txBox="1"/>
+          <p:nvPr/>
+        </p:nvSpPr>
+        <p:spPr>
+          <a:xfrm>
+            <a:off x="9219438" y="5358384"/>
+            <a:ext cx="1288161" cy="420624"/>
           </a:xfrm>
           <a:prstGeom prst="rect">
             <a:avLst/>
@@ -30101,14 +30233,14 @@
       </p:sp>
       <p:sp>
         <p:nvSpPr>
-          <p:cNvPr id="93" name="TextBox 92"/>
-          <p:cNvSpPr txBox="1"/>
-          <p:nvPr/>
-        </p:nvSpPr>
-        <p:spPr>
-          <a:xfrm>
-            <a:off x="10461879" y="4352544"/>
-            <a:ext cx="1388745" cy="420624"/>
+          <p:cNvPr id="96" name="TextBox 95"/>
+          <p:cNvSpPr txBox="1"/>
+          <p:nvPr/>
+        </p:nvSpPr>
+        <p:spPr>
+          <a:xfrm>
+            <a:off x="10562463" y="4352544"/>
+            <a:ext cx="1288161" cy="420624"/>
           </a:xfrm>
           <a:prstGeom prst="rect">
             <a:avLst/>
@@ -30136,14 +30268,14 @@
       </p:sp>
       <p:sp>
         <p:nvSpPr>
-          <p:cNvPr id="94" name="TextBox 93"/>
-          <p:cNvSpPr txBox="1"/>
-          <p:nvPr/>
-        </p:nvSpPr>
-        <p:spPr>
-          <a:xfrm>
-            <a:off x="10461879" y="4828032"/>
-            <a:ext cx="1388745" cy="475488"/>
+          <p:cNvPr id="97" name="TextBox 96"/>
+          <p:cNvSpPr txBox="1"/>
+          <p:nvPr/>
+        </p:nvSpPr>
+        <p:spPr>
+          <a:xfrm>
+            <a:off x="10562463" y="4828032"/>
+            <a:ext cx="1288161" cy="475488"/>
           </a:xfrm>
           <a:prstGeom prst="rect">
             <a:avLst/>
@@ -30171,14 +30303,14 @@
       </p:sp>
       <p:sp>
         <p:nvSpPr>
-          <p:cNvPr id="95" name="TextBox 94"/>
-          <p:cNvSpPr txBox="1"/>
-          <p:nvPr/>
-        </p:nvSpPr>
-        <p:spPr>
-          <a:xfrm>
-            <a:off x="10461879" y="5358384"/>
-            <a:ext cx="1388745" cy="420624"/>
+          <p:cNvPr id="98" name="TextBox 97"/>
+          <p:cNvSpPr txBox="1"/>
+          <p:nvPr/>
+        </p:nvSpPr>
+        <p:spPr>
+          <a:xfrm>
+            <a:off x="10562463" y="5358384"/>
+            <a:ext cx="1288161" cy="420624"/>
           </a:xfrm>
           <a:prstGeom prst="rect">
             <a:avLst/>
@@ -30206,7 +30338,7 @@
       </p:sp>
       <p:sp>
         <p:nvSpPr>
-          <p:cNvPr id="96" name="TextBox 95"/>
+          <p:cNvPr id="99" name="TextBox 98"/>
           <p:cNvSpPr txBox="1"/>
           <p:nvPr/>
         </p:nvSpPr>

--- a/docs/capstone_presentation.pptx
+++ b/docs/capstone_presentation.pptx
@@ -31930,7 +31930,7 @@
                   <a:srgbClr val="0D2D5E"/>
                 </a:solidFill>
               </a:rPr>
-              <a:t>lookup_loan_status</a:t>
+              <a:t>query_loan_policy</a:t>
             </a:r>
           </a:p>
         </p:txBody>
@@ -33521,7 +33521,7 @@
                 </a:solidFill>
               </a:rPr>
               <a:t>RAG_TOP_K = 5
-lookup_loan_status
+query_loan_policy
 tool calls this
 MMR diversity
 re-ranking</a:t>

--- a/docs/capstone_presentation.pptx
+++ b/docs/capstone_presentation.pptx
@@ -532,7 +532,7 @@
           </a:p>
           <a:p>
             <a:r>
-              <a:t>Built in 10 days across 8 phases; 233 tests passing. Let me walk you through the architecture and key decisions.</a:t>
+              <a:t>Built in 10 days across 8 phases; 244 tests passing. Let me walk you through the architecture and key decisions.</a:t>
             </a:r>
           </a:p>
         </p:txBody>
@@ -982,7 +982,7 @@
           </a:p>
           <a:p>
             <a:r>
-              <a:t>233 automated tests provide regression coverage; scripts/run_evaluation.py --suite all runs all 3 evaluation suites.</a:t>
+              <a:t>244 automated tests provide regression coverage; scripts/run_evaluation.py --suite all runs all 3 evaluation suites.</a:t>
             </a:r>
           </a:p>
         </p:txBody>
@@ -1437,12 +1437,17 @@
           </a:p>
           <a:p>
             <a:r>
-              <a:t>Layer ④ shows the 5 @tool functions; Layer ⑤ shows the full RAG ingestion pipeline ending in ChromaDB.</a:t>
-            </a:r>
-          </a:p>
-          <a:p>
-            <a:r>
-              <a:t>Langfuse (right panel) is self-hosted — all traces stay on-premise, satisfying Indian data-protection requirements.</a:t>
+              <a:t>Layer ④ shows the 5 @tool functions; the purple MCP strip notes that all 5 are simultaneously exposed via FastMCP for external clients.</a:t>
+            </a:r>
+          </a:p>
+          <a:p>
+            <a:r>
+              <a:t>MCP (Model Context Protocol) makes the tools discoverable by Claude Desktop, Claude Code, and any external bank system — no code changes to the agent needed.</a:t>
+            </a:r>
+          </a:p>
+          <a:p>
+            <a:r>
+              <a:t>Layer ⑤ shows the full RAG ingestion pipeline ending in ChromaDB. Langfuse (right panel) self-hosted — all traces on-premise.</a:t>
             </a:r>
           </a:p>
         </p:txBody>
@@ -1527,6 +1532,11 @@
           </a:p>
           <a:p>
             <a:r>
+              <a:t>MCP (FastMCP): additive exposure layer — all 5 tools discoverable via Model Context Protocol without changing the LangChain agent path.</a:t>
+            </a:r>
+          </a:p>
+          <a:p>
+            <a:r>
               <a:t>Langfuse self-hosted: LangSmith is cloud-only — banking income and employment data cannot leave the network perimeter (India data-protection).</a:t>
             </a:r>
           </a:p>
@@ -1617,7 +1627,7 @@
           </a:p>
           <a:p>
             <a:r>
-              <a:t>All 8 phases are complete — verified by 233 passing tests and 8 Jupyter demo notebooks.</a:t>
+              <a:t>All 8 phases are complete — verified by 244 passing tests and 8 Jupyter demo notebooks.</a:t>
             </a:r>
           </a:p>
           <a:p>
@@ -1708,6 +1718,11 @@
           <a:p>
             <a:r>
               <a:t>generate_escalation_summary is triggered automatically when loan_amount exceeds the product ceiling — validates mobile (10-digit) and email.</a:t>
+            </a:r>
+          </a:p>
+          <a:p>
+            <a:r>
+              <a:t>MCP strip (purple, below tools): all 5 tools are simultaneously exposed via FastMCP — Claude Desktop, Claude Code, and external bank systems can call them without Python imports.</a:t>
             </a:r>
           </a:p>
           <a:p>
@@ -5697,7 +5712,7 @@
                   <a:srgbClr val="D4AF37"/>
                 </a:solidFill>
               </a:rPr>
-              <a:t>233</a:t>
+              <a:t>244</a:t>
             </a:r>
           </a:p>
         </p:txBody>
@@ -13879,7 +13894,7 @@
                   <a:srgbClr val="D4AF37"/>
                 </a:solidFill>
               </a:rPr>
-              <a:t>233</a:t>
+              <a:t>244</a:t>
             </a:r>
           </a:p>
         </p:txBody>
@@ -19786,7 +19801,7 @@
                   <a:srgbClr val="6B7C93"/>
                 </a:solidFill>
               </a:rPr>
-              <a:t>github.com/manojbansal-projects/IITM-LoanCopilot  ·  233 tests passing  ·  8 Jupyter notebooks</a:t>
+              <a:t>github.com/manojbansal-projects/IITM-LoanCopilot  ·  244 tests passing  ·  8 Jupyter notebooks</a:t>
             </a:r>
           </a:p>
         </p:txBody>
@@ -24391,7 +24406,7 @@
         <p:spPr>
           <a:xfrm>
             <a:off x="1536192" y="4521708"/>
-            <a:ext cx="1475841" cy="859536"/>
+            <a:ext cx="1475841" cy="813816"/>
           </a:xfrm>
           <a:prstGeom prst="rect">
             <a:avLst/>
@@ -24435,8 +24450,8 @@
         </p:nvSpPr>
         <p:spPr>
           <a:xfrm>
-            <a:off x="1572768" y="4594860"/>
-            <a:ext cx="1402689" cy="731520"/>
+            <a:off x="1572768" y="4576572"/>
+            <a:ext cx="1402689" cy="713232"/>
           </a:xfrm>
           <a:prstGeom prst="rect">
             <a:avLst/>
@@ -24471,7 +24486,7 @@
         <p:spPr>
           <a:xfrm>
             <a:off x="3048609" y="4521708"/>
-            <a:ext cx="1475841" cy="859536"/>
+            <a:ext cx="1475841" cy="813816"/>
           </a:xfrm>
           <a:prstGeom prst="rect">
             <a:avLst/>
@@ -24515,8 +24530,8 @@
         </p:nvSpPr>
         <p:spPr>
           <a:xfrm>
-            <a:off x="3085185" y="4594860"/>
-            <a:ext cx="1402689" cy="731520"/>
+            <a:off x="3085185" y="4576572"/>
+            <a:ext cx="1402689" cy="713232"/>
           </a:xfrm>
           <a:prstGeom prst="rect">
             <a:avLst/>
@@ -24551,7 +24566,7 @@
         <p:spPr>
           <a:xfrm>
             <a:off x="4561027" y="4521708"/>
-            <a:ext cx="1475841" cy="859536"/>
+            <a:ext cx="1475841" cy="813816"/>
           </a:xfrm>
           <a:prstGeom prst="rect">
             <a:avLst/>
@@ -24595,8 +24610,8 @@
         </p:nvSpPr>
         <p:spPr>
           <a:xfrm>
-            <a:off x="4597603" y="4594860"/>
-            <a:ext cx="1402689" cy="731520"/>
+            <a:off x="4597603" y="4576572"/>
+            <a:ext cx="1402689" cy="713232"/>
           </a:xfrm>
           <a:prstGeom prst="rect">
             <a:avLst/>
@@ -24631,7 +24646,7 @@
         <p:spPr>
           <a:xfrm>
             <a:off x="6073444" y="4521708"/>
-            <a:ext cx="1475841" cy="859536"/>
+            <a:ext cx="1475841" cy="813816"/>
           </a:xfrm>
           <a:prstGeom prst="rect">
             <a:avLst/>
@@ -24675,8 +24690,8 @@
         </p:nvSpPr>
         <p:spPr>
           <a:xfrm>
-            <a:off x="6110020" y="4594860"/>
-            <a:ext cx="1402689" cy="731520"/>
+            <a:off x="6110020" y="4576572"/>
+            <a:ext cx="1402689" cy="713232"/>
           </a:xfrm>
           <a:prstGeom prst="rect">
             <a:avLst/>
@@ -24696,8 +24711,8 @@
                   <a:srgbClr val="0D2D5E"/>
                 </a:solidFill>
               </a:rPr>
-              <a:t>lookup_
-loan_status</a:t>
+              <a:t>query_loan
+_policy</a:t>
             </a:r>
           </a:p>
         </p:txBody>
@@ -24711,7 +24726,7 @@
         <p:spPr>
           <a:xfrm>
             <a:off x="7585862" y="4521708"/>
-            <a:ext cx="1475841" cy="859536"/>
+            <a:ext cx="1475841" cy="813816"/>
           </a:xfrm>
           <a:prstGeom prst="rect">
             <a:avLst/>
@@ -24755,8 +24770,8 @@
         </p:nvSpPr>
         <p:spPr>
           <a:xfrm>
-            <a:off x="7622438" y="4594860"/>
-            <a:ext cx="1402689" cy="731520"/>
+            <a:off x="7622438" y="4576572"/>
+            <a:ext cx="1402689" cy="713232"/>
           </a:xfrm>
           <a:prstGeom prst="rect">
             <a:avLst/>
@@ -24785,6 +24800,83 @@
       <p:sp>
         <p:nvSpPr>
           <p:cNvPr id="54" name="Rectangle 53"/>
+          <p:cNvSpPr/>
+          <p:nvPr/>
+        </p:nvSpPr>
+        <p:spPr>
+          <a:xfrm>
+            <a:off x="1536192" y="5326380"/>
+            <a:ext cx="7562088" cy="201168"/>
+          </a:xfrm>
+          <a:prstGeom prst="rect">
+            <a:avLst/>
+          </a:prstGeom>
+          <a:solidFill>
+            <a:srgbClr val="6A0DAD"/>
+          </a:solidFill>
+          <a:ln>
+            <a:noFill/>
+          </a:ln>
+        </p:spPr>
+        <p:style>
+          <a:lnRef idx="1">
+            <a:schemeClr val="accent1"/>
+          </a:lnRef>
+          <a:fillRef idx="3">
+            <a:schemeClr val="accent1"/>
+          </a:fillRef>
+          <a:effectRef idx="2">
+            <a:schemeClr val="accent1"/>
+          </a:effectRef>
+          <a:fontRef idx="minor">
+            <a:schemeClr val="lt1"/>
+          </a:fontRef>
+        </p:style>
+        <p:txBody>
+          <a:bodyPr rtlCol="0" anchor="ctr"/>
+          <a:lstStyle/>
+          <a:p>
+            <a:pPr algn="ctr"/>
+          </a:p>
+        </p:txBody>
+      </p:sp>
+      <p:sp>
+        <p:nvSpPr>
+          <p:cNvPr id="55" name="TextBox 54"/>
+          <p:cNvSpPr txBox="1"/>
+          <p:nvPr/>
+        </p:nvSpPr>
+        <p:spPr>
+          <a:xfrm>
+            <a:off x="1581912" y="5344668"/>
+            <a:ext cx="7498079" cy="164592"/>
+          </a:xfrm>
+          <a:prstGeom prst="rect">
+            <a:avLst/>
+          </a:prstGeom>
+          <a:noFill/>
+        </p:spPr>
+        <p:txBody>
+          <a:bodyPr wrap="square">
+            <a:spAutoFit/>
+          </a:bodyPr>
+          <a:lstStyle/>
+          <a:p>
+            <a:pPr algn="ctr"/>
+            <a:r>
+              <a:rPr sz="750" b="1" i="0">
+                <a:solidFill>
+                  <a:srgbClr val="FFFFFF"/>
+                </a:solidFill>
+              </a:rPr>
+              <a:t>↑  All 5 tools exposed via MCP  (loan_mcp/server.py · FastMCP · stdio &amp; HTTP · USE_MCP=true)</a:t>
+            </a:r>
+          </a:p>
+        </p:txBody>
+      </p:sp>
+      <p:sp>
+        <p:nvSpPr>
+          <p:cNvPr id="56" name="Rectangle 55"/>
           <p:cNvSpPr/>
           <p:nvPr/>
         </p:nvSpPr>
@@ -24829,7 +24921,7 @@
       </p:sp>
       <p:sp>
         <p:nvSpPr>
-          <p:cNvPr id="55" name="TextBox 54"/>
+          <p:cNvPr id="57" name="TextBox 56"/>
           <p:cNvSpPr txBox="1"/>
           <p:nvPr/>
         </p:nvSpPr>
@@ -24865,7 +24957,7 @@
       </p:sp>
       <p:sp>
         <p:nvSpPr>
-          <p:cNvPr id="56" name="Rectangle 55"/>
+          <p:cNvPr id="58" name="Rectangle 57"/>
           <p:cNvSpPr/>
           <p:nvPr/>
         </p:nvSpPr>
@@ -24910,7 +25002,7 @@
       </p:sp>
       <p:sp>
         <p:nvSpPr>
-          <p:cNvPr id="57" name="TextBox 56"/>
+          <p:cNvPr id="59" name="TextBox 58"/>
           <p:cNvSpPr txBox="1"/>
           <p:nvPr/>
         </p:nvSpPr>
@@ -24946,7 +25038,7 @@
       </p:sp>
       <p:sp>
         <p:nvSpPr>
-          <p:cNvPr id="58" name="Rectangle 57"/>
+          <p:cNvPr id="60" name="Rectangle 59"/>
           <p:cNvSpPr/>
           <p:nvPr/>
         </p:nvSpPr>
@@ -24991,7 +25083,7 @@
       </p:sp>
       <p:sp>
         <p:nvSpPr>
-          <p:cNvPr id="59" name="TextBox 58"/>
+          <p:cNvPr id="61" name="TextBox 60"/>
           <p:cNvSpPr txBox="1"/>
           <p:nvPr/>
         </p:nvSpPr>
@@ -25027,7 +25119,7 @@
       </p:sp>
       <p:sp>
         <p:nvSpPr>
-          <p:cNvPr id="60" name="Rectangle 59"/>
+          <p:cNvPr id="62" name="Rectangle 61"/>
           <p:cNvSpPr/>
           <p:nvPr/>
         </p:nvSpPr>
@@ -25072,7 +25164,7 @@
       </p:sp>
       <p:sp>
         <p:nvSpPr>
-          <p:cNvPr id="61" name="TextBox 60"/>
+          <p:cNvPr id="63" name="TextBox 62"/>
           <p:cNvSpPr txBox="1"/>
           <p:nvPr/>
         </p:nvSpPr>
@@ -25552,7 +25644,7 @@
         <p:spPr>
           <a:xfrm>
             <a:off x="320040" y="1719072"/>
-            <a:ext cx="11548872" cy="548640"/>
+            <a:ext cx="11548872" cy="484632"/>
           </a:xfrm>
           <a:prstGeom prst="rect">
             <a:avLst/>
@@ -25595,7 +25687,7 @@
         <p:spPr>
           <a:xfrm>
             <a:off x="457200" y="1737360"/>
-            <a:ext cx="2194560" cy="493776"/>
+            <a:ext cx="2194560" cy="429768"/>
           </a:xfrm>
           <a:prstGeom prst="rect">
             <a:avLst/>
@@ -25629,7 +25721,7 @@
         <p:spPr>
           <a:xfrm>
             <a:off x="2743200" y="1737360"/>
-            <a:ext cx="2834640" cy="493776"/>
+            <a:ext cx="2834640" cy="429768"/>
           </a:xfrm>
           <a:prstGeom prst="rect">
             <a:avLst/>
@@ -25663,7 +25755,7 @@
         <p:spPr>
           <a:xfrm>
             <a:off x="5669280" y="1737360"/>
-            <a:ext cx="6080760" cy="493776"/>
+            <a:ext cx="6080760" cy="429768"/>
           </a:xfrm>
           <a:prstGeom prst="rect">
             <a:avLst/>
@@ -25696,8 +25788,8 @@
         </p:nvSpPr>
         <p:spPr>
           <a:xfrm>
-            <a:off x="320040" y="2286000"/>
-            <a:ext cx="11548872" cy="548640"/>
+            <a:off x="320040" y="2221991"/>
+            <a:ext cx="11548872" cy="484632"/>
           </a:xfrm>
           <a:prstGeom prst="rect">
             <a:avLst/>
@@ -25739,8 +25831,8 @@
         </p:nvSpPr>
         <p:spPr>
           <a:xfrm>
-            <a:off x="457200" y="2304288"/>
-            <a:ext cx="2194560" cy="493776"/>
+            <a:off x="457200" y="2240280"/>
+            <a:ext cx="2194560" cy="429768"/>
           </a:xfrm>
           <a:prstGeom prst="rect">
             <a:avLst/>
@@ -25773,8 +25865,8 @@
         </p:nvSpPr>
         <p:spPr>
           <a:xfrm>
-            <a:off x="2743200" y="2304288"/>
-            <a:ext cx="2834640" cy="493776"/>
+            <a:off x="2743200" y="2240280"/>
+            <a:ext cx="2834640" cy="429768"/>
           </a:xfrm>
           <a:prstGeom prst="rect">
             <a:avLst/>
@@ -25807,8 +25899,8 @@
         </p:nvSpPr>
         <p:spPr>
           <a:xfrm>
-            <a:off x="5669280" y="2304288"/>
-            <a:ext cx="6080760" cy="493776"/>
+            <a:off x="5669280" y="2240280"/>
+            <a:ext cx="6080760" cy="429768"/>
           </a:xfrm>
           <a:prstGeom prst="rect">
             <a:avLst/>
@@ -25841,8 +25933,8 @@
         </p:nvSpPr>
         <p:spPr>
           <a:xfrm>
-            <a:off x="320040" y="2852928"/>
-            <a:ext cx="11548872" cy="548640"/>
+            <a:off x="320040" y="2724912"/>
+            <a:ext cx="11548872" cy="484632"/>
           </a:xfrm>
           <a:prstGeom prst="rect">
             <a:avLst/>
@@ -25884,8 +25976,8 @@
         </p:nvSpPr>
         <p:spPr>
           <a:xfrm>
-            <a:off x="457200" y="2871215"/>
-            <a:ext cx="2194560" cy="493776"/>
+            <a:off x="457200" y="2743200"/>
+            <a:ext cx="2194560" cy="429768"/>
           </a:xfrm>
           <a:prstGeom prst="rect">
             <a:avLst/>
@@ -25918,8 +26010,8 @@
         </p:nvSpPr>
         <p:spPr>
           <a:xfrm>
-            <a:off x="2743200" y="2871215"/>
-            <a:ext cx="2834640" cy="493776"/>
+            <a:off x="2743200" y="2743200"/>
+            <a:ext cx="2834640" cy="429768"/>
           </a:xfrm>
           <a:prstGeom prst="rect">
             <a:avLst/>
@@ -25952,8 +26044,8 @@
         </p:nvSpPr>
         <p:spPr>
           <a:xfrm>
-            <a:off x="5669280" y="2871215"/>
-            <a:ext cx="6080760" cy="493776"/>
+            <a:off x="5669280" y="2743200"/>
+            <a:ext cx="6080760" cy="429768"/>
           </a:xfrm>
           <a:prstGeom prst="rect">
             <a:avLst/>
@@ -25986,8 +26078,8 @@
         </p:nvSpPr>
         <p:spPr>
           <a:xfrm>
-            <a:off x="320040" y="3419856"/>
-            <a:ext cx="11548872" cy="548640"/>
+            <a:off x="320040" y="3227832"/>
+            <a:ext cx="11548872" cy="484632"/>
           </a:xfrm>
           <a:prstGeom prst="rect">
             <a:avLst/>
@@ -26029,8 +26121,8 @@
         </p:nvSpPr>
         <p:spPr>
           <a:xfrm>
-            <a:off x="457200" y="3438144"/>
-            <a:ext cx="2194560" cy="493776"/>
+            <a:off x="457200" y="3246120"/>
+            <a:ext cx="2194560" cy="429768"/>
           </a:xfrm>
           <a:prstGeom prst="rect">
             <a:avLst/>
@@ -26063,8 +26155,8 @@
         </p:nvSpPr>
         <p:spPr>
           <a:xfrm>
-            <a:off x="2743200" y="3438144"/>
-            <a:ext cx="2834640" cy="493776"/>
+            <a:off x="2743200" y="3246120"/>
+            <a:ext cx="2834640" cy="429768"/>
           </a:xfrm>
           <a:prstGeom prst="rect">
             <a:avLst/>
@@ -26097,8 +26189,8 @@
         </p:nvSpPr>
         <p:spPr>
           <a:xfrm>
-            <a:off x="5669280" y="3438144"/>
-            <a:ext cx="6080760" cy="493776"/>
+            <a:off x="5669280" y="3246120"/>
+            <a:ext cx="6080760" cy="429768"/>
           </a:xfrm>
           <a:prstGeom prst="rect">
             <a:avLst/>
@@ -26131,8 +26223,8 @@
         </p:nvSpPr>
         <p:spPr>
           <a:xfrm>
-            <a:off x="320040" y="3986783"/>
-            <a:ext cx="11548872" cy="548640"/>
+            <a:off x="320040" y="3730752"/>
+            <a:ext cx="11548872" cy="484632"/>
           </a:xfrm>
           <a:prstGeom prst="rect">
             <a:avLst/>
@@ -26174,8 +26266,8 @@
         </p:nvSpPr>
         <p:spPr>
           <a:xfrm>
-            <a:off x="457200" y="4005072"/>
-            <a:ext cx="2194560" cy="493776"/>
+            <a:off x="457200" y="3749039"/>
+            <a:ext cx="2194560" cy="429768"/>
           </a:xfrm>
           <a:prstGeom prst="rect">
             <a:avLst/>
@@ -26208,8 +26300,8 @@
         </p:nvSpPr>
         <p:spPr>
           <a:xfrm>
-            <a:off x="2743200" y="4005072"/>
-            <a:ext cx="2834640" cy="493776"/>
+            <a:off x="2743200" y="3749039"/>
+            <a:ext cx="2834640" cy="429768"/>
           </a:xfrm>
           <a:prstGeom prst="rect">
             <a:avLst/>
@@ -26242,8 +26334,8 @@
         </p:nvSpPr>
         <p:spPr>
           <a:xfrm>
-            <a:off x="5669280" y="4005072"/>
-            <a:ext cx="6080760" cy="493776"/>
+            <a:off x="5669280" y="3749039"/>
+            <a:ext cx="6080760" cy="429768"/>
           </a:xfrm>
           <a:prstGeom prst="rect">
             <a:avLst/>
@@ -26276,8 +26368,8 @@
         </p:nvSpPr>
         <p:spPr>
           <a:xfrm>
-            <a:off x="320040" y="4553712"/>
-            <a:ext cx="11548872" cy="548640"/>
+            <a:off x="320040" y="4233672"/>
+            <a:ext cx="11548872" cy="484632"/>
           </a:xfrm>
           <a:prstGeom prst="rect">
             <a:avLst/>
@@ -26319,8 +26411,8 @@
         </p:nvSpPr>
         <p:spPr>
           <a:xfrm>
-            <a:off x="457200" y="4572000"/>
-            <a:ext cx="2194560" cy="493776"/>
+            <a:off x="457200" y="4251960"/>
+            <a:ext cx="2194560" cy="429768"/>
           </a:xfrm>
           <a:prstGeom prst="rect">
             <a:avLst/>
@@ -26353,8 +26445,8 @@
         </p:nvSpPr>
         <p:spPr>
           <a:xfrm>
-            <a:off x="2743200" y="4572000"/>
-            <a:ext cx="2834640" cy="493776"/>
+            <a:off x="2743200" y="4251960"/>
+            <a:ext cx="2834640" cy="429768"/>
           </a:xfrm>
           <a:prstGeom prst="rect">
             <a:avLst/>
@@ -26387,8 +26479,8 @@
         </p:nvSpPr>
         <p:spPr>
           <a:xfrm>
-            <a:off x="5669280" y="4572000"/>
-            <a:ext cx="6080760" cy="493776"/>
+            <a:off x="5669280" y="4251960"/>
+            <a:ext cx="6080760" cy="429768"/>
           </a:xfrm>
           <a:prstGeom prst="rect">
             <a:avLst/>
@@ -26421,8 +26513,8 @@
         </p:nvSpPr>
         <p:spPr>
           <a:xfrm>
-            <a:off x="320040" y="5120640"/>
-            <a:ext cx="11548872" cy="548640"/>
+            <a:off x="320040" y="4736592"/>
+            <a:ext cx="11548872" cy="484632"/>
           </a:xfrm>
           <a:prstGeom prst="rect">
             <a:avLst/>
@@ -26464,8 +26556,8 @@
         </p:nvSpPr>
         <p:spPr>
           <a:xfrm>
-            <a:off x="457200" y="5138927"/>
-            <a:ext cx="2194560" cy="493776"/>
+            <a:off x="457200" y="4754880"/>
+            <a:ext cx="2194560" cy="429768"/>
           </a:xfrm>
           <a:prstGeom prst="rect">
             <a:avLst/>
@@ -26498,8 +26590,8 @@
         </p:nvSpPr>
         <p:spPr>
           <a:xfrm>
-            <a:off x="2743200" y="5138927"/>
-            <a:ext cx="2834640" cy="493776"/>
+            <a:off x="2743200" y="4754880"/>
+            <a:ext cx="2834640" cy="429768"/>
           </a:xfrm>
           <a:prstGeom prst="rect">
             <a:avLst/>
@@ -26532,8 +26624,8 @@
         </p:nvSpPr>
         <p:spPr>
           <a:xfrm>
-            <a:off x="5669280" y="5138927"/>
-            <a:ext cx="6080760" cy="493776"/>
+            <a:off x="5669280" y="4754880"/>
+            <a:ext cx="6080760" cy="429768"/>
           </a:xfrm>
           <a:prstGeom prst="rect">
             <a:avLst/>
@@ -26566,8 +26658,8 @@
         </p:nvSpPr>
         <p:spPr>
           <a:xfrm>
-            <a:off x="320040" y="5687568"/>
-            <a:ext cx="11548872" cy="548640"/>
+            <a:off x="320040" y="5239512"/>
+            <a:ext cx="11548872" cy="484632"/>
           </a:xfrm>
           <a:prstGeom prst="rect">
             <a:avLst/>
@@ -26609,8 +26701,8 @@
         </p:nvSpPr>
         <p:spPr>
           <a:xfrm>
-            <a:off x="457200" y="5705856"/>
-            <a:ext cx="2194560" cy="493776"/>
+            <a:off x="457200" y="5257800"/>
+            <a:ext cx="2194560" cy="429768"/>
           </a:xfrm>
           <a:prstGeom prst="rect">
             <a:avLst/>
@@ -26643,8 +26735,8 @@
         </p:nvSpPr>
         <p:spPr>
           <a:xfrm>
-            <a:off x="2743200" y="5705856"/>
-            <a:ext cx="2834640" cy="493776"/>
+            <a:off x="2743200" y="5257800"/>
+            <a:ext cx="2834640" cy="429768"/>
           </a:xfrm>
           <a:prstGeom prst="rect">
             <a:avLst/>
@@ -26677,8 +26769,8 @@
         </p:nvSpPr>
         <p:spPr>
           <a:xfrm>
-            <a:off x="5669280" y="5705856"/>
-            <a:ext cx="6080760" cy="493776"/>
+            <a:off x="5669280" y="5257800"/>
+            <a:ext cx="6080760" cy="429768"/>
           </a:xfrm>
           <a:prstGeom prst="rect">
             <a:avLst/>
@@ -26699,6 +26791,151 @@
                 </a:solidFill>
               </a:rPr>
               <a:t>Streamlit enables rapid iteration; Customer Chat + RM Dashboard in one app. No separate API server needed; CLI supports all 5 phases for notebook-based demos</a:t>
+            </a:r>
+          </a:p>
+        </p:txBody>
+      </p:sp>
+      <p:sp>
+        <p:nvSpPr>
+          <p:cNvPr id="45" name="Rectangle 44"/>
+          <p:cNvSpPr/>
+          <p:nvPr/>
+        </p:nvSpPr>
+        <p:spPr>
+          <a:xfrm>
+            <a:off x="320040" y="5742432"/>
+            <a:ext cx="11548872" cy="484632"/>
+          </a:xfrm>
+          <a:prstGeom prst="rect">
+            <a:avLst/>
+          </a:prstGeom>
+          <a:solidFill>
+            <a:srgbClr val="FFFFFF"/>
+          </a:solidFill>
+          <a:ln>
+            <a:noFill/>
+          </a:ln>
+        </p:spPr>
+        <p:style>
+          <a:lnRef idx="1">
+            <a:schemeClr val="accent1"/>
+          </a:lnRef>
+          <a:fillRef idx="3">
+            <a:schemeClr val="accent1"/>
+          </a:fillRef>
+          <a:effectRef idx="2">
+            <a:schemeClr val="accent1"/>
+          </a:effectRef>
+          <a:fontRef idx="minor">
+            <a:schemeClr val="lt1"/>
+          </a:fontRef>
+        </p:style>
+        <p:txBody>
+          <a:bodyPr rtlCol="0" anchor="ctr"/>
+          <a:lstStyle/>
+          <a:p>
+            <a:pPr algn="ctr"/>
+          </a:p>
+        </p:txBody>
+      </p:sp>
+      <p:sp>
+        <p:nvSpPr>
+          <p:cNvPr id="46" name="TextBox 45"/>
+          <p:cNvSpPr txBox="1"/>
+          <p:nvPr/>
+        </p:nvSpPr>
+        <p:spPr>
+          <a:xfrm>
+            <a:off x="457200" y="5760720"/>
+            <a:ext cx="2194560" cy="429768"/>
+          </a:xfrm>
+          <a:prstGeom prst="rect">
+            <a:avLst/>
+          </a:prstGeom>
+          <a:noFill/>
+        </p:spPr>
+        <p:txBody>
+          <a:bodyPr wrap="square">
+            <a:spAutoFit/>
+          </a:bodyPr>
+          <a:lstStyle/>
+          <a:p>
+            <a:pPr algn="l"/>
+            <a:r>
+              <a:rPr sz="950" b="1" i="0">
+                <a:solidFill>
+                  <a:srgbClr val="0D2D5E"/>
+                </a:solidFill>
+              </a:rPr>
+              <a:t>MCP Tool Transport</a:t>
+            </a:r>
+          </a:p>
+        </p:txBody>
+      </p:sp>
+      <p:sp>
+        <p:nvSpPr>
+          <p:cNvPr id="47" name="TextBox 46"/>
+          <p:cNvSpPr txBox="1"/>
+          <p:nvPr/>
+        </p:nvSpPr>
+        <p:spPr>
+          <a:xfrm>
+            <a:off x="2743200" y="5760720"/>
+            <a:ext cx="2834640" cy="429768"/>
+          </a:xfrm>
+          <a:prstGeom prst="rect">
+            <a:avLst/>
+          </a:prstGeom>
+          <a:noFill/>
+        </p:spPr>
+        <p:txBody>
+          <a:bodyPr wrap="square">
+            <a:spAutoFit/>
+          </a:bodyPr>
+          <a:lstStyle/>
+          <a:p>
+            <a:pPr algn="l"/>
+            <a:r>
+              <a:rPr sz="900" b="0" i="0">
+                <a:solidFill>
+                  <a:srgbClr val="2D3A4B"/>
+                </a:solidFill>
+              </a:rPr>
+              <a:t>FastMCP  (mcp v1.27 · loan_mcp/server.py)</a:t>
+            </a:r>
+          </a:p>
+        </p:txBody>
+      </p:sp>
+      <p:sp>
+        <p:nvSpPr>
+          <p:cNvPr id="48" name="TextBox 47"/>
+          <p:cNvSpPr txBox="1"/>
+          <p:nvPr/>
+        </p:nvSpPr>
+        <p:spPr>
+          <a:xfrm>
+            <a:off x="5669280" y="5760720"/>
+            <a:ext cx="6080760" cy="429768"/>
+          </a:xfrm>
+          <a:prstGeom prst="rect">
+            <a:avLst/>
+          </a:prstGeom>
+          <a:noFill/>
+        </p:spPr>
+        <p:txBody>
+          <a:bodyPr wrap="square">
+            <a:spAutoFit/>
+          </a:bodyPr>
+          <a:lstStyle/>
+          <a:p>
+            <a:pPr algn="l"/>
+            <a:r>
+              <a:rPr sz="850" b="0" i="0">
+                <a:solidFill>
+                  <a:srgbClr val="6B7C93"/>
+                </a:solidFill>
+              </a:rPr>
+              <a:t>All 5 tools exposed via Model Context Protocol — discoverable by Claude Desktop, Claude Code, and external bank systems without Python imports. USE_MCP=true selects MCP path; default is direct @tool imports (zero breaking change). Adds schema validation at the protocol layer; &lt;1ms serialisation overhead</a:t>
             </a:r>
           </a:p>
         </p:txBody>
@@ -27969,7 +28206,7 @@
               </a:rPr>
               <a:t>• 5 @tool functions
 • create_react_agent
-• All tools traced
+• MCP exposure layer
 • Escalation ceiling logic</a:t>
             </a:r>
           </a:p>
@@ -30365,7 +30602,7 @@
                   <a:srgbClr val="6B7C93"/>
                 </a:solidFill>
               </a:rPr>
-              <a:t>233 unit + integration tests passing across 12 test files · 8 Jupyter demo notebooks (one per phase)</a:t>
+              <a:t>244 unit + integration tests passing across 13 test files · 8 Jupyter demo notebooks (one per phase)</a:t>
             </a:r>
           </a:p>
         </p:txBody>
@@ -31348,7 +31585,7 @@
         <p:spPr>
           <a:xfrm>
             <a:off x="4160520" y="1389888"/>
-            <a:ext cx="7818120" cy="969264"/>
+            <a:ext cx="7818120" cy="914400"/>
           </a:xfrm>
           <a:prstGeom prst="rect">
             <a:avLst/>
@@ -31393,7 +31630,7 @@
         <p:spPr>
           <a:xfrm>
             <a:off x="4160520" y="1389888"/>
-            <a:ext cx="91440" cy="969264"/>
+            <a:ext cx="91440" cy="914400"/>
           </a:xfrm>
           <a:prstGeom prst="rect">
             <a:avLst/>
@@ -31435,8 +31672,8 @@
         </p:nvSpPr>
         <p:spPr>
           <a:xfrm>
-            <a:off x="4315968" y="1444752"/>
-            <a:ext cx="5029200" cy="310896"/>
+            <a:off x="4315968" y="1435608"/>
+            <a:ext cx="5029200" cy="292608"/>
           </a:xfrm>
           <a:prstGeom prst="rect">
             <a:avLst/>
@@ -31469,8 +31706,8 @@
         </p:nvSpPr>
         <p:spPr>
           <a:xfrm>
-            <a:off x="4315968" y="1755648"/>
-            <a:ext cx="7516368" cy="548640"/>
+            <a:off x="4315968" y="1737360"/>
+            <a:ext cx="7516368" cy="530352"/>
           </a:xfrm>
           <a:prstGeom prst="rect">
             <a:avLst/>
@@ -31505,8 +31742,8 @@
         </p:nvSpPr>
         <p:spPr>
           <a:xfrm>
-            <a:off x="4160520" y="2414016"/>
-            <a:ext cx="7818120" cy="969264"/>
+            <a:off x="4160520" y="2359152"/>
+            <a:ext cx="7818120" cy="914400"/>
           </a:xfrm>
           <a:prstGeom prst="rect">
             <a:avLst/>
@@ -31550,8 +31787,8 @@
         </p:nvSpPr>
         <p:spPr>
           <a:xfrm>
-            <a:off x="4160520" y="2414016"/>
-            <a:ext cx="91440" cy="969264"/>
+            <a:off x="4160520" y="2359152"/>
+            <a:ext cx="91440" cy="914400"/>
           </a:xfrm>
           <a:prstGeom prst="rect">
             <a:avLst/>
@@ -31593,8 +31830,8 @@
         </p:nvSpPr>
         <p:spPr>
           <a:xfrm>
-            <a:off x="4315968" y="2468880"/>
-            <a:ext cx="5029200" cy="310896"/>
+            <a:off x="4315968" y="2404872"/>
+            <a:ext cx="5029200" cy="292608"/>
           </a:xfrm>
           <a:prstGeom prst="rect">
             <a:avLst/>
@@ -31627,8 +31864,8 @@
         </p:nvSpPr>
         <p:spPr>
           <a:xfrm>
-            <a:off x="4315968" y="2779776"/>
-            <a:ext cx="7516368" cy="548640"/>
+            <a:off x="4315968" y="2706624"/>
+            <a:ext cx="7516368" cy="530352"/>
           </a:xfrm>
           <a:prstGeom prst="rect">
             <a:avLst/>
@@ -31663,8 +31900,8 @@
         </p:nvSpPr>
         <p:spPr>
           <a:xfrm>
-            <a:off x="4160520" y="3438144"/>
-            <a:ext cx="7818120" cy="969264"/>
+            <a:off x="4160520" y="3328416"/>
+            <a:ext cx="7818120" cy="914400"/>
           </a:xfrm>
           <a:prstGeom prst="rect">
             <a:avLst/>
@@ -31708,8 +31945,8 @@
         </p:nvSpPr>
         <p:spPr>
           <a:xfrm>
-            <a:off x="4160520" y="3438144"/>
-            <a:ext cx="91440" cy="969264"/>
+            <a:off x="4160520" y="3328416"/>
+            <a:ext cx="91440" cy="914400"/>
           </a:xfrm>
           <a:prstGeom prst="rect">
             <a:avLst/>
@@ -31751,8 +31988,8 @@
         </p:nvSpPr>
         <p:spPr>
           <a:xfrm>
-            <a:off x="4315968" y="3493008"/>
-            <a:ext cx="5029200" cy="310896"/>
+            <a:off x="4315968" y="3374136"/>
+            <a:ext cx="5029200" cy="292608"/>
           </a:xfrm>
           <a:prstGeom prst="rect">
             <a:avLst/>
@@ -31785,8 +32022,8 @@
         </p:nvSpPr>
         <p:spPr>
           <a:xfrm>
-            <a:off x="4315968" y="3803904"/>
-            <a:ext cx="7516368" cy="548640"/>
+            <a:off x="4315968" y="3675888"/>
+            <a:ext cx="7516368" cy="530352"/>
           </a:xfrm>
           <a:prstGeom prst="rect">
             <a:avLst/>
@@ -31821,8 +32058,8 @@
         </p:nvSpPr>
         <p:spPr>
           <a:xfrm>
-            <a:off x="4160520" y="4462272"/>
-            <a:ext cx="7818120" cy="969264"/>
+            <a:off x="4160520" y="4297680"/>
+            <a:ext cx="7818120" cy="914400"/>
           </a:xfrm>
           <a:prstGeom prst="rect">
             <a:avLst/>
@@ -31866,8 +32103,8 @@
         </p:nvSpPr>
         <p:spPr>
           <a:xfrm>
-            <a:off x="4160520" y="4462272"/>
-            <a:ext cx="91440" cy="969264"/>
+            <a:off x="4160520" y="4297680"/>
+            <a:ext cx="91440" cy="914400"/>
           </a:xfrm>
           <a:prstGeom prst="rect">
             <a:avLst/>
@@ -31909,8 +32146,8 @@
         </p:nvSpPr>
         <p:spPr>
           <a:xfrm>
-            <a:off x="4315968" y="4517136"/>
-            <a:ext cx="5029200" cy="310896"/>
+            <a:off x="4315968" y="4343400"/>
+            <a:ext cx="5029200" cy="292608"/>
           </a:xfrm>
           <a:prstGeom prst="rect">
             <a:avLst/>
@@ -31943,8 +32180,8 @@
         </p:nvSpPr>
         <p:spPr>
           <a:xfrm>
-            <a:off x="4315968" y="4828032"/>
-            <a:ext cx="7516368" cy="548640"/>
+            <a:off x="4315968" y="4645152"/>
+            <a:ext cx="7516368" cy="530352"/>
           </a:xfrm>
           <a:prstGeom prst="rect">
             <a:avLst/>
@@ -31979,8 +32216,8 @@
         </p:nvSpPr>
         <p:spPr>
           <a:xfrm>
-            <a:off x="4160520" y="5486400"/>
-            <a:ext cx="7818120" cy="969264"/>
+            <a:off x="4160520" y="5266944"/>
+            <a:ext cx="7818120" cy="914400"/>
           </a:xfrm>
           <a:prstGeom prst="rect">
             <a:avLst/>
@@ -32024,8 +32261,8 @@
         </p:nvSpPr>
         <p:spPr>
           <a:xfrm>
-            <a:off x="4160520" y="5486400"/>
-            <a:ext cx="91440" cy="969264"/>
+            <a:off x="4160520" y="5266944"/>
+            <a:ext cx="91440" cy="914400"/>
           </a:xfrm>
           <a:prstGeom prst="rect">
             <a:avLst/>
@@ -32067,8 +32304,8 @@
         </p:nvSpPr>
         <p:spPr>
           <a:xfrm>
-            <a:off x="4315968" y="5541264"/>
-            <a:ext cx="5029200" cy="310896"/>
+            <a:off x="4315968" y="5312664"/>
+            <a:ext cx="5029200" cy="292608"/>
           </a:xfrm>
           <a:prstGeom prst="rect">
             <a:avLst/>
@@ -32101,8 +32338,8 @@
         </p:nvSpPr>
         <p:spPr>
           <a:xfrm>
-            <a:off x="4315968" y="5852160"/>
-            <a:ext cx="7516368" cy="548640"/>
+            <a:off x="4315968" y="5614416"/>
+            <a:ext cx="7516368" cy="530352"/>
           </a:xfrm>
           <a:prstGeom prst="rect">
             <a:avLst/>
@@ -32125,6 +32362,83 @@
               <a:t>Triggered: loan_amount &gt; escalation ceiling (Home ₹1.5Cr · Personal ₹40L · MSME ₹2Cr · Car ₹20L)
 Collects: name · mobile (10-digit validated) · email (regex validated) · preferred time
 Outputs: RM briefing packet + escalation_id → persists to data/rlhf/escalations.json</a:t>
+            </a:r>
+          </a:p>
+        </p:txBody>
+      </p:sp>
+      <p:sp>
+        <p:nvSpPr>
+          <p:cNvPr id="47" name="Rectangle 46"/>
+          <p:cNvSpPr/>
+          <p:nvPr/>
+        </p:nvSpPr>
+        <p:spPr>
+          <a:xfrm>
+            <a:off x="4160520" y="6272784"/>
+            <a:ext cx="7818120" cy="182880"/>
+          </a:xfrm>
+          <a:prstGeom prst="rect">
+            <a:avLst/>
+          </a:prstGeom>
+          <a:solidFill>
+            <a:srgbClr val="6A0DAD"/>
+          </a:solidFill>
+          <a:ln>
+            <a:noFill/>
+          </a:ln>
+        </p:spPr>
+        <p:style>
+          <a:lnRef idx="1">
+            <a:schemeClr val="accent1"/>
+          </a:lnRef>
+          <a:fillRef idx="3">
+            <a:schemeClr val="accent1"/>
+          </a:fillRef>
+          <a:effectRef idx="2">
+            <a:schemeClr val="accent1"/>
+          </a:effectRef>
+          <a:fontRef idx="minor">
+            <a:schemeClr val="lt1"/>
+          </a:fontRef>
+        </p:style>
+        <p:txBody>
+          <a:bodyPr rtlCol="0" anchor="ctr"/>
+          <a:lstStyle/>
+          <a:p>
+            <a:pPr algn="ctr"/>
+          </a:p>
+        </p:txBody>
+      </p:sp>
+      <p:sp>
+        <p:nvSpPr>
+          <p:cNvPr id="48" name="TextBox 47"/>
+          <p:cNvSpPr txBox="1"/>
+          <p:nvPr/>
+        </p:nvSpPr>
+        <p:spPr>
+          <a:xfrm>
+            <a:off x="4224528" y="6300216"/>
+            <a:ext cx="7662672" cy="146304"/>
+          </a:xfrm>
+          <a:prstGeom prst="rect">
+            <a:avLst/>
+          </a:prstGeom>
+          <a:noFill/>
+        </p:spPr>
+        <p:txBody>
+          <a:bodyPr wrap="square">
+            <a:spAutoFit/>
+          </a:bodyPr>
+          <a:lstStyle/>
+          <a:p>
+            <a:pPr algn="ctr"/>
+            <a:r>
+              <a:rPr sz="750" b="1" i="0">
+                <a:solidFill>
+                  <a:srgbClr val="FFFFFF"/>
+                </a:solidFill>
+              </a:rPr>
+              <a:t>MCP Exposure Layer: all 5 tools discoverable via loan_mcp/server.py (FastMCP · stdio &amp; HTTP)  ·  USE_MCP=true selects MCP path</a:t>
             </a:r>
           </a:p>
         </p:txBody>
@@ -34755,7 +35069,7 @@
         <p:spPr>
           <a:xfrm>
             <a:off x="457200" y="5303520"/>
-            <a:ext cx="7178040" cy="1042415"/>
+            <a:ext cx="7178040" cy="1161288"/>
           </a:xfrm>
           <a:prstGeom prst="rect">
             <a:avLst/>
@@ -34834,7 +35148,7 @@
         <p:spPr>
           <a:xfrm>
             <a:off x="566928" y="5596127"/>
-            <a:ext cx="6858000" cy="182880"/>
+            <a:ext cx="6858000" cy="201168"/>
           </a:xfrm>
           <a:prstGeom prst="rect">
             <a:avLst/>
@@ -34867,8 +35181,8 @@
         </p:nvSpPr>
         <p:spPr>
           <a:xfrm>
-            <a:off x="566928" y="5797295"/>
-            <a:ext cx="6858000" cy="182880"/>
+            <a:off x="566928" y="5788151"/>
+            <a:ext cx="6858000" cy="201168"/>
           </a:xfrm>
           <a:prstGeom prst="rect">
             <a:avLst/>
@@ -34901,8 +35215,8 @@
         </p:nvSpPr>
         <p:spPr>
           <a:xfrm>
-            <a:off x="566928" y="5998464"/>
-            <a:ext cx="6858000" cy="182880"/>
+            <a:off x="566928" y="5980175"/>
+            <a:ext cx="6858000" cy="201168"/>
           </a:xfrm>
           <a:prstGeom prst="rect">
             <a:avLst/>
@@ -34935,8 +35249,8 @@
         </p:nvSpPr>
         <p:spPr>
           <a:xfrm>
-            <a:off x="566928" y="6199631"/>
-            <a:ext cx="6858000" cy="182880"/>
+            <a:off x="566928" y="6172199"/>
+            <a:ext cx="6858000" cy="201168"/>
           </a:xfrm>
           <a:prstGeom prst="rect">
             <a:avLst/>

--- a/docs/capstone_presentation.pptx
+++ b/docs/capstone_presentation.pptx
@@ -532,7 +532,7 @@
           </a:p>
           <a:p>
             <a:r>
-              <a:t>Built in 10 days across 8 phases; 244 tests passing. Let me walk you through the architecture and key decisions.</a:t>
+              <a:t>Built in 10 days across 8 phases; 426 tests passing. Let me walk you through the architecture and key decisions.</a:t>
             </a:r>
           </a:p>
         </p:txBody>
@@ -982,7 +982,7 @@
           </a:p>
           <a:p>
             <a:r>
-              <a:t>244 automated tests provide regression coverage; scripts/run_evaluation.py --suite all runs all 3 evaluation suites.</a:t>
+              <a:t>426 automated tests provide regression coverage; scripts/run_evaluation.py --suite all runs all 3 evaluation suites.</a:t>
             </a:r>
           </a:p>
         </p:txBody>
@@ -1627,7 +1627,7 @@
           </a:p>
           <a:p>
             <a:r>
-              <a:t>All 8 phases are complete — verified by 244 passing tests and 8 Jupyter demo notebooks.</a:t>
+              <a:t>All 8 phases are complete — verified by 426 passing tests and 8 Jupyter demo notebooks.</a:t>
             </a:r>
           </a:p>
           <a:p>
@@ -5712,7 +5712,7 @@
                   <a:srgbClr val="D4AF37"/>
                 </a:solidFill>
               </a:rPr>
-              <a:t>244</a:t>
+              <a:t>426</a:t>
             </a:r>
           </a:p>
         </p:txBody>
@@ -13894,7 +13894,7 @@
                   <a:srgbClr val="D4AF37"/>
                 </a:solidFill>
               </a:rPr>
-              <a:t>244</a:t>
+              <a:t>426</a:t>
             </a:r>
           </a:p>
         </p:txBody>
@@ -19801,7 +19801,7 @@
                   <a:srgbClr val="6B7C93"/>
                 </a:solidFill>
               </a:rPr>
-              <a:t>github.com/manojbansal-projects/IITM-LoanCopilot  ·  244 tests passing  ·  8 Jupyter notebooks</a:t>
+              <a:t>github.com/manojbansal-projects/IITM-LoanCopilot  ·  426 tests passing  ·  8 Jupyter notebooks</a:t>
             </a:r>
           </a:p>
         </p:txBody>
@@ -30602,7 +30602,7 @@
                   <a:srgbClr val="6B7C93"/>
                 </a:solidFill>
               </a:rPr>
-              <a:t>244 unit + integration tests passing across 13 test files · 8 Jupyter demo notebooks (one per phase)</a:t>
+              <a:t>426 unit + integration tests passing across 13 test files · 8 Jupyter demo notebooks (one per phase)</a:t>
             </a:r>
           </a:p>
         </p:txBody>

--- a/docs/capstone_presentation.pptx
+++ b/docs/capstone_presentation.pptx
@@ -4,25 +4,28 @@
   <p:sldMasterIdLst>
     <p:sldMasterId id="2147483648" r:id="rId1"/>
   </p:sldMasterIdLst>
+  <p:notesMasterIdLst>
+    <p:notesMasterId r:id="rId18"/>
+  </p:notesMasterIdLst>
   <p:sldIdLst>
-    <p:sldId id="256" r:id="rId7"/>
-    <p:sldId id="257" r:id="rId9"/>
-    <p:sldId id="258" r:id="rId10"/>
-    <p:sldId id="259" r:id="rId11"/>
-    <p:sldId id="260" r:id="rId12"/>
-    <p:sldId id="261" r:id="rId13"/>
-    <p:sldId id="262" r:id="rId14"/>
-    <p:sldId id="263" r:id="rId15"/>
-    <p:sldId id="264" r:id="rId16"/>
-    <p:sldId id="265" r:id="rId17"/>
-    <p:sldId id="266" r:id="rId18"/>
-    <p:sldId id="267" r:id="rId19"/>
-    <p:sldId id="268" r:id="rId20"/>
-    <p:sldId id="269" r:id="rId21"/>
-    <p:sldId id="270" r:id="rId22"/>
-    <p:sldId id="271" r:id="rId23"/>
+    <p:sldId id="256" r:id="rId2"/>
+    <p:sldId id="257" r:id="rId3"/>
+    <p:sldId id="258" r:id="rId4"/>
+    <p:sldId id="259" r:id="rId5"/>
+    <p:sldId id="260" r:id="rId6"/>
+    <p:sldId id="261" r:id="rId7"/>
+    <p:sldId id="262" r:id="rId8"/>
+    <p:sldId id="263" r:id="rId9"/>
+    <p:sldId id="264" r:id="rId10"/>
+    <p:sldId id="265" r:id="rId11"/>
+    <p:sldId id="266" r:id="rId12"/>
+    <p:sldId id="267" r:id="rId13"/>
+    <p:sldId id="268" r:id="rId14"/>
+    <p:sldId id="269" r:id="rId15"/>
+    <p:sldId id="270" r:id="rId16"/>
+    <p:sldId id="271" r:id="rId17"/>
   </p:sldIdLst>
-  <p:sldSz cx="12188952" cy="6858000" type="screen4x3"/>
+  <p:sldSz cx="12188825" cy="6858000"/>
   <p:notesSz cx="6858000" cy="9144000"/>
   <p:defaultTextStyle>
     <a:defPPr>
@@ -119,11 +122,27 @@
       </a:defRPr>
     </a:lvl9pPr>
   </p:defaultTextStyle>
+  <p:extLst>
+    <p:ext uri="{EFAFB233-063F-42B5-8137-9DF3F51BA10A}">
+      <p15:sldGuideLst xmlns:p15="http://schemas.microsoft.com/office/powerpoint/2012/main">
+        <p15:guide id="1" orient="horz" pos="2160">
+          <p15:clr>
+            <a:srgbClr val="A4A3A4"/>
+          </p15:clr>
+        </p15:guide>
+        <p15:guide id="2" pos="2880">
+          <p15:clr>
+            <a:srgbClr val="A4A3A4"/>
+          </p15:clr>
+        </p15:guide>
+      </p15:sldGuideLst>
+    </p:ext>
+  </p:extLst>
 </p:presentation>
 </file>
 
 <file path=ppt/notesMasters/notesMaster1.xml><?xml version="1.0" encoding="utf-8"?>
-<p:notesMaster xmlns:a="http://schemas.openxmlformats.org/drawingml/2006/main" xmlns:p="http://schemas.openxmlformats.org/presentationml/2006/main" xmlns:r="http://schemas.openxmlformats.org/officeDocument/2006/relationships">
+<p:notesMaster xmlns:a="http://schemas.openxmlformats.org/drawingml/2006/main" xmlns:r="http://schemas.openxmlformats.org/officeDocument/2006/relationships" xmlns:p="http://schemas.openxmlformats.org/presentationml/2006/main">
   <p:cSld>
     <p:bg>
       <p:bgRef idx="1001">
@@ -144,241 +163,16 @@
           <a:chExt cx="0" cy="0"/>
         </a:xfrm>
       </p:grpSpPr>
-      <p:sp>
-        <p:nvSpPr>
-          <p:cNvPr id="2" name="Header Placeholder 1"/>
-          <p:cNvSpPr>
-            <a:spLocks noGrp="1"/>
-          </p:cNvSpPr>
-          <p:nvPr>
-            <p:ph type="hdr" sz="quarter"/>
-          </p:nvPr>
-        </p:nvSpPr>
-        <p:spPr>
-          <a:xfrm>
-            <a:off x="0" y="0"/>
-            <a:ext cx="2971800" cy="457200"/>
-          </a:xfrm>
-          <a:prstGeom prst="rect">
-            <a:avLst/>
-          </a:prstGeom>
-        </p:spPr>
-        <p:txBody>
-          <a:bodyPr vert="horz" lIns="91440" tIns="45720" rIns="91440" bIns="45720" rtlCol="0"/>
-          <a:lstStyle>
-            <a:lvl1pPr algn="l">
-              <a:defRPr sz="1200"/>
-            </a:lvl1pPr>
-          </a:lstStyle>
-          <a:p>
-            <a:endParaRPr lang="en-US"/>
-          </a:p>
-        </p:txBody>
-      </p:sp>
-      <p:sp>
-        <p:nvSpPr>
-          <p:cNvPr id="3" name="Date Placeholder 2"/>
-          <p:cNvSpPr>
-            <a:spLocks noGrp="1"/>
-          </p:cNvSpPr>
-          <p:nvPr>
-            <p:ph type="dt" idx="1"/>
-          </p:nvPr>
-        </p:nvSpPr>
-        <p:spPr>
-          <a:xfrm>
-            <a:off x="3884613" y="0"/>
-            <a:ext cx="2971800" cy="457200"/>
-          </a:xfrm>
-          <a:prstGeom prst="rect">
-            <a:avLst/>
-          </a:prstGeom>
-        </p:spPr>
-        <p:txBody>
-          <a:bodyPr vert="horz" lIns="91440" tIns="45720" rIns="91440" bIns="45720" rtlCol="0"/>
-          <a:lstStyle>
-            <a:lvl1pPr algn="r">
-              <a:defRPr sz="1200"/>
-            </a:lvl1pPr>
-          </a:lstStyle>
-          <a:p>
-            <a:fld id="{0F89C1C7-3DCD-1040-A9CF-14679D8B5DDD}" type="datetimeFigureOut">
-              <a:rPr lang="en-US" smtClean="0"/>
-              <a:t>10/17/16</a:t>
-            </a:fld>
-            <a:endParaRPr lang="en-US"/>
-          </a:p>
-        </p:txBody>
-      </p:sp>
-      <p:sp>
-        <p:nvSpPr>
-          <p:cNvPr id="4" name="Slide Image Placeholder 3"/>
-          <p:cNvSpPr>
-            <a:spLocks noGrp="1" noRot="1" noChangeAspect="1"/>
-          </p:cNvSpPr>
-          <p:nvPr>
-            <p:ph type="sldImg" idx="2"/>
-          </p:nvPr>
-        </p:nvSpPr>
-        <p:spPr>
-          <a:xfrm>
-            <a:off x="1143000" y="685800"/>
-            <a:ext cx="4572000" cy="3429000"/>
-          </a:xfrm>
-          <a:prstGeom prst="rect">
-            <a:avLst/>
-          </a:prstGeom>
-          <a:noFill/>
-          <a:ln w="12700">
-            <a:solidFill>
-              <a:prstClr val="black"/>
-            </a:solidFill>
-          </a:ln>
-        </p:spPr>
-        <p:txBody>
-          <a:bodyPr vert="horz" lIns="91440" tIns="45720" rIns="91440" bIns="45720" rtlCol="0" anchor="ctr"/>
-          <a:lstStyle/>
-          <a:p>
-            <a:endParaRPr lang="en-US"/>
-          </a:p>
-        </p:txBody>
-      </p:sp>
-      <p:sp>
-        <p:nvSpPr>
-          <p:cNvPr id="5" name="Notes Placeholder 4"/>
-          <p:cNvSpPr>
-            <a:spLocks noGrp="1"/>
-          </p:cNvSpPr>
-          <p:nvPr>
-            <p:ph type="body" sz="quarter" idx="3"/>
-          </p:nvPr>
-        </p:nvSpPr>
-        <p:spPr>
-          <a:xfrm>
-            <a:off x="685800" y="4343400"/>
-            <a:ext cx="5486400" cy="4114800"/>
-          </a:xfrm>
-          <a:prstGeom prst="rect">
-            <a:avLst/>
-          </a:prstGeom>
-        </p:spPr>
-        <p:txBody>
-          <a:bodyPr vert="horz" lIns="91440" tIns="45720" rIns="91440" bIns="45720" rtlCol="0"/>
-          <a:lstStyle/>
-          <a:p>
-            <a:pPr lvl="0"/>
-            <a:r>
-              <a:rPr lang="en-US" smtClean="0"/>
-              <a:t>Click to edit Master text styles</a:t>
-            </a:r>
-          </a:p>
-          <a:p>
-            <a:pPr lvl="1"/>
-            <a:r>
-              <a:rPr lang="en-US" smtClean="0"/>
-              <a:t>Second level</a:t>
-            </a:r>
-          </a:p>
-          <a:p>
-            <a:pPr lvl="2"/>
-            <a:r>
-              <a:rPr lang="en-US" smtClean="0"/>
-              <a:t>Third level</a:t>
-            </a:r>
-          </a:p>
-          <a:p>
-            <a:pPr lvl="3"/>
-            <a:r>
-              <a:rPr lang="en-US" smtClean="0"/>
-              <a:t>Fourth level</a:t>
-            </a:r>
-          </a:p>
-          <a:p>
-            <a:pPr lvl="4"/>
-            <a:r>
-              <a:rPr lang="en-US" smtClean="0"/>
-              <a:t>Fifth level</a:t>
-            </a:r>
-            <a:endParaRPr lang="en-US"/>
-          </a:p>
-        </p:txBody>
-      </p:sp>
-      <p:sp>
-        <p:nvSpPr>
-          <p:cNvPr id="6" name="Footer Placeholder 5"/>
-          <p:cNvSpPr>
-            <a:spLocks noGrp="1"/>
-          </p:cNvSpPr>
-          <p:nvPr>
-            <p:ph type="ftr" sz="quarter" idx="4"/>
-          </p:nvPr>
-        </p:nvSpPr>
-        <p:spPr>
-          <a:xfrm>
-            <a:off x="0" y="8685213"/>
-            <a:ext cx="2971800" cy="457200"/>
-          </a:xfrm>
-          <a:prstGeom prst="rect">
-            <a:avLst/>
-          </a:prstGeom>
-        </p:spPr>
-        <p:txBody>
-          <a:bodyPr vert="horz" lIns="91440" tIns="45720" rIns="91440" bIns="45720" rtlCol="0" anchor="b"/>
-          <a:lstStyle>
-            <a:lvl1pPr algn="l">
-              <a:defRPr sz="1200"/>
-            </a:lvl1pPr>
-          </a:lstStyle>
-          <a:p>
-            <a:endParaRPr lang="en-US"/>
-          </a:p>
-        </p:txBody>
-      </p:sp>
-      <p:sp>
-        <p:nvSpPr>
-          <p:cNvPr id="7" name="Slide Number Placeholder 6"/>
-          <p:cNvSpPr>
-            <a:spLocks noGrp="1"/>
-          </p:cNvSpPr>
-          <p:nvPr>
-            <p:ph type="sldNum" sz="quarter" idx="5"/>
-          </p:nvPr>
-        </p:nvSpPr>
-        <p:spPr>
-          <a:xfrm>
-            <a:off x="3884613" y="8685213"/>
-            <a:ext cx="2971800" cy="457200"/>
-          </a:xfrm>
-          <a:prstGeom prst="rect">
-            <a:avLst/>
-          </a:prstGeom>
-        </p:spPr>
-        <p:txBody>
-          <a:bodyPr vert="horz" lIns="91440" tIns="45720" rIns="91440" bIns="45720" rtlCol="0" anchor="b"/>
-          <a:lstStyle>
-            <a:lvl1pPr algn="r">
-              <a:defRPr sz="1200"/>
-            </a:lvl1pPr>
-          </a:lstStyle>
-          <a:p>
-            <a:fld id="{BB5E49A5-4136-284D-997B-48E1D791AD67}" type="slidenum">
-              <a:rPr lang="en-US" smtClean="0"/>
-              <a:t>‹#›</a:t>
-            </a:fld>
-            <a:endParaRPr lang="en-US"/>
-          </a:p>
-        </p:txBody>
-      </p:sp>
     </p:spTree>
     <p:extLst>
       <p:ext uri="{BB962C8B-B14F-4D97-AF65-F5344CB8AC3E}">
-        <p14:creationId xmlns:p14="http://schemas.microsoft.com/office/powerpoint/2010/main" val="2623252185"/>
+        <p14:creationId xmlns:p14="http://schemas.microsoft.com/office/powerpoint/2010/main" val="2809634145"/>
       </p:ext>
     </p:extLst>
   </p:cSld>
   <p:clrMap bg1="lt1" tx1="dk1" bg2="lt2" tx2="dk2" accent1="accent1" accent2="accent2" accent3="accent3" accent4="accent4" accent5="accent5" accent6="accent6" hlink="hlink" folHlink="folHlink"/>
   <p:notesStyle>
-    <a:lvl1pPr marL="0" algn="l" defTabSz="457200" rtl="0" eaLnBrk="1" latinLnBrk="0" hangingPunct="1">
+    <a:lvl1pPr marL="0" algn="l" defTabSz="914400" rtl="0" eaLnBrk="1" latinLnBrk="0" hangingPunct="1">
       <a:defRPr sz="1200" kern="1200">
         <a:solidFill>
           <a:schemeClr val="tx1"/>
@@ -388,7 +182,7 @@
         <a:cs typeface="+mn-cs"/>
       </a:defRPr>
     </a:lvl1pPr>
-    <a:lvl2pPr marL="457200" algn="l" defTabSz="457200" rtl="0" eaLnBrk="1" latinLnBrk="0" hangingPunct="1">
+    <a:lvl2pPr marL="457200" algn="l" defTabSz="914400" rtl="0" eaLnBrk="1" latinLnBrk="0" hangingPunct="1">
       <a:defRPr sz="1200" kern="1200">
         <a:solidFill>
           <a:schemeClr val="tx1"/>
@@ -398,7 +192,7 @@
         <a:cs typeface="+mn-cs"/>
       </a:defRPr>
     </a:lvl2pPr>
-    <a:lvl3pPr marL="914400" algn="l" defTabSz="457200" rtl="0" eaLnBrk="1" latinLnBrk="0" hangingPunct="1">
+    <a:lvl3pPr marL="914400" algn="l" defTabSz="914400" rtl="0" eaLnBrk="1" latinLnBrk="0" hangingPunct="1">
       <a:defRPr sz="1200" kern="1200">
         <a:solidFill>
           <a:schemeClr val="tx1"/>
@@ -408,7 +202,7 @@
         <a:cs typeface="+mn-cs"/>
       </a:defRPr>
     </a:lvl3pPr>
-    <a:lvl4pPr marL="1371600" algn="l" defTabSz="457200" rtl="0" eaLnBrk="1" latinLnBrk="0" hangingPunct="1">
+    <a:lvl4pPr marL="1371600" algn="l" defTabSz="914400" rtl="0" eaLnBrk="1" latinLnBrk="0" hangingPunct="1">
       <a:defRPr sz="1200" kern="1200">
         <a:solidFill>
           <a:schemeClr val="tx1"/>
@@ -418,7 +212,7 @@
         <a:cs typeface="+mn-cs"/>
       </a:defRPr>
     </a:lvl4pPr>
-    <a:lvl5pPr marL="1828800" algn="l" defTabSz="457200" rtl="0" eaLnBrk="1" latinLnBrk="0" hangingPunct="1">
+    <a:lvl5pPr marL="1828800" algn="l" defTabSz="914400" rtl="0" eaLnBrk="1" latinLnBrk="0" hangingPunct="1">
       <a:defRPr sz="1200" kern="1200">
         <a:solidFill>
           <a:schemeClr val="tx1"/>
@@ -428,7 +222,7 @@
         <a:cs typeface="+mn-cs"/>
       </a:defRPr>
     </a:lvl5pPr>
-    <a:lvl6pPr marL="2286000" algn="l" defTabSz="457200" rtl="0" eaLnBrk="1" latinLnBrk="0" hangingPunct="1">
+    <a:lvl6pPr marL="2286000" algn="l" defTabSz="914400" rtl="0" eaLnBrk="1" latinLnBrk="0" hangingPunct="1">
       <a:defRPr sz="1200" kern="1200">
         <a:solidFill>
           <a:schemeClr val="tx1"/>
@@ -438,7 +232,7 @@
         <a:cs typeface="+mn-cs"/>
       </a:defRPr>
     </a:lvl6pPr>
-    <a:lvl7pPr marL="2743200" algn="l" defTabSz="457200" rtl="0" eaLnBrk="1" latinLnBrk="0" hangingPunct="1">
+    <a:lvl7pPr marL="2743200" algn="l" defTabSz="914400" rtl="0" eaLnBrk="1" latinLnBrk="0" hangingPunct="1">
       <a:defRPr sz="1200" kern="1200">
         <a:solidFill>
           <a:schemeClr val="tx1"/>
@@ -448,7 +242,7 @@
         <a:cs typeface="+mn-cs"/>
       </a:defRPr>
     </a:lvl7pPr>
-    <a:lvl8pPr marL="3200400" algn="l" defTabSz="457200" rtl="0" eaLnBrk="1" latinLnBrk="0" hangingPunct="1">
+    <a:lvl8pPr marL="3200400" algn="l" defTabSz="914400" rtl="0" eaLnBrk="1" latinLnBrk="0" hangingPunct="1">
       <a:defRPr sz="1200" kern="1200">
         <a:solidFill>
           <a:schemeClr val="tx1"/>
@@ -458,7 +252,7 @@
         <a:cs typeface="+mn-cs"/>
       </a:defRPr>
     </a:lvl8pPr>
-    <a:lvl9pPr marL="3657600" algn="l" defTabSz="457200" rtl="0" eaLnBrk="1" latinLnBrk="0" hangingPunct="1">
+    <a:lvl9pPr marL="3657600" algn="l" defTabSz="914400" rtl="0" eaLnBrk="1" latinLnBrk="0" hangingPunct="1">
       <a:defRPr sz="1200" kern="1200">
         <a:solidFill>
           <a:schemeClr val="tx1"/>
@@ -473,7 +267,7 @@
 </file>
 
 <file path=ppt/notesSlides/notesSlide1.xml><?xml version="1.0" encoding="utf-8"?>
-<p:notes xmlns:a="http://schemas.openxmlformats.org/drawingml/2006/main" xmlns:p="http://schemas.openxmlformats.org/presentationml/2006/main" xmlns:r="http://schemas.openxmlformats.org/officeDocument/2006/relationships">
+<p:notes xmlns:a="http://schemas.openxmlformats.org/drawingml/2006/main" xmlns:r="http://schemas.openxmlformats.org/officeDocument/2006/relationships" xmlns:p="http://schemas.openxmlformats.org/presentationml/2006/main">
   <p:cSld>
     <p:spTree>
       <p:nvGrpSpPr>
@@ -493,7 +287,7 @@
         <p:nvSpPr>
           <p:cNvPr id="2" name="Slide Image Placeholder 1"/>
           <p:cNvSpPr>
-            <a:spLocks noGrp="1"/>
+            <a:spLocks noGrp="1" noRot="1" noChangeAspect="1"/>
           </p:cNvSpPr>
           <p:nvPr>
             <p:ph type="sldImg" idx="2"/>
@@ -508,7 +302,7 @@
             <a:spLocks noGrp="1"/>
           </p:cNvSpPr>
           <p:nvPr>
-            <p:ph type="body" idx="3" sz="quarter"/>
+            <p:ph type="body" sz="quarter" idx="3"/>
           </p:nvPr>
         </p:nvSpPr>
         <p:spPr/>
@@ -544,7 +338,7 @@
             <a:spLocks noGrp="1"/>
           </p:cNvSpPr>
           <p:nvPr>
-            <p:ph type="sldNum" idx="5" sz="quarter"/>
+            <p:ph type="sldNum" sz="quarter" idx="5"/>
           </p:nvPr>
         </p:nvSpPr>
         <p:spPr/>
@@ -558,7 +352,7 @@
 </file>
 
 <file path=ppt/notesSlides/notesSlide10.xml><?xml version="1.0" encoding="utf-8"?>
-<p:notes xmlns:a="http://schemas.openxmlformats.org/drawingml/2006/main" xmlns:p="http://schemas.openxmlformats.org/presentationml/2006/main" xmlns:r="http://schemas.openxmlformats.org/officeDocument/2006/relationships">
+<p:notes xmlns:a="http://schemas.openxmlformats.org/drawingml/2006/main" xmlns:r="http://schemas.openxmlformats.org/officeDocument/2006/relationships" xmlns:p="http://schemas.openxmlformats.org/presentationml/2006/main">
   <p:cSld>
     <p:spTree>
       <p:nvGrpSpPr>
@@ -578,7 +372,7 @@
         <p:nvSpPr>
           <p:cNvPr id="2" name="Slide Image Placeholder 1"/>
           <p:cNvSpPr>
-            <a:spLocks noGrp="1"/>
+            <a:spLocks noGrp="1" noRot="1" noChangeAspect="1"/>
           </p:cNvSpPr>
           <p:nvPr>
             <p:ph type="sldImg" idx="2"/>
@@ -593,7 +387,7 @@
             <a:spLocks noGrp="1"/>
           </p:cNvSpPr>
           <p:nvPr>
-            <p:ph type="body" idx="3" sz="quarter"/>
+            <p:ph type="body" sz="quarter" idx="3"/>
           </p:nvPr>
         </p:nvSpPr>
         <p:spPr/>
@@ -634,7 +428,7 @@
             <a:spLocks noGrp="1"/>
           </p:cNvSpPr>
           <p:nvPr>
-            <p:ph type="sldNum" idx="5" sz="quarter"/>
+            <p:ph type="sldNum" sz="quarter" idx="5"/>
           </p:nvPr>
         </p:nvSpPr>
         <p:spPr/>
@@ -648,7 +442,7 @@
 </file>
 
 <file path=ppt/notesSlides/notesSlide11.xml><?xml version="1.0" encoding="utf-8"?>
-<p:notes xmlns:a="http://schemas.openxmlformats.org/drawingml/2006/main" xmlns:p="http://schemas.openxmlformats.org/presentationml/2006/main" xmlns:r="http://schemas.openxmlformats.org/officeDocument/2006/relationships">
+<p:notes xmlns:a="http://schemas.openxmlformats.org/drawingml/2006/main" xmlns:r="http://schemas.openxmlformats.org/officeDocument/2006/relationships" xmlns:p="http://schemas.openxmlformats.org/presentationml/2006/main">
   <p:cSld>
     <p:spTree>
       <p:nvGrpSpPr>
@@ -668,7 +462,7 @@
         <p:nvSpPr>
           <p:cNvPr id="2" name="Slide Image Placeholder 1"/>
           <p:cNvSpPr>
-            <a:spLocks noGrp="1"/>
+            <a:spLocks noGrp="1" noRot="1" noChangeAspect="1"/>
           </p:cNvSpPr>
           <p:nvPr>
             <p:ph type="sldImg" idx="2"/>
@@ -683,7 +477,7 @@
             <a:spLocks noGrp="1"/>
           </p:cNvSpPr>
           <p:nvPr>
-            <p:ph type="body" idx="3" sz="quarter"/>
+            <p:ph type="body" sz="quarter" idx="3"/>
           </p:nvPr>
         </p:nvSpPr>
         <p:spPr/>
@@ -692,7 +486,7 @@
           <a:lstStyle/>
           <a:p>
             <a:r>
-              <a:t>The RLHF loop: customer star rating → feedback_collector → analyse_feedback() → EMPATHY_PREFIX injected into next session.</a:t>
+              <a:t>The RLHF loop: customer 👍/👎 → feedback_collector → analyse_feedback() → EMPATHY_PREFIX injected into next session.</a:t>
             </a:r>
           </a:p>
           <a:p>
@@ -724,7 +518,7 @@
             <a:spLocks noGrp="1"/>
           </p:cNvSpPr>
           <p:nvPr>
-            <p:ph type="sldNum" idx="5" sz="quarter"/>
+            <p:ph type="sldNum" sz="quarter" idx="5"/>
           </p:nvPr>
         </p:nvSpPr>
         <p:spPr/>
@@ -738,7 +532,7 @@
 </file>
 
 <file path=ppt/notesSlides/notesSlide12.xml><?xml version="1.0" encoding="utf-8"?>
-<p:notes xmlns:a="http://schemas.openxmlformats.org/drawingml/2006/main" xmlns:p="http://schemas.openxmlformats.org/presentationml/2006/main" xmlns:r="http://schemas.openxmlformats.org/officeDocument/2006/relationships">
+<p:notes xmlns:a="http://schemas.openxmlformats.org/drawingml/2006/main" xmlns:r="http://schemas.openxmlformats.org/officeDocument/2006/relationships" xmlns:p="http://schemas.openxmlformats.org/presentationml/2006/main">
   <p:cSld>
     <p:spTree>
       <p:nvGrpSpPr>
@@ -758,7 +552,7 @@
         <p:nvSpPr>
           <p:cNvPr id="2" name="Slide Image Placeholder 1"/>
           <p:cNvSpPr>
-            <a:spLocks noGrp="1"/>
+            <a:spLocks noGrp="1" noRot="1" noChangeAspect="1"/>
           </p:cNvSpPr>
           <p:nvPr>
             <p:ph type="sldImg" idx="2"/>
@@ -773,7 +567,7 @@
             <a:spLocks noGrp="1"/>
           </p:cNvSpPr>
           <p:nvPr>
-            <p:ph type="body" idx="3" sz="quarter"/>
+            <p:ph type="body" sz="quarter" idx="3"/>
           </p:nvPr>
         </p:nvSpPr>
         <p:spPr/>
@@ -802,7 +596,7 @@
           </a:p>
           <a:p>
             <a:r>
-              <a:t>Star ratings (user_feedback score) and policy_checker violations (policy_compliance score) both flow to Langfuse for trend analysis.</a:t>
+              <a:t>Thumbs feedback (user_feedback score) and policy_checker violations (policy_compliance score) both flow to Langfuse for trend analysis.</a:t>
             </a:r>
           </a:p>
         </p:txBody>
@@ -814,7 +608,7 @@
             <a:spLocks noGrp="1"/>
           </p:cNvSpPr>
           <p:nvPr>
-            <p:ph type="sldNum" idx="5" sz="quarter"/>
+            <p:ph type="sldNum" sz="quarter" idx="5"/>
           </p:nvPr>
         </p:nvSpPr>
         <p:spPr/>
@@ -828,7 +622,7 @@
 </file>
 
 <file path=ppt/notesSlides/notesSlide13.xml><?xml version="1.0" encoding="utf-8"?>
-<p:notes xmlns:a="http://schemas.openxmlformats.org/drawingml/2006/main" xmlns:p="http://schemas.openxmlformats.org/presentationml/2006/main" xmlns:r="http://schemas.openxmlformats.org/officeDocument/2006/relationships">
+<p:notes xmlns:a="http://schemas.openxmlformats.org/drawingml/2006/main" xmlns:r="http://schemas.openxmlformats.org/officeDocument/2006/relationships" xmlns:p="http://schemas.openxmlformats.org/presentationml/2006/main">
   <p:cSld>
     <p:spTree>
       <p:nvGrpSpPr>
@@ -848,7 +642,7 @@
         <p:nvSpPr>
           <p:cNvPr id="2" name="Slide Image Placeholder 1"/>
           <p:cNvSpPr>
-            <a:spLocks noGrp="1"/>
+            <a:spLocks noGrp="1" noRot="1" noChangeAspect="1"/>
           </p:cNvSpPr>
           <p:nvPr>
             <p:ph type="sldImg" idx="2"/>
@@ -863,7 +657,7 @@
             <a:spLocks noGrp="1"/>
           </p:cNvSpPr>
           <p:nvPr>
-            <p:ph type="body" idx="3" sz="quarter"/>
+            <p:ph type="body" sz="quarter" idx="3"/>
           </p:nvPr>
         </p:nvSpPr>
         <p:spPr/>
@@ -904,7 +698,7 @@
             <a:spLocks noGrp="1"/>
           </p:cNvSpPr>
           <p:nvPr>
-            <p:ph type="sldNum" idx="5" sz="quarter"/>
+            <p:ph type="sldNum" sz="quarter" idx="5"/>
           </p:nvPr>
         </p:nvSpPr>
         <p:spPr/>
@@ -918,7 +712,7 @@
 </file>
 
 <file path=ppt/notesSlides/notesSlide14.xml><?xml version="1.0" encoding="utf-8"?>
-<p:notes xmlns:a="http://schemas.openxmlformats.org/drawingml/2006/main" xmlns:p="http://schemas.openxmlformats.org/presentationml/2006/main" xmlns:r="http://schemas.openxmlformats.org/officeDocument/2006/relationships">
+<p:notes xmlns:a="http://schemas.openxmlformats.org/drawingml/2006/main" xmlns:r="http://schemas.openxmlformats.org/officeDocument/2006/relationships" xmlns:p="http://schemas.openxmlformats.org/presentationml/2006/main">
   <p:cSld>
     <p:spTree>
       <p:nvGrpSpPr>
@@ -938,7 +732,7 @@
         <p:nvSpPr>
           <p:cNvPr id="2" name="Slide Image Placeholder 1"/>
           <p:cNvSpPr>
-            <a:spLocks noGrp="1"/>
+            <a:spLocks noGrp="1" noRot="1" noChangeAspect="1"/>
           </p:cNvSpPr>
           <p:nvPr>
             <p:ph type="sldImg" idx="2"/>
@@ -953,7 +747,7 @@
             <a:spLocks noGrp="1"/>
           </p:cNvSpPr>
           <p:nvPr>
-            <p:ph type="body" idx="3" sz="quarter"/>
+            <p:ph type="body" sz="quarter" idx="3"/>
           </p:nvPr>
         </p:nvSpPr>
         <p:spPr/>
@@ -994,7 +788,7 @@
             <a:spLocks noGrp="1"/>
           </p:cNvSpPr>
           <p:nvPr>
-            <p:ph type="sldNum" idx="5" sz="quarter"/>
+            <p:ph type="sldNum" sz="quarter" idx="5"/>
           </p:nvPr>
         </p:nvSpPr>
         <p:spPr/>
@@ -1008,7 +802,7 @@
 </file>
 
 <file path=ppt/notesSlides/notesSlide15.xml><?xml version="1.0" encoding="utf-8"?>
-<p:notes xmlns:a="http://schemas.openxmlformats.org/drawingml/2006/main" xmlns:p="http://schemas.openxmlformats.org/presentationml/2006/main" xmlns:r="http://schemas.openxmlformats.org/officeDocument/2006/relationships">
+<p:notes xmlns:a="http://schemas.openxmlformats.org/drawingml/2006/main" xmlns:r="http://schemas.openxmlformats.org/officeDocument/2006/relationships" xmlns:p="http://schemas.openxmlformats.org/presentationml/2006/main">
   <p:cSld>
     <p:spTree>
       <p:nvGrpSpPr>
@@ -1028,7 +822,7 @@
         <p:nvSpPr>
           <p:cNvPr id="2" name="Slide Image Placeholder 1"/>
           <p:cNvSpPr>
-            <a:spLocks noGrp="1"/>
+            <a:spLocks noGrp="1" noRot="1" noChangeAspect="1"/>
           </p:cNvSpPr>
           <p:nvPr>
             <p:ph type="sldImg" idx="2"/>
@@ -1043,7 +837,7 @@
             <a:spLocks noGrp="1"/>
           </p:cNvSpPr>
           <p:nvPr>
-            <p:ph type="body" idx="3" sz="quarter"/>
+            <p:ph type="body" sz="quarter" idx="3"/>
           </p:nvPr>
         </p:nvSpPr>
         <p:spPr/>
@@ -1084,7 +878,7 @@
             <a:spLocks noGrp="1"/>
           </p:cNvSpPr>
           <p:nvPr>
-            <p:ph type="sldNum" idx="5" sz="quarter"/>
+            <p:ph type="sldNum" sz="quarter" idx="5"/>
           </p:nvPr>
         </p:nvSpPr>
         <p:spPr/>
@@ -1098,7 +892,7 @@
 </file>
 
 <file path=ppt/notesSlides/notesSlide16.xml><?xml version="1.0" encoding="utf-8"?>
-<p:notes xmlns:a="http://schemas.openxmlformats.org/drawingml/2006/main" xmlns:p="http://schemas.openxmlformats.org/presentationml/2006/main" xmlns:r="http://schemas.openxmlformats.org/officeDocument/2006/relationships">
+<p:notes xmlns:a="http://schemas.openxmlformats.org/drawingml/2006/main" xmlns:r="http://schemas.openxmlformats.org/officeDocument/2006/relationships" xmlns:p="http://schemas.openxmlformats.org/presentationml/2006/main">
   <p:cSld>
     <p:spTree>
       <p:nvGrpSpPr>
@@ -1118,7 +912,7 @@
         <p:nvSpPr>
           <p:cNvPr id="2" name="Slide Image Placeholder 1"/>
           <p:cNvSpPr>
-            <a:spLocks noGrp="1"/>
+            <a:spLocks noGrp="1" noRot="1" noChangeAspect="1"/>
           </p:cNvSpPr>
           <p:nvPr>
             <p:ph type="sldImg" idx="2"/>
@@ -1133,7 +927,7 @@
             <a:spLocks noGrp="1"/>
           </p:cNvSpPr>
           <p:nvPr>
-            <p:ph type="body" idx="3" sz="quarter"/>
+            <p:ph type="body" sz="quarter" idx="3"/>
           </p:nvPr>
         </p:nvSpPr>
         <p:spPr/>
@@ -1184,7 +978,7 @@
             <a:spLocks noGrp="1"/>
           </p:cNvSpPr>
           <p:nvPr>
-            <p:ph type="sldNum" idx="5" sz="quarter"/>
+            <p:ph type="sldNum" sz="quarter" idx="5"/>
           </p:nvPr>
         </p:nvSpPr>
         <p:spPr/>
@@ -1198,7 +992,7 @@
 </file>
 
 <file path=ppt/notesSlides/notesSlide2.xml><?xml version="1.0" encoding="utf-8"?>
-<p:notes xmlns:a="http://schemas.openxmlformats.org/drawingml/2006/main" xmlns:p="http://schemas.openxmlformats.org/presentationml/2006/main" xmlns:r="http://schemas.openxmlformats.org/officeDocument/2006/relationships">
+<p:notes xmlns:a="http://schemas.openxmlformats.org/drawingml/2006/main" xmlns:r="http://schemas.openxmlformats.org/officeDocument/2006/relationships" xmlns:p="http://schemas.openxmlformats.org/presentationml/2006/main">
   <p:cSld>
     <p:spTree>
       <p:nvGrpSpPr>
@@ -1218,7 +1012,7 @@
         <p:nvSpPr>
           <p:cNvPr id="2" name="Slide Image Placeholder 1"/>
           <p:cNvSpPr>
-            <a:spLocks noGrp="1"/>
+            <a:spLocks noGrp="1" noRot="1" noChangeAspect="1"/>
           </p:cNvSpPr>
           <p:nvPr>
             <p:ph type="sldImg" idx="2"/>
@@ -1233,7 +1027,7 @@
             <a:spLocks noGrp="1"/>
           </p:cNvSpPr>
           <p:nvPr>
-            <p:ph type="body" idx="3" sz="quarter"/>
+            <p:ph type="body" sz="quarter" idx="3"/>
           </p:nvPr>
         </p:nvSpPr>
         <p:spPr/>
@@ -1274,7 +1068,7 @@
             <a:spLocks noGrp="1"/>
           </p:cNvSpPr>
           <p:nvPr>
-            <p:ph type="sldNum" idx="5" sz="quarter"/>
+            <p:ph type="sldNum" sz="quarter" idx="5"/>
           </p:nvPr>
         </p:nvSpPr>
         <p:spPr/>
@@ -1288,7 +1082,7 @@
 </file>
 
 <file path=ppt/notesSlides/notesSlide3.xml><?xml version="1.0" encoding="utf-8"?>
-<p:notes xmlns:a="http://schemas.openxmlformats.org/drawingml/2006/main" xmlns:p="http://schemas.openxmlformats.org/presentationml/2006/main" xmlns:r="http://schemas.openxmlformats.org/officeDocument/2006/relationships">
+<p:notes xmlns:a="http://schemas.openxmlformats.org/drawingml/2006/main" xmlns:r="http://schemas.openxmlformats.org/officeDocument/2006/relationships" xmlns:p="http://schemas.openxmlformats.org/presentationml/2006/main">
   <p:cSld>
     <p:spTree>
       <p:nvGrpSpPr>
@@ -1308,7 +1102,7 @@
         <p:nvSpPr>
           <p:cNvPr id="2" name="Slide Image Placeholder 1"/>
           <p:cNvSpPr>
-            <a:spLocks noGrp="1"/>
+            <a:spLocks noGrp="1" noRot="1" noChangeAspect="1"/>
           </p:cNvSpPr>
           <p:nvPr>
             <p:ph type="sldImg" idx="2"/>
@@ -1323,7 +1117,7 @@
             <a:spLocks noGrp="1"/>
           </p:cNvSpPr>
           <p:nvPr>
-            <p:ph type="body" idx="3" sz="quarter"/>
+            <p:ph type="body" sz="quarter" idx="3"/>
           </p:nvPr>
         </p:nvSpPr>
         <p:spPr/>
@@ -1364,7 +1158,7 @@
             <a:spLocks noGrp="1"/>
           </p:cNvSpPr>
           <p:nvPr>
-            <p:ph type="sldNum" idx="5" sz="quarter"/>
+            <p:ph type="sldNum" sz="quarter" idx="5"/>
           </p:nvPr>
         </p:nvSpPr>
         <p:spPr/>
@@ -1378,7 +1172,7 @@
 </file>
 
 <file path=ppt/notesSlides/notesSlide4.xml><?xml version="1.0" encoding="utf-8"?>
-<p:notes xmlns:a="http://schemas.openxmlformats.org/drawingml/2006/main" xmlns:p="http://schemas.openxmlformats.org/presentationml/2006/main" xmlns:r="http://schemas.openxmlformats.org/officeDocument/2006/relationships">
+<p:notes xmlns:a="http://schemas.openxmlformats.org/drawingml/2006/main" xmlns:r="http://schemas.openxmlformats.org/officeDocument/2006/relationships" xmlns:p="http://schemas.openxmlformats.org/presentationml/2006/main">
   <p:cSld>
     <p:spTree>
       <p:nvGrpSpPr>
@@ -1398,7 +1192,7 @@
         <p:nvSpPr>
           <p:cNvPr id="2" name="Slide Image Placeholder 1"/>
           <p:cNvSpPr>
-            <a:spLocks noGrp="1"/>
+            <a:spLocks noGrp="1" noRot="1" noChangeAspect="1"/>
           </p:cNvSpPr>
           <p:nvPr>
             <p:ph type="sldImg" idx="2"/>
@@ -1413,7 +1207,7 @@
             <a:spLocks noGrp="1"/>
           </p:cNvSpPr>
           <p:nvPr>
-            <p:ph type="body" idx="3" sz="quarter"/>
+            <p:ph type="body" sz="quarter" idx="3"/>
           </p:nvPr>
         </p:nvSpPr>
         <p:spPr/>
@@ -1459,7 +1253,7 @@
             <a:spLocks noGrp="1"/>
           </p:cNvSpPr>
           <p:nvPr>
-            <p:ph type="sldNum" idx="5" sz="quarter"/>
+            <p:ph type="sldNum" sz="quarter" idx="5"/>
           </p:nvPr>
         </p:nvSpPr>
         <p:spPr/>
@@ -1473,7 +1267,7 @@
 </file>
 
 <file path=ppt/notesSlides/notesSlide5.xml><?xml version="1.0" encoding="utf-8"?>
-<p:notes xmlns:a="http://schemas.openxmlformats.org/drawingml/2006/main" xmlns:p="http://schemas.openxmlformats.org/presentationml/2006/main" xmlns:r="http://schemas.openxmlformats.org/officeDocument/2006/relationships">
+<p:notes xmlns:a="http://schemas.openxmlformats.org/drawingml/2006/main" xmlns:r="http://schemas.openxmlformats.org/officeDocument/2006/relationships" xmlns:p="http://schemas.openxmlformats.org/presentationml/2006/main">
   <p:cSld>
     <p:spTree>
       <p:nvGrpSpPr>
@@ -1493,7 +1287,7 @@
         <p:nvSpPr>
           <p:cNvPr id="2" name="Slide Image Placeholder 1"/>
           <p:cNvSpPr>
-            <a:spLocks noGrp="1"/>
+            <a:spLocks noGrp="1" noRot="1" noChangeAspect="1"/>
           </p:cNvSpPr>
           <p:nvPr>
             <p:ph type="sldImg" idx="2"/>
@@ -1508,7 +1302,7 @@
             <a:spLocks noGrp="1"/>
           </p:cNvSpPr>
           <p:nvPr>
-            <p:ph type="body" idx="3" sz="quarter"/>
+            <p:ph type="body" sz="quarter" idx="3"/>
           </p:nvPr>
         </p:nvSpPr>
         <p:spPr/>
@@ -1554,7 +1348,7 @@
             <a:spLocks noGrp="1"/>
           </p:cNvSpPr>
           <p:nvPr>
-            <p:ph type="sldNum" idx="5" sz="quarter"/>
+            <p:ph type="sldNum" sz="quarter" idx="5"/>
           </p:nvPr>
         </p:nvSpPr>
         <p:spPr/>
@@ -1568,7 +1362,7 @@
 </file>
 
 <file path=ppt/notesSlides/notesSlide6.xml><?xml version="1.0" encoding="utf-8"?>
-<p:notes xmlns:a="http://schemas.openxmlformats.org/drawingml/2006/main" xmlns:p="http://schemas.openxmlformats.org/presentationml/2006/main" xmlns:r="http://schemas.openxmlformats.org/officeDocument/2006/relationships">
+<p:notes xmlns:a="http://schemas.openxmlformats.org/drawingml/2006/main" xmlns:r="http://schemas.openxmlformats.org/officeDocument/2006/relationships" xmlns:p="http://schemas.openxmlformats.org/presentationml/2006/main">
   <p:cSld>
     <p:spTree>
       <p:nvGrpSpPr>
@@ -1588,7 +1382,7 @@
         <p:nvSpPr>
           <p:cNvPr id="2" name="Slide Image Placeholder 1"/>
           <p:cNvSpPr>
-            <a:spLocks noGrp="1"/>
+            <a:spLocks noGrp="1" noRot="1" noChangeAspect="1"/>
           </p:cNvSpPr>
           <p:nvPr>
             <p:ph type="sldImg" idx="2"/>
@@ -1603,7 +1397,7 @@
             <a:spLocks noGrp="1"/>
           </p:cNvSpPr>
           <p:nvPr>
-            <p:ph type="body" idx="3" sz="quarter"/>
+            <p:ph type="body" sz="quarter" idx="3"/>
           </p:nvPr>
         </p:nvSpPr>
         <p:spPr/>
@@ -1644,7 +1438,7 @@
             <a:spLocks noGrp="1"/>
           </p:cNvSpPr>
           <p:nvPr>
-            <p:ph type="sldNum" idx="5" sz="quarter"/>
+            <p:ph type="sldNum" sz="quarter" idx="5"/>
           </p:nvPr>
         </p:nvSpPr>
         <p:spPr/>
@@ -1658,7 +1452,7 @@
 </file>
 
 <file path=ppt/notesSlides/notesSlide7.xml><?xml version="1.0" encoding="utf-8"?>
-<p:notes xmlns:a="http://schemas.openxmlformats.org/drawingml/2006/main" xmlns:p="http://schemas.openxmlformats.org/presentationml/2006/main" xmlns:r="http://schemas.openxmlformats.org/officeDocument/2006/relationships">
+<p:notes xmlns:a="http://schemas.openxmlformats.org/drawingml/2006/main" xmlns:r="http://schemas.openxmlformats.org/officeDocument/2006/relationships" xmlns:p="http://schemas.openxmlformats.org/presentationml/2006/main">
   <p:cSld>
     <p:spTree>
       <p:nvGrpSpPr>
@@ -1678,7 +1472,7 @@
         <p:nvSpPr>
           <p:cNvPr id="2" name="Slide Image Placeholder 1"/>
           <p:cNvSpPr>
-            <a:spLocks noGrp="1"/>
+            <a:spLocks noGrp="1" noRot="1" noChangeAspect="1"/>
           </p:cNvSpPr>
           <p:nvPr>
             <p:ph type="sldImg" idx="2"/>
@@ -1693,7 +1487,7 @@
             <a:spLocks noGrp="1"/>
           </p:cNvSpPr>
           <p:nvPr>
-            <p:ph type="body" idx="3" sz="quarter"/>
+            <p:ph type="body" sz="quarter" idx="3"/>
           </p:nvPr>
         </p:nvSpPr>
         <p:spPr/>
@@ -1739,7 +1533,7 @@
             <a:spLocks noGrp="1"/>
           </p:cNvSpPr>
           <p:nvPr>
-            <p:ph type="sldNum" idx="5" sz="quarter"/>
+            <p:ph type="sldNum" sz="quarter" idx="5"/>
           </p:nvPr>
         </p:nvSpPr>
         <p:spPr/>
@@ -1753,7 +1547,7 @@
 </file>
 
 <file path=ppt/notesSlides/notesSlide8.xml><?xml version="1.0" encoding="utf-8"?>
-<p:notes xmlns:a="http://schemas.openxmlformats.org/drawingml/2006/main" xmlns:p="http://schemas.openxmlformats.org/presentationml/2006/main" xmlns:r="http://schemas.openxmlformats.org/officeDocument/2006/relationships">
+<p:notes xmlns:a="http://schemas.openxmlformats.org/drawingml/2006/main" xmlns:r="http://schemas.openxmlformats.org/officeDocument/2006/relationships" xmlns:p="http://schemas.openxmlformats.org/presentationml/2006/main">
   <p:cSld>
     <p:spTree>
       <p:nvGrpSpPr>
@@ -1773,7 +1567,7 @@
         <p:nvSpPr>
           <p:cNvPr id="2" name="Slide Image Placeholder 1"/>
           <p:cNvSpPr>
-            <a:spLocks noGrp="1"/>
+            <a:spLocks noGrp="1" noRot="1" noChangeAspect="1"/>
           </p:cNvSpPr>
           <p:nvPr>
             <p:ph type="sldImg" idx="2"/>
@@ -1788,7 +1582,7 @@
             <a:spLocks noGrp="1"/>
           </p:cNvSpPr>
           <p:nvPr>
-            <p:ph type="body" idx="3" sz="quarter"/>
+            <p:ph type="body" sz="quarter" idx="3"/>
           </p:nvPr>
         </p:nvSpPr>
         <p:spPr/>
@@ -1829,7 +1623,7 @@
             <a:spLocks noGrp="1"/>
           </p:cNvSpPr>
           <p:nvPr>
-            <p:ph type="sldNum" idx="5" sz="quarter"/>
+            <p:ph type="sldNum" sz="quarter" idx="5"/>
           </p:nvPr>
         </p:nvSpPr>
         <p:spPr/>
@@ -1843,7 +1637,7 @@
 </file>
 
 <file path=ppt/notesSlides/notesSlide9.xml><?xml version="1.0" encoding="utf-8"?>
-<p:notes xmlns:a="http://schemas.openxmlformats.org/drawingml/2006/main" xmlns:p="http://schemas.openxmlformats.org/presentationml/2006/main" xmlns:r="http://schemas.openxmlformats.org/officeDocument/2006/relationships">
+<p:notes xmlns:a="http://schemas.openxmlformats.org/drawingml/2006/main" xmlns:r="http://schemas.openxmlformats.org/officeDocument/2006/relationships" xmlns:p="http://schemas.openxmlformats.org/presentationml/2006/main">
   <p:cSld>
     <p:spTree>
       <p:nvGrpSpPr>
@@ -1863,7 +1657,7 @@
         <p:nvSpPr>
           <p:cNvPr id="2" name="Slide Image Placeholder 1"/>
           <p:cNvSpPr>
-            <a:spLocks noGrp="1"/>
+            <a:spLocks noGrp="1" noRot="1" noChangeAspect="1"/>
           </p:cNvSpPr>
           <p:nvPr>
             <p:ph type="sldImg" idx="2"/>
@@ -1878,7 +1672,7 @@
             <a:spLocks noGrp="1"/>
           </p:cNvSpPr>
           <p:nvPr>
-            <p:ph type="body" idx="3" sz="quarter"/>
+            <p:ph type="body" sz="quarter" idx="3"/>
           </p:nvPr>
         </p:nvSpPr>
         <p:spPr/>
@@ -1919,7 +1713,7 @@
             <a:spLocks noGrp="1"/>
           </p:cNvSpPr>
           <p:nvPr>
-            <p:ph type="sldNum" idx="5" sz="quarter"/>
+            <p:ph type="sldNum" sz="quarter" idx="5"/>
           </p:nvPr>
         </p:nvSpPr>
         <p:spPr/>
@@ -1970,10 +1764,9 @@
           <a:lstStyle/>
           <a:p>
             <a:r>
-              <a:rPr lang="en-US" smtClean="0"/>
+              <a:rPr lang="en-US"/>
               <a:t>Click to edit Master title style</a:t>
             </a:r>
-            <a:endParaRPr lang="en-US"/>
           </a:p>
         </p:txBody>
       </p:sp>
@@ -2089,10 +1882,9 @@
           </a:lstStyle>
           <a:p>
             <a:r>
-              <a:rPr lang="en-US" smtClean="0"/>
+              <a:rPr lang="en-US"/>
               <a:t>Click to edit Master subtitle style</a:t>
             </a:r>
-            <a:endParaRPr lang="en-US"/>
           </a:p>
         </p:txBody>
       </p:sp>
@@ -2113,7 +1905,7 @@
           <a:p>
             <a:fld id="{5BCAD085-E8A6-8845-BD4E-CB4CCA059FC4}" type="datetimeFigureOut">
               <a:rPr lang="en-US" smtClean="0"/>
-              <a:t>1/27/13</a:t>
+              <a:t>6/15/26</a:t>
             </a:fld>
             <a:endParaRPr lang="en-US"/>
           </a:p>
@@ -2207,10 +1999,9 @@
           <a:lstStyle/>
           <a:p>
             <a:r>
-              <a:rPr lang="en-US" smtClean="0"/>
+              <a:rPr lang="en-US"/>
               <a:t>Click to edit Master title style</a:t>
             </a:r>
-            <a:endParaRPr lang="en-US"/>
           </a:p>
         </p:txBody>
       </p:sp>
@@ -2231,38 +2022,37 @@
           <a:p>
             <a:pPr lvl="0"/>
             <a:r>
-              <a:rPr lang="en-US" smtClean="0"/>
+              <a:rPr lang="en-US"/>
               <a:t>Click to edit Master text styles</a:t>
             </a:r>
           </a:p>
           <a:p>
             <a:pPr lvl="1"/>
             <a:r>
-              <a:rPr lang="en-US" smtClean="0"/>
+              <a:rPr lang="en-US"/>
               <a:t>Second level</a:t>
             </a:r>
           </a:p>
           <a:p>
             <a:pPr lvl="2"/>
             <a:r>
-              <a:rPr lang="en-US" smtClean="0"/>
+              <a:rPr lang="en-US"/>
               <a:t>Third level</a:t>
             </a:r>
           </a:p>
           <a:p>
             <a:pPr lvl="3"/>
             <a:r>
-              <a:rPr lang="en-US" smtClean="0"/>
+              <a:rPr lang="en-US"/>
               <a:t>Fourth level</a:t>
             </a:r>
           </a:p>
           <a:p>
             <a:pPr lvl="4"/>
             <a:r>
-              <a:rPr lang="en-US" smtClean="0"/>
+              <a:rPr lang="en-US"/>
               <a:t>Fifth level</a:t>
             </a:r>
-            <a:endParaRPr lang="en-US"/>
           </a:p>
         </p:txBody>
       </p:sp>
@@ -2283,7 +2073,7 @@
           <a:p>
             <a:fld id="{5BCAD085-E8A6-8845-BD4E-CB4CCA059FC4}" type="datetimeFigureOut">
               <a:rPr lang="en-US" smtClean="0"/>
-              <a:t>1/27/13</a:t>
+              <a:t>6/15/26</a:t>
             </a:fld>
             <a:endParaRPr lang="en-US"/>
           </a:p>
@@ -2382,10 +2172,9 @@
           <a:lstStyle/>
           <a:p>
             <a:r>
-              <a:rPr lang="en-US" smtClean="0"/>
+              <a:rPr lang="en-US"/>
               <a:t>Click to edit Master title style</a:t>
             </a:r>
-            <a:endParaRPr lang="en-US"/>
           </a:p>
         </p:txBody>
       </p:sp>
@@ -2411,38 +2200,37 @@
           <a:p>
             <a:pPr lvl="0"/>
             <a:r>
-              <a:rPr lang="en-US" smtClean="0"/>
+              <a:rPr lang="en-US"/>
               <a:t>Click to edit Master text styles</a:t>
             </a:r>
           </a:p>
           <a:p>
             <a:pPr lvl="1"/>
             <a:r>
-              <a:rPr lang="en-US" smtClean="0"/>
+              <a:rPr lang="en-US"/>
               <a:t>Second level</a:t>
             </a:r>
           </a:p>
           <a:p>
             <a:pPr lvl="2"/>
             <a:r>
-              <a:rPr lang="en-US" smtClean="0"/>
+              <a:rPr lang="en-US"/>
               <a:t>Third level</a:t>
             </a:r>
           </a:p>
           <a:p>
             <a:pPr lvl="3"/>
             <a:r>
-              <a:rPr lang="en-US" smtClean="0"/>
+              <a:rPr lang="en-US"/>
               <a:t>Fourth level</a:t>
             </a:r>
           </a:p>
           <a:p>
             <a:pPr lvl="4"/>
             <a:r>
-              <a:rPr lang="en-US" smtClean="0"/>
+              <a:rPr lang="en-US"/>
               <a:t>Fifth level</a:t>
             </a:r>
-            <a:endParaRPr lang="en-US"/>
           </a:p>
         </p:txBody>
       </p:sp>
@@ -2463,7 +2251,7 @@
           <a:p>
             <a:fld id="{5BCAD085-E8A6-8845-BD4E-CB4CCA059FC4}" type="datetimeFigureOut">
               <a:rPr lang="en-US" smtClean="0"/>
-              <a:t>1/27/13</a:t>
+              <a:t>6/15/26</a:t>
             </a:fld>
             <a:endParaRPr lang="en-US"/>
           </a:p>
@@ -2557,10 +2345,9 @@
           <a:lstStyle/>
           <a:p>
             <a:r>
-              <a:rPr lang="en-US" smtClean="0"/>
+              <a:rPr lang="en-US"/>
               <a:t>Click to edit Master title style</a:t>
             </a:r>
-            <a:endParaRPr lang="en-US"/>
           </a:p>
         </p:txBody>
       </p:sp>
@@ -2581,38 +2368,37 @@
           <a:p>
             <a:pPr lvl="0"/>
             <a:r>
-              <a:rPr lang="en-US" smtClean="0"/>
+              <a:rPr lang="en-US"/>
               <a:t>Click to edit Master text styles</a:t>
             </a:r>
           </a:p>
           <a:p>
             <a:pPr lvl="1"/>
             <a:r>
-              <a:rPr lang="en-US" smtClean="0"/>
+              <a:rPr lang="en-US"/>
               <a:t>Second level</a:t>
             </a:r>
           </a:p>
           <a:p>
             <a:pPr lvl="2"/>
             <a:r>
-              <a:rPr lang="en-US" smtClean="0"/>
+              <a:rPr lang="en-US"/>
               <a:t>Third level</a:t>
             </a:r>
           </a:p>
           <a:p>
             <a:pPr lvl="3"/>
             <a:r>
-              <a:rPr lang="en-US" smtClean="0"/>
+              <a:rPr lang="en-US"/>
               <a:t>Fourth level</a:t>
             </a:r>
           </a:p>
           <a:p>
             <a:pPr lvl="4"/>
             <a:r>
-              <a:rPr lang="en-US" smtClean="0"/>
+              <a:rPr lang="en-US"/>
               <a:t>Fifth level</a:t>
             </a:r>
-            <a:endParaRPr lang="en-US"/>
           </a:p>
         </p:txBody>
       </p:sp>
@@ -2633,7 +2419,7 @@
           <a:p>
             <a:fld id="{5BCAD085-E8A6-8845-BD4E-CB4CCA059FC4}" type="datetimeFigureOut">
               <a:rPr lang="en-US" smtClean="0"/>
-              <a:t>1/27/13</a:t>
+              <a:t>6/15/26</a:t>
             </a:fld>
             <a:endParaRPr lang="en-US"/>
           </a:p>
@@ -2736,10 +2522,9 @@
           </a:lstStyle>
           <a:p>
             <a:r>
-              <a:rPr lang="en-US" smtClean="0"/>
+              <a:rPr lang="en-US"/>
               <a:t>Click to edit Master title style</a:t>
             </a:r>
-            <a:endParaRPr lang="en-US"/>
           </a:p>
         </p:txBody>
       </p:sp>
@@ -2856,7 +2641,7 @@
           <a:p>
             <a:pPr lvl="0"/>
             <a:r>
-              <a:rPr lang="en-US" smtClean="0"/>
+              <a:rPr lang="en-US"/>
               <a:t>Click to edit Master text styles</a:t>
             </a:r>
           </a:p>
@@ -2879,7 +2664,7 @@
           <a:p>
             <a:fld id="{5BCAD085-E8A6-8845-BD4E-CB4CCA059FC4}" type="datetimeFigureOut">
               <a:rPr lang="en-US" smtClean="0"/>
-              <a:t>1/27/13</a:t>
+              <a:t>6/15/26</a:t>
             </a:fld>
             <a:endParaRPr lang="en-US"/>
           </a:p>
@@ -2973,10 +2758,9 @@
           <a:lstStyle/>
           <a:p>
             <a:r>
-              <a:rPr lang="en-US" smtClean="0"/>
+              <a:rPr lang="en-US"/>
               <a:t>Click to edit Master title style</a:t>
             </a:r>
-            <a:endParaRPr lang="en-US"/>
           </a:p>
         </p:txBody>
       </p:sp>
@@ -3030,38 +2814,37 @@
           <a:p>
             <a:pPr lvl="0"/>
             <a:r>
-              <a:rPr lang="en-US" smtClean="0"/>
+              <a:rPr lang="en-US"/>
               <a:t>Click to edit Master text styles</a:t>
             </a:r>
           </a:p>
           <a:p>
             <a:pPr lvl="1"/>
             <a:r>
-              <a:rPr lang="en-US" smtClean="0"/>
+              <a:rPr lang="en-US"/>
               <a:t>Second level</a:t>
             </a:r>
           </a:p>
           <a:p>
             <a:pPr lvl="2"/>
             <a:r>
-              <a:rPr lang="en-US" smtClean="0"/>
+              <a:rPr lang="en-US"/>
               <a:t>Third level</a:t>
             </a:r>
           </a:p>
           <a:p>
             <a:pPr lvl="3"/>
             <a:r>
-              <a:rPr lang="en-US" smtClean="0"/>
+              <a:rPr lang="en-US"/>
               <a:t>Fourth level</a:t>
             </a:r>
           </a:p>
           <a:p>
             <a:pPr lvl="4"/>
             <a:r>
-              <a:rPr lang="en-US" smtClean="0"/>
+              <a:rPr lang="en-US"/>
               <a:t>Fifth level</a:t>
             </a:r>
-            <a:endParaRPr lang="en-US"/>
           </a:p>
         </p:txBody>
       </p:sp>
@@ -3115,38 +2898,37 @@
           <a:p>
             <a:pPr lvl="0"/>
             <a:r>
-              <a:rPr lang="en-US" smtClean="0"/>
+              <a:rPr lang="en-US"/>
               <a:t>Click to edit Master text styles</a:t>
             </a:r>
           </a:p>
           <a:p>
             <a:pPr lvl="1"/>
             <a:r>
-              <a:rPr lang="en-US" smtClean="0"/>
+              <a:rPr lang="en-US"/>
               <a:t>Second level</a:t>
             </a:r>
           </a:p>
           <a:p>
             <a:pPr lvl="2"/>
             <a:r>
-              <a:rPr lang="en-US" smtClean="0"/>
+              <a:rPr lang="en-US"/>
               <a:t>Third level</a:t>
             </a:r>
           </a:p>
           <a:p>
             <a:pPr lvl="3"/>
             <a:r>
-              <a:rPr lang="en-US" smtClean="0"/>
+              <a:rPr lang="en-US"/>
               <a:t>Fourth level</a:t>
             </a:r>
           </a:p>
           <a:p>
             <a:pPr lvl="4"/>
             <a:r>
-              <a:rPr lang="en-US" smtClean="0"/>
+              <a:rPr lang="en-US"/>
               <a:t>Fifth level</a:t>
             </a:r>
-            <a:endParaRPr lang="en-US"/>
           </a:p>
         </p:txBody>
       </p:sp>
@@ -3167,7 +2949,7 @@
           <a:p>
             <a:fld id="{5BCAD085-E8A6-8845-BD4E-CB4CCA059FC4}" type="datetimeFigureOut">
               <a:rPr lang="en-US" smtClean="0"/>
-              <a:t>1/27/13</a:t>
+              <a:t>6/15/26</a:t>
             </a:fld>
             <a:endParaRPr lang="en-US"/>
           </a:p>
@@ -3265,10 +3047,9 @@
           </a:lstStyle>
           <a:p>
             <a:r>
-              <a:rPr lang="en-US" smtClean="0"/>
+              <a:rPr lang="en-US"/>
               <a:t>Click to edit Master title style</a:t>
             </a:r>
-            <a:endParaRPr lang="en-US"/>
           </a:p>
         </p:txBody>
       </p:sp>
@@ -3331,7 +3112,7 @@
           <a:p>
             <a:pPr lvl="0"/>
             <a:r>
-              <a:rPr lang="en-US" smtClean="0"/>
+              <a:rPr lang="en-US"/>
               <a:t>Click to edit Master text styles</a:t>
             </a:r>
           </a:p>
@@ -3387,38 +3168,37 @@
           <a:p>
             <a:pPr lvl="0"/>
             <a:r>
-              <a:rPr lang="en-US" smtClean="0"/>
+              <a:rPr lang="en-US"/>
               <a:t>Click to edit Master text styles</a:t>
             </a:r>
           </a:p>
           <a:p>
             <a:pPr lvl="1"/>
             <a:r>
-              <a:rPr lang="en-US" smtClean="0"/>
+              <a:rPr lang="en-US"/>
               <a:t>Second level</a:t>
             </a:r>
           </a:p>
           <a:p>
             <a:pPr lvl="2"/>
             <a:r>
-              <a:rPr lang="en-US" smtClean="0"/>
+              <a:rPr lang="en-US"/>
               <a:t>Third level</a:t>
             </a:r>
           </a:p>
           <a:p>
             <a:pPr lvl="3"/>
             <a:r>
-              <a:rPr lang="en-US" smtClean="0"/>
+              <a:rPr lang="en-US"/>
               <a:t>Fourth level</a:t>
             </a:r>
           </a:p>
           <a:p>
             <a:pPr lvl="4"/>
             <a:r>
-              <a:rPr lang="en-US" smtClean="0"/>
+              <a:rPr lang="en-US"/>
               <a:t>Fifth level</a:t>
             </a:r>
-            <a:endParaRPr lang="en-US"/>
           </a:p>
         </p:txBody>
       </p:sp>
@@ -3481,7 +3261,7 @@
           <a:p>
             <a:pPr lvl="0"/>
             <a:r>
-              <a:rPr lang="en-US" smtClean="0"/>
+              <a:rPr lang="en-US"/>
               <a:t>Click to edit Master text styles</a:t>
             </a:r>
           </a:p>
@@ -3537,38 +3317,37 @@
           <a:p>
             <a:pPr lvl="0"/>
             <a:r>
-              <a:rPr lang="en-US" smtClean="0"/>
+              <a:rPr lang="en-US"/>
               <a:t>Click to edit Master text styles</a:t>
             </a:r>
           </a:p>
           <a:p>
             <a:pPr lvl="1"/>
             <a:r>
-              <a:rPr lang="en-US" smtClean="0"/>
+              <a:rPr lang="en-US"/>
               <a:t>Second level</a:t>
             </a:r>
           </a:p>
           <a:p>
             <a:pPr lvl="2"/>
             <a:r>
-              <a:rPr lang="en-US" smtClean="0"/>
+              <a:rPr lang="en-US"/>
               <a:t>Third level</a:t>
             </a:r>
           </a:p>
           <a:p>
             <a:pPr lvl="3"/>
             <a:r>
-              <a:rPr lang="en-US" smtClean="0"/>
+              <a:rPr lang="en-US"/>
               <a:t>Fourth level</a:t>
             </a:r>
           </a:p>
           <a:p>
             <a:pPr lvl="4"/>
             <a:r>
-              <a:rPr lang="en-US" smtClean="0"/>
+              <a:rPr lang="en-US"/>
               <a:t>Fifth level</a:t>
             </a:r>
-            <a:endParaRPr lang="en-US"/>
           </a:p>
         </p:txBody>
       </p:sp>
@@ -3589,7 +3368,7 @@
           <a:p>
             <a:fld id="{5BCAD085-E8A6-8845-BD4E-CB4CCA059FC4}" type="datetimeFigureOut">
               <a:rPr lang="en-US" smtClean="0"/>
-              <a:t>1/27/13</a:t>
+              <a:t>6/15/26</a:t>
             </a:fld>
             <a:endParaRPr lang="en-US"/>
           </a:p>
@@ -3683,10 +3462,9 @@
           <a:lstStyle/>
           <a:p>
             <a:r>
-              <a:rPr lang="en-US" smtClean="0"/>
+              <a:rPr lang="en-US"/>
               <a:t>Click to edit Master title style</a:t>
             </a:r>
-            <a:endParaRPr lang="en-US"/>
           </a:p>
         </p:txBody>
       </p:sp>
@@ -3707,7 +3485,7 @@
           <a:p>
             <a:fld id="{5BCAD085-E8A6-8845-BD4E-CB4CCA059FC4}" type="datetimeFigureOut">
               <a:rPr lang="en-US" smtClean="0"/>
-              <a:t>1/27/13</a:t>
+              <a:t>6/15/26</a:t>
             </a:fld>
             <a:endParaRPr lang="en-US"/>
           </a:p>
@@ -3802,7 +3580,7 @@
           <a:p>
             <a:fld id="{5BCAD085-E8A6-8845-BD4E-CB4CCA059FC4}" type="datetimeFigureOut">
               <a:rPr lang="en-US" smtClean="0"/>
-              <a:t>1/27/13</a:t>
+              <a:t>6/15/26</a:t>
             </a:fld>
             <a:endParaRPr lang="en-US"/>
           </a:p>
@@ -3905,10 +3683,9 @@
           </a:lstStyle>
           <a:p>
             <a:r>
-              <a:rPr lang="en-US" smtClean="0"/>
+              <a:rPr lang="en-US"/>
               <a:t>Click to edit Master title style</a:t>
             </a:r>
-            <a:endParaRPr lang="en-US"/>
           </a:p>
         </p:txBody>
       </p:sp>
@@ -3962,38 +3739,37 @@
           <a:p>
             <a:pPr lvl="0"/>
             <a:r>
-              <a:rPr lang="en-US" smtClean="0"/>
+              <a:rPr lang="en-US"/>
               <a:t>Click to edit Master text styles</a:t>
             </a:r>
           </a:p>
           <a:p>
             <a:pPr lvl="1"/>
             <a:r>
-              <a:rPr lang="en-US" smtClean="0"/>
+              <a:rPr lang="en-US"/>
               <a:t>Second level</a:t>
             </a:r>
           </a:p>
           <a:p>
             <a:pPr lvl="2"/>
             <a:r>
-              <a:rPr lang="en-US" smtClean="0"/>
+              <a:rPr lang="en-US"/>
               <a:t>Third level</a:t>
             </a:r>
           </a:p>
           <a:p>
             <a:pPr lvl="3"/>
             <a:r>
-              <a:rPr lang="en-US" smtClean="0"/>
+              <a:rPr lang="en-US"/>
               <a:t>Fourth level</a:t>
             </a:r>
           </a:p>
           <a:p>
             <a:pPr lvl="4"/>
             <a:r>
-              <a:rPr lang="en-US" smtClean="0"/>
+              <a:rPr lang="en-US"/>
               <a:t>Fifth level</a:t>
             </a:r>
-            <a:endParaRPr lang="en-US"/>
           </a:p>
         </p:txBody>
       </p:sp>
@@ -4056,7 +3832,7 @@
           <a:p>
             <a:pPr lvl="0"/>
             <a:r>
-              <a:rPr lang="en-US" smtClean="0"/>
+              <a:rPr lang="en-US"/>
               <a:t>Click to edit Master text styles</a:t>
             </a:r>
           </a:p>
@@ -4079,7 +3855,7 @@
           <a:p>
             <a:fld id="{5BCAD085-E8A6-8845-BD4E-CB4CCA059FC4}" type="datetimeFigureOut">
               <a:rPr lang="en-US" smtClean="0"/>
-              <a:t>1/27/13</a:t>
+              <a:t>6/15/26</a:t>
             </a:fld>
             <a:endParaRPr lang="en-US"/>
           </a:p>
@@ -4182,10 +3958,9 @@
           </a:lstStyle>
           <a:p>
             <a:r>
-              <a:rPr lang="en-US" smtClean="0"/>
+              <a:rPr lang="en-US"/>
               <a:t>Click to edit Master title style</a:t>
             </a:r>
-            <a:endParaRPr lang="en-US"/>
           </a:p>
         </p:txBody>
       </p:sp>
@@ -4309,7 +4084,7 @@
           <a:p>
             <a:pPr lvl="0"/>
             <a:r>
-              <a:rPr lang="en-US" smtClean="0"/>
+              <a:rPr lang="en-US"/>
               <a:t>Click to edit Master text styles</a:t>
             </a:r>
           </a:p>
@@ -4332,7 +4107,7 @@
           <a:p>
             <a:fld id="{5BCAD085-E8A6-8845-BD4E-CB4CCA059FC4}" type="datetimeFigureOut">
               <a:rPr lang="en-US" smtClean="0"/>
-              <a:t>1/27/13</a:t>
+              <a:t>6/15/26</a:t>
             </a:fld>
             <a:endParaRPr lang="en-US"/>
           </a:p>
@@ -4441,10 +4216,9 @@
           <a:lstStyle/>
           <a:p>
             <a:r>
-              <a:rPr lang="en-US" smtClean="0"/>
+              <a:rPr lang="en-US"/>
               <a:t>Click to edit Master title style</a:t>
             </a:r>
-            <a:endParaRPr lang="en-US"/>
           </a:p>
         </p:txBody>
       </p:sp>
@@ -4475,38 +4249,37 @@
           <a:p>
             <a:pPr lvl="0"/>
             <a:r>
-              <a:rPr lang="en-US" smtClean="0"/>
+              <a:rPr lang="en-US"/>
               <a:t>Click to edit Master text styles</a:t>
             </a:r>
           </a:p>
           <a:p>
             <a:pPr lvl="1"/>
             <a:r>
-              <a:rPr lang="en-US" smtClean="0"/>
+              <a:rPr lang="en-US"/>
               <a:t>Second level</a:t>
             </a:r>
           </a:p>
           <a:p>
             <a:pPr lvl="2"/>
             <a:r>
-              <a:rPr lang="en-US" smtClean="0"/>
+              <a:rPr lang="en-US"/>
               <a:t>Third level</a:t>
             </a:r>
           </a:p>
           <a:p>
             <a:pPr lvl="3"/>
             <a:r>
-              <a:rPr lang="en-US" smtClean="0"/>
+              <a:rPr lang="en-US"/>
               <a:t>Fourth level</a:t>
             </a:r>
           </a:p>
           <a:p>
             <a:pPr lvl="4"/>
             <a:r>
-              <a:rPr lang="en-US" smtClean="0"/>
+              <a:rPr lang="en-US"/>
               <a:t>Fifth level</a:t>
             </a:r>
-            <a:endParaRPr lang="en-US"/>
           </a:p>
         </p:txBody>
       </p:sp>
@@ -4545,7 +4318,7 @@
           <a:p>
             <a:fld id="{5BCAD085-E8A6-8845-BD4E-CB4CCA059FC4}" type="datetimeFigureOut">
               <a:rPr lang="en-US" smtClean="0"/>
-              <a:t>1/27/13</a:t>
+              <a:t>6/15/26</a:t>
             </a:fld>
             <a:endParaRPr lang="en-US"/>
           </a:p>
@@ -4904,7 +4677,7 @@
 </file>
 
 <file path=ppt/slides/slide1.xml><?xml version="1.0" encoding="utf-8"?>
-<p:sld xmlns:a="http://schemas.openxmlformats.org/drawingml/2006/main" xmlns:p="http://schemas.openxmlformats.org/presentationml/2006/main" xmlns:r="http://schemas.openxmlformats.org/officeDocument/2006/relationships">
+<p:sld xmlns:a="http://schemas.openxmlformats.org/drawingml/2006/main" xmlns:r="http://schemas.openxmlformats.org/officeDocument/2006/relationships" xmlns:p="http://schemas.openxmlformats.org/presentationml/2006/main">
   <p:cSld>
     <p:spTree>
       <p:nvGrpSpPr>
@@ -4912,7 +4685,14 @@
         <p:cNvGrpSpPr/>
         <p:nvPr/>
       </p:nvGrpSpPr>
-      <p:grpSpPr/>
+      <p:grpSpPr>
+        <a:xfrm>
+          <a:off x="0" y="0"/>
+          <a:ext cx="0" cy="0"/>
+          <a:chOff x="0" y="0"/>
+          <a:chExt cx="0" cy="0"/>
+        </a:xfrm>
+      </p:grpSpPr>
       <p:sp>
         <p:nvSpPr>
           <p:cNvPr id="2" name="Rectangle 1"/>
@@ -4953,6 +4733,7 @@
           <a:lstStyle/>
           <a:p>
             <a:pPr algn="ctr"/>
+            <a:endParaRPr/>
           </a:p>
         </p:txBody>
       </p:sp>
@@ -4996,6 +4777,7 @@
           <a:lstStyle/>
           <a:p>
             <a:pPr algn="ctr"/>
+            <a:endParaRPr/>
           </a:p>
         </p:txBody>
       </p:sp>
@@ -5039,6 +4821,7 @@
           <a:lstStyle/>
           <a:p>
             <a:pPr algn="ctr"/>
+            <a:endParaRPr/>
           </a:p>
         </p:txBody>
       </p:sp>
@@ -5082,6 +4865,7 @@
           <a:lstStyle/>
           <a:p>
             <a:pPr algn="ctr"/>
+            <a:endParaRPr/>
           </a:p>
         </p:txBody>
       </p:sp>
@@ -5125,6 +4909,7 @@
           <a:lstStyle/>
           <a:p>
             <a:pPr algn="ctr"/>
+            <a:endParaRPr/>
           </a:p>
         </p:txBody>
       </p:sp>
@@ -5168,6 +4953,7 @@
           <a:lstStyle/>
           <a:p>
             <a:pPr algn="ctr"/>
+            <a:endParaRPr/>
           </a:p>
         </p:txBody>
       </p:sp>
@@ -5347,6 +5133,7 @@
           <a:lstStyle/>
           <a:p>
             <a:pPr algn="ctr"/>
+            <a:endParaRPr/>
           </a:p>
         </p:txBody>
       </p:sp>
@@ -5458,6 +5245,7 @@
           <a:lstStyle/>
           <a:p>
             <a:pPr algn="ctr"/>
+            <a:endParaRPr/>
           </a:p>
         </p:txBody>
       </p:sp>
@@ -5569,6 +5357,7 @@
           <a:lstStyle/>
           <a:p>
             <a:pPr algn="ctr"/>
+            <a:endParaRPr/>
           </a:p>
         </p:txBody>
       </p:sp>
@@ -5680,6 +5469,7 @@
           <a:lstStyle/>
           <a:p>
             <a:pPr algn="ctr"/>
+            <a:endParaRPr/>
           </a:p>
         </p:txBody>
       </p:sp>
@@ -5828,7 +5618,7 @@
 </file>
 
 <file path=ppt/slides/slide10.xml><?xml version="1.0" encoding="utf-8"?>
-<p:sld xmlns:a="http://schemas.openxmlformats.org/drawingml/2006/main" xmlns:p="http://schemas.openxmlformats.org/presentationml/2006/main" xmlns:r="http://schemas.openxmlformats.org/officeDocument/2006/relationships">
+<p:sld xmlns:a="http://schemas.openxmlformats.org/drawingml/2006/main" xmlns:r="http://schemas.openxmlformats.org/officeDocument/2006/relationships" xmlns:p="http://schemas.openxmlformats.org/presentationml/2006/main">
   <p:cSld>
     <p:spTree>
       <p:nvGrpSpPr>
@@ -5836,7 +5626,14 @@
         <p:cNvGrpSpPr/>
         <p:nvPr/>
       </p:nvGrpSpPr>
-      <p:grpSpPr/>
+      <p:grpSpPr>
+        <a:xfrm>
+          <a:off x="0" y="0"/>
+          <a:ext cx="0" cy="0"/>
+          <a:chOff x="0" y="0"/>
+          <a:chExt cx="0" cy="0"/>
+        </a:xfrm>
+      </p:grpSpPr>
       <p:sp>
         <p:nvSpPr>
           <p:cNvPr id="2" name="Rectangle 1"/>
@@ -5877,6 +5674,7 @@
           <a:lstStyle/>
           <a:p>
             <a:pPr algn="ctr"/>
+            <a:endParaRPr/>
           </a:p>
         </p:txBody>
       </p:sp>
@@ -5920,6 +5718,7 @@
           <a:lstStyle/>
           <a:p>
             <a:pPr algn="ctr"/>
+            <a:endParaRPr/>
           </a:p>
         </p:txBody>
       </p:sp>
@@ -5963,6 +5762,7 @@
           <a:lstStyle/>
           <a:p>
             <a:pPr algn="ctr"/>
+            <a:endParaRPr/>
           </a:p>
         </p:txBody>
       </p:sp>
@@ -6074,6 +5874,7 @@
           <a:lstStyle/>
           <a:p>
             <a:pPr algn="ctr"/>
+            <a:endParaRPr/>
           </a:p>
         </p:txBody>
       </p:sp>
@@ -6153,6 +5954,7 @@
           <a:lstStyle/>
           <a:p>
             <a:pPr algn="ctr"/>
+            <a:endParaRPr/>
           </a:p>
         </p:txBody>
       </p:sp>
@@ -6196,6 +5998,7 @@
           <a:lstStyle/>
           <a:p>
             <a:pPr algn="ctr"/>
+            <a:endParaRPr/>
           </a:p>
         </p:txBody>
       </p:sp>
@@ -6273,6 +6076,7 @@
           <a:lstStyle/>
           <a:p>
             <a:pPr algn="ctr"/>
+            <a:endParaRPr/>
           </a:p>
         </p:txBody>
       </p:sp>
@@ -6384,6 +6188,7 @@
           <a:lstStyle/>
           <a:p>
             <a:pPr algn="ctr"/>
+            <a:endParaRPr/>
           </a:p>
         </p:txBody>
       </p:sp>
@@ -6495,6 +6300,7 @@
           <a:lstStyle/>
           <a:p>
             <a:pPr algn="ctr"/>
+            <a:endParaRPr/>
           </a:p>
         </p:txBody>
       </p:sp>
@@ -6606,6 +6412,7 @@
           <a:lstStyle/>
           <a:p>
             <a:pPr algn="ctr"/>
+            <a:endParaRPr/>
           </a:p>
         </p:txBody>
       </p:sp>
@@ -6672,7 +6479,7 @@
                   <a:srgbClr val="2D3A4B"/>
                 </a:solidFill>
               </a:rPr>
-              <a:t>Returns the next missing required field based on profile state. Required fields: product → amount → tenure → income → age → employment_type. Agent never asks for a field already in SessionState.</a:t>
+              <a:t>Returns the next missing required field based on profile state. Required fields: product → name → amount → tenure → income → age → employment_type → credit_score. Agent never asks for a field already in SessionState.</a:t>
             </a:r>
           </a:p>
         </p:txBody>
@@ -6717,6 +6524,7 @@
           <a:lstStyle/>
           <a:p>
             <a:pPr algn="ctr"/>
+            <a:endParaRPr/>
           </a:p>
         </p:txBody>
       </p:sp>
@@ -6830,6 +6638,7 @@
           <a:lstStyle/>
           <a:p>
             <a:pPr algn="ctr"/>
+            <a:endParaRPr/>
           </a:p>
         </p:txBody>
       </p:sp>
@@ -6873,6 +6682,7 @@
           <a:lstStyle/>
           <a:p>
             <a:pPr algn="ctr"/>
+            <a:endParaRPr/>
           </a:p>
         </p:txBody>
       </p:sp>
@@ -6950,6 +6760,7 @@
           <a:lstStyle/>
           <a:p>
             <a:pPr algn="ctr"/>
+            <a:endParaRPr/>
           </a:p>
         </p:txBody>
       </p:sp>
@@ -7061,6 +6872,7 @@
           <a:lstStyle/>
           <a:p>
             <a:pPr algn="ctr"/>
+            <a:endParaRPr/>
           </a:p>
         </p:txBody>
       </p:sp>
@@ -7172,6 +6984,7 @@
           <a:lstStyle/>
           <a:p>
             <a:pPr algn="ctr"/>
+            <a:endParaRPr/>
           </a:p>
         </p:txBody>
       </p:sp>
@@ -7283,6 +7096,7 @@
           <a:lstStyle/>
           <a:p>
             <a:pPr algn="ctr"/>
+            <a:endParaRPr/>
           </a:p>
         </p:txBody>
       </p:sp>
@@ -7394,6 +7208,7 @@
           <a:lstStyle/>
           <a:p>
             <a:pPr algn="ctr"/>
+            <a:endParaRPr/>
           </a:p>
         </p:txBody>
       </p:sp>
@@ -7505,6 +7320,7 @@
           <a:lstStyle/>
           <a:p>
             <a:pPr algn="ctr"/>
+            <a:endParaRPr/>
           </a:p>
         </p:txBody>
       </p:sp>
@@ -7616,6 +7432,7 @@
           <a:lstStyle/>
           <a:p>
             <a:pPr algn="ctr"/>
+            <a:endParaRPr/>
           </a:p>
         </p:txBody>
       </p:sp>
@@ -7727,6 +7544,7 @@
           <a:lstStyle/>
           <a:p>
             <a:pPr algn="ctr"/>
+            <a:endParaRPr/>
           </a:p>
         </p:txBody>
       </p:sp>
@@ -7838,6 +7656,7 @@
           <a:lstStyle/>
           <a:p>
             <a:pPr algn="ctr"/>
+            <a:endParaRPr/>
           </a:p>
         </p:txBody>
       </p:sp>
@@ -7949,6 +7768,7 @@
           <a:lstStyle/>
           <a:p>
             <a:pPr algn="ctr"/>
+            <a:endParaRPr/>
           </a:p>
         </p:txBody>
       </p:sp>
@@ -8063,7 +7883,7 @@
 </file>
 
 <file path=ppt/slides/slide11.xml><?xml version="1.0" encoding="utf-8"?>
-<p:sld xmlns:a="http://schemas.openxmlformats.org/drawingml/2006/main" xmlns:p="http://schemas.openxmlformats.org/presentationml/2006/main" xmlns:r="http://schemas.openxmlformats.org/officeDocument/2006/relationships">
+<p:sld xmlns:a="http://schemas.openxmlformats.org/drawingml/2006/main" xmlns:r="http://schemas.openxmlformats.org/officeDocument/2006/relationships" xmlns:p="http://schemas.openxmlformats.org/presentationml/2006/main">
   <p:cSld>
     <p:spTree>
       <p:nvGrpSpPr>
@@ -8071,7 +7891,14 @@
         <p:cNvGrpSpPr/>
         <p:nvPr/>
       </p:nvGrpSpPr>
-      <p:grpSpPr/>
+      <p:grpSpPr>
+        <a:xfrm>
+          <a:off x="0" y="0"/>
+          <a:ext cx="0" cy="0"/>
+          <a:chOff x="0" y="0"/>
+          <a:chExt cx="0" cy="0"/>
+        </a:xfrm>
+      </p:grpSpPr>
       <p:sp>
         <p:nvSpPr>
           <p:cNvPr id="2" name="Rectangle 1"/>
@@ -8112,6 +7939,7 @@
           <a:lstStyle/>
           <a:p>
             <a:pPr algn="ctr"/>
+            <a:endParaRPr/>
           </a:p>
         </p:txBody>
       </p:sp>
@@ -8155,6 +7983,7 @@
           <a:lstStyle/>
           <a:p>
             <a:pPr algn="ctr"/>
+            <a:endParaRPr/>
           </a:p>
         </p:txBody>
       </p:sp>
@@ -8198,6 +8027,7 @@
           <a:lstStyle/>
           <a:p>
             <a:pPr algn="ctr"/>
+            <a:endParaRPr/>
           </a:p>
         </p:txBody>
       </p:sp>
@@ -8309,6 +8139,7 @@
           <a:lstStyle/>
           <a:p>
             <a:pPr algn="ctr"/>
+            <a:endParaRPr/>
           </a:p>
         </p:txBody>
       </p:sp>
@@ -8388,6 +8219,7 @@
           <a:lstStyle/>
           <a:p>
             <a:pPr algn="ctr"/>
+            <a:endParaRPr/>
           </a:p>
         </p:txBody>
       </p:sp>
@@ -8431,6 +8263,7 @@
           <a:lstStyle/>
           <a:p>
             <a:pPr algn="ctr"/>
+            <a:endParaRPr/>
           </a:p>
         </p:txBody>
       </p:sp>
@@ -8498,11 +8331,11 @@
                   <a:srgbClr val="2D3A4B"/>
                 </a:solidFill>
               </a:rPr>
-              <a:t>1–5 ⭐ in Streamlit
-+ optional comment
+              <a:t>👍/👎 in Streamlit
+per AI response
 feedback_collector.
 record_feedback()
-Normalised 0–1 score</a:t>
+1.0 (👍) or 0.0 (👎)</a:t>
             </a:r>
           </a:p>
         </p:txBody>
@@ -8549,6 +8382,7 @@
           <a:lstStyle/>
           <a:p>
             <a:pPr algn="ctr"/>
+            <a:endParaRPr/>
           </a:p>
         </p:txBody>
       </p:sp>
@@ -8592,6 +8426,7 @@
           <a:lstStyle/>
           <a:p>
             <a:pPr algn="ctr"/>
+            <a:endParaRPr/>
           </a:p>
         </p:txBody>
       </p:sp>
@@ -8709,6 +8544,7 @@
           <a:lstStyle/>
           <a:p>
             <a:pPr algn="ctr"/>
+            <a:endParaRPr/>
           </a:p>
         </p:txBody>
       </p:sp>
@@ -8752,6 +8588,7 @@
           <a:lstStyle/>
           <a:p>
             <a:pPr algn="ctr"/>
+            <a:endParaRPr/>
           </a:p>
         </p:txBody>
       </p:sp>
@@ -8870,6 +8707,7 @@
           <a:lstStyle/>
           <a:p>
             <a:pPr algn="ctr"/>
+            <a:endParaRPr/>
           </a:p>
         </p:txBody>
       </p:sp>
@@ -8913,6 +8751,7 @@
           <a:lstStyle/>
           <a:p>
             <a:pPr algn="ctr"/>
+            <a:endParaRPr/>
           </a:p>
         </p:txBody>
       </p:sp>
@@ -9166,6 +9005,7 @@
           <a:lstStyle/>
           <a:p>
             <a:pPr algn="ctr"/>
+            <a:endParaRPr/>
           </a:p>
         </p:txBody>
       </p:sp>
@@ -9279,6 +9119,7 @@
           <a:lstStyle/>
           <a:p>
             <a:pPr algn="ctr"/>
+            <a:endParaRPr/>
           </a:p>
         </p:txBody>
       </p:sp>
@@ -9322,6 +9163,7 @@
           <a:lstStyle/>
           <a:p>
             <a:pPr algn="ctr"/>
+            <a:endParaRPr/>
           </a:p>
         </p:txBody>
       </p:sp>
@@ -9399,6 +9241,7 @@
           <a:lstStyle/>
           <a:p>
             <a:pPr algn="ctr"/>
+            <a:endParaRPr/>
           </a:p>
         </p:txBody>
       </p:sp>
@@ -9510,6 +9353,7 @@
           <a:lstStyle/>
           <a:p>
             <a:pPr algn="ctr"/>
+            <a:endParaRPr/>
           </a:p>
         </p:txBody>
       </p:sp>
@@ -9621,6 +9465,7 @@
           <a:lstStyle/>
           <a:p>
             <a:pPr algn="ctr"/>
+            <a:endParaRPr/>
           </a:p>
         </p:txBody>
       </p:sp>
@@ -9732,6 +9577,7 @@
           <a:lstStyle/>
           <a:p>
             <a:pPr algn="ctr"/>
+            <a:endParaRPr/>
           </a:p>
         </p:txBody>
       </p:sp>
@@ -9845,6 +9691,7 @@
           <a:lstStyle/>
           <a:p>
             <a:pPr algn="ctr"/>
+            <a:endParaRPr/>
           </a:p>
         </p:txBody>
       </p:sp>
@@ -9891,7 +9738,7 @@
 </file>
 
 <file path=ppt/slides/slide12.xml><?xml version="1.0" encoding="utf-8"?>
-<p:sld xmlns:a="http://schemas.openxmlformats.org/drawingml/2006/main" xmlns:p="http://schemas.openxmlformats.org/presentationml/2006/main" xmlns:r="http://schemas.openxmlformats.org/officeDocument/2006/relationships">
+<p:sld xmlns:a="http://schemas.openxmlformats.org/drawingml/2006/main" xmlns:r="http://schemas.openxmlformats.org/officeDocument/2006/relationships" xmlns:p="http://schemas.openxmlformats.org/presentationml/2006/main">
   <p:cSld>
     <p:spTree>
       <p:nvGrpSpPr>
@@ -9899,7 +9746,14 @@
         <p:cNvGrpSpPr/>
         <p:nvPr/>
       </p:nvGrpSpPr>
-      <p:grpSpPr/>
+      <p:grpSpPr>
+        <a:xfrm>
+          <a:off x="0" y="0"/>
+          <a:ext cx="0" cy="0"/>
+          <a:chOff x="0" y="0"/>
+          <a:chExt cx="0" cy="0"/>
+        </a:xfrm>
+      </p:grpSpPr>
       <p:sp>
         <p:nvSpPr>
           <p:cNvPr id="2" name="Rectangle 1"/>
@@ -9940,6 +9794,7 @@
           <a:lstStyle/>
           <a:p>
             <a:pPr algn="ctr"/>
+            <a:endParaRPr/>
           </a:p>
         </p:txBody>
       </p:sp>
@@ -9983,6 +9838,7 @@
           <a:lstStyle/>
           <a:p>
             <a:pPr algn="ctr"/>
+            <a:endParaRPr/>
           </a:p>
         </p:txBody>
       </p:sp>
@@ -10026,6 +9882,7 @@
           <a:lstStyle/>
           <a:p>
             <a:pPr algn="ctr"/>
+            <a:endParaRPr/>
           </a:p>
         </p:txBody>
       </p:sp>
@@ -10137,6 +9994,7 @@
           <a:lstStyle/>
           <a:p>
             <a:pPr algn="ctr"/>
+            <a:endParaRPr/>
           </a:p>
         </p:txBody>
       </p:sp>
@@ -10216,6 +10074,7 @@
           <a:lstStyle/>
           <a:p>
             <a:pPr algn="ctr"/>
+            <a:endParaRPr/>
           </a:p>
         </p:txBody>
       </p:sp>
@@ -10259,6 +10118,7 @@
           <a:lstStyle/>
           <a:p>
             <a:pPr algn="ctr"/>
+            <a:endParaRPr/>
           </a:p>
         </p:txBody>
       </p:sp>
@@ -10407,6 +10267,7 @@
           <a:lstStyle/>
           <a:p>
             <a:pPr algn="ctr"/>
+            <a:endParaRPr/>
           </a:p>
         </p:txBody>
       </p:sp>
@@ -10450,6 +10311,7 @@
           <a:lstStyle/>
           <a:p>
             <a:pPr algn="ctr"/>
+            <a:endParaRPr/>
           </a:p>
         </p:txBody>
       </p:sp>
@@ -10598,6 +10460,7 @@
           <a:lstStyle/>
           <a:p>
             <a:pPr algn="ctr"/>
+            <a:endParaRPr/>
           </a:p>
         </p:txBody>
       </p:sp>
@@ -10641,6 +10504,7 @@
           <a:lstStyle/>
           <a:p>
             <a:pPr algn="ctr"/>
+            <a:endParaRPr/>
           </a:p>
         </p:txBody>
       </p:sp>
@@ -10742,7 +10606,7 @@
                   <a:srgbClr val="2D3A4B"/>
                 </a:solidFill>
               </a:rPr>
-              <a:t>Star ratings normalised (rating−1)/4 → Langfuse score 'user_feedback'. policy_checker violations → score 'policy_compliance=0.0'. All scores queryable for trend analysis.</a:t>
+              <a:t>Thumbs feedback (👍=1.0, 👎=0.0) → Langfuse score 'user_feedback'. policy_checker violations → score 'policy_compliance=0.0'. All scores queryable for trend analysis.</a:t>
             </a:r>
           </a:p>
         </p:txBody>
@@ -10789,6 +10653,7 @@
           <a:lstStyle/>
           <a:p>
             <a:pPr algn="ctr"/>
+            <a:endParaRPr/>
           </a:p>
         </p:txBody>
       </p:sp>
@@ -10832,6 +10697,7 @@
           <a:lstStyle/>
           <a:p>
             <a:pPr algn="ctr"/>
+            <a:endParaRPr/>
           </a:p>
         </p:txBody>
       </p:sp>
@@ -10980,6 +10846,7 @@
           <a:lstStyle/>
           <a:p>
             <a:pPr algn="ctr"/>
+            <a:endParaRPr/>
           </a:p>
         </p:txBody>
       </p:sp>
@@ -11023,6 +10890,7 @@
           <a:lstStyle/>
           <a:p>
             <a:pPr algn="ctr"/>
+            <a:endParaRPr/>
           </a:p>
         </p:txBody>
       </p:sp>
@@ -11171,6 +11039,7 @@
           <a:lstStyle/>
           <a:p>
             <a:pPr algn="ctr"/>
+            <a:endParaRPr/>
           </a:p>
         </p:txBody>
       </p:sp>
@@ -11214,6 +11083,7 @@
           <a:lstStyle/>
           <a:p>
             <a:pPr algn="ctr"/>
+            <a:endParaRPr/>
           </a:p>
         </p:txBody>
       </p:sp>
@@ -11363,7 +11233,7 @@
 </file>
 
 <file path=ppt/slides/slide13.xml><?xml version="1.0" encoding="utf-8"?>
-<p:sld xmlns:a="http://schemas.openxmlformats.org/drawingml/2006/main" xmlns:p="http://schemas.openxmlformats.org/presentationml/2006/main" xmlns:r="http://schemas.openxmlformats.org/officeDocument/2006/relationships">
+<p:sld xmlns:a="http://schemas.openxmlformats.org/drawingml/2006/main" xmlns:r="http://schemas.openxmlformats.org/officeDocument/2006/relationships" xmlns:p="http://schemas.openxmlformats.org/presentationml/2006/main">
   <p:cSld>
     <p:spTree>
       <p:nvGrpSpPr>
@@ -11371,7 +11241,14 @@
         <p:cNvGrpSpPr/>
         <p:nvPr/>
       </p:nvGrpSpPr>
-      <p:grpSpPr/>
+      <p:grpSpPr>
+        <a:xfrm>
+          <a:off x="0" y="0"/>
+          <a:ext cx="0" cy="0"/>
+          <a:chOff x="0" y="0"/>
+          <a:chExt cx="0" cy="0"/>
+        </a:xfrm>
+      </p:grpSpPr>
       <p:sp>
         <p:nvSpPr>
           <p:cNvPr id="2" name="Rectangle 1"/>
@@ -11412,6 +11289,7 @@
           <a:lstStyle/>
           <a:p>
             <a:pPr algn="ctr"/>
+            <a:endParaRPr/>
           </a:p>
         </p:txBody>
       </p:sp>
@@ -11455,6 +11333,7 @@
           <a:lstStyle/>
           <a:p>
             <a:pPr algn="ctr"/>
+            <a:endParaRPr/>
           </a:p>
         </p:txBody>
       </p:sp>
@@ -11498,6 +11377,7 @@
           <a:lstStyle/>
           <a:p>
             <a:pPr algn="ctr"/>
+            <a:endParaRPr/>
           </a:p>
         </p:txBody>
       </p:sp>
@@ -11609,6 +11489,7 @@
           <a:lstStyle/>
           <a:p>
             <a:pPr algn="ctr"/>
+            <a:endParaRPr/>
           </a:p>
         </p:txBody>
       </p:sp>
@@ -11688,6 +11569,7 @@
           <a:lstStyle/>
           <a:p>
             <a:pPr algn="ctr"/>
+            <a:endParaRPr/>
           </a:p>
         </p:txBody>
       </p:sp>
@@ -11731,6 +11613,7 @@
           <a:lstStyle/>
           <a:p>
             <a:pPr algn="ctr"/>
+            <a:endParaRPr/>
           </a:p>
         </p:txBody>
       </p:sp>
@@ -11983,6 +11866,7 @@
           <a:lstStyle/>
           <a:p>
             <a:pPr algn="ctr"/>
+            <a:endParaRPr/>
           </a:p>
         </p:txBody>
       </p:sp>
@@ -12062,6 +11946,7 @@
           <a:lstStyle/>
           <a:p>
             <a:pPr algn="ctr"/>
+            <a:endParaRPr/>
           </a:p>
         </p:txBody>
       </p:sp>
@@ -12105,6 +11990,7 @@
           <a:lstStyle/>
           <a:p>
             <a:pPr algn="ctr"/>
+            <a:endParaRPr/>
           </a:p>
         </p:txBody>
       </p:sp>
@@ -12357,6 +12243,7 @@
           <a:lstStyle/>
           <a:p>
             <a:pPr algn="ctr"/>
+            <a:endParaRPr/>
           </a:p>
         </p:txBody>
       </p:sp>
@@ -12436,6 +12323,7 @@
           <a:lstStyle/>
           <a:p>
             <a:pPr algn="ctr"/>
+            <a:endParaRPr/>
           </a:p>
         </p:txBody>
       </p:sp>
@@ -12479,6 +12367,7 @@
           <a:lstStyle/>
           <a:p>
             <a:pPr algn="ctr"/>
+            <a:endParaRPr/>
           </a:p>
         </p:txBody>
       </p:sp>
@@ -12731,6 +12620,7 @@
           <a:lstStyle/>
           <a:p>
             <a:pPr algn="ctr"/>
+            <a:endParaRPr/>
           </a:p>
         </p:txBody>
       </p:sp>
@@ -12808,6 +12698,7 @@
           <a:lstStyle/>
           <a:p>
             <a:pPr algn="ctr"/>
+            <a:endParaRPr/>
           </a:p>
         </p:txBody>
       </p:sp>
@@ -12887,6 +12778,7 @@
           <a:lstStyle/>
           <a:p>
             <a:pPr algn="ctr"/>
+            <a:endParaRPr/>
           </a:p>
         </p:txBody>
       </p:sp>
@@ -12966,6 +12858,7 @@
           <a:lstStyle/>
           <a:p>
             <a:pPr algn="ctr"/>
+            <a:endParaRPr/>
           </a:p>
         </p:txBody>
       </p:sp>
@@ -13045,6 +12938,7 @@
           <a:lstStyle/>
           <a:p>
             <a:pPr algn="ctr"/>
+            <a:endParaRPr/>
           </a:p>
         </p:txBody>
       </p:sp>
@@ -13091,7 +12985,7 @@
 </file>
 
 <file path=ppt/slides/slide14.xml><?xml version="1.0" encoding="utf-8"?>
-<p:sld xmlns:a="http://schemas.openxmlformats.org/drawingml/2006/main" xmlns:p="http://schemas.openxmlformats.org/presentationml/2006/main" xmlns:r="http://schemas.openxmlformats.org/officeDocument/2006/relationships">
+<p:sld xmlns:a="http://schemas.openxmlformats.org/drawingml/2006/main" xmlns:r="http://schemas.openxmlformats.org/officeDocument/2006/relationships" xmlns:p="http://schemas.openxmlformats.org/presentationml/2006/main">
   <p:cSld>
     <p:spTree>
       <p:nvGrpSpPr>
@@ -13099,7 +12993,14 @@
         <p:cNvGrpSpPr/>
         <p:nvPr/>
       </p:nvGrpSpPr>
-      <p:grpSpPr/>
+      <p:grpSpPr>
+        <a:xfrm>
+          <a:off x="0" y="0"/>
+          <a:ext cx="0" cy="0"/>
+          <a:chOff x="0" y="0"/>
+          <a:chExt cx="0" cy="0"/>
+        </a:xfrm>
+      </p:grpSpPr>
       <p:sp>
         <p:nvSpPr>
           <p:cNvPr id="2" name="Rectangle 1"/>
@@ -13140,6 +13041,7 @@
           <a:lstStyle/>
           <a:p>
             <a:pPr algn="ctr"/>
+            <a:endParaRPr/>
           </a:p>
         </p:txBody>
       </p:sp>
@@ -13183,6 +13085,7 @@
           <a:lstStyle/>
           <a:p>
             <a:pPr algn="ctr"/>
+            <a:endParaRPr/>
           </a:p>
         </p:txBody>
       </p:sp>
@@ -13226,6 +13129,7 @@
           <a:lstStyle/>
           <a:p>
             <a:pPr algn="ctr"/>
+            <a:endParaRPr/>
           </a:p>
         </p:txBody>
       </p:sp>
@@ -13337,6 +13241,7 @@
           <a:lstStyle/>
           <a:p>
             <a:pPr algn="ctr"/>
+            <a:endParaRPr/>
           </a:p>
         </p:txBody>
       </p:sp>
@@ -13414,6 +13319,7 @@
           <a:lstStyle/>
           <a:p>
             <a:pPr algn="ctr"/>
+            <a:endParaRPr/>
           </a:p>
         </p:txBody>
       </p:sp>
@@ -13526,6 +13432,7 @@
           <a:lstStyle/>
           <a:p>
             <a:pPr algn="ctr"/>
+            <a:endParaRPr/>
           </a:p>
         </p:txBody>
       </p:sp>
@@ -13638,6 +13545,7 @@
           <a:lstStyle/>
           <a:p>
             <a:pPr algn="ctr"/>
+            <a:endParaRPr/>
           </a:p>
         </p:txBody>
       </p:sp>
@@ -13750,6 +13658,7 @@
           <a:lstStyle/>
           <a:p>
             <a:pPr algn="ctr"/>
+            <a:endParaRPr/>
           </a:p>
         </p:txBody>
       </p:sp>
@@ -13862,6 +13771,7 @@
           <a:lstStyle/>
           <a:p>
             <a:pPr algn="ctr"/>
+            <a:endParaRPr/>
           </a:p>
         </p:txBody>
       </p:sp>
@@ -13974,6 +13884,7 @@
           <a:lstStyle/>
           <a:p>
             <a:pPr algn="ctr"/>
+            <a:endParaRPr/>
           </a:p>
         </p:txBody>
       </p:sp>
@@ -14187,6 +14098,7 @@
           <a:lstStyle/>
           <a:p>
             <a:pPr algn="ctr"/>
+            <a:endParaRPr/>
           </a:p>
         </p:txBody>
       </p:sp>
@@ -14400,6 +14312,7 @@
           <a:lstStyle/>
           <a:p>
             <a:pPr algn="ctr"/>
+            <a:endParaRPr/>
           </a:p>
         </p:txBody>
       </p:sp>
@@ -14613,6 +14526,7 @@
           <a:lstStyle/>
           <a:p>
             <a:pPr algn="ctr"/>
+            <a:endParaRPr/>
           </a:p>
         </p:txBody>
       </p:sp>
@@ -14826,6 +14740,7 @@
           <a:lstStyle/>
           <a:p>
             <a:pPr algn="ctr"/>
+            <a:endParaRPr/>
           </a:p>
         </p:txBody>
       </p:sp>
@@ -14903,6 +14818,7 @@
           <a:lstStyle/>
           <a:p>
             <a:pPr algn="ctr"/>
+            <a:endParaRPr/>
           </a:p>
         </p:txBody>
       </p:sp>
@@ -15082,6 +14998,7 @@
           <a:lstStyle/>
           <a:p>
             <a:pPr algn="ctr"/>
+            <a:endParaRPr/>
           </a:p>
         </p:txBody>
       </p:sp>
@@ -15261,6 +15178,7 @@
           <a:lstStyle/>
           <a:p>
             <a:pPr algn="ctr"/>
+            <a:endParaRPr/>
           </a:p>
         </p:txBody>
       </p:sp>
@@ -15440,6 +15358,7 @@
           <a:lstStyle/>
           <a:p>
             <a:pPr algn="ctr"/>
+            <a:endParaRPr/>
           </a:p>
         </p:txBody>
       </p:sp>
@@ -15619,6 +15538,7 @@
           <a:lstStyle/>
           <a:p>
             <a:pPr algn="ctr"/>
+            <a:endParaRPr/>
           </a:p>
         </p:txBody>
       </p:sp>
@@ -15801,7 +15721,7 @@
 </file>
 
 <file path=ppt/slides/slide15.xml><?xml version="1.0" encoding="utf-8"?>
-<p:sld xmlns:a="http://schemas.openxmlformats.org/drawingml/2006/main" xmlns:p="http://schemas.openxmlformats.org/presentationml/2006/main" xmlns:r="http://schemas.openxmlformats.org/officeDocument/2006/relationships">
+<p:sld xmlns:a="http://schemas.openxmlformats.org/drawingml/2006/main" xmlns:r="http://schemas.openxmlformats.org/officeDocument/2006/relationships" xmlns:p="http://schemas.openxmlformats.org/presentationml/2006/main">
   <p:cSld>
     <p:spTree>
       <p:nvGrpSpPr>
@@ -15809,7 +15729,14 @@
         <p:cNvGrpSpPr/>
         <p:nvPr/>
       </p:nvGrpSpPr>
-      <p:grpSpPr/>
+      <p:grpSpPr>
+        <a:xfrm>
+          <a:off x="0" y="0"/>
+          <a:ext cx="0" cy="0"/>
+          <a:chOff x="0" y="0"/>
+          <a:chExt cx="0" cy="0"/>
+        </a:xfrm>
+      </p:grpSpPr>
       <p:sp>
         <p:nvSpPr>
           <p:cNvPr id="2" name="Rectangle 1"/>
@@ -15850,6 +15777,7 @@
           <a:lstStyle/>
           <a:p>
             <a:pPr algn="ctr"/>
+            <a:endParaRPr/>
           </a:p>
         </p:txBody>
       </p:sp>
@@ -15893,6 +15821,7 @@
           <a:lstStyle/>
           <a:p>
             <a:pPr algn="ctr"/>
+            <a:endParaRPr/>
           </a:p>
         </p:txBody>
       </p:sp>
@@ -15936,6 +15865,7 @@
           <a:lstStyle/>
           <a:p>
             <a:pPr algn="ctr"/>
+            <a:endParaRPr/>
           </a:p>
         </p:txBody>
       </p:sp>
@@ -16047,6 +15977,7 @@
           <a:lstStyle/>
           <a:p>
             <a:pPr algn="ctr"/>
+            <a:endParaRPr/>
           </a:p>
         </p:txBody>
       </p:sp>
@@ -16126,6 +16057,7 @@
           <a:lstStyle/>
           <a:p>
             <a:pPr algn="ctr"/>
+            <a:endParaRPr/>
           </a:p>
         </p:txBody>
       </p:sp>
@@ -16169,6 +16101,7 @@
           <a:lstStyle/>
           <a:p>
             <a:pPr algn="ctr"/>
+            <a:endParaRPr/>
           </a:p>
         </p:txBody>
       </p:sp>
@@ -16246,6 +16179,7 @@
           <a:lstStyle/>
           <a:p>
             <a:pPr algn="ctr"/>
+            <a:endParaRPr/>
           </a:p>
         </p:txBody>
       </p:sp>
@@ -16357,6 +16291,7 @@
           <a:lstStyle/>
           <a:p>
             <a:pPr algn="ctr"/>
+            <a:endParaRPr/>
           </a:p>
         </p:txBody>
       </p:sp>
@@ -16468,6 +16403,7 @@
           <a:lstStyle/>
           <a:p>
             <a:pPr algn="ctr"/>
+            <a:endParaRPr/>
           </a:p>
         </p:txBody>
       </p:sp>
@@ -16579,6 +16515,7 @@
           <a:lstStyle/>
           <a:p>
             <a:pPr algn="ctr"/>
+            <a:endParaRPr/>
           </a:p>
         </p:txBody>
       </p:sp>
@@ -16690,6 +16627,7 @@
           <a:lstStyle/>
           <a:p>
             <a:pPr algn="ctr"/>
+            <a:endParaRPr/>
           </a:p>
         </p:txBody>
       </p:sp>
@@ -16801,6 +16739,7 @@
           <a:lstStyle/>
           <a:p>
             <a:pPr algn="ctr"/>
+            <a:endParaRPr/>
           </a:p>
         </p:txBody>
       </p:sp>
@@ -16983,6 +16922,7 @@
           <a:lstStyle/>
           <a:p>
             <a:pPr algn="ctr"/>
+            <a:endParaRPr/>
           </a:p>
         </p:txBody>
       </p:sp>
@@ -17026,6 +16966,7 @@
           <a:lstStyle/>
           <a:p>
             <a:pPr algn="ctr"/>
+            <a:endParaRPr/>
           </a:p>
         </p:txBody>
       </p:sp>
@@ -17103,6 +17044,7 @@
           <a:lstStyle/>
           <a:p>
             <a:pPr algn="ctr"/>
+            <a:endParaRPr/>
           </a:p>
         </p:txBody>
       </p:sp>
@@ -17214,6 +17156,7 @@
           <a:lstStyle/>
           <a:p>
             <a:pPr algn="ctr"/>
+            <a:endParaRPr/>
           </a:p>
         </p:txBody>
       </p:sp>
@@ -17325,6 +17268,7 @@
           <a:lstStyle/>
           <a:p>
             <a:pPr algn="ctr"/>
+            <a:endParaRPr/>
           </a:p>
         </p:txBody>
       </p:sp>
@@ -17436,6 +17380,7 @@
           <a:lstStyle/>
           <a:p>
             <a:pPr algn="ctr"/>
+            <a:endParaRPr/>
           </a:p>
         </p:txBody>
       </p:sp>
@@ -17547,6 +17492,7 @@
           <a:lstStyle/>
           <a:p>
             <a:pPr algn="ctr"/>
+            <a:endParaRPr/>
           </a:p>
         </p:txBody>
       </p:sp>
@@ -17658,6 +17604,7 @@
           <a:lstStyle/>
           <a:p>
             <a:pPr algn="ctr"/>
+            <a:endParaRPr/>
           </a:p>
         </p:txBody>
       </p:sp>
@@ -17769,6 +17716,7 @@
           <a:lstStyle/>
           <a:p>
             <a:pPr algn="ctr"/>
+            <a:endParaRPr/>
           </a:p>
         </p:txBody>
       </p:sp>
@@ -17812,6 +17760,7 @@
           <a:lstStyle/>
           <a:p>
             <a:pPr algn="ctr"/>
+            <a:endParaRPr/>
           </a:p>
         </p:txBody>
       </p:sp>
@@ -17889,6 +17838,7 @@
           <a:lstStyle/>
           <a:p>
             <a:pPr algn="ctr"/>
+            <a:endParaRPr/>
           </a:p>
         </p:txBody>
       </p:sp>
@@ -18000,6 +17950,7 @@
           <a:lstStyle/>
           <a:p>
             <a:pPr algn="ctr"/>
+            <a:endParaRPr/>
           </a:p>
         </p:txBody>
       </p:sp>
@@ -18111,6 +18062,7 @@
           <a:lstStyle/>
           <a:p>
             <a:pPr algn="ctr"/>
+            <a:endParaRPr/>
           </a:p>
         </p:txBody>
       </p:sp>
@@ -18222,6 +18174,7 @@
           <a:lstStyle/>
           <a:p>
             <a:pPr algn="ctr"/>
+            <a:endParaRPr/>
           </a:p>
         </p:txBody>
       </p:sp>
@@ -18333,6 +18286,7 @@
           <a:lstStyle/>
           <a:p>
             <a:pPr algn="ctr"/>
+            <a:endParaRPr/>
           </a:p>
         </p:txBody>
       </p:sp>
@@ -18444,6 +18398,7 @@
           <a:lstStyle/>
           <a:p>
             <a:pPr algn="ctr"/>
+            <a:endParaRPr/>
           </a:p>
         </p:txBody>
       </p:sp>
@@ -18521,6 +18476,7 @@
           <a:lstStyle/>
           <a:p>
             <a:pPr algn="ctr"/>
+            <a:endParaRPr/>
           </a:p>
         </p:txBody>
       </p:sp>
@@ -18632,6 +18588,7 @@
           <a:lstStyle/>
           <a:p>
             <a:pPr algn="ctr"/>
+            <a:endParaRPr/>
           </a:p>
         </p:txBody>
       </p:sp>
@@ -18743,6 +18700,7 @@
           <a:lstStyle/>
           <a:p>
             <a:pPr algn="ctr"/>
+            <a:endParaRPr/>
           </a:p>
         </p:txBody>
       </p:sp>
@@ -18854,6 +18812,7 @@
           <a:lstStyle/>
           <a:p>
             <a:pPr algn="ctr"/>
+            <a:endParaRPr/>
           </a:p>
         </p:txBody>
       </p:sp>
@@ -18968,7 +18927,7 @@
 </file>
 
 <file path=ppt/slides/slide16.xml><?xml version="1.0" encoding="utf-8"?>
-<p:sld xmlns:a="http://schemas.openxmlformats.org/drawingml/2006/main" xmlns:p="http://schemas.openxmlformats.org/presentationml/2006/main" xmlns:r="http://schemas.openxmlformats.org/officeDocument/2006/relationships">
+<p:sld xmlns:a="http://schemas.openxmlformats.org/drawingml/2006/main" xmlns:r="http://schemas.openxmlformats.org/officeDocument/2006/relationships" xmlns:p="http://schemas.openxmlformats.org/presentationml/2006/main">
   <p:cSld>
     <p:spTree>
       <p:nvGrpSpPr>
@@ -18976,7 +18935,14 @@
         <p:cNvGrpSpPr/>
         <p:nvPr/>
       </p:nvGrpSpPr>
-      <p:grpSpPr/>
+      <p:grpSpPr>
+        <a:xfrm>
+          <a:off x="0" y="0"/>
+          <a:ext cx="0" cy="0"/>
+          <a:chOff x="0" y="0"/>
+          <a:chExt cx="0" cy="0"/>
+        </a:xfrm>
+      </p:grpSpPr>
       <p:sp>
         <p:nvSpPr>
           <p:cNvPr id="2" name="Rectangle 1"/>
@@ -19017,6 +18983,7 @@
           <a:lstStyle/>
           <a:p>
             <a:pPr algn="ctr"/>
+            <a:endParaRPr/>
           </a:p>
         </p:txBody>
       </p:sp>
@@ -19060,6 +19027,7 @@
           <a:lstStyle/>
           <a:p>
             <a:pPr algn="ctr"/>
+            <a:endParaRPr/>
           </a:p>
         </p:txBody>
       </p:sp>
@@ -19103,6 +19071,7 @@
           <a:lstStyle/>
           <a:p>
             <a:pPr algn="ctr"/>
+            <a:endParaRPr/>
           </a:p>
         </p:txBody>
       </p:sp>
@@ -19146,6 +19115,7 @@
           <a:lstStyle/>
           <a:p>
             <a:pPr algn="ctr"/>
+            <a:endParaRPr/>
           </a:p>
         </p:txBody>
       </p:sp>
@@ -19257,6 +19227,7 @@
           <a:lstStyle/>
           <a:p>
             <a:pPr algn="ctr"/>
+            <a:endParaRPr/>
           </a:p>
         </p:txBody>
       </p:sp>
@@ -19368,6 +19339,7 @@
           <a:lstStyle/>
           <a:p>
             <a:pPr algn="ctr"/>
+            <a:endParaRPr/>
           </a:p>
         </p:txBody>
       </p:sp>
@@ -19479,6 +19451,7 @@
           <a:lstStyle/>
           <a:p>
             <a:pPr algn="ctr"/>
+            <a:endParaRPr/>
           </a:p>
         </p:txBody>
       </p:sp>
@@ -19590,6 +19563,7 @@
           <a:lstStyle/>
           <a:p>
             <a:pPr algn="ctr"/>
+            <a:endParaRPr/>
           </a:p>
         </p:txBody>
       </p:sp>
@@ -19701,6 +19675,7 @@
           <a:lstStyle/>
           <a:p>
             <a:pPr algn="ctr"/>
+            <a:endParaRPr/>
           </a:p>
         </p:txBody>
       </p:sp>
@@ -19767,7 +19742,7 @@
                   <a:srgbClr val="D0E4FF"/>
                 </a:solidFill>
               </a:rPr>
-              <a:t>Star ratings → policy_updater → EMPATHY_PREFIX injection demonstrates a lightweight RLHF loop without fine-tuning. Prompt-level adaptation is fast to iterate and fully auditable.</a:t>
+              <a:t>Thumbs 👍/👎 feedback → policy_updater → EMPATHY_PREFIX injection demonstrates a lightweight RLHF loop without fine-tuning. Prompt-level adaptation is fast to iterate and fully auditable.</a:t>
             </a:r>
           </a:p>
         </p:txBody>
@@ -19815,7 +19790,7 @@
 </file>
 
 <file path=ppt/slides/slide2.xml><?xml version="1.0" encoding="utf-8"?>
-<p:sld xmlns:a="http://schemas.openxmlformats.org/drawingml/2006/main" xmlns:p="http://schemas.openxmlformats.org/presentationml/2006/main" xmlns:r="http://schemas.openxmlformats.org/officeDocument/2006/relationships">
+<p:sld xmlns:a="http://schemas.openxmlformats.org/drawingml/2006/main" xmlns:r="http://schemas.openxmlformats.org/officeDocument/2006/relationships" xmlns:p="http://schemas.openxmlformats.org/presentationml/2006/main">
   <p:cSld>
     <p:spTree>
       <p:nvGrpSpPr>
@@ -19823,7 +19798,14 @@
         <p:cNvGrpSpPr/>
         <p:nvPr/>
       </p:nvGrpSpPr>
-      <p:grpSpPr/>
+      <p:grpSpPr>
+        <a:xfrm>
+          <a:off x="0" y="0"/>
+          <a:ext cx="0" cy="0"/>
+          <a:chOff x="0" y="0"/>
+          <a:chExt cx="0" cy="0"/>
+        </a:xfrm>
+      </p:grpSpPr>
       <p:sp>
         <p:nvSpPr>
           <p:cNvPr id="2" name="Rectangle 1"/>
@@ -19864,6 +19846,7 @@
           <a:lstStyle/>
           <a:p>
             <a:pPr algn="ctr"/>
+            <a:endParaRPr/>
           </a:p>
         </p:txBody>
       </p:sp>
@@ -19907,6 +19890,7 @@
           <a:lstStyle/>
           <a:p>
             <a:pPr algn="ctr"/>
+            <a:endParaRPr/>
           </a:p>
         </p:txBody>
       </p:sp>
@@ -19950,6 +19934,7 @@
           <a:lstStyle/>
           <a:p>
             <a:pPr algn="ctr"/>
+            <a:endParaRPr/>
           </a:p>
         </p:txBody>
       </p:sp>
@@ -20061,6 +20046,7 @@
           <a:lstStyle/>
           <a:p>
             <a:pPr algn="ctr"/>
+            <a:endParaRPr/>
           </a:p>
         </p:txBody>
       </p:sp>
@@ -20140,6 +20126,7 @@
           <a:lstStyle/>
           <a:p>
             <a:pPr algn="ctr"/>
+            <a:endParaRPr/>
           </a:p>
         </p:txBody>
       </p:sp>
@@ -20183,6 +20170,7 @@
           <a:lstStyle/>
           <a:p>
             <a:pPr algn="ctr"/>
+            <a:endParaRPr/>
           </a:p>
         </p:txBody>
       </p:sp>
@@ -20296,6 +20284,7 @@
           <a:lstStyle/>
           <a:p>
             <a:pPr algn="ctr"/>
+            <a:endParaRPr/>
           </a:p>
         </p:txBody>
       </p:sp>
@@ -20339,6 +20328,7 @@
           <a:lstStyle/>
           <a:p>
             <a:pPr algn="ctr"/>
+            <a:endParaRPr/>
           </a:p>
         </p:txBody>
       </p:sp>
@@ -20452,6 +20442,7 @@
           <a:lstStyle/>
           <a:p>
             <a:pPr algn="ctr"/>
+            <a:endParaRPr/>
           </a:p>
         </p:txBody>
       </p:sp>
@@ -20495,6 +20486,7 @@
           <a:lstStyle/>
           <a:p>
             <a:pPr algn="ctr"/>
+            <a:endParaRPr/>
           </a:p>
         </p:txBody>
       </p:sp>
@@ -20608,6 +20600,7 @@
           <a:lstStyle/>
           <a:p>
             <a:pPr algn="ctr"/>
+            <a:endParaRPr/>
           </a:p>
         </p:txBody>
       </p:sp>
@@ -20651,6 +20644,7 @@
           <a:lstStyle/>
           <a:p>
             <a:pPr algn="ctr"/>
+            <a:endParaRPr/>
           </a:p>
         </p:txBody>
       </p:sp>
@@ -20762,6 +20756,7 @@
           <a:lstStyle/>
           <a:p>
             <a:pPr algn="ctr"/>
+            <a:endParaRPr/>
           </a:p>
         </p:txBody>
       </p:sp>
@@ -20876,7 +20871,7 @@
 </file>
 
 <file path=ppt/slides/slide3.xml><?xml version="1.0" encoding="utf-8"?>
-<p:sld xmlns:a="http://schemas.openxmlformats.org/drawingml/2006/main" xmlns:p="http://schemas.openxmlformats.org/presentationml/2006/main" xmlns:r="http://schemas.openxmlformats.org/officeDocument/2006/relationships">
+<p:sld xmlns:a="http://schemas.openxmlformats.org/drawingml/2006/main" xmlns:r="http://schemas.openxmlformats.org/officeDocument/2006/relationships" xmlns:p="http://schemas.openxmlformats.org/presentationml/2006/main">
   <p:cSld>
     <p:spTree>
       <p:nvGrpSpPr>
@@ -20884,7 +20879,14 @@
         <p:cNvGrpSpPr/>
         <p:nvPr/>
       </p:nvGrpSpPr>
-      <p:grpSpPr/>
+      <p:grpSpPr>
+        <a:xfrm>
+          <a:off x="0" y="0"/>
+          <a:ext cx="0" cy="0"/>
+          <a:chOff x="0" y="0"/>
+          <a:chExt cx="0" cy="0"/>
+        </a:xfrm>
+      </p:grpSpPr>
       <p:sp>
         <p:nvSpPr>
           <p:cNvPr id="2" name="Rectangle 1"/>
@@ -20925,6 +20927,7 @@
           <a:lstStyle/>
           <a:p>
             <a:pPr algn="ctr"/>
+            <a:endParaRPr/>
           </a:p>
         </p:txBody>
       </p:sp>
@@ -20968,6 +20971,7 @@
           <a:lstStyle/>
           <a:p>
             <a:pPr algn="ctr"/>
+            <a:endParaRPr/>
           </a:p>
         </p:txBody>
       </p:sp>
@@ -21011,6 +21015,7 @@
           <a:lstStyle/>
           <a:p>
             <a:pPr algn="ctr"/>
+            <a:endParaRPr/>
           </a:p>
         </p:txBody>
       </p:sp>
@@ -21122,6 +21127,7 @@
           <a:lstStyle/>
           <a:p>
             <a:pPr algn="ctr"/>
+            <a:endParaRPr/>
           </a:p>
         </p:txBody>
       </p:sp>
@@ -21201,6 +21207,7 @@
           <a:lstStyle/>
           <a:p>
             <a:pPr algn="ctr"/>
+            <a:endParaRPr/>
           </a:p>
         </p:txBody>
       </p:sp>
@@ -21244,6 +21251,7 @@
           <a:lstStyle/>
           <a:p>
             <a:pPr algn="ctr"/>
+            <a:endParaRPr/>
           </a:p>
         </p:txBody>
       </p:sp>
@@ -21395,6 +21403,7 @@
           <a:lstStyle/>
           <a:p>
             <a:pPr algn="ctr"/>
+            <a:endParaRPr/>
           </a:p>
         </p:txBody>
       </p:sp>
@@ -21438,6 +21447,7 @@
           <a:lstStyle/>
           <a:p>
             <a:pPr algn="ctr"/>
+            <a:endParaRPr/>
           </a:p>
         </p:txBody>
       </p:sp>
@@ -21588,6 +21598,7 @@
           <a:lstStyle/>
           <a:p>
             <a:pPr algn="ctr"/>
+            <a:endParaRPr/>
           </a:p>
         </p:txBody>
       </p:sp>
@@ -21631,6 +21642,7 @@
           <a:lstStyle/>
           <a:p>
             <a:pPr algn="ctr"/>
+            <a:endParaRPr/>
           </a:p>
         </p:txBody>
       </p:sp>
@@ -21782,6 +21794,7 @@
           <a:lstStyle/>
           <a:p>
             <a:pPr algn="ctr"/>
+            <a:endParaRPr/>
           </a:p>
         </p:txBody>
       </p:sp>
@@ -21825,6 +21838,7 @@
           <a:lstStyle/>
           <a:p>
             <a:pPr algn="ctr"/>
+            <a:endParaRPr/>
           </a:p>
         </p:txBody>
       </p:sp>
@@ -21976,6 +21990,7 @@
           <a:lstStyle/>
           <a:p>
             <a:pPr algn="ctr"/>
+            <a:endParaRPr/>
           </a:p>
         </p:txBody>
       </p:sp>
@@ -22019,6 +22034,7 @@
           <a:lstStyle/>
           <a:p>
             <a:pPr algn="ctr"/>
+            <a:endParaRPr/>
           </a:p>
         </p:txBody>
       </p:sp>
@@ -22168,6 +22184,7 @@
           <a:lstStyle/>
           <a:p>
             <a:pPr algn="ctr"/>
+            <a:endParaRPr/>
           </a:p>
         </p:txBody>
       </p:sp>
@@ -22247,6 +22264,7 @@
           <a:lstStyle/>
           <a:p>
             <a:pPr algn="ctr"/>
+            <a:endParaRPr/>
           </a:p>
         </p:txBody>
       </p:sp>
@@ -22290,6 +22308,7 @@
           <a:lstStyle/>
           <a:p>
             <a:pPr algn="ctr"/>
+            <a:endParaRPr/>
           </a:p>
         </p:txBody>
       </p:sp>
@@ -22401,6 +22420,7 @@
           <a:lstStyle/>
           <a:p>
             <a:pPr algn="ctr"/>
+            <a:endParaRPr/>
           </a:p>
         </p:txBody>
       </p:sp>
@@ -22512,6 +22532,7 @@
           <a:lstStyle/>
           <a:p>
             <a:pPr algn="ctr"/>
+            <a:endParaRPr/>
           </a:p>
         </p:txBody>
       </p:sp>
@@ -22623,6 +22644,7 @@
           <a:lstStyle/>
           <a:p>
             <a:pPr algn="ctr"/>
+            <a:endParaRPr/>
           </a:p>
         </p:txBody>
       </p:sp>
@@ -22737,7 +22759,7 @@
 </file>
 
 <file path=ppt/slides/slide4.xml><?xml version="1.0" encoding="utf-8"?>
-<p:sld xmlns:a="http://schemas.openxmlformats.org/drawingml/2006/main" xmlns:p="http://schemas.openxmlformats.org/presentationml/2006/main" xmlns:r="http://schemas.openxmlformats.org/officeDocument/2006/relationships">
+<p:sld xmlns:a="http://schemas.openxmlformats.org/drawingml/2006/main" xmlns:r="http://schemas.openxmlformats.org/officeDocument/2006/relationships" xmlns:p="http://schemas.openxmlformats.org/presentationml/2006/main">
   <p:cSld>
     <p:spTree>
       <p:nvGrpSpPr>
@@ -22745,7 +22767,14 @@
         <p:cNvGrpSpPr/>
         <p:nvPr/>
       </p:nvGrpSpPr>
-      <p:grpSpPr/>
+      <p:grpSpPr>
+        <a:xfrm>
+          <a:off x="0" y="0"/>
+          <a:ext cx="0" cy="0"/>
+          <a:chOff x="0" y="0"/>
+          <a:chExt cx="0" cy="0"/>
+        </a:xfrm>
+      </p:grpSpPr>
       <p:sp>
         <p:nvSpPr>
           <p:cNvPr id="2" name="Rectangle 1"/>
@@ -22786,6 +22815,7 @@
           <a:lstStyle/>
           <a:p>
             <a:pPr algn="ctr"/>
+            <a:endParaRPr/>
           </a:p>
         </p:txBody>
       </p:sp>
@@ -22829,6 +22859,7 @@
           <a:lstStyle/>
           <a:p>
             <a:pPr algn="ctr"/>
+            <a:endParaRPr/>
           </a:p>
         </p:txBody>
       </p:sp>
@@ -22872,6 +22903,7 @@
           <a:lstStyle/>
           <a:p>
             <a:pPr algn="ctr"/>
+            <a:endParaRPr/>
           </a:p>
         </p:txBody>
       </p:sp>
@@ -22983,6 +23015,7 @@
           <a:lstStyle/>
           <a:p>
             <a:pPr algn="ctr"/>
+            <a:endParaRPr/>
           </a:p>
         </p:txBody>
       </p:sp>
@@ -23062,6 +23095,7 @@
           <a:lstStyle/>
           <a:p>
             <a:pPr algn="ctr"/>
+            <a:endParaRPr/>
           </a:p>
         </p:txBody>
       </p:sp>
@@ -23105,6 +23139,7 @@
           <a:lstStyle/>
           <a:p>
             <a:pPr algn="ctr"/>
+            <a:endParaRPr/>
           </a:p>
         </p:txBody>
       </p:sp>
@@ -23229,6 +23264,7 @@
           <a:lstStyle/>
           <a:p>
             <a:pPr algn="ctr"/>
+            <a:endParaRPr/>
           </a:p>
         </p:txBody>
       </p:sp>
@@ -23342,6 +23378,7 @@
           <a:lstStyle/>
           <a:p>
             <a:pPr algn="ctr"/>
+            <a:endParaRPr/>
           </a:p>
         </p:txBody>
       </p:sp>
@@ -23455,6 +23492,7 @@
           <a:lstStyle/>
           <a:p>
             <a:pPr algn="ctr"/>
+            <a:endParaRPr/>
           </a:p>
         </p:txBody>
       </p:sp>
@@ -23568,6 +23606,7 @@
           <a:lstStyle/>
           <a:p>
             <a:pPr algn="ctr"/>
+            <a:endParaRPr/>
           </a:p>
         </p:txBody>
       </p:sp>
@@ -23681,6 +23720,7 @@
           <a:lstStyle/>
           <a:p>
             <a:pPr algn="ctr"/>
+            <a:endParaRPr/>
           </a:p>
         </p:txBody>
       </p:sp>
@@ -23794,6 +23834,7 @@
           <a:lstStyle/>
           <a:p>
             <a:pPr algn="ctr"/>
+            <a:endParaRPr/>
           </a:p>
         </p:txBody>
       </p:sp>
@@ -23874,6 +23915,7 @@
           <a:lstStyle/>
           <a:p>
             <a:pPr algn="ctr"/>
+            <a:endParaRPr/>
           </a:p>
         </p:txBody>
       </p:sp>
@@ -23954,6 +23996,7 @@
           <a:lstStyle/>
           <a:p>
             <a:pPr algn="ctr"/>
+            <a:endParaRPr/>
           </a:p>
         </p:txBody>
       </p:sp>
@@ -24034,6 +24077,7 @@
           <a:lstStyle/>
           <a:p>
             <a:pPr algn="ctr"/>
+            <a:endParaRPr/>
           </a:p>
         </p:txBody>
       </p:sp>
@@ -24115,6 +24159,7 @@
           <a:lstStyle/>
           <a:p>
             <a:pPr algn="ctr"/>
+            <a:endParaRPr/>
           </a:p>
         </p:txBody>
       </p:sp>
@@ -24196,6 +24241,7 @@
           <a:lstStyle/>
           <a:p>
             <a:pPr algn="ctr"/>
+            <a:endParaRPr/>
           </a:p>
         </p:txBody>
       </p:sp>
@@ -24277,6 +24323,7 @@
           <a:lstStyle/>
           <a:p>
             <a:pPr algn="ctr"/>
+            <a:endParaRPr/>
           </a:p>
         </p:txBody>
       </p:sp>
@@ -24358,6 +24405,7 @@
           <a:lstStyle/>
           <a:p>
             <a:pPr algn="ctr"/>
+            <a:endParaRPr/>
           </a:p>
         </p:txBody>
       </p:sp>
@@ -24439,6 +24487,7 @@
           <a:lstStyle/>
           <a:p>
             <a:pPr algn="ctr"/>
+            <a:endParaRPr/>
           </a:p>
         </p:txBody>
       </p:sp>
@@ -24519,6 +24568,7 @@
           <a:lstStyle/>
           <a:p>
             <a:pPr algn="ctr"/>
+            <a:endParaRPr/>
           </a:p>
         </p:txBody>
       </p:sp>
@@ -24599,6 +24649,7 @@
           <a:lstStyle/>
           <a:p>
             <a:pPr algn="ctr"/>
+            <a:endParaRPr/>
           </a:p>
         </p:txBody>
       </p:sp>
@@ -24679,6 +24730,7 @@
           <a:lstStyle/>
           <a:p>
             <a:pPr algn="ctr"/>
+            <a:endParaRPr/>
           </a:p>
         </p:txBody>
       </p:sp>
@@ -24759,6 +24811,7 @@
           <a:lstStyle/>
           <a:p>
             <a:pPr algn="ctr"/>
+            <a:endParaRPr/>
           </a:p>
         </p:txBody>
       </p:sp>
@@ -24837,6 +24890,7 @@
           <a:lstStyle/>
           <a:p>
             <a:pPr algn="ctr"/>
+            <a:endParaRPr/>
           </a:p>
         </p:txBody>
       </p:sp>
@@ -24916,6 +24970,7 @@
           <a:lstStyle/>
           <a:p>
             <a:pPr algn="ctr"/>
+            <a:endParaRPr/>
           </a:p>
         </p:txBody>
       </p:sp>
@@ -24997,6 +25052,7 @@
           <a:lstStyle/>
           <a:p>
             <a:pPr algn="ctr"/>
+            <a:endParaRPr/>
           </a:p>
         </p:txBody>
       </p:sp>
@@ -25078,6 +25134,7 @@
           <a:lstStyle/>
           <a:p>
             <a:pPr algn="ctr"/>
+            <a:endParaRPr/>
           </a:p>
         </p:txBody>
       </p:sp>
@@ -25159,6 +25216,7 @@
           <a:lstStyle/>
           <a:p>
             <a:pPr algn="ctr"/>
+            <a:endParaRPr/>
           </a:p>
         </p:txBody>
       </p:sp>
@@ -25207,7 +25265,7 @@
 </file>
 
 <file path=ppt/slides/slide5.xml><?xml version="1.0" encoding="utf-8"?>
-<p:sld xmlns:a="http://schemas.openxmlformats.org/drawingml/2006/main" xmlns:p="http://schemas.openxmlformats.org/presentationml/2006/main" xmlns:r="http://schemas.openxmlformats.org/officeDocument/2006/relationships">
+<p:sld xmlns:a="http://schemas.openxmlformats.org/drawingml/2006/main" xmlns:r="http://schemas.openxmlformats.org/officeDocument/2006/relationships" xmlns:p="http://schemas.openxmlformats.org/presentationml/2006/main">
   <p:cSld>
     <p:spTree>
       <p:nvGrpSpPr>
@@ -25215,7 +25273,14 @@
         <p:cNvGrpSpPr/>
         <p:nvPr/>
       </p:nvGrpSpPr>
-      <p:grpSpPr/>
+      <p:grpSpPr>
+        <a:xfrm>
+          <a:off x="0" y="0"/>
+          <a:ext cx="0" cy="0"/>
+          <a:chOff x="0" y="0"/>
+          <a:chExt cx="0" cy="0"/>
+        </a:xfrm>
+      </p:grpSpPr>
       <p:sp>
         <p:nvSpPr>
           <p:cNvPr id="2" name="Rectangle 1"/>
@@ -25256,6 +25321,7 @@
           <a:lstStyle/>
           <a:p>
             <a:pPr algn="ctr"/>
+            <a:endParaRPr/>
           </a:p>
         </p:txBody>
       </p:sp>
@@ -25299,6 +25365,7 @@
           <a:lstStyle/>
           <a:p>
             <a:pPr algn="ctr"/>
+            <a:endParaRPr/>
           </a:p>
         </p:txBody>
       </p:sp>
@@ -25342,6 +25409,7 @@
           <a:lstStyle/>
           <a:p>
             <a:pPr algn="ctr"/>
+            <a:endParaRPr/>
           </a:p>
         </p:txBody>
       </p:sp>
@@ -25453,6 +25521,7 @@
           <a:lstStyle/>
           <a:p>
             <a:pPr algn="ctr"/>
+            <a:endParaRPr/>
           </a:p>
         </p:txBody>
       </p:sp>
@@ -25530,6 +25599,7 @@
           <a:lstStyle/>
           <a:p>
             <a:pPr algn="ctr"/>
+            <a:endParaRPr/>
           </a:p>
         </p:txBody>
       </p:sp>
@@ -25675,6 +25745,7 @@
           <a:lstStyle/>
           <a:p>
             <a:pPr algn="ctr"/>
+            <a:endParaRPr/>
           </a:p>
         </p:txBody>
       </p:sp>
@@ -25820,6 +25891,7 @@
           <a:lstStyle/>
           <a:p>
             <a:pPr algn="ctr"/>
+            <a:endParaRPr/>
           </a:p>
         </p:txBody>
       </p:sp>
@@ -25965,6 +26037,7 @@
           <a:lstStyle/>
           <a:p>
             <a:pPr algn="ctr"/>
+            <a:endParaRPr/>
           </a:p>
         </p:txBody>
       </p:sp>
@@ -26110,6 +26183,7 @@
           <a:lstStyle/>
           <a:p>
             <a:pPr algn="ctr"/>
+            <a:endParaRPr/>
           </a:p>
         </p:txBody>
       </p:sp>
@@ -26255,6 +26329,7 @@
           <a:lstStyle/>
           <a:p>
             <a:pPr algn="ctr"/>
+            <a:endParaRPr/>
           </a:p>
         </p:txBody>
       </p:sp>
@@ -26400,6 +26475,7 @@
           <a:lstStyle/>
           <a:p>
             <a:pPr algn="ctr"/>
+            <a:endParaRPr/>
           </a:p>
         </p:txBody>
       </p:sp>
@@ -26545,6 +26621,7 @@
           <a:lstStyle/>
           <a:p>
             <a:pPr algn="ctr"/>
+            <a:endParaRPr/>
           </a:p>
         </p:txBody>
       </p:sp>
@@ -26690,6 +26767,7 @@
           <a:lstStyle/>
           <a:p>
             <a:pPr algn="ctr"/>
+            <a:endParaRPr/>
           </a:p>
         </p:txBody>
       </p:sp>
@@ -26835,6 +26913,7 @@
           <a:lstStyle/>
           <a:p>
             <a:pPr algn="ctr"/>
+            <a:endParaRPr/>
           </a:p>
         </p:txBody>
       </p:sp>
@@ -26935,7 +27014,7 @@
                   <a:srgbClr val="6B7C93"/>
                 </a:solidFill>
               </a:rPr>
-              <a:t>All 5 tools exposed via Model Context Protocol — discoverable by Claude Desktop, Claude Code, and external bank systems without Python imports. USE_MCP=true selects MCP path; default is direct @tool imports (zero breaking change). Adds schema validation at the protocol layer; &lt;1ms serialisation overhead</a:t>
+              <a:t>All 5 tools exposed via Model Context Protocol — discoverable by Claude Desktop, Claude Code, and external bank systems without Python imports. MCP path is the default (USE_MCP=true); USE_MCP=false selects direct @tool imports. Adds schema validation at the protocol layer; &lt;1ms serialisation overhead</a:t>
             </a:r>
           </a:p>
         </p:txBody>
@@ -26949,7 +27028,7 @@
 </file>
 
 <file path=ppt/slides/slide6.xml><?xml version="1.0" encoding="utf-8"?>
-<p:sld xmlns:a="http://schemas.openxmlformats.org/drawingml/2006/main" xmlns:p="http://schemas.openxmlformats.org/presentationml/2006/main" xmlns:r="http://schemas.openxmlformats.org/officeDocument/2006/relationships">
+<p:sld xmlns:a="http://schemas.openxmlformats.org/drawingml/2006/main" xmlns:r="http://schemas.openxmlformats.org/officeDocument/2006/relationships" xmlns:p="http://schemas.openxmlformats.org/presentationml/2006/main">
   <p:cSld>
     <p:spTree>
       <p:nvGrpSpPr>
@@ -26957,7 +27036,14 @@
         <p:cNvGrpSpPr/>
         <p:nvPr/>
       </p:nvGrpSpPr>
-      <p:grpSpPr/>
+      <p:grpSpPr>
+        <a:xfrm>
+          <a:off x="0" y="0"/>
+          <a:ext cx="0" cy="0"/>
+          <a:chOff x="0" y="0"/>
+          <a:chExt cx="0" cy="0"/>
+        </a:xfrm>
+      </p:grpSpPr>
       <p:sp>
         <p:nvSpPr>
           <p:cNvPr id="2" name="Rectangle 1"/>
@@ -26998,6 +27084,7 @@
           <a:lstStyle/>
           <a:p>
             <a:pPr algn="ctr"/>
+            <a:endParaRPr/>
           </a:p>
         </p:txBody>
       </p:sp>
@@ -27041,6 +27128,7 @@
           <a:lstStyle/>
           <a:p>
             <a:pPr algn="ctr"/>
+            <a:endParaRPr/>
           </a:p>
         </p:txBody>
       </p:sp>
@@ -27084,6 +27172,7 @@
           <a:lstStyle/>
           <a:p>
             <a:pPr algn="ctr"/>
+            <a:endParaRPr/>
           </a:p>
         </p:txBody>
       </p:sp>
@@ -27195,6 +27284,7 @@
           <a:lstStyle/>
           <a:p>
             <a:pPr algn="ctr"/>
+            <a:endParaRPr/>
           </a:p>
         </p:txBody>
       </p:sp>
@@ -27272,6 +27362,7 @@
           <a:lstStyle/>
           <a:p>
             <a:pPr algn="ctr"/>
+            <a:endParaRPr/>
           </a:p>
         </p:txBody>
       </p:sp>
@@ -27351,6 +27442,7 @@
           <a:lstStyle/>
           <a:p>
             <a:pPr algn="ctr"/>
+            <a:endParaRPr/>
           </a:p>
         </p:txBody>
       </p:sp>
@@ -27534,6 +27626,7 @@
           <a:lstStyle/>
           <a:p>
             <a:pPr algn="ctr"/>
+            <a:endParaRPr/>
           </a:p>
         </p:txBody>
       </p:sp>
@@ -27613,6 +27706,7 @@
           <a:lstStyle/>
           <a:p>
             <a:pPr algn="ctr"/>
+            <a:endParaRPr/>
           </a:p>
         </p:txBody>
       </p:sp>
@@ -27796,6 +27890,7 @@
           <a:lstStyle/>
           <a:p>
             <a:pPr algn="ctr"/>
+            <a:endParaRPr/>
           </a:p>
         </p:txBody>
       </p:sp>
@@ -27875,6 +27970,7 @@
           <a:lstStyle/>
           <a:p>
             <a:pPr algn="ctr"/>
+            <a:endParaRPr/>
           </a:p>
         </p:txBody>
       </p:sp>
@@ -28058,6 +28154,7 @@
           <a:lstStyle/>
           <a:p>
             <a:pPr algn="ctr"/>
+            <a:endParaRPr/>
           </a:p>
         </p:txBody>
       </p:sp>
@@ -28137,6 +28234,7 @@
           <a:lstStyle/>
           <a:p>
             <a:pPr algn="ctr"/>
+            <a:endParaRPr/>
           </a:p>
         </p:txBody>
       </p:sp>
@@ -28320,6 +28418,7 @@
           <a:lstStyle/>
           <a:p>
             <a:pPr algn="ctr"/>
+            <a:endParaRPr/>
           </a:p>
         </p:txBody>
       </p:sp>
@@ -28399,6 +28498,7 @@
           <a:lstStyle/>
           <a:p>
             <a:pPr algn="ctr"/>
+            <a:endParaRPr/>
           </a:p>
         </p:txBody>
       </p:sp>
@@ -28582,6 +28682,7 @@
           <a:lstStyle/>
           <a:p>
             <a:pPr algn="ctr"/>
+            <a:endParaRPr/>
           </a:p>
         </p:txBody>
       </p:sp>
@@ -28661,6 +28762,7 @@
           <a:lstStyle/>
           <a:p>
             <a:pPr algn="ctr"/>
+            <a:endParaRPr/>
           </a:p>
         </p:txBody>
       </p:sp>
@@ -28728,7 +28830,7 @@
                   <a:srgbClr val="2D3A4B"/>
                 </a:solidFill>
               </a:rPr>
-              <a:t>• Star rating UI
+              <a:t>• Thumbs 👍/👎 feedback
 • feedback_collector
 • EMPATHY_PREFIX inject
 • policy_checker inline</a:t>
@@ -28844,6 +28946,7 @@
           <a:lstStyle/>
           <a:p>
             <a:pPr algn="ctr"/>
+            <a:endParaRPr/>
           </a:p>
         </p:txBody>
       </p:sp>
@@ -28923,6 +29026,7 @@
           <a:lstStyle/>
           <a:p>
             <a:pPr algn="ctr"/>
+            <a:endParaRPr/>
           </a:p>
         </p:txBody>
       </p:sp>
@@ -29106,6 +29210,7 @@
           <a:lstStyle/>
           <a:p>
             <a:pPr algn="ctr"/>
+            <a:endParaRPr/>
           </a:p>
         </p:txBody>
       </p:sp>
@@ -29185,6 +29290,7 @@
           <a:lstStyle/>
           <a:p>
             <a:pPr algn="ctr"/>
+            <a:endParaRPr/>
           </a:p>
         </p:txBody>
       </p:sp>
@@ -29333,6 +29439,7 @@
           <a:lstStyle/>
           <a:p>
             <a:pPr algn="ctr"/>
+            <a:endParaRPr/>
           </a:p>
         </p:txBody>
       </p:sp>
@@ -29410,6 +29517,7 @@
           <a:lstStyle/>
           <a:p>
             <a:pPr algn="ctr"/>
+            <a:endParaRPr/>
           </a:p>
         </p:txBody>
       </p:sp>
@@ -29453,6 +29561,7 @@
           <a:lstStyle/>
           <a:p>
             <a:pPr algn="ctr"/>
+            <a:endParaRPr/>
           </a:p>
         </p:txBody>
       </p:sp>
@@ -29531,6 +29640,7 @@
           <a:lstStyle/>
           <a:p>
             <a:pPr algn="ctr"/>
+            <a:endParaRPr/>
           </a:p>
         </p:txBody>
       </p:sp>
@@ -29574,6 +29684,7 @@
           <a:lstStyle/>
           <a:p>
             <a:pPr algn="ctr"/>
+            <a:endParaRPr/>
           </a:p>
         </p:txBody>
       </p:sp>
@@ -29652,6 +29763,7 @@
           <a:lstStyle/>
           <a:p>
             <a:pPr algn="ctr"/>
+            <a:endParaRPr/>
           </a:p>
         </p:txBody>
       </p:sp>
@@ -29695,6 +29807,7 @@
           <a:lstStyle/>
           <a:p>
             <a:pPr algn="ctr"/>
+            <a:endParaRPr/>
           </a:p>
         </p:txBody>
       </p:sp>
@@ -30322,7 +30435,7 @@
                   <a:srgbClr val="2D3A4B"/>
                 </a:solidFill>
               </a:rPr>
-              <a:t>Star ratings → empathy;
+              <a:t>Thumbs feedback → empathy;
 policy_checker inline</a:t>
             </a:r>
           </a:p>
@@ -30616,7 +30729,7 @@
 </file>
 
 <file path=ppt/slides/slide7.xml><?xml version="1.0" encoding="utf-8"?>
-<p:sld xmlns:a="http://schemas.openxmlformats.org/drawingml/2006/main" xmlns:p="http://schemas.openxmlformats.org/presentationml/2006/main" xmlns:r="http://schemas.openxmlformats.org/officeDocument/2006/relationships">
+<p:sld xmlns:a="http://schemas.openxmlformats.org/drawingml/2006/main" xmlns:r="http://schemas.openxmlformats.org/officeDocument/2006/relationships" xmlns:p="http://schemas.openxmlformats.org/presentationml/2006/main">
   <p:cSld>
     <p:spTree>
       <p:nvGrpSpPr>
@@ -30624,7 +30737,14 @@
         <p:cNvGrpSpPr/>
         <p:nvPr/>
       </p:nvGrpSpPr>
-      <p:grpSpPr/>
+      <p:grpSpPr>
+        <a:xfrm>
+          <a:off x="0" y="0"/>
+          <a:ext cx="0" cy="0"/>
+          <a:chOff x="0" y="0"/>
+          <a:chExt cx="0" cy="0"/>
+        </a:xfrm>
+      </p:grpSpPr>
       <p:sp>
         <p:nvSpPr>
           <p:cNvPr id="2" name="Rectangle 1"/>
@@ -30665,6 +30785,7 @@
           <a:lstStyle/>
           <a:p>
             <a:pPr algn="ctr"/>
+            <a:endParaRPr/>
           </a:p>
         </p:txBody>
       </p:sp>
@@ -30708,6 +30829,7 @@
           <a:lstStyle/>
           <a:p>
             <a:pPr algn="ctr"/>
+            <a:endParaRPr/>
           </a:p>
         </p:txBody>
       </p:sp>
@@ -30751,6 +30873,7 @@
           <a:lstStyle/>
           <a:p>
             <a:pPr algn="ctr"/>
+            <a:endParaRPr/>
           </a:p>
         </p:txBody>
       </p:sp>
@@ -30862,6 +30985,7 @@
           <a:lstStyle/>
           <a:p>
             <a:pPr algn="ctr"/>
+            <a:endParaRPr/>
           </a:p>
         </p:txBody>
       </p:sp>
@@ -30941,6 +31065,7 @@
           <a:lstStyle/>
           <a:p>
             <a:pPr algn="ctr"/>
+            <a:endParaRPr/>
           </a:p>
         </p:txBody>
       </p:sp>
@@ -30984,6 +31109,7 @@
           <a:lstStyle/>
           <a:p>
             <a:pPr algn="ctr"/>
+            <a:endParaRPr/>
           </a:p>
         </p:txBody>
       </p:sp>
@@ -31061,6 +31187,7 @@
           <a:lstStyle/>
           <a:p>
             <a:pPr algn="ctr"/>
+            <a:endParaRPr/>
           </a:p>
         </p:txBody>
       </p:sp>
@@ -31172,6 +31299,7 @@
           <a:lstStyle/>
           <a:p>
             <a:pPr algn="ctr"/>
+            <a:endParaRPr/>
           </a:p>
         </p:txBody>
       </p:sp>
@@ -31283,6 +31411,7 @@
           <a:lstStyle/>
           <a:p>
             <a:pPr algn="ctr"/>
+            <a:endParaRPr/>
           </a:p>
         </p:txBody>
       </p:sp>
@@ -31394,6 +31523,7 @@
           <a:lstStyle/>
           <a:p>
             <a:pPr algn="ctr"/>
+            <a:endParaRPr/>
           </a:p>
         </p:txBody>
       </p:sp>
@@ -31505,6 +31635,7 @@
           <a:lstStyle/>
           <a:p>
             <a:pPr algn="ctr"/>
+            <a:endParaRPr/>
           </a:p>
         </p:txBody>
       </p:sp>
@@ -31618,6 +31749,7 @@
           <a:lstStyle/>
           <a:p>
             <a:pPr algn="ctr"/>
+            <a:endParaRPr/>
           </a:p>
         </p:txBody>
       </p:sp>
@@ -31661,6 +31793,7 @@
           <a:lstStyle/>
           <a:p>
             <a:pPr algn="ctr"/>
+            <a:endParaRPr/>
           </a:p>
         </p:txBody>
       </p:sp>
@@ -31776,6 +31909,7 @@
           <a:lstStyle/>
           <a:p>
             <a:pPr algn="ctr"/>
+            <a:endParaRPr/>
           </a:p>
         </p:txBody>
       </p:sp>
@@ -31819,6 +31953,7 @@
           <a:lstStyle/>
           <a:p>
             <a:pPr algn="ctr"/>
+            <a:endParaRPr/>
           </a:p>
         </p:txBody>
       </p:sp>
@@ -31934,6 +32069,7 @@
           <a:lstStyle/>
           <a:p>
             <a:pPr algn="ctr"/>
+            <a:endParaRPr/>
           </a:p>
         </p:txBody>
       </p:sp>
@@ -31977,6 +32113,7 @@
           <a:lstStyle/>
           <a:p>
             <a:pPr algn="ctr"/>
+            <a:endParaRPr/>
           </a:p>
         </p:txBody>
       </p:sp>
@@ -32092,6 +32229,7 @@
           <a:lstStyle/>
           <a:p>
             <a:pPr algn="ctr"/>
+            <a:endParaRPr/>
           </a:p>
         </p:txBody>
       </p:sp>
@@ -32135,6 +32273,7 @@
           <a:lstStyle/>
           <a:p>
             <a:pPr algn="ctr"/>
+            <a:endParaRPr/>
           </a:p>
         </p:txBody>
       </p:sp>
@@ -32250,6 +32389,7 @@
           <a:lstStyle/>
           <a:p>
             <a:pPr algn="ctr"/>
+            <a:endParaRPr/>
           </a:p>
         </p:txBody>
       </p:sp>
@@ -32293,6 +32433,7 @@
           <a:lstStyle/>
           <a:p>
             <a:pPr algn="ctr"/>
+            <a:endParaRPr/>
           </a:p>
         </p:txBody>
       </p:sp>
@@ -32406,6 +32547,7 @@
           <a:lstStyle/>
           <a:p>
             <a:pPr algn="ctr"/>
+            <a:endParaRPr/>
           </a:p>
         </p:txBody>
       </p:sp>
@@ -32417,28 +32559,92 @@
         </p:nvSpPr>
         <p:spPr>
           <a:xfrm>
-            <a:off x="4224528" y="6300216"/>
-            <a:ext cx="7662672" cy="146304"/>
-          </a:xfrm>
-          <a:prstGeom prst="rect">
-            <a:avLst/>
-          </a:prstGeom>
-          <a:noFill/>
-        </p:spPr>
-        <p:txBody>
-          <a:bodyPr wrap="square">
-            <a:spAutoFit/>
-          </a:bodyPr>
-          <a:lstStyle/>
-          <a:p>
-            <a:pPr algn="ctr"/>
-            <a:r>
-              <a:rPr sz="750" b="1" i="0">
+            <a:off x="4224528" y="6271188"/>
+            <a:ext cx="7644257" cy="207749"/>
+          </a:xfrm>
+          <a:prstGeom prst="rect">
+            <a:avLst/>
+          </a:prstGeom>
+          <a:noFill/>
+        </p:spPr>
+        <p:txBody>
+          <a:bodyPr wrap="square">
+            <a:spAutoFit/>
+          </a:bodyPr>
+          <a:lstStyle/>
+          <a:p>
+            <a:pPr algn="ctr"/>
+            <a:r>
+              <a:rPr sz="750" b="1" i="0" dirty="0">
                 <a:solidFill>
                   <a:srgbClr val="FFFFFF"/>
                 </a:solidFill>
               </a:rPr>
-              <a:t>MCP Exposure Layer: all 5 tools discoverable via loan_mcp/server.py (FastMCP · stdio &amp; HTTP)  ·  USE_MCP=true selects MCP path</a:t>
+              <a:t>MCP Exposure Layer: all 5 tools discoverable via </a:t>
+            </a:r>
+            <a:r>
+              <a:rPr sz="750" b="1" i="0" dirty="0" err="1">
+                <a:solidFill>
+                  <a:srgbClr val="FFFFFF"/>
+                </a:solidFill>
+              </a:rPr>
+              <a:t>loan_mcp</a:t>
+            </a:r>
+            <a:r>
+              <a:rPr sz="750" b="1" i="0" dirty="0">
+                <a:solidFill>
+                  <a:srgbClr val="FFFFFF"/>
+                </a:solidFill>
+              </a:rPr>
+              <a:t>/</a:t>
+            </a:r>
+            <a:r>
+              <a:rPr sz="750" b="1" i="0" dirty="0" err="1">
+                <a:solidFill>
+                  <a:srgbClr val="FFFFFF"/>
+                </a:solidFill>
+              </a:rPr>
+              <a:t>server.py</a:t>
+            </a:r>
+            <a:r>
+              <a:rPr sz="750" b="1" i="0" dirty="0">
+                <a:solidFill>
+                  <a:srgbClr val="FFFFFF"/>
+                </a:solidFill>
+              </a:rPr>
+              <a:t> (</a:t>
+            </a:r>
+            <a:r>
+              <a:rPr sz="750" b="1" i="0" dirty="0" err="1">
+                <a:solidFill>
+                  <a:srgbClr val="FFFFFF"/>
+                </a:solidFill>
+              </a:rPr>
+              <a:t>FastMCP</a:t>
+            </a:r>
+            <a:r>
+              <a:rPr sz="750" b="1" i="0" dirty="0">
+                <a:solidFill>
+                  <a:srgbClr val="FFFFFF"/>
+                </a:solidFill>
+              </a:rPr>
+              <a:t> · </a:t>
+            </a:r>
+            <a:r>
+              <a:rPr sz="750" b="1" i="0" dirty="0" err="1">
+                <a:solidFill>
+                  <a:srgbClr val="FFFFFF"/>
+                </a:solidFill>
+              </a:rPr>
+              <a:t>stdio</a:t>
+            </a:r>
+            <a:r>
+              <a:rPr sz="750" b="1" i="0" dirty="0">
+                <a:solidFill>
+                  <a:srgbClr val="FFFFFF"/>
+                </a:solidFill>
+              </a:rPr>
+              <a:t> &amp; HTTP)  ·  USE_MCP=true selects MCP path</a:t>
             </a:r>
           </a:p>
         </p:txBody>
@@ -32452,7 +32658,7 @@
 </file>
 
 <file path=ppt/slides/slide8.xml><?xml version="1.0" encoding="utf-8"?>
-<p:sld xmlns:a="http://schemas.openxmlformats.org/drawingml/2006/main" xmlns:p="http://schemas.openxmlformats.org/presentationml/2006/main" xmlns:r="http://schemas.openxmlformats.org/officeDocument/2006/relationships">
+<p:sld xmlns:a="http://schemas.openxmlformats.org/drawingml/2006/main" xmlns:r="http://schemas.openxmlformats.org/officeDocument/2006/relationships" xmlns:p="http://schemas.openxmlformats.org/presentationml/2006/main">
   <p:cSld>
     <p:spTree>
       <p:nvGrpSpPr>
@@ -32460,7 +32666,14 @@
         <p:cNvGrpSpPr/>
         <p:nvPr/>
       </p:nvGrpSpPr>
-      <p:grpSpPr/>
+      <p:grpSpPr>
+        <a:xfrm>
+          <a:off x="0" y="0"/>
+          <a:ext cx="0" cy="0"/>
+          <a:chOff x="0" y="0"/>
+          <a:chExt cx="0" cy="0"/>
+        </a:xfrm>
+      </p:grpSpPr>
       <p:sp>
         <p:nvSpPr>
           <p:cNvPr id="2" name="Rectangle 1"/>
@@ -32501,6 +32714,7 @@
           <a:lstStyle/>
           <a:p>
             <a:pPr algn="ctr"/>
+            <a:endParaRPr/>
           </a:p>
         </p:txBody>
       </p:sp>
@@ -32544,6 +32758,7 @@
           <a:lstStyle/>
           <a:p>
             <a:pPr algn="ctr"/>
+            <a:endParaRPr/>
           </a:p>
         </p:txBody>
       </p:sp>
@@ -32587,6 +32802,7 @@
           <a:lstStyle/>
           <a:p>
             <a:pPr algn="ctr"/>
+            <a:endParaRPr/>
           </a:p>
         </p:txBody>
       </p:sp>
@@ -32698,6 +32914,7 @@
           <a:lstStyle/>
           <a:p>
             <a:pPr algn="ctr"/>
+            <a:endParaRPr/>
           </a:p>
         </p:txBody>
       </p:sp>
@@ -32777,6 +32994,7 @@
           <a:lstStyle/>
           <a:p>
             <a:pPr algn="ctr"/>
+            <a:endParaRPr/>
           </a:p>
         </p:txBody>
       </p:sp>
@@ -32820,6 +33038,7 @@
           <a:lstStyle/>
           <a:p>
             <a:pPr algn="ctr"/>
+            <a:endParaRPr/>
           </a:p>
         </p:txBody>
       </p:sp>
@@ -33006,6 +33225,7 @@
           <a:lstStyle/>
           <a:p>
             <a:pPr algn="ctr"/>
+            <a:endParaRPr/>
           </a:p>
         </p:txBody>
       </p:sp>
@@ -33049,6 +33269,7 @@
           <a:lstStyle/>
           <a:p>
             <a:pPr algn="ctr"/>
+            <a:endParaRPr/>
           </a:p>
         </p:txBody>
       </p:sp>
@@ -33234,6 +33455,7 @@
           <a:lstStyle/>
           <a:p>
             <a:pPr algn="ctr"/>
+            <a:endParaRPr/>
           </a:p>
         </p:txBody>
       </p:sp>
@@ -33277,6 +33499,7 @@
           <a:lstStyle/>
           <a:p>
             <a:pPr algn="ctr"/>
+            <a:endParaRPr/>
           </a:p>
         </p:txBody>
       </p:sp>
@@ -33462,6 +33685,7 @@
           <a:lstStyle/>
           <a:p>
             <a:pPr algn="ctr"/>
+            <a:endParaRPr/>
           </a:p>
         </p:txBody>
       </p:sp>
@@ -33505,6 +33729,7 @@
           <a:lstStyle/>
           <a:p>
             <a:pPr algn="ctr"/>
+            <a:endParaRPr/>
           </a:p>
         </p:txBody>
       </p:sp>
@@ -33691,6 +33916,7 @@
           <a:lstStyle/>
           <a:p>
             <a:pPr algn="ctr"/>
+            <a:endParaRPr/>
           </a:p>
         </p:txBody>
       </p:sp>
@@ -33734,6 +33960,7 @@
           <a:lstStyle/>
           <a:p>
             <a:pPr algn="ctr"/>
+            <a:endParaRPr/>
           </a:p>
         </p:txBody>
       </p:sp>
@@ -33883,6 +34110,7 @@
           <a:lstStyle/>
           <a:p>
             <a:pPr algn="ctr"/>
+            <a:endParaRPr/>
           </a:p>
         </p:txBody>
       </p:sp>
@@ -33962,6 +34190,7 @@
           <a:lstStyle/>
           <a:p>
             <a:pPr algn="ctr"/>
+            <a:endParaRPr/>
           </a:p>
         </p:txBody>
       </p:sp>
@@ -34075,6 +34304,7 @@
           <a:lstStyle/>
           <a:p>
             <a:pPr algn="ctr"/>
+            <a:endParaRPr/>
           </a:p>
         </p:txBody>
       </p:sp>
@@ -34189,7 +34419,7 @@
 </file>
 
 <file path=ppt/slides/slide9.xml><?xml version="1.0" encoding="utf-8"?>
-<p:sld xmlns:a="http://schemas.openxmlformats.org/drawingml/2006/main" xmlns:p="http://schemas.openxmlformats.org/presentationml/2006/main" xmlns:r="http://schemas.openxmlformats.org/officeDocument/2006/relationships">
+<p:sld xmlns:a="http://schemas.openxmlformats.org/drawingml/2006/main" xmlns:r="http://schemas.openxmlformats.org/officeDocument/2006/relationships" xmlns:p="http://schemas.openxmlformats.org/presentationml/2006/main">
   <p:cSld>
     <p:spTree>
       <p:nvGrpSpPr>
@@ -34197,7 +34427,14 @@
         <p:cNvGrpSpPr/>
         <p:nvPr/>
       </p:nvGrpSpPr>
-      <p:grpSpPr/>
+      <p:grpSpPr>
+        <a:xfrm>
+          <a:off x="0" y="0"/>
+          <a:ext cx="0" cy="0"/>
+          <a:chOff x="0" y="0"/>
+          <a:chExt cx="0" cy="0"/>
+        </a:xfrm>
+      </p:grpSpPr>
       <p:sp>
         <p:nvSpPr>
           <p:cNvPr id="2" name="Rectangle 1"/>
@@ -34238,6 +34475,7 @@
           <a:lstStyle/>
           <a:p>
             <a:pPr algn="ctr"/>
+            <a:endParaRPr/>
           </a:p>
         </p:txBody>
       </p:sp>
@@ -34281,6 +34519,7 @@
           <a:lstStyle/>
           <a:p>
             <a:pPr algn="ctr"/>
+            <a:endParaRPr/>
           </a:p>
         </p:txBody>
       </p:sp>
@@ -34324,6 +34563,7 @@
           <a:lstStyle/>
           <a:p>
             <a:pPr algn="ctr"/>
+            <a:endParaRPr/>
           </a:p>
         </p:txBody>
       </p:sp>
@@ -34435,6 +34675,7 @@
           <a:lstStyle/>
           <a:p>
             <a:pPr algn="ctr"/>
+            <a:endParaRPr/>
           </a:p>
         </p:txBody>
       </p:sp>
@@ -34514,6 +34755,7 @@
           <a:lstStyle/>
           <a:p>
             <a:pPr algn="ctr"/>
+            <a:endParaRPr/>
           </a:p>
         </p:txBody>
       </p:sp>
@@ -34557,6 +34799,7 @@
           <a:lstStyle/>
           <a:p>
             <a:pPr algn="ctr"/>
+            <a:endParaRPr/>
           </a:p>
         </p:txBody>
       </p:sp>
@@ -34636,6 +34879,7 @@
           <a:lstStyle/>
           <a:p>
             <a:pPr algn="ctr"/>
+            <a:endParaRPr/>
           </a:p>
         </p:txBody>
       </p:sp>
@@ -34824,6 +35068,7 @@
           <a:lstStyle/>
           <a:p>
             <a:pPr algn="ctr"/>
+            <a:endParaRPr/>
           </a:p>
         </p:txBody>
       </p:sp>
@@ -34944,6 +35189,7 @@
           <a:lstStyle/>
           <a:p>
             <a:pPr algn="ctr"/>
+            <a:endParaRPr/>
           </a:p>
         </p:txBody>
       </p:sp>
@@ -35023,6 +35269,7 @@
           <a:lstStyle/>
           <a:p>
             <a:pPr algn="ctr"/>
+            <a:endParaRPr/>
           </a:p>
         </p:txBody>
       </p:sp>
@@ -35102,6 +35349,7 @@
           <a:lstStyle/>
           <a:p>
             <a:pPr algn="ctr"/>
+            <a:endParaRPr/>
           </a:p>
         </p:txBody>
       </p:sp>
@@ -35317,6 +35565,7 @@
           <a:lstStyle/>
           <a:p>
             <a:pPr algn="ctr"/>
+            <a:endParaRPr/>
           </a:p>
         </p:txBody>
       </p:sp>
@@ -35360,6 +35609,7 @@
           <a:lstStyle/>
           <a:p>
             <a:pPr algn="ctr"/>
+            <a:endParaRPr/>
           </a:p>
         </p:txBody>
       </p:sp>
@@ -35472,6 +35722,7 @@
           <a:lstStyle/>
           <a:p>
             <a:pPr algn="ctr"/>
+            <a:endParaRPr/>
           </a:p>
         </p:txBody>
       </p:sp>
@@ -35617,6 +35868,7 @@
           <a:lstStyle/>
           <a:p>
             <a:pPr algn="ctr"/>
+            <a:endParaRPr/>
           </a:p>
         </p:txBody>
       </p:sp>
@@ -35762,6 +36014,7 @@
           <a:lstStyle/>
           <a:p>
             <a:pPr algn="ctr"/>
+            <a:endParaRPr/>
           </a:p>
         </p:txBody>
       </p:sp>
@@ -35907,6 +36160,7 @@
           <a:lstStyle/>
           <a:p>
             <a:pPr algn="ctr"/>
+            <a:endParaRPr/>
           </a:p>
         </p:txBody>
       </p:sp>
@@ -36052,6 +36306,7 @@
           <a:lstStyle/>
           <a:p>
             <a:pPr algn="ctr"/>
+            <a:endParaRPr/>
           </a:p>
         </p:txBody>
       </p:sp>
@@ -36496,44 +36751,44 @@
         <a:sysClr val="window" lastClr="FFFFFF"/>
       </a:lt1>
       <a:dk2>
-        <a:srgbClr val="1F497D"/>
+        <a:srgbClr val="0E2841"/>
       </a:dk2>
       <a:lt2>
-        <a:srgbClr val="EEECE1"/>
+        <a:srgbClr val="E8E8E8"/>
       </a:lt2>
       <a:accent1>
-        <a:srgbClr val="4F81BD"/>
+        <a:srgbClr val="156082"/>
       </a:accent1>
       <a:accent2>
-        <a:srgbClr val="C0504D"/>
+        <a:srgbClr val="E97132"/>
       </a:accent2>
       <a:accent3>
-        <a:srgbClr val="9BBB59"/>
+        <a:srgbClr val="196B24"/>
       </a:accent3>
       <a:accent4>
-        <a:srgbClr val="8064A2"/>
+        <a:srgbClr val="0F9ED5"/>
       </a:accent4>
       <a:accent5>
-        <a:srgbClr val="4BACC6"/>
+        <a:srgbClr val="A02B93"/>
       </a:accent5>
       <a:accent6>
-        <a:srgbClr val="F79646"/>
+        <a:srgbClr val="4EA72E"/>
       </a:accent6>
       <a:hlink>
-        <a:srgbClr val="0000FF"/>
+        <a:srgbClr val="467886"/>
       </a:hlink>
       <a:folHlink>
-        <a:srgbClr val="800080"/>
+        <a:srgbClr val="96607D"/>
       </a:folHlink>
     </a:clrScheme>
     <a:fontScheme name="Office">
       <a:majorFont>
-        <a:latin typeface="Calibri"/>
+        <a:latin typeface="Aptos Display" panose="02110004020202020204"/>
         <a:ea typeface=""/>
         <a:cs typeface=""/>
-        <a:font script="Jpan" typeface="ＭＳ Ｐゴシック"/>
+        <a:font script="Jpan" typeface="游ゴシック Light"/>
         <a:font script="Hang" typeface="맑은 고딕"/>
-        <a:font script="Hans" typeface="宋体"/>
+        <a:font script="Hans" typeface="等线 Light"/>
         <a:font script="Hant" typeface="新細明體"/>
         <a:font script="Arab" typeface="Times New Roman"/>
         <a:font script="Hebr" typeface="Times New Roman"/>
@@ -36561,14 +36816,31 @@
         <a:font script="Viet" typeface="Times New Roman"/>
         <a:font script="Uigh" typeface="Microsoft Uighur"/>
         <a:font script="Geor" typeface="Sylfaen"/>
+        <a:font script="Armn" typeface="Arial"/>
+        <a:font script="Bugi" typeface="Leelawadee UI"/>
+        <a:font script="Bopo" typeface="Microsoft JhengHei"/>
+        <a:font script="Java" typeface="Javanese Text"/>
+        <a:font script="Lisu" typeface="Segoe UI"/>
+        <a:font script="Mymr" typeface="Myanmar Text"/>
+        <a:font script="Nkoo" typeface="Ebrima"/>
+        <a:font script="Olck" typeface="Nirmala UI"/>
+        <a:font script="Osma" typeface="Ebrima"/>
+        <a:font script="Phag" typeface="Phagspa"/>
+        <a:font script="Syrn" typeface="Estrangelo Edessa"/>
+        <a:font script="Syrj" typeface="Estrangelo Edessa"/>
+        <a:font script="Syre" typeface="Estrangelo Edessa"/>
+        <a:font script="Sora" typeface="Nirmala UI"/>
+        <a:font script="Tale" typeface="Microsoft Tai Le"/>
+        <a:font script="Talu" typeface="Microsoft New Tai Lue"/>
+        <a:font script="Tfng" typeface="Ebrima"/>
       </a:majorFont>
       <a:minorFont>
-        <a:latin typeface="Calibri"/>
+        <a:latin typeface="Aptos" panose="02110004020202020204"/>
         <a:ea typeface=""/>
         <a:cs typeface=""/>
-        <a:font script="Jpan" typeface="ＭＳ Ｐゴシック"/>
+        <a:font script="Jpan" typeface="游ゴシック"/>
         <a:font script="Hang" typeface="맑은 고딕"/>
-        <a:font script="Hans" typeface="宋体"/>
+        <a:font script="Hans" typeface="等线"/>
         <a:font script="Hant" typeface="新細明體"/>
         <a:font script="Arab" typeface="Arial"/>
         <a:font script="Hebr" typeface="Arial"/>
@@ -36596,6 +36868,23 @@
         <a:font script="Viet" typeface="Arial"/>
         <a:font script="Uigh" typeface="Microsoft Uighur"/>
         <a:font script="Geor" typeface="Sylfaen"/>
+        <a:font script="Armn" typeface="Arial"/>
+        <a:font script="Bugi" typeface="Leelawadee UI"/>
+        <a:font script="Bopo" typeface="Microsoft JhengHei"/>
+        <a:font script="Java" typeface="Javanese Text"/>
+        <a:font script="Lisu" typeface="Segoe UI"/>
+        <a:font script="Mymr" typeface="Myanmar Text"/>
+        <a:font script="Nkoo" typeface="Ebrima"/>
+        <a:font script="Olck" typeface="Nirmala UI"/>
+        <a:font script="Osma" typeface="Ebrima"/>
+        <a:font script="Phag" typeface="Phagspa"/>
+        <a:font script="Syrn" typeface="Estrangelo Edessa"/>
+        <a:font script="Syrj" typeface="Estrangelo Edessa"/>
+        <a:font script="Syre" typeface="Estrangelo Edessa"/>
+        <a:font script="Sora" typeface="Nirmala UI"/>
+        <a:font script="Tale" typeface="Microsoft Tai Le"/>
+        <a:font script="Talu" typeface="Microsoft New Tai Lue"/>
+        <a:font script="Tfng" typeface="Ebrima"/>
       </a:minorFont>
     </a:fontScheme>
     <a:fmtScheme name="Office">
@@ -36607,180 +36896,136 @@
           <a:gsLst>
             <a:gs pos="0">
               <a:schemeClr val="phClr">
-                <a:tint val="50000"/>
-                <a:satMod val="300000"/>
+                <a:lumMod val="110000"/>
+                <a:satMod val="105000"/>
+                <a:tint val="67000"/>
               </a:schemeClr>
             </a:gs>
-            <a:gs pos="35000">
+            <a:gs pos="50000">
               <a:schemeClr val="phClr">
-                <a:tint val="37000"/>
-                <a:satMod val="300000"/>
+                <a:lumMod val="105000"/>
+                <a:satMod val="103000"/>
+                <a:tint val="73000"/>
               </a:schemeClr>
             </a:gs>
             <a:gs pos="100000">
               <a:schemeClr val="phClr">
-                <a:tint val="15000"/>
-                <a:satMod val="350000"/>
+                <a:lumMod val="105000"/>
+                <a:satMod val="109000"/>
+                <a:tint val="81000"/>
               </a:schemeClr>
             </a:gs>
           </a:gsLst>
-          <a:lin ang="16200000" scaled="1"/>
+          <a:lin ang="5400000" scaled="0"/>
         </a:gradFill>
         <a:gradFill rotWithShape="1">
           <a:gsLst>
             <a:gs pos="0">
               <a:schemeClr val="phClr">
-                <a:tint val="100000"/>
+                <a:satMod val="103000"/>
+                <a:lumMod val="102000"/>
+                <a:tint val="94000"/>
+              </a:schemeClr>
+            </a:gs>
+            <a:gs pos="50000">
+              <a:schemeClr val="phClr">
+                <a:satMod val="110000"/>
+                <a:lumMod val="100000"/>
                 <a:shade val="100000"/>
-                <a:satMod val="130000"/>
               </a:schemeClr>
             </a:gs>
             <a:gs pos="100000">
               <a:schemeClr val="phClr">
-                <a:tint val="50000"/>
-                <a:shade val="100000"/>
-                <a:satMod val="350000"/>
+                <a:lumMod val="99000"/>
+                <a:satMod val="120000"/>
+                <a:shade val="78000"/>
               </a:schemeClr>
             </a:gs>
           </a:gsLst>
-          <a:lin ang="16200000" scaled="0"/>
+          <a:lin ang="5400000" scaled="0"/>
         </a:gradFill>
       </a:fillStyleLst>
       <a:lnStyleLst>
-        <a:ln w="9525" cap="flat" cmpd="sng" algn="ctr">
+        <a:ln w="12700" cap="flat" cmpd="sng" algn="ctr">
           <a:solidFill>
-            <a:schemeClr val="phClr">
-              <a:shade val="95000"/>
-              <a:satMod val="105000"/>
-            </a:schemeClr>
+            <a:schemeClr val="phClr"/>
           </a:solidFill>
           <a:prstDash val="solid"/>
+          <a:miter lim="800000"/>
+        </a:ln>
+        <a:ln w="19050" cap="flat" cmpd="sng" algn="ctr">
+          <a:solidFill>
+            <a:schemeClr val="phClr"/>
+          </a:solidFill>
+          <a:prstDash val="solid"/>
+          <a:miter lim="800000"/>
         </a:ln>
         <a:ln w="25400" cap="flat" cmpd="sng" algn="ctr">
           <a:solidFill>
             <a:schemeClr val="phClr"/>
           </a:solidFill>
           <a:prstDash val="solid"/>
-        </a:ln>
-        <a:ln w="38100" cap="flat" cmpd="sng" algn="ctr">
-          <a:solidFill>
-            <a:schemeClr val="phClr"/>
-          </a:solidFill>
-          <a:prstDash val="solid"/>
+          <a:miter lim="800000"/>
         </a:ln>
       </a:lnStyleLst>
       <a:effectStyleLst>
         <a:effectStyle>
+          <a:effectLst/>
+        </a:effectStyle>
+        <a:effectStyle>
+          <a:effectLst/>
+        </a:effectStyle>
+        <a:effectStyle>
           <a:effectLst>
-            <a:outerShdw blurRad="40000" dist="20000" dir="5400000" rotWithShape="0">
+            <a:outerShdw blurRad="57150" dist="19050" dir="5400000" algn="ctr" rotWithShape="0">
               <a:srgbClr val="000000">
-                <a:alpha val="38000"/>
+                <a:alpha val="63000"/>
               </a:srgbClr>
             </a:outerShdw>
           </a:effectLst>
-        </a:effectStyle>
-        <a:effectStyle>
-          <a:effectLst>
-            <a:outerShdw blurRad="40000" dist="23000" dir="5400000" rotWithShape="0">
-              <a:srgbClr val="000000">
-                <a:alpha val="35000"/>
-              </a:srgbClr>
-            </a:outerShdw>
-          </a:effectLst>
-        </a:effectStyle>
-        <a:effectStyle>
-          <a:effectLst>
-            <a:outerShdw blurRad="40000" dist="23000" dir="5400000" rotWithShape="0">
-              <a:srgbClr val="000000">
-                <a:alpha val="35000"/>
-              </a:srgbClr>
-            </a:outerShdw>
-          </a:effectLst>
-          <a:scene3d>
-            <a:camera prst="orthographicFront">
-              <a:rot lat="0" lon="0" rev="0"/>
-            </a:camera>
-            <a:lightRig rig="threePt" dir="t">
-              <a:rot lat="0" lon="0" rev="1200000"/>
-            </a:lightRig>
-          </a:scene3d>
-          <a:sp3d>
-            <a:bevelT w="63500" h="25400"/>
-          </a:sp3d>
         </a:effectStyle>
       </a:effectStyleLst>
       <a:bgFillStyleLst>
         <a:solidFill>
           <a:schemeClr val="phClr"/>
         </a:solidFill>
+        <a:solidFill>
+          <a:schemeClr val="phClr">
+            <a:tint val="95000"/>
+            <a:satMod val="170000"/>
+          </a:schemeClr>
+        </a:solidFill>
         <a:gradFill rotWithShape="1">
           <a:gsLst>
             <a:gs pos="0">
               <a:schemeClr val="phClr">
-                <a:tint val="40000"/>
-                <a:satMod val="350000"/>
+                <a:tint val="93000"/>
+                <a:satMod val="150000"/>
+                <a:shade val="98000"/>
+                <a:lumMod val="102000"/>
               </a:schemeClr>
             </a:gs>
-            <a:gs pos="40000">
+            <a:gs pos="50000">
               <a:schemeClr val="phClr">
-                <a:tint val="45000"/>
-                <a:shade val="99000"/>
-                <a:satMod val="350000"/>
+                <a:tint val="98000"/>
+                <a:satMod val="130000"/>
+                <a:shade val="90000"/>
+                <a:lumMod val="103000"/>
               </a:schemeClr>
             </a:gs>
             <a:gs pos="100000">
               <a:schemeClr val="phClr">
-                <a:shade val="20000"/>
-                <a:satMod val="255000"/>
+                <a:shade val="63000"/>
+                <a:satMod val="120000"/>
               </a:schemeClr>
             </a:gs>
           </a:gsLst>
-          <a:path path="circle">
-            <a:fillToRect l="50000" t="-80000" r="50000" b="180000"/>
-          </a:path>
-        </a:gradFill>
-        <a:gradFill rotWithShape="1">
-          <a:gsLst>
-            <a:gs pos="0">
-              <a:schemeClr val="phClr">
-                <a:tint val="80000"/>
-                <a:satMod val="300000"/>
-              </a:schemeClr>
-            </a:gs>
-            <a:gs pos="100000">
-              <a:schemeClr val="phClr">
-                <a:shade val="30000"/>
-                <a:satMod val="200000"/>
-              </a:schemeClr>
-            </a:gs>
-          </a:gsLst>
-          <a:path path="circle">
-            <a:fillToRect l="50000" t="50000" r="50000" b="50000"/>
-          </a:path>
+          <a:lin ang="5400000" scaled="0"/>
         </a:gradFill>
       </a:bgFillStyleLst>
     </a:fmtScheme>
   </a:themeElements>
   <a:objectDefaults>
-    <a:spDef>
-      <a:spPr/>
-      <a:bodyPr/>
-      <a:lstStyle/>
-      <a:style>
-        <a:lnRef idx="1">
-          <a:schemeClr val="accent1"/>
-        </a:lnRef>
-        <a:fillRef idx="3">
-          <a:schemeClr val="accent1"/>
-        </a:fillRef>
-        <a:effectRef idx="2">
-          <a:schemeClr val="accent1"/>
-        </a:effectRef>
-        <a:fontRef idx="minor">
-          <a:schemeClr val="lt1"/>
-        </a:fontRef>
-      </a:style>
-    </a:spDef>
     <a:lnDef>
       <a:spPr/>
       <a:bodyPr/>
@@ -36802,5 +37047,10 @@
     </a:lnDef>
   </a:objectDefaults>
   <a:extraClrSchemeLst/>
+  <a:extLst>
+    <a:ext uri="{05A4C25C-085E-4340-85A3-A5531E510DB2}">
+      <thm15:themeFamily xmlns:thm15="http://schemas.microsoft.com/office/thememl/2012/main" name="Office Theme" id="{2E142A2C-CD16-42D6-873A-C26D2A0506FA}" vid="{1BDDFF52-6CD6-40A5-AB3C-68EB2F1E4D0A}"/>
+    </a:ext>
+  </a:extLst>
 </a:theme>
 </file>
--- a/docs/capstone_presentation.pptx
+++ b/docs/capstone_presentation.pptx
@@ -8094,7 +8094,7 @@
                   <a:srgbClr val="B0C4DE"/>
                 </a:solidFill>
               </a:rPr>
-              <a:t>Feedback loop: customer rating → policy updater → adapted system prompt → better next session</a:t>
+              <a:t>Two-layer RLHF: within-session correction (immediate) + cross-session adaptive policy (LLM-generated)</a:t>
             </a:r>
           </a:p>
         </p:txBody>
@@ -8331,11 +8331,12 @@
                   <a:srgbClr val="2D3A4B"/>
                 </a:solidFill>
               </a:rPr>
-              <a:t>👍/👎 in Streamlit
+              <a:t>1–5 ★ in Streamlit
 per AI response
++ text comment
 feedback_collector.
 record_feedback()
-1.0 (👍) or 0.0 (👎)</a:t>
+rating (1–5) + comment</a:t>
             </a:r>
           </a:p>
         </p:txBody>
@@ -8657,10 +8658,10 @@
               </a:rPr>
               <a:t>analyse_feedback()
 last 20 ratings:
-avg &lt; 0.60 →
-EMPATHY BOOST
-avg ≥ 0.85 →
-maintain</a:t>
+avg &lt; 0.60 → EMPATHY
+avg ≥ 0.85 → maintain
+update_adaptive_policy()
+→ adaptive_policy.json</a:t>
             </a:r>
           </a:p>
         </p:txBody>
@@ -8958,7 +8959,7 @@
                   <a:srgbClr val="D97B06"/>
                 </a:solidFill>
               </a:rPr>
-              <a:t>↩  Adapted prompt injected into next session start</a:t>
+              <a:t>↩  get_adapted_prompt() stacks: EMPATHY_PREFIX + adaptive_policy entries + base prompt</a:t>
             </a:r>
           </a:p>
         </p:txBody>

--- a/docs/capstone_presentation.pptx
+++ b/docs/capstone_presentation.pptx
@@ -12905,7 +12905,7 @@
         </p:nvSpPr>
         <p:spPr>
           <a:xfrm>
-            <a:off x="7964424" y="5358383"/>
+            <a:off x="7964244" y="5358383"/>
             <a:ext cx="3749039" cy="822960"/>
           </a:xfrm>
           <a:prstGeom prst="rect">
@@ -14594,7 +14594,7 @@
                   <a:srgbClr val="2D3A4B"/>
                 </a:solidFill>
               </a:rPr>
-              <a:t> 5</a:t>
+              <a:t xml:space="preserve"> 5</a:t>
             </a:r>
           </a:p>
         </p:txBody>
@@ -16674,7 +16674,7 @@
         </p:nvSpPr>
         <p:spPr>
           <a:xfrm>
-            <a:off x="502920" y="4425696"/>
+            <a:off x="502920" y="4245696"/>
             <a:ext cx="3200400" cy="201168"/>
           </a:xfrm>
           <a:prstGeom prst="rect">
@@ -17539,7 +17539,7 @@
         </p:nvSpPr>
         <p:spPr>
           <a:xfrm>
-            <a:off x="4892040" y="4425696"/>
+            <a:off x="4892040" y="4245696"/>
             <a:ext cx="3200400" cy="201168"/>
           </a:xfrm>
           <a:prstGeom prst="rect">
@@ -22454,7 +22454,7 @@
                   <a:srgbClr val="1A5FA8"/>
                 </a:solidFill>
               </a:rPr>
-              <a:t>Bot: </a:t>
+              <a:t xml:space="preserve">Bot: </a:t>
             </a:r>
           </a:p>
         </p:txBody>
@@ -22566,7 +22566,7 @@
                   <a:srgbClr val="1A5FA8"/>
                 </a:solidFill>
               </a:rPr>
-              <a:t>Bot: </a:t>
+              <a:t xml:space="preserve">Bot: </a:t>
             </a:r>
           </a:p>
         </p:txBody>
@@ -22678,7 +22678,7 @@
                   <a:srgbClr val="1A5FA8"/>
                 </a:solidFill>
               </a:rPr>
-              <a:t>Bot: </a:t>
+              <a:t xml:space="preserve">Bot: </a:t>
             </a:r>
           </a:p>
         </p:txBody>
@@ -32561,7 +32561,7 @@
         <p:spPr>
           <a:xfrm>
             <a:off x="4224528" y="6271188"/>
-            <a:ext cx="7644257" cy="207749"/>
+            <a:ext cx="7642457" cy="207749"/>
           </a:xfrm>
           <a:prstGeom prst="rect">
             <a:avLst/>
@@ -32581,7 +32581,7 @@
                   <a:srgbClr val="FFFFFF"/>
                 </a:solidFill>
               </a:rPr>
-              <a:t>MCP Exposure Layer: all 5 tools discoverable via </a:t>
+              <a:t xml:space="preserve">MCP Exposure Layer: all 5 tools discoverable via </a:t>
             </a:r>
             <a:r>
               <a:rPr sz="750" b="1" i="0" dirty="0" err="1">
@@ -32613,7 +32613,7 @@
                   <a:srgbClr val="FFFFFF"/>
                 </a:solidFill>
               </a:rPr>
-              <a:t> (</a:t>
+              <a:t xml:space="preserve"> (</a:t>
             </a:r>
             <a:r>
               <a:rPr sz="750" b="1" i="0" dirty="0" err="1">
@@ -32629,7 +32629,7 @@
                   <a:srgbClr val="FFFFFF"/>
                 </a:solidFill>
               </a:rPr>
-              <a:t> · </a:t>
+              <a:t xml:space="preserve"> · </a:t>
             </a:r>
             <a:r>
               <a:rPr sz="750" b="1" i="0" dirty="0" err="1">
@@ -32645,7 +32645,7 @@
                   <a:srgbClr val="FFFFFF"/>
                 </a:solidFill>
               </a:rPr>
-              <a:t> &amp; HTTP)  ·  USE_MCP=true selects MCP path</a:t>
+              <a:t xml:space="preserve"> &amp; HTTP)  ·  USE_MCP=true selects MCP path</a:t>
             </a:r>
           </a:p>
         </p:txBody>
@@ -34079,7 +34079,7 @@
         </p:nvSpPr>
         <p:spPr>
           <a:xfrm>
-            <a:off x="320040" y="4425696"/>
+            <a:off x="320040" y="4245696"/>
             <a:ext cx="11548872" cy="274320"/>
           </a:xfrm>
           <a:prstGeom prst="rect">
